--- a/report/Slide_Backprop_Initialization.pptx
+++ b/report/Slide_Backprop_Initialization.pptx
@@ -2026,7 +2026,7 @@
           <a:p>
             <a:r>
               <a:rPr lang="en-US" dirty="0"/>
-              <a:t>Đây là phần thể hiện tư duy phản biện — không chỉ báo cáo số mà GIẢI THÍCH cơ chế. He vs Xavier cho ReLU: chênh lệch nằm trong nhiễu 1-seed, không kết luận dứt khoát được.</a:t>
+              <a:t>Đây là phần thể hiện tư duy phản biện — hai nguyên nhân ĐỘC LẬP: (1) trần đạo hàm 0,25 làm tín hiệu yếu, (2) lệch tâm dương làm SGD đi đường dích dắc (như LeCun 1998 'Efficient BackProp' khuyến nghị centering). He vs Xavier cho ReLU: chênh lệch nằm trong nhiễu 1-seed, không có ý nghĩa thống kê, không kết luận dứt khoát được.</a:t>
             </a:r>
             <a:endParaRPr lang="en-US" dirty="0"/>
           </a:p>
@@ -9369,8 +9369,8 @@
         </p:nvSpPr>
         <p:spPr>
           <a:xfrm>
-            <a:off x="640080" y="2926080"/>
-            <a:ext cx="10911535" cy="2194560"/>
+            <a:off x="640080" y="2788920"/>
+            <a:ext cx="10911535" cy="2286000"/>
           </a:xfrm>
           <a:prstGeom prst="rect">
             <a:avLst/>
@@ -9384,13 +9384,13 @@
           <a:p>
             <a:pPr marL="228600" indent="-228600">
               <a:spcAft>
-                <a:spcPts val="1200"/>
+                <a:spcPts val="800"/>
               </a:spcAft>
               <a:buSzPct val="100000"/>
               <a:buChar char="▪"/>
             </a:pPr>
             <a:r>
-              <a:rPr lang="en-US" sz="1600" dirty="0">
+              <a:rPr lang="en-US" sz="1500" dirty="0">
                 <a:solidFill>
                   <a:srgbClr val="1A2238"/>
                 </a:solidFill>
@@ -9398,20 +9398,20 @@
                 <a:ea typeface="Calibri" pitchFamily="34" charset="-122"/>
                 <a:cs typeface="Calibri" pitchFamily="34" charset="-120"/>
               </a:rPr>
-              <a:t>Gấp đôi Xavier — bù việc ReLU triệt tiêu khoảng một nửa variance (phần z&lt;0 → 0)</a:t>
-            </a:r>
-            <a:endParaRPr lang="en-US" sz="1600" dirty="0"/>
+              <a:t>Gấp đôi Xavier — bù ReLU triệt tiêu ~một nửa variance (z&lt;0 → 0)</a:t>
+            </a:r>
+            <a:endParaRPr lang="en-US" sz="1500" dirty="0"/>
           </a:p>
           <a:p>
             <a:pPr marL="228600" indent="-228600">
               <a:spcAft>
-                <a:spcPts val="1200"/>
+                <a:spcPts val="800"/>
               </a:spcAft>
               <a:buSzPct val="100000"/>
               <a:buChar char="▪"/>
             </a:pPr>
             <a:r>
-              <a:rPr lang="en-US" sz="1600" dirty="0">
+              <a:rPr lang="en-US" sz="1500" dirty="0">
                 <a:solidFill>
                   <a:srgbClr val="1A2238"/>
                 </a:solidFill>
@@ -9421,18 +9421,18 @@
               </a:rPr>
               <a:t>Phù hợp ReLU / Leaky ReLU</a:t>
             </a:r>
-            <a:endParaRPr lang="en-US" sz="1600" dirty="0"/>
+            <a:endParaRPr lang="en-US" sz="1500" dirty="0"/>
           </a:p>
           <a:p>
             <a:pPr marL="228600" indent="-228600">
               <a:spcAft>
-                <a:spcPts val="1200"/>
+                <a:spcPts val="800"/>
               </a:spcAft>
               <a:buSzPct val="100000"/>
               <a:buChar char="▪"/>
             </a:pPr>
             <a:r>
-              <a:rPr lang="en-US" sz="1600" dirty="0">
+              <a:rPr lang="en-US" sz="1500" dirty="0">
                 <a:solidFill>
                   <a:srgbClr val="1A2238"/>
                 </a:solidFill>
@@ -9440,9 +9440,30 @@
                 <a:ea typeface="Calibri" pitchFamily="34" charset="-122"/>
                 <a:cs typeface="Calibri" pitchFamily="34" charset="-120"/>
               </a:rPr>
-              <a:t>Thực nghiệm: ReLU+Xavier 67,4% vs. ReLU+He 66,7% — chênh lệch nằm TRONG biên độ nhiễu của 1 seed/15 epoch</a:t>
-            </a:r>
-            <a:endParaRPr lang="en-US" sz="1600" dirty="0"/>
+              <a:t>Hệ quả bậc-1 chưa xử lý: ReLU còn LỆCH TÂM DƯƠNG (E[a]≈0,4σ&gt;0) — động lực cho ELU/SELU tự chuẩn hoá</a:t>
+            </a:r>
+            <a:endParaRPr lang="en-US" sz="1500" dirty="0"/>
+          </a:p>
+          <a:p>
+            <a:pPr marL="228600" indent="-228600">
+              <a:spcAft>
+                <a:spcPts val="800"/>
+              </a:spcAft>
+              <a:buSzPct val="100000"/>
+              <a:buChar char="▪"/>
+            </a:pPr>
+            <a:r>
+              <a:rPr lang="en-US" sz="1500" dirty="0">
+                <a:solidFill>
+                  <a:srgbClr val="1A2238"/>
+                </a:solidFill>
+                <a:latin typeface="Calibri" pitchFamily="34" charset="0"/>
+                <a:ea typeface="Calibri" pitchFamily="34" charset="-122"/>
+                <a:cs typeface="Calibri" pitchFamily="34" charset="-120"/>
+              </a:rPr>
+              <a:t>Thực nghiệm: ReLU+Xavier 67,4% vs. ReLU+He 66,7% (n=1 seed)</a:t>
+            </a:r>
+            <a:endParaRPr lang="en-US" sz="1500" dirty="0"/>
           </a:p>
         </p:txBody>
       </p:sp>
@@ -9505,7 +9526,7 @@
               <a:buNone/>
             </a:pPr>
             <a:r>
-              <a:rPr lang="en-US" sz="1350" i="1" dirty="0">
+              <a:rPr lang="en-US" sz="1300" i="1" dirty="0">
                 <a:solidFill>
                   <a:srgbClr val="16213E"/>
                 </a:solidFill>
@@ -9513,9 +9534,9 @@
                 <a:ea typeface="Calibri" pitchFamily="34" charset="-122"/>
                 <a:cs typeface="Calibri" pitchFamily="34" charset="-120"/>
               </a:rPr>
-              <a:t>Trung thực khoa học: dự đoán lý thuyết “He &gt; Xavier cho ReLU” KHÔNG được xác nhận rõ ràng ở quy mô thực nghiệm nhỏ này</a:t>
-            </a:r>
-            <a:endParaRPr lang="en-US" sz="1350" dirty="0"/>
+              <a:t>Trung thực khoa học: chênh lệch He/Xavier trên KHÔNG có ý nghĩa thống kê (statistically insignificant, n=1) — KHÔNG kết luận Xavier vượt trội He cho ReLU</a:t>
+            </a:r>
+            <a:endParaRPr lang="en-US" sz="1300" dirty="0"/>
           </a:p>
         </p:txBody>
       </p:sp>
@@ -12581,8 +12602,8 @@
         </p:nvSpPr>
         <p:spPr>
           <a:xfrm>
-            <a:off x="11185855" y="6446520"/>
-            <a:ext cx="731520" cy="274320"/>
+            <a:off x="640080" y="6172200"/>
+            <a:ext cx="10911535" cy="365760"/>
           </a:xfrm>
           <a:prstGeom prst="rect">
             <a:avLst/>
@@ -12594,11 +12615,11 @@
           <a:bodyPr wrap="square" lIns="0" tIns="0" rIns="0" bIns="0" rtlCol="0" anchor="ctr"/>
           <a:lstStyle/>
           <a:p>
-            <a:pPr algn="r" indent="0" marL="0">
+            <a:pPr algn="ctr" indent="0" marL="0">
               <a:buNone/>
             </a:pPr>
             <a:r>
-              <a:rPr lang="en-US" sz="900" dirty="0">
+              <a:rPr lang="en-US" sz="1050" i="1" dirty="0">
                 <a:solidFill>
                   <a:srgbClr val="5B6478"/>
                 </a:solidFill>
@@ -12606,6 +12627,45 @@
                 <a:ea typeface="Calibri" pitchFamily="34" charset="-122"/>
                 <a:cs typeface="Calibri" pitchFamily="34" charset="-120"/>
               </a:rPr>
+              <a:t>* 0,00e+00 = đã chạm giới hạn biểu diễn số thực float64 (machine precision ε≈2,2×10⁻¹⁶) — không phải trùng hợp, mà là bằng chứng hai phép tính TOÁN HỌC GIỐNG HỆT NHAU.</a:t>
+            </a:r>
+            <a:endParaRPr lang="en-US" sz="1050" dirty="0"/>
+          </a:p>
+        </p:txBody>
+      </p:sp>
+      <p:sp>
+        <p:nvSpPr>
+          <p:cNvPr id="12" name="Text 10"/>
+          <p:cNvSpPr txBox="1"/>
+          <p:nvPr/>
+        </p:nvSpPr>
+        <p:spPr>
+          <a:xfrm>
+            <a:off x="11185855" y="6446520"/>
+            <a:ext cx="731520" cy="274320"/>
+          </a:xfrm>
+          <a:prstGeom prst="rect">
+            <a:avLst/>
+          </a:prstGeom>
+          <a:noFill/>
+          <a:ln/>
+        </p:spPr>
+        <p:txBody>
+          <a:bodyPr wrap="square" lIns="0" tIns="0" rIns="0" bIns="0" rtlCol="0" anchor="ctr"/>
+          <a:lstStyle/>
+          <a:p>
+            <a:pPr algn="r" indent="0" marL="0">
+              <a:buNone/>
+            </a:pPr>
+            <a:r>
+              <a:rPr lang="en-US" sz="900" dirty="0">
+                <a:solidFill>
+                  <a:srgbClr val="5B6478"/>
+                </a:solidFill>
+                <a:latin typeface="Calibri" pitchFamily="34" charset="0"/>
+                <a:ea typeface="Calibri" pitchFamily="34" charset="-122"/>
+                <a:cs typeface="Calibri" pitchFamily="34" charset="-120"/>
+              </a:rPr>
               <a:t>20/29</a:t>
             </a:r>
             <a:endParaRPr lang="en-US" sz="900" dirty="0"/>
@@ -12614,7 +12674,7 @@
       </p:sp>
       <p:sp>
         <p:nvSpPr>
-          <p:cNvPr id="12" name="Shape 10"/>
+          <p:cNvPr id="13" name="Shape 11"/>
           <p:cNvSpPr/>
           <p:nvPr/>
         </p:nvSpPr>
@@ -12634,7 +12694,7 @@
       </p:sp>
       <p:sp>
         <p:nvSpPr>
-          <p:cNvPr id="13" name="Shape 11"/>
+          <p:cNvPr id="14" name="Shape 12"/>
           <p:cNvSpPr/>
           <p:nvPr/>
         </p:nvSpPr>
@@ -12654,7 +12714,7 @@
       </p:sp>
       <p:sp>
         <p:nvSpPr>
-          <p:cNvPr id="14" name="Shape 12"/>
+          <p:cNvPr id="15" name="Shape 13"/>
           <p:cNvSpPr/>
           <p:nvPr/>
         </p:nvSpPr>
@@ -12674,7 +12734,7 @@
       </p:sp>
       <p:sp>
         <p:nvSpPr>
-          <p:cNvPr id="15" name="Shape 13"/>
+          <p:cNvPr id="16" name="Shape 14"/>
           <p:cNvSpPr/>
           <p:nvPr/>
         </p:nvSpPr>
@@ -12694,7 +12754,7 @@
       </p:sp>
       <p:sp>
         <p:nvSpPr>
-          <p:cNvPr id="16" name="Text 14"/>
+          <p:cNvPr id="17" name="Text 15"/>
           <p:cNvSpPr txBox="1"/>
           <p:nvPr/>
         </p:nvSpPr>
@@ -12965,7 +13025,7 @@
                 <a:ea typeface="Calibri" pitchFamily="34" charset="-122"/>
                 <a:cs typeface="Calibri" pitchFamily="34" charset="-120"/>
               </a:rPr>
-              <a:t>Sai số tối đa giữa 3 cách: ≈10⁻⁹ (mức làm tròn số thực, KHÔNG phải sai số thuật toán)</a:t>
+              <a:t>Sai số tối đa giữa 3 cách: ≈10⁻⁹ — mức sai số làm tròn float64 (machine precision), KHÔNG phải sai số thuật toán</a:t>
             </a:r>
             <a:endParaRPr lang="en-US" sz="1600" dirty="0"/>
           </a:p>
@@ -13328,7 +13388,7 @@
       </p:sp>
       <p:pic>
         <p:nvPicPr>
-          <p:cNvPr id="4" name="Image 0" descr="..\results\figures\initialization_comparison.png">    </p:cNvPr>
+          <p:cNvPr id="4" name="Image 0" descr="..\results\figures\initialization_comparison_slide.png">    </p:cNvPr>
           <p:cNvPicPr>
             <a:picLocks noChangeAspect="1"/>
           </p:cNvPicPr>
@@ -13342,8 +13402,8 @@
         </p:blipFill>
         <p:spPr>
           <a:xfrm>
-            <a:off x="2621128" y="1783080"/>
-            <a:ext cx="6949440" cy="3274948"/>
+            <a:off x="3352648" y="1691640"/>
+            <a:ext cx="5486400" cy="3066741"/>
           </a:xfrm>
           <a:prstGeom prst="rect">
             <a:avLst/>
@@ -13358,8 +13418,8 @@
         </p:nvSpPr>
         <p:spPr>
           <a:xfrm>
-            <a:off x="640080" y="5286628"/>
-            <a:ext cx="10911535" cy="1463040"/>
+            <a:off x="640080" y="4895541"/>
+            <a:ext cx="10911535" cy="1188720"/>
           </a:xfrm>
           <a:prstGeom prst="rect">
             <a:avLst/>
@@ -13373,13 +13433,13 @@
           <a:p>
             <a:pPr marL="228600" indent="-228600">
               <a:spcAft>
-                <a:spcPts val="600"/>
+                <a:spcPts val="500"/>
               </a:spcAft>
               <a:buSzPct val="100000"/>
               <a:buChar char="▪"/>
             </a:pPr>
             <a:r>
-              <a:rPr lang="en-US" sz="1450" dirty="0">
+              <a:rPr lang="en-US" sz="1300" dirty="0">
                 <a:solidFill>
                   <a:srgbClr val="1A2238"/>
                 </a:solidFill>
@@ -13389,18 +13449,18 @@
               </a:rPr>
               <a:t>Zero/Random: LUÔN ở mức ngẫu nhiên (10%), với MỌI activation</a:t>
             </a:r>
-            <a:endParaRPr lang="en-US" sz="1450" dirty="0"/>
+            <a:endParaRPr lang="en-US" sz="1300" dirty="0"/>
           </a:p>
           <a:p>
             <a:pPr marL="228600" indent="-228600">
               <a:spcAft>
-                <a:spcPts val="600"/>
+                <a:spcPts val="500"/>
               </a:spcAft>
               <a:buSzPct val="100000"/>
               <a:buChar char="▪"/>
             </a:pPr>
             <a:r>
-              <a:rPr lang="en-US" sz="1450" dirty="0">
+              <a:rPr lang="en-US" sz="1300" dirty="0">
                 <a:solidFill>
                   <a:srgbClr val="1A2238"/>
                 </a:solidFill>
@@ -13410,18 +13470,18 @@
               </a:rPr>
               <a:t>Sigmoid: LUÔN ~10% dù initialization nào — kể cả He/Xavier</a:t>
             </a:r>
-            <a:endParaRPr lang="en-US" sz="1450" dirty="0"/>
+            <a:endParaRPr lang="en-US" sz="1300" dirty="0"/>
           </a:p>
           <a:p>
             <a:pPr marL="228600" indent="-228600">
               <a:spcAft>
-                <a:spcPts val="600"/>
+                <a:spcPts val="500"/>
               </a:spcAft>
               <a:buSzPct val="100000"/>
               <a:buChar char="▪"/>
             </a:pPr>
             <a:r>
-              <a:rPr lang="en-US" sz="1450" dirty="0">
+              <a:rPr lang="en-US" sz="1300" dirty="0">
                 <a:solidFill>
                   <a:srgbClr val="1A2238"/>
                 </a:solidFill>
@@ -13431,7 +13491,7 @@
               </a:rPr>
               <a:t>LeCun/Xavier/He: 64–69% với Tanh/ReLU/Leaky ReLU</a:t>
             </a:r>
-            <a:endParaRPr lang="en-US" sz="1450" dirty="0"/>
+            <a:endParaRPr lang="en-US" sz="1300" dirty="0"/>
           </a:p>
         </p:txBody>
       </p:sp>
@@ -13698,7 +13758,7 @@
       </p:sp>
       <p:pic>
         <p:nvPicPr>
-          <p:cNvPr id="4" name="Image 0" descr="..\results\figures\gradient_norm.png">    </p:cNvPr>
+          <p:cNvPr id="4" name="Image 0" descr="..\results\figures\gradient_norm_slide.png">    </p:cNvPr>
           <p:cNvPicPr>
             <a:picLocks noChangeAspect="1"/>
           </p:cNvPicPr>
@@ -13713,7 +13773,7 @@
         <p:spPr>
           <a:xfrm>
             <a:off x="640080" y="1783080"/>
-            <a:ext cx="5339547" cy="3931920"/>
+            <a:ext cx="5746501" cy="3931920"/>
           </a:xfrm>
           <a:prstGeom prst="rect">
             <a:avLst/>
@@ -13728,8 +13788,8 @@
         </p:nvSpPr>
         <p:spPr>
           <a:xfrm>
-            <a:off x="6345387" y="1920240"/>
-            <a:ext cx="5206228" cy="3749040"/>
+            <a:off x="6752341" y="1920240"/>
+            <a:ext cx="4799274" cy="3749040"/>
           </a:xfrm>
           <a:prstGeom prst="rect">
             <a:avLst/>
@@ -16286,7 +16346,7 @@
               <a:buNone/>
             </a:pPr>
             <a:r>
-              <a:rPr lang="en-US" sz="2900" b="1" dirty="0">
+              <a:rPr lang="en-US" sz="2400" b="1" dirty="0">
                 <a:solidFill>
                   <a:srgbClr val="1A2238"/>
                 </a:solidFill>
@@ -16296,20 +16356,93 @@
               </a:rPr>
               <a:t>Vì sao Sigmoid thất bại dù He/Xavier “đúng lý thuyết”?</a:t>
             </a:r>
-            <a:endParaRPr lang="en-US" sz="2900" dirty="0"/>
-          </a:p>
-        </p:txBody>
-      </p:sp>
-      <p:sp>
-        <p:nvSpPr>
-          <p:cNvPr id="4" name="Text 2"/>
+            <a:endParaRPr lang="en-US" sz="2400" dirty="0"/>
+          </a:p>
+        </p:txBody>
+      </p:sp>
+      <p:sp>
+        <p:nvSpPr>
+          <p:cNvPr id="4" name="Shape 2"/>
+          <p:cNvSpPr/>
+          <p:nvPr/>
+        </p:nvSpPr>
+        <p:spPr>
+          <a:xfrm>
+            <a:off x="640080" y="1828800"/>
+            <a:ext cx="5120640" cy="2788920"/>
+          </a:xfrm>
+          <a:prstGeom prst="roundRect">
+            <a:avLst>
+              <a:gd name="adj" fmla="val 2623"/>
+            </a:avLst>
+          </a:prstGeom>
+          <a:solidFill>
+            <a:srgbClr val="EAF0FB"/>
+          </a:solidFill>
+          <a:ln w="12700">
+            <a:solidFill>
+              <a:srgbClr val="285AB4"/>
+            </a:solidFill>
+            <a:prstDash val="solid"/>
+          </a:ln>
+          <a:effectLst>
+            <a:outerShdw sx="100000" sy="100000" kx="0" ky="0" algn="bl" rotWithShape="0" blurRad="114300" dist="38100" dir="5400000">
+              <a:srgbClr val="1A1A2E">
+                <a:alpha val="20000"/>
+              </a:srgbClr>
+            </a:outerShdw>
+          </a:effectLst>
+        </p:spPr>
+      </p:sp>
+      <p:sp>
+        <p:nvSpPr>
+          <p:cNvPr id="5" name="Text 3"/>
           <p:cNvSpPr txBox="1"/>
           <p:nvPr/>
         </p:nvSpPr>
         <p:spPr>
           <a:xfrm>
-            <a:off x="640080" y="1965960"/>
-            <a:ext cx="10911535" cy="3566160"/>
+            <a:off x="914400" y="2029968"/>
+            <a:ext cx="4572000" cy="365760"/>
+          </a:xfrm>
+          <a:prstGeom prst="rect">
+            <a:avLst/>
+          </a:prstGeom>
+          <a:noFill/>
+          <a:ln/>
+        </p:spPr>
+        <p:txBody>
+          <a:bodyPr wrap="square" lIns="0" tIns="0" rIns="0" bIns="0" rtlCol="0" anchor="ctr"/>
+          <a:lstStyle/>
+          <a:p>
+            <a:pPr indent="0" marL="0">
+              <a:buNone/>
+            </a:pPr>
+            <a:r>
+              <a:rPr lang="en-US" sz="1500" b="1" dirty="0">
+                <a:solidFill>
+                  <a:srgbClr val="285AB4"/>
+                </a:solidFill>
+                <a:latin typeface="Cambria" pitchFamily="34" charset="0"/>
+                <a:ea typeface="Cambria" pitchFamily="34" charset="-122"/>
+                <a:cs typeface="Cambria" pitchFamily="34" charset="-120"/>
+              </a:rPr>
+              <a:t>Nguyên nhân 1 — trần đạo hàm</a:t>
+            </a:r>
+            <a:endParaRPr lang="en-US" sz="1500" dirty="0"/>
+          </a:p>
+        </p:txBody>
+      </p:sp>
+      <p:sp>
+        <p:nvSpPr>
+          <p:cNvPr id="6" name="Text 4"/>
+          <p:cNvSpPr txBox="1"/>
+          <p:nvPr/>
+        </p:nvSpPr>
+        <p:spPr>
+          <a:xfrm>
+            <a:off x="914400" y="2514600"/>
+            <a:ext cx="4572000" cy="1965960"/>
           </a:xfrm>
           <a:prstGeom prst="rect">
             <a:avLst/>
@@ -16323,13 +16456,13 @@
           <a:p>
             <a:pPr marL="228600" indent="-228600">
               <a:spcAft>
-                <a:spcPts val="1200"/>
+                <a:spcPts val="800"/>
               </a:spcAft>
               <a:buSzPct val="100000"/>
               <a:buChar char="▪"/>
             </a:pPr>
             <a:r>
-              <a:rPr lang="en-US" sz="1600" dirty="0">
+              <a:rPr lang="en-US" sz="1350" dirty="0">
                 <a:solidFill>
                   <a:srgbClr val="1A2238"/>
                 </a:solidFill>
@@ -16337,20 +16470,20 @@
                 <a:ea typeface="Calibri" pitchFamily="34" charset="-122"/>
                 <a:cs typeface="Calibri" pitchFamily="34" charset="-120"/>
               </a:rPr>
-              <a:t>σ′(z) ≤ 0,25 LUÔN LUÔN đúng — không liên quan tới weight scale</a:t>
-            </a:r>
-            <a:endParaRPr lang="en-US" sz="1600" dirty="0"/>
+              <a:t>σ′(z) ≤ 0,25 LUÔN đúng, bất kể weight scale</a:t>
+            </a:r>
+            <a:endParaRPr lang="en-US" sz="1350" dirty="0"/>
           </a:p>
           <a:p>
             <a:pPr marL="228600" indent="-228600">
               <a:spcAft>
-                <a:spcPts val="1200"/>
+                <a:spcPts val="800"/>
               </a:spcAft>
               <a:buSzPct val="100000"/>
               <a:buChar char="▪"/>
             </a:pPr>
             <a:r>
-              <a:rPr lang="en-US" sz="1600" dirty="0">
+              <a:rPr lang="en-US" sz="1350" dirty="0">
                 <a:solidFill>
                   <a:srgbClr val="1A2238"/>
                 </a:solidFill>
@@ -16358,20 +16491,20 @@
                 <a:ea typeface="Calibri" pitchFamily="34" charset="-122"/>
                 <a:cs typeface="Calibri" pitchFamily="34" charset="-120"/>
               </a:rPr>
-              <a:t>6 lớp ⇒ hệ số suy giảm trần do riêng activation: 0,25⁶ ≈ 2,4×10⁻⁴</a:t>
-            </a:r>
-            <a:endParaRPr lang="en-US" sz="1600" dirty="0"/>
+              <a:t>6 lớp ⇒ trần suy giảm: 0,25⁶ ≈ 2,4×10⁻⁴</a:t>
+            </a:r>
+            <a:endParaRPr lang="en-US" sz="1350" dirty="0"/>
           </a:p>
           <a:p>
             <a:pPr marL="228600" indent="-228600">
               <a:spcAft>
-                <a:spcPts val="1200"/>
+                <a:spcPts val="800"/>
               </a:spcAft>
               <a:buSzPct val="100000"/>
               <a:buChar char="▪"/>
             </a:pPr>
             <a:r>
-              <a:rPr lang="en-US" sz="1600" dirty="0">
+              <a:rPr lang="en-US" sz="1350" dirty="0">
                 <a:solidFill>
                   <a:srgbClr val="1A2238"/>
                 </a:solidFill>
@@ -16379,20 +16512,115 @@
                 <a:ea typeface="Calibri" pitchFamily="34" charset="-122"/>
                 <a:cs typeface="Calibri" pitchFamily="34" charset="-120"/>
               </a:rPr>
-              <a:t>Gradient lớp 1 (Sigmoid+He) ≈ 1,6×10⁻⁵ — khác 0 nhưng quá nhỏ để cập nhật đáng kể ở lr=0,05/15 epoch</a:t>
-            </a:r>
-            <a:endParaRPr lang="en-US" sz="1600" dirty="0"/>
-          </a:p>
+              <a:t>Gradient lớp 1 ≈ 1,6×10⁻⁵ — khác 0 nhưng quá nhỏ</a:t>
+            </a:r>
+            <a:endParaRPr lang="en-US" sz="1350" dirty="0"/>
+          </a:p>
+        </p:txBody>
+      </p:sp>
+      <p:sp>
+        <p:nvSpPr>
+          <p:cNvPr id="7" name="Shape 5"/>
+          <p:cNvSpPr/>
+          <p:nvPr/>
+        </p:nvSpPr>
+        <p:spPr>
+          <a:xfrm>
+            <a:off x="6430975" y="1828800"/>
+            <a:ext cx="5120640" cy="2788920"/>
+          </a:xfrm>
+          <a:prstGeom prst="roundRect">
+            <a:avLst>
+              <a:gd name="adj" fmla="val 2623"/>
+            </a:avLst>
+          </a:prstGeom>
+          <a:solidFill>
+            <a:srgbClr val="FBEEEC"/>
+          </a:solidFill>
+          <a:ln w="12700">
+            <a:solidFill>
+              <a:srgbClr val="BE3C32"/>
+            </a:solidFill>
+            <a:prstDash val="solid"/>
+          </a:ln>
+          <a:effectLst>
+            <a:outerShdw sx="100000" sy="100000" kx="0" ky="0" algn="bl" rotWithShape="0" blurRad="114300" dist="38100" dir="5400000">
+              <a:srgbClr val="1A1A2E">
+                <a:alpha val="20000"/>
+              </a:srgbClr>
+            </a:outerShdw>
+          </a:effectLst>
+        </p:spPr>
+      </p:sp>
+      <p:sp>
+        <p:nvSpPr>
+          <p:cNvPr id="8" name="Text 6"/>
+          <p:cNvSpPr txBox="1"/>
+          <p:nvPr/>
+        </p:nvSpPr>
+        <p:spPr>
+          <a:xfrm>
+            <a:off x="6705295" y="2029968"/>
+            <a:ext cx="4572000" cy="365760"/>
+          </a:xfrm>
+          <a:prstGeom prst="rect">
+            <a:avLst/>
+          </a:prstGeom>
+          <a:noFill/>
+          <a:ln/>
+        </p:spPr>
+        <p:txBody>
+          <a:bodyPr wrap="square" lIns="0" tIns="0" rIns="0" bIns="0" rtlCol="0" anchor="ctr"/>
+          <a:lstStyle/>
+          <a:p>
+            <a:pPr indent="0" marL="0">
+              <a:buNone/>
+            </a:pPr>
+            <a:r>
+              <a:rPr lang="en-US" sz="1500" b="1" dirty="0">
+                <a:solidFill>
+                  <a:srgbClr val="BE3C32"/>
+                </a:solidFill>
+                <a:latin typeface="Cambria" pitchFamily="34" charset="0"/>
+                <a:ea typeface="Cambria" pitchFamily="34" charset="-122"/>
+                <a:cs typeface="Cambria" pitchFamily="34" charset="-120"/>
+              </a:rPr>
+              <a:t>Nguyên nhân 2 — lệch tâm (zig-zag)</a:t>
+            </a:r>
+            <a:endParaRPr lang="en-US" sz="1500" dirty="0"/>
+          </a:p>
+        </p:txBody>
+      </p:sp>
+      <p:sp>
+        <p:nvSpPr>
+          <p:cNvPr id="9" name="Text 7"/>
+          <p:cNvSpPr txBox="1"/>
+          <p:nvPr/>
+        </p:nvSpPr>
+        <p:spPr>
+          <a:xfrm>
+            <a:off x="6705295" y="2514600"/>
+            <a:ext cx="4572000" cy="1965960"/>
+          </a:xfrm>
+          <a:prstGeom prst="rect">
+            <a:avLst/>
+          </a:prstGeom>
+          <a:noFill/>
+          <a:ln/>
+        </p:spPr>
+        <p:txBody>
+          <a:bodyPr wrap="square" lIns="0" tIns="0" rIns="0" bIns="0" rtlCol="0" anchor="t"/>
+          <a:lstStyle/>
           <a:p>
             <a:pPr marL="228600" indent="-228600">
               <a:spcAft>
-                <a:spcPts val="1200"/>
+                <a:spcPts val="800"/>
               </a:spcAft>
               <a:buSzPct val="100000"/>
               <a:buChar char="▪"/>
             </a:pPr>
             <a:r>
-              <a:rPr lang="en-US" sz="1600" dirty="0">
+              <a:rPr lang="en-US" sz="1350" dirty="0">
                 <a:solidFill>
                   <a:srgbClr val="1A2238"/>
                 </a:solidFill>
@@ -16400,45 +16628,342 @@
                 <a:ea typeface="Calibri" pitchFamily="34" charset="-122"/>
                 <a:cs typeface="Calibri" pitchFamily="34" charset="-120"/>
               </a:rPr>
-              <a:t>Kết luận: Initialization tốt là ĐIỀU KIỆN CẦN, không phải ĐIỀU KIỆN ĐỦ</a:t>
-            </a:r>
-            <a:endParaRPr lang="en-US" sz="1600" dirty="0"/>
-          </a:p>
-        </p:txBody>
-      </p:sp>
-      <p:sp>
-        <p:nvSpPr>
-          <p:cNvPr id="5" name="Text 3"/>
-          <p:cNvSpPr txBox="1"/>
-          <p:nvPr/>
-        </p:nvSpPr>
-        <p:spPr>
-          <a:xfrm>
-            <a:off x="11185855" y="6446520"/>
-            <a:ext cx="731520" cy="274320"/>
-          </a:xfrm>
-          <a:prstGeom prst="rect">
-            <a:avLst/>
-          </a:prstGeom>
-          <a:noFill/>
-          <a:ln/>
-        </p:spPr>
-        <p:txBody>
-          <a:bodyPr wrap="square" lIns="0" tIns="0" rIns="0" bIns="0" rtlCol="0" anchor="ctr"/>
-          <a:lstStyle/>
-          <a:p>
-            <a:pPr algn="r" indent="0" marL="0">
-              <a:buNone/>
-            </a:pPr>
-            <a:r>
-              <a:rPr lang="en-US" sz="900" dirty="0">
-                <a:solidFill>
-                  <a:srgbClr val="5B6478"/>
+              <a:t>σ(z)∈(0,1) không đối xứng quanh 0 (E[σ]≈0,5)</a:t>
+            </a:r>
+            <a:endParaRPr lang="en-US" sz="1350" dirty="0"/>
+          </a:p>
+          <a:p>
+            <a:pPr marL="228600" indent="-228600">
+              <a:spcAft>
+                <a:spcPts val="800"/>
+              </a:spcAft>
+              <a:buSzPct val="100000"/>
+              <a:buChar char="▪"/>
+            </a:pPr>
+            <a:r>
+              <a:rPr lang="en-US" sz="1350" dirty="0">
+                <a:solidFill>
+                  <a:srgbClr val="1A2238"/>
                 </a:solidFill>
                 <a:latin typeface="Calibri" pitchFamily="34" charset="0"/>
                 <a:ea typeface="Calibri" pitchFamily="34" charset="-122"/>
                 <a:cs typeface="Calibri" pitchFamily="34" charset="-120"/>
               </a:rPr>
+              <a:t>⇒ mọi trọng số vào 1 neuron cùng dấu gradient</a:t>
+            </a:r>
+            <a:endParaRPr lang="en-US" sz="1350" dirty="0"/>
+          </a:p>
+          <a:p>
+            <a:pPr marL="228600" indent="-228600">
+              <a:spcAft>
+                <a:spcPts val="800"/>
+              </a:spcAft>
+              <a:buSzPct val="100000"/>
+              <a:buChar char="▪"/>
+            </a:pPr>
+            <a:r>
+              <a:rPr lang="en-US" sz="1350" dirty="0">
+                <a:solidFill>
+                  <a:srgbClr val="1A2238"/>
+                </a:solidFill>
+                <a:latin typeface="Calibri" pitchFamily="34" charset="0"/>
+                <a:ea typeface="Calibri" pitchFamily="34" charset="-122"/>
+                <a:cs typeface="Calibri" pitchFamily="34" charset="-120"/>
+              </a:rPr>
+              <a:t>⇒ Gradient Descent buộc đi đường DÍCH DẮC, không đường thẳng</a:t>
+            </a:r>
+            <a:endParaRPr lang="en-US" sz="1350" dirty="0"/>
+          </a:p>
+        </p:txBody>
+      </p:sp>
+      <p:sp>
+        <p:nvSpPr>
+          <p:cNvPr id="10" name="Shape 8"/>
+          <p:cNvSpPr/>
+          <p:nvPr/>
+        </p:nvSpPr>
+        <p:spPr>
+          <a:xfrm>
+            <a:off x="6751015" y="4818888"/>
+            <a:ext cx="4297680" cy="384048"/>
+          </a:xfrm>
+          <a:prstGeom prst="line">
+            <a:avLst/>
+          </a:prstGeom>
+          <a:noFill/>
+          <a:ln w="15875">
+            <a:solidFill>
+              <a:srgbClr val="D9DEE8"/>
+            </a:solidFill>
+            <a:prstDash val="dash"/>
+          </a:ln>
+        </p:spPr>
+      </p:sp>
+      <p:sp>
+        <p:nvSpPr>
+          <p:cNvPr id="11" name="Shape 9"/>
+          <p:cNvSpPr/>
+          <p:nvPr/>
+        </p:nvSpPr>
+        <p:spPr>
+          <a:xfrm>
+            <a:off x="6751015" y="4818888"/>
+            <a:ext cx="859536" cy="0"/>
+          </a:xfrm>
+          <a:prstGeom prst="line">
+            <a:avLst/>
+          </a:prstGeom>
+          <a:noFill/>
+          <a:ln w="25400">
+            <a:solidFill>
+              <a:srgbClr val="BE3C32"/>
+            </a:solidFill>
+            <a:prstDash val="solid"/>
+          </a:ln>
+        </p:spPr>
+      </p:sp>
+      <p:sp>
+        <p:nvSpPr>
+          <p:cNvPr id="12" name="Shape 10"/>
+          <p:cNvSpPr/>
+          <p:nvPr/>
+        </p:nvSpPr>
+        <p:spPr>
+          <a:xfrm>
+            <a:off x="7610551" y="4818888"/>
+            <a:ext cx="0" cy="153619"/>
+          </a:xfrm>
+          <a:prstGeom prst="line">
+            <a:avLst/>
+          </a:prstGeom>
+          <a:noFill/>
+          <a:ln w="25400">
+            <a:solidFill>
+              <a:srgbClr val="BE3C32"/>
+            </a:solidFill>
+            <a:prstDash val="solid"/>
+          </a:ln>
+        </p:spPr>
+      </p:sp>
+      <p:sp>
+        <p:nvSpPr>
+          <p:cNvPr id="13" name="Shape 11"/>
+          <p:cNvSpPr/>
+          <p:nvPr/>
+        </p:nvSpPr>
+        <p:spPr>
+          <a:xfrm>
+            <a:off x="7610551" y="4972507"/>
+            <a:ext cx="859536" cy="0"/>
+          </a:xfrm>
+          <a:prstGeom prst="line">
+            <a:avLst/>
+          </a:prstGeom>
+          <a:noFill/>
+          <a:ln w="25400">
+            <a:solidFill>
+              <a:srgbClr val="BE3C32"/>
+            </a:solidFill>
+            <a:prstDash val="solid"/>
+          </a:ln>
+        </p:spPr>
+      </p:sp>
+      <p:sp>
+        <p:nvSpPr>
+          <p:cNvPr id="14" name="Shape 12"/>
+          <p:cNvSpPr/>
+          <p:nvPr/>
+        </p:nvSpPr>
+        <p:spPr>
+          <a:xfrm>
+            <a:off x="8470087" y="4972507"/>
+            <a:ext cx="0" cy="153619"/>
+          </a:xfrm>
+          <a:prstGeom prst="line">
+            <a:avLst/>
+          </a:prstGeom>
+          <a:noFill/>
+          <a:ln w="25400">
+            <a:solidFill>
+              <a:srgbClr val="BE3C32"/>
+            </a:solidFill>
+            <a:prstDash val="solid"/>
+          </a:ln>
+        </p:spPr>
+      </p:sp>
+      <p:sp>
+        <p:nvSpPr>
+          <p:cNvPr id="15" name="Shape 13"/>
+          <p:cNvSpPr/>
+          <p:nvPr/>
+        </p:nvSpPr>
+        <p:spPr>
+          <a:xfrm>
+            <a:off x="8470087" y="5126126"/>
+            <a:ext cx="859536" cy="0"/>
+          </a:xfrm>
+          <a:prstGeom prst="line">
+            <a:avLst/>
+          </a:prstGeom>
+          <a:noFill/>
+          <a:ln w="25400">
+            <a:solidFill>
+              <a:srgbClr val="BE3C32"/>
+            </a:solidFill>
+            <a:prstDash val="solid"/>
+          </a:ln>
+        </p:spPr>
+      </p:sp>
+      <p:sp>
+        <p:nvSpPr>
+          <p:cNvPr id="16" name="Shape 14"/>
+          <p:cNvSpPr/>
+          <p:nvPr/>
+        </p:nvSpPr>
+        <p:spPr>
+          <a:xfrm>
+            <a:off x="9329623" y="5126126"/>
+            <a:ext cx="1719072" cy="76810"/>
+          </a:xfrm>
+          <a:prstGeom prst="line">
+            <a:avLst/>
+          </a:prstGeom>
+          <a:noFill/>
+          <a:ln w="25400">
+            <a:solidFill>
+              <a:srgbClr val="BE3C32"/>
+            </a:solidFill>
+            <a:prstDash val="solid"/>
+            <a:tailEnd type="triangle"/>
+          </a:ln>
+        </p:spPr>
+      </p:sp>
+      <p:sp>
+        <p:nvSpPr>
+          <p:cNvPr id="17" name="Shape 15"/>
+          <p:cNvSpPr/>
+          <p:nvPr/>
+        </p:nvSpPr>
+        <p:spPr>
+          <a:xfrm>
+            <a:off x="11002975" y="5157216"/>
+            <a:ext cx="91440" cy="91440"/>
+          </a:xfrm>
+          <a:prstGeom prst="ellipse">
+            <a:avLst/>
+          </a:prstGeom>
+          <a:solidFill>
+            <a:srgbClr val="BE3C32"/>
+          </a:solidFill>
+          <a:ln/>
+        </p:spPr>
+      </p:sp>
+      <p:sp>
+        <p:nvSpPr>
+          <p:cNvPr id="18" name="Shape 16"/>
+          <p:cNvSpPr/>
+          <p:nvPr/>
+        </p:nvSpPr>
+        <p:spPr>
+          <a:xfrm>
+            <a:off x="640080" y="5349240"/>
+            <a:ext cx="10911535" cy="685800"/>
+          </a:xfrm>
+          <a:prstGeom prst="roundRect">
+            <a:avLst>
+              <a:gd name="adj" fmla="val 10667"/>
+            </a:avLst>
+          </a:prstGeom>
+          <a:solidFill>
+            <a:srgbClr val="F1F4F9"/>
+          </a:solidFill>
+          <a:ln w="9525">
+            <a:solidFill>
+              <a:srgbClr val="D9DEE8"/>
+            </a:solidFill>
+            <a:prstDash val="solid"/>
+          </a:ln>
+          <a:effectLst>
+            <a:outerShdw sx="100000" sy="100000" kx="0" ky="0" algn="bl" rotWithShape="0" blurRad="114300" dist="38100" dir="5400000">
+              <a:srgbClr val="1A1A2E">
+                <a:alpha val="20000"/>
+              </a:srgbClr>
+            </a:outerShdw>
+          </a:effectLst>
+        </p:spPr>
+      </p:sp>
+      <p:sp>
+        <p:nvSpPr>
+          <p:cNvPr id="19" name="Text 17"/>
+          <p:cNvSpPr txBox="1"/>
+          <p:nvPr/>
+        </p:nvSpPr>
+        <p:spPr>
+          <a:xfrm>
+            <a:off x="868680" y="5349240"/>
+            <a:ext cx="10454335" cy="685800"/>
+          </a:xfrm>
+          <a:prstGeom prst="rect">
+            <a:avLst/>
+          </a:prstGeom>
+          <a:noFill/>
+          <a:ln/>
+        </p:spPr>
+        <p:txBody>
+          <a:bodyPr wrap="square" lIns="0" tIns="0" rIns="0" bIns="0" rtlCol="0" anchor="ctr"/>
+          <a:lstStyle/>
+          <a:p>
+            <a:pPr algn="ctr" indent="0" marL="0">
+              <a:buNone/>
+            </a:pPr>
+            <a:r>
+              <a:rPr lang="en-US" sz="1550" dirty="0">
+                <a:solidFill>
+                  <a:srgbClr val="16213E"/>
+                </a:solidFill>
+                <a:latin typeface="Cambria Math" pitchFamily="34" charset="0"/>
+                <a:ea typeface="Cambria Math" pitchFamily="34" charset="-122"/>
+                <a:cs typeface="Cambria Math" pitchFamily="34" charset="-120"/>
+              </a:rPr>
+              <a:t>Kết luận: Initialization đúng = ĐIỀU KIỆN CẦN, không phải ĐIỀU KIỆN ĐỦ</a:t>
+            </a:r>
+            <a:endParaRPr lang="en-US" sz="1550" dirty="0"/>
+          </a:p>
+        </p:txBody>
+      </p:sp>
+      <p:sp>
+        <p:nvSpPr>
+          <p:cNvPr id="20" name="Text 18"/>
+          <p:cNvSpPr txBox="1"/>
+          <p:nvPr/>
+        </p:nvSpPr>
+        <p:spPr>
+          <a:xfrm>
+            <a:off x="11185855" y="6446520"/>
+            <a:ext cx="731520" cy="274320"/>
+          </a:xfrm>
+          <a:prstGeom prst="rect">
+            <a:avLst/>
+          </a:prstGeom>
+          <a:noFill/>
+          <a:ln/>
+        </p:spPr>
+        <p:txBody>
+          <a:bodyPr wrap="square" lIns="0" tIns="0" rIns="0" bIns="0" rtlCol="0" anchor="ctr"/>
+          <a:lstStyle/>
+          <a:p>
+            <a:pPr algn="r" indent="0" marL="0">
+              <a:buNone/>
+            </a:pPr>
+            <a:r>
+              <a:rPr lang="en-US" sz="900" dirty="0">
+                <a:solidFill>
+                  <a:srgbClr val="5B6478"/>
+                </a:solidFill>
+                <a:latin typeface="Calibri" pitchFamily="34" charset="0"/>
+                <a:ea typeface="Calibri" pitchFamily="34" charset="-122"/>
+                <a:cs typeface="Calibri" pitchFamily="34" charset="-120"/>
+              </a:rPr>
               <a:t>25/29</a:t>
             </a:r>
             <a:endParaRPr lang="en-US" sz="900" dirty="0"/>
@@ -16447,7 +16972,7 @@
       </p:sp>
       <p:sp>
         <p:nvSpPr>
-          <p:cNvPr id="6" name="Shape 4"/>
+          <p:cNvPr id="21" name="Shape 19"/>
           <p:cNvSpPr/>
           <p:nvPr/>
         </p:nvSpPr>
@@ -16467,7 +16992,7 @@
       </p:sp>
       <p:sp>
         <p:nvSpPr>
-          <p:cNvPr id="7" name="Shape 5"/>
+          <p:cNvPr id="22" name="Shape 20"/>
           <p:cNvSpPr/>
           <p:nvPr/>
         </p:nvSpPr>
@@ -16487,7 +17012,7 @@
       </p:sp>
       <p:sp>
         <p:nvSpPr>
-          <p:cNvPr id="8" name="Shape 6"/>
+          <p:cNvPr id="23" name="Shape 21"/>
           <p:cNvSpPr/>
           <p:nvPr/>
         </p:nvSpPr>
@@ -16507,7 +17032,7 @@
       </p:sp>
       <p:sp>
         <p:nvSpPr>
-          <p:cNvPr id="9" name="Shape 7"/>
+          <p:cNvPr id="24" name="Shape 22"/>
           <p:cNvSpPr/>
           <p:nvPr/>
         </p:nvSpPr>
@@ -16527,7 +17052,7 @@
       </p:sp>
       <p:sp>
         <p:nvSpPr>
-          <p:cNvPr id="10" name="Text 8"/>
+          <p:cNvPr id="25" name="Text 23"/>
           <p:cNvSpPr txBox="1"/>
           <p:nvPr/>
         </p:nvSpPr>
@@ -20885,7 +21410,7 @@
                 <a:ea typeface="Calibri" pitchFamily="34" charset="-122"/>
                 <a:cs typeface="Calibri" pitchFamily="34" charset="-120"/>
               </a:rPr>
-              <a:t>g biến đổi x thành đại lượng trung gian; f biến đổi đại lượng đó thành y</a:t>
+              <a:t>g biến x → đại lượng trung gian; f biến đại lượng đó → y</a:t>
             </a:r>
             <a:endParaRPr lang="en-US" sz="1600" dirty="0"/>
           </a:p>
@@ -20906,7 +21431,7 @@
                 <a:ea typeface="Calibri" pitchFamily="34" charset="-122"/>
                 <a:cs typeface="Calibri" pitchFamily="34" charset="-120"/>
               </a:rPr>
-              <a:t>Độ nhạy tổng = độ nhạy từng bước, nhân dồn lại</a:t>
+              <a:t>Độ nhạy tổng = tích độ nhạy từng bước (nhân dồn)</a:t>
             </a:r>
             <a:endParaRPr lang="en-US" sz="1600" dirty="0"/>
           </a:p>
@@ -20927,7 +21452,7 @@
                 <a:ea typeface="Calibri" pitchFamily="34" charset="-122"/>
                 <a:cs typeface="Calibri" pitchFamily="34" charset="-120"/>
               </a:rPr>
-              <a:t>Ẩn dụ: truyền tin đồn qua một chuỗi người — sai lệch cuối cùng phụ thuộc mức khuếch đại ở MỖI khâu</a:t>
+              <a:t>Ẩn dụ: tin đồn qua nhiều người — sai lệch cuối phụ thuộc MỖI khâu</a:t>
             </a:r>
             <a:endParaRPr lang="en-US" sz="1600" dirty="0"/>
           </a:p>
@@ -23099,8 +23624,8 @@
         </p:nvSpPr>
         <p:spPr>
           <a:xfrm>
-            <a:off x="640080" y="1965960"/>
-            <a:ext cx="6035040" cy="3657600"/>
+            <a:off x="640080" y="1920240"/>
+            <a:ext cx="10911535" cy="1737360"/>
           </a:xfrm>
           <a:prstGeom prst="rect">
             <a:avLst/>
@@ -23120,7 +23645,7 @@
               <a:buChar char="▪"/>
             </a:pPr>
             <a:r>
-              <a:rPr lang="en-US" sz="1600" dirty="0">
+              <a:rPr lang="en-US" sz="1650" dirty="0">
                 <a:solidFill>
                   <a:srgbClr val="1A2238"/>
                 </a:solidFill>
@@ -23128,9 +23653,9 @@
                 <a:ea typeface="Calibri" pitchFamily="34" charset="-122"/>
                 <a:cs typeface="Calibri" pitchFamily="34" charset="-120"/>
               </a:rPr>
-              <a:t>Backprop = Chain Rule áp dụng CÓ HỆ THỐNG trên một computational graph</a:t>
-            </a:r>
-            <a:endParaRPr lang="en-US" sz="1600" dirty="0"/>
+              <a:t>Backprop = Chain Rule áp dụng CÓ HỆ THỐNG trên computational graph</a:t>
+            </a:r>
+            <a:endParaRPr lang="en-US" sz="1650" dirty="0"/>
           </a:p>
           <a:p>
             <a:pPr marL="228600" indent="-228600">
@@ -23141,7 +23666,7 @@
               <a:buChar char="▪"/>
             </a:pPr>
             <a:r>
-              <a:rPr lang="en-US" sz="1600" dirty="0">
+              <a:rPr lang="en-US" sz="1650" dirty="0">
                 <a:solidFill>
                   <a:srgbClr val="1A2238"/>
                 </a:solidFill>
@@ -23149,9 +23674,9 @@
                 <a:ea typeface="Calibri" pitchFamily="34" charset="-122"/>
                 <a:cs typeface="Calibri" pitchFamily="34" charset="-120"/>
               </a:rPr>
-              <a:t>Đi ngược từ Loss, hỏi ở mỗi bước: “bước này khuếch đại hay giảm lỗi bao nhiêu?”</a:t>
-            </a:r>
-            <a:endParaRPr lang="en-US" sz="1600" dirty="0"/>
+              <a:t>Đi ngược từ Loss: mỗi bước hỏi “khuếch đại/giảm lỗi bao nhiêu?”</a:t>
+            </a:r>
+            <a:endParaRPr lang="en-US" sz="1650" dirty="0"/>
           </a:p>
           <a:p>
             <a:pPr marL="228600" indent="-228600">
@@ -23162,7 +23687,7 @@
               <a:buChar char="▪"/>
             </a:pPr>
             <a:r>
-              <a:rPr lang="en-US" sz="1600" dirty="0">
+              <a:rPr lang="en-US" sz="1650" dirty="0">
                 <a:solidFill>
                   <a:srgbClr val="1A2238"/>
                 </a:solidFill>
@@ -23172,7 +23697,7 @@
               </a:rPr>
               <a:t>Tận dụng giá trị forward đã lưu (cache) — không tính lại từ đầu</a:t>
             </a:r>
-            <a:endParaRPr lang="en-US" sz="1600" dirty="0"/>
+            <a:endParaRPr lang="en-US" sz="1650" dirty="0"/>
           </a:p>
           <a:p>
             <a:pPr marL="228600" indent="-228600">
@@ -23183,7 +23708,7 @@
               <a:buChar char="▪"/>
             </a:pPr>
             <a:r>
-              <a:rPr lang="en-US" sz="1600" dirty="0">
+              <a:rPr lang="en-US" sz="1650" dirty="0">
                 <a:solidFill>
                   <a:srgbClr val="1A2238"/>
                 </a:solidFill>
@@ -23191,9 +23716,9 @@
                 <a:ea typeface="Calibri" pitchFamily="34" charset="-122"/>
                 <a:cs typeface="Calibri" pitchFamily="34" charset="-120"/>
               </a:rPr>
-              <a:t>Phổ biến rộng rãi bởi Rumelhart, Hinton &amp; Williams (1986)</a:t>
-            </a:r>
-            <a:endParaRPr lang="en-US" sz="1600" dirty="0"/>
+              <a:t>Phổ biến bởi Rumelhart, Hinton &amp; Williams (1986)</a:t>
+            </a:r>
+            <a:endParaRPr lang="en-US" sz="1650" dirty="0"/>
           </a:p>
         </p:txBody>
       </p:sp>
@@ -23205,30 +23730,23 @@
         </p:nvSpPr>
         <p:spPr>
           <a:xfrm>
-            <a:off x="7040880" y="1965960"/>
-            <a:ext cx="4480560" cy="3657600"/>
+            <a:off x="2232508" y="4160520"/>
+            <a:ext cx="1554480" cy="685800"/>
           </a:xfrm>
           <a:prstGeom prst="roundRect">
             <a:avLst>
-              <a:gd name="adj" fmla="val 2000"/>
+              <a:gd name="adj" fmla="val 8000"/>
             </a:avLst>
           </a:prstGeom>
           <a:solidFill>
-            <a:srgbClr val="F1F4F9"/>
+            <a:srgbClr val="FFFFFF"/>
           </a:solidFill>
-          <a:ln w="9525">
+          <a:ln w="15875">
             <a:solidFill>
-              <a:srgbClr val="D9DEE8"/>
+              <a:srgbClr val="1A2238"/>
             </a:solidFill>
             <a:prstDash val="solid"/>
           </a:ln>
-          <a:effectLst>
-            <a:outerShdw sx="100000" sy="100000" kx="0" ky="0" algn="bl" rotWithShape="0" blurRad="114300" dist="38100" dir="5400000">
-              <a:srgbClr val="1A1A2E">
-                <a:alpha val="20000"/>
-              </a:srgbClr>
-            </a:outerShdw>
-          </a:effectLst>
         </p:spPr>
       </p:sp>
       <p:sp>
@@ -23239,8 +23757,8 @@
         </p:nvSpPr>
         <p:spPr>
           <a:xfrm>
-            <a:off x="7315200" y="2194560"/>
-            <a:ext cx="3931920" cy="365760"/>
+            <a:off x="2232508" y="4160520"/>
+            <a:ext cx="1554480" cy="685800"/>
           </a:xfrm>
           <a:prstGeom prst="rect">
             <a:avLst/>
@@ -23252,34 +23770,61 @@
           <a:bodyPr wrap="square" lIns="0" tIns="0" rIns="0" bIns="0" rtlCol="0" anchor="ctr"/>
           <a:lstStyle/>
           <a:p>
-            <a:pPr indent="0" marL="0">
+            <a:pPr algn="ctr" indent="0" marL="0">
               <a:buNone/>
             </a:pPr>
             <a:r>
-              <a:rPr lang="en-US" sz="1400" b="1" dirty="0">
-                <a:solidFill>
-                  <a:srgbClr val="16213E"/>
-                </a:solidFill>
-                <a:latin typeface="Cambria" pitchFamily="34" charset="0"/>
-                <a:ea typeface="Cambria" pitchFamily="34" charset="-122"/>
-                <a:cs typeface="Cambria" pitchFamily="34" charset="-120"/>
-              </a:rPr>
-              <a:t>Ẩn dụ dây chuyền sản xuất</a:t>
-            </a:r>
-            <a:endParaRPr lang="en-US" sz="1400" dirty="0"/>
-          </a:p>
-        </p:txBody>
-      </p:sp>
-      <p:sp>
-        <p:nvSpPr>
-          <p:cNvPr id="7" name="Text 5"/>
+              <a:rPr lang="en-US" sz="1200" dirty="0">
+                <a:solidFill>
+                  <a:srgbClr val="1A2238"/>
+                </a:solidFill>
+                <a:latin typeface="Cambria Math" pitchFamily="34" charset="0"/>
+                <a:ea typeface="Cambria Math" pitchFamily="34" charset="-122"/>
+                <a:cs typeface="Cambria Math" pitchFamily="34" charset="-120"/>
+              </a:rPr>
+              <a:t>Công đoạn 1</a:t>
+            </a:r>
+            <a:endParaRPr lang="en-US" sz="1200" dirty="0"/>
+          </a:p>
+        </p:txBody>
+      </p:sp>
+      <p:sp>
+        <p:nvSpPr>
+          <p:cNvPr id="7" name="Shape 5"/>
+          <p:cNvSpPr/>
+          <p:nvPr/>
+        </p:nvSpPr>
+        <p:spPr>
+          <a:xfrm>
+            <a:off x="4289908" y="4160520"/>
+            <a:ext cx="1554480" cy="685800"/>
+          </a:xfrm>
+          <a:prstGeom prst="roundRect">
+            <a:avLst>
+              <a:gd name="adj" fmla="val 8000"/>
+            </a:avLst>
+          </a:prstGeom>
+          <a:solidFill>
+            <a:srgbClr val="FFFFFF"/>
+          </a:solidFill>
+          <a:ln w="15875">
+            <a:solidFill>
+              <a:srgbClr val="1A2238"/>
+            </a:solidFill>
+            <a:prstDash val="solid"/>
+          </a:ln>
+        </p:spPr>
+      </p:sp>
+      <p:sp>
+        <p:nvSpPr>
+          <p:cNvPr id="8" name="Text 6"/>
           <p:cNvSpPr txBox="1"/>
           <p:nvPr/>
         </p:nvSpPr>
         <p:spPr>
           <a:xfrm>
-            <a:off x="7315200" y="2697480"/>
-            <a:ext cx="3931920" cy="2651760"/>
+            <a:off x="4289908" y="4160520"/>
+            <a:ext cx="1554480" cy="685800"/>
           </a:xfrm>
           <a:prstGeom prst="rect">
             <a:avLst/>
@@ -23288,37 +23833,352 @@
           <a:ln/>
         </p:spPr>
         <p:txBody>
-          <a:bodyPr wrap="square" lIns="0" tIns="0" rIns="0" bIns="0" rtlCol="0" anchor="t"/>
-          <a:lstStyle/>
-          <a:p>
-            <a:pPr indent="0" marL="0">
+          <a:bodyPr wrap="square" lIns="0" tIns="0" rIns="0" bIns="0" rtlCol="0" anchor="ctr"/>
+          <a:lstStyle/>
+          <a:p>
+            <a:pPr algn="ctr" indent="0" marL="0">
               <a:buNone/>
             </a:pPr>
             <a:r>
-              <a:rPr lang="en-US" sz="1400" i="1" dirty="0">
+              <a:rPr lang="en-US" sz="1200" dirty="0">
                 <a:solidFill>
                   <a:srgbClr val="1A2238"/>
+                </a:solidFill>
+                <a:latin typeface="Cambria Math" pitchFamily="34" charset="0"/>
+                <a:ea typeface="Cambria Math" pitchFamily="34" charset="-122"/>
+                <a:cs typeface="Cambria Math" pitchFamily="34" charset="-120"/>
+              </a:rPr>
+              <a:t>Công đoạn 2</a:t>
+            </a:r>
+            <a:endParaRPr lang="en-US" sz="1200" dirty="0"/>
+          </a:p>
+        </p:txBody>
+      </p:sp>
+      <p:sp>
+        <p:nvSpPr>
+          <p:cNvPr id="9" name="Shape 7"/>
+          <p:cNvSpPr/>
+          <p:nvPr/>
+        </p:nvSpPr>
+        <p:spPr>
+          <a:xfrm>
+            <a:off x="6347308" y="4160520"/>
+            <a:ext cx="1554480" cy="685800"/>
+          </a:xfrm>
+          <a:prstGeom prst="roundRect">
+            <a:avLst>
+              <a:gd name="adj" fmla="val 8000"/>
+            </a:avLst>
+          </a:prstGeom>
+          <a:solidFill>
+            <a:srgbClr val="FFFFFF"/>
+          </a:solidFill>
+          <a:ln w="15875">
+            <a:solidFill>
+              <a:srgbClr val="1A2238"/>
+            </a:solidFill>
+            <a:prstDash val="solid"/>
+          </a:ln>
+        </p:spPr>
+      </p:sp>
+      <p:sp>
+        <p:nvSpPr>
+          <p:cNvPr id="10" name="Text 8"/>
+          <p:cNvSpPr txBox="1"/>
+          <p:nvPr/>
+        </p:nvSpPr>
+        <p:spPr>
+          <a:xfrm>
+            <a:off x="6347308" y="4160520"/>
+            <a:ext cx="1554480" cy="685800"/>
+          </a:xfrm>
+          <a:prstGeom prst="rect">
+            <a:avLst/>
+          </a:prstGeom>
+          <a:noFill/>
+          <a:ln/>
+        </p:spPr>
+        <p:txBody>
+          <a:bodyPr wrap="square" lIns="0" tIns="0" rIns="0" bIns="0" rtlCol="0" anchor="ctr"/>
+          <a:lstStyle/>
+          <a:p>
+            <a:pPr algn="ctr" indent="0" marL="0">
+              <a:buNone/>
+            </a:pPr>
+            <a:r>
+              <a:rPr lang="en-US" sz="1200" dirty="0">
+                <a:solidFill>
+                  <a:srgbClr val="1A2238"/>
+                </a:solidFill>
+                <a:latin typeface="Cambria Math" pitchFamily="34" charset="0"/>
+                <a:ea typeface="Cambria Math" pitchFamily="34" charset="-122"/>
+                <a:cs typeface="Cambria Math" pitchFamily="34" charset="-120"/>
+              </a:rPr>
+              <a:t>Công đoạn 3</a:t>
+            </a:r>
+            <a:endParaRPr lang="en-US" sz="1200" dirty="0"/>
+          </a:p>
+        </p:txBody>
+      </p:sp>
+      <p:sp>
+        <p:nvSpPr>
+          <p:cNvPr id="11" name="Shape 9"/>
+          <p:cNvSpPr/>
+          <p:nvPr/>
+        </p:nvSpPr>
+        <p:spPr>
+          <a:xfrm>
+            <a:off x="8404708" y="4160520"/>
+            <a:ext cx="1554480" cy="685800"/>
+          </a:xfrm>
+          <a:prstGeom prst="roundRect">
+            <a:avLst>
+              <a:gd name="adj" fmla="val 8000"/>
+            </a:avLst>
+          </a:prstGeom>
+          <a:solidFill>
+            <a:srgbClr val="FBEEEC"/>
+          </a:solidFill>
+          <a:ln w="15875">
+            <a:solidFill>
+              <a:srgbClr val="BE3C32"/>
+            </a:solidFill>
+            <a:prstDash val="solid"/>
+          </a:ln>
+        </p:spPr>
+      </p:sp>
+      <p:sp>
+        <p:nvSpPr>
+          <p:cNvPr id="12" name="Text 10"/>
+          <p:cNvSpPr txBox="1"/>
+          <p:nvPr/>
+        </p:nvSpPr>
+        <p:spPr>
+          <a:xfrm>
+            <a:off x="8404708" y="4160520"/>
+            <a:ext cx="1554480" cy="685800"/>
+          </a:xfrm>
+          <a:prstGeom prst="rect">
+            <a:avLst/>
+          </a:prstGeom>
+          <a:noFill/>
+          <a:ln/>
+        </p:spPr>
+        <p:txBody>
+          <a:bodyPr wrap="square" lIns="0" tIns="0" rIns="0" bIns="0" rtlCol="0" anchor="ctr"/>
+          <a:lstStyle/>
+          <a:p>
+            <a:pPr algn="ctr" indent="0" marL="0">
+              <a:buNone/>
+            </a:pPr>
+            <a:r>
+              <a:rPr lang="en-US" sz="1200" dirty="0">
+                <a:solidFill>
+                  <a:srgbClr val="1A2238"/>
+                </a:solidFill>
+                <a:latin typeface="Cambria Math" pitchFamily="34" charset="0"/>
+                <a:ea typeface="Cambria Math" pitchFamily="34" charset="-122"/>
+                <a:cs typeface="Cambria Math" pitchFamily="34" charset="-120"/>
+              </a:rPr>
+              <a:t>Sản phẩm (lỗi)</a:t>
+            </a:r>
+            <a:endParaRPr lang="en-US" sz="1200" dirty="0"/>
+          </a:p>
+        </p:txBody>
+      </p:sp>
+      <p:sp>
+        <p:nvSpPr>
+          <p:cNvPr id="13" name="Shape 11"/>
+          <p:cNvSpPr/>
+          <p:nvPr/>
+        </p:nvSpPr>
+        <p:spPr>
+          <a:xfrm>
+            <a:off x="3786988" y="4503420"/>
+            <a:ext cx="502920" cy="0"/>
+          </a:xfrm>
+          <a:prstGeom prst="line">
+            <a:avLst/>
+          </a:prstGeom>
+          <a:noFill/>
+          <a:ln w="28575">
+            <a:solidFill>
+              <a:srgbClr val="285AB4"/>
+            </a:solidFill>
+            <a:prstDash val="solid"/>
+            <a:tailEnd type="triangle"/>
+          </a:ln>
+        </p:spPr>
+      </p:sp>
+      <p:sp>
+        <p:nvSpPr>
+          <p:cNvPr id="14" name="Shape 12"/>
+          <p:cNvSpPr/>
+          <p:nvPr/>
+        </p:nvSpPr>
+        <p:spPr>
+          <a:xfrm>
+            <a:off x="5844388" y="4503420"/>
+            <a:ext cx="502920" cy="0"/>
+          </a:xfrm>
+          <a:prstGeom prst="line">
+            <a:avLst/>
+          </a:prstGeom>
+          <a:noFill/>
+          <a:ln w="28575">
+            <a:solidFill>
+              <a:srgbClr val="285AB4"/>
+            </a:solidFill>
+            <a:prstDash val="solid"/>
+            <a:tailEnd type="triangle"/>
+          </a:ln>
+        </p:spPr>
+      </p:sp>
+      <p:sp>
+        <p:nvSpPr>
+          <p:cNvPr id="15" name="Shape 13"/>
+          <p:cNvSpPr/>
+          <p:nvPr/>
+        </p:nvSpPr>
+        <p:spPr>
+          <a:xfrm>
+            <a:off x="7901788" y="4503420"/>
+            <a:ext cx="502920" cy="0"/>
+          </a:xfrm>
+          <a:prstGeom prst="line">
+            <a:avLst/>
+          </a:prstGeom>
+          <a:noFill/>
+          <a:ln w="28575">
+            <a:solidFill>
+              <a:srgbClr val="285AB4"/>
+            </a:solidFill>
+            <a:prstDash val="solid"/>
+            <a:tailEnd type="triangle"/>
+          </a:ln>
+        </p:spPr>
+      </p:sp>
+      <p:sp>
+        <p:nvSpPr>
+          <p:cNvPr id="16" name="Shape 14"/>
+          <p:cNvSpPr/>
+          <p:nvPr/>
+        </p:nvSpPr>
+        <p:spPr>
+          <a:xfrm>
+            <a:off x="7901788" y="5303520"/>
+            <a:ext cx="502920" cy="0"/>
+          </a:xfrm>
+          <a:prstGeom prst="line">
+            <a:avLst/>
+          </a:prstGeom>
+          <a:noFill/>
+          <a:ln w="28575">
+            <a:solidFill>
+              <a:srgbClr val="BE3C32"/>
+            </a:solidFill>
+            <a:prstDash val="dash"/>
+            <a:headEnd type="triangle"/>
+          </a:ln>
+        </p:spPr>
+      </p:sp>
+      <p:sp>
+        <p:nvSpPr>
+          <p:cNvPr id="17" name="Shape 15"/>
+          <p:cNvSpPr/>
+          <p:nvPr/>
+        </p:nvSpPr>
+        <p:spPr>
+          <a:xfrm>
+            <a:off x="5844388" y="5303520"/>
+            <a:ext cx="502920" cy="0"/>
+          </a:xfrm>
+          <a:prstGeom prst="line">
+            <a:avLst/>
+          </a:prstGeom>
+          <a:noFill/>
+          <a:ln w="28575">
+            <a:solidFill>
+              <a:srgbClr val="BE3C32"/>
+            </a:solidFill>
+            <a:prstDash val="dash"/>
+            <a:headEnd type="triangle"/>
+          </a:ln>
+        </p:spPr>
+      </p:sp>
+      <p:sp>
+        <p:nvSpPr>
+          <p:cNvPr id="18" name="Shape 16"/>
+          <p:cNvSpPr/>
+          <p:nvPr/>
+        </p:nvSpPr>
+        <p:spPr>
+          <a:xfrm>
+            <a:off x="3786988" y="5303520"/>
+            <a:ext cx="502920" cy="0"/>
+          </a:xfrm>
+          <a:prstGeom prst="line">
+            <a:avLst/>
+          </a:prstGeom>
+          <a:noFill/>
+          <a:ln w="28575">
+            <a:solidFill>
+              <a:srgbClr val="BE3C32"/>
+            </a:solidFill>
+            <a:prstDash val="dash"/>
+            <a:headEnd type="triangle"/>
+          </a:ln>
+        </p:spPr>
+      </p:sp>
+      <p:sp>
+        <p:nvSpPr>
+          <p:cNvPr id="19" name="Text 17"/>
+          <p:cNvSpPr txBox="1"/>
+          <p:nvPr/>
+        </p:nvSpPr>
+        <p:spPr>
+          <a:xfrm>
+            <a:off x="640080" y="5413248"/>
+            <a:ext cx="10911535" cy="320040"/>
+          </a:xfrm>
+          <a:prstGeom prst="rect">
+            <a:avLst/>
+          </a:prstGeom>
+          <a:noFill/>
+          <a:ln/>
+        </p:spPr>
+        <p:txBody>
+          <a:bodyPr wrap="square" lIns="0" tIns="0" rIns="0" bIns="0" rtlCol="0" anchor="ctr"/>
+          <a:lstStyle/>
+          <a:p>
+            <a:pPr algn="ctr" indent="0" marL="0">
+              <a:buNone/>
+            </a:pPr>
+            <a:r>
+              <a:rPr lang="en-US" sz="1200" i="1" dirty="0">
+                <a:solidFill>
+                  <a:srgbClr val="5B6478"/>
                 </a:solidFill>
                 <a:latin typeface="Calibri" pitchFamily="34" charset="0"/>
                 <a:ea typeface="Calibri" pitchFamily="34" charset="-122"/>
                 <a:cs typeface="Calibri" pitchFamily="34" charset="-120"/>
               </a:rPr>
-              <a:t>Sản phẩm cuối bị lỗi. Muốn biết công đoạn nào “chịu trách nhiệm” bao nhiêu, ta đi NGƯỢC từ cuối dây chuyền về đầu, hỏi từng công đoạn — rồi nhân dồn các mức khuếch đại lại.</a:t>
-            </a:r>
-            <a:endParaRPr lang="en-US" sz="1400" dirty="0"/>
-          </a:p>
-        </p:txBody>
-      </p:sp>
-      <p:sp>
-        <p:nvSpPr>
-          <p:cNvPr id="8" name="Text 6"/>
+              <a:t>“Công đoạn nào gây lỗi nhiều nhất?” — đi ngược, hỏi từng bước</a:t>
+            </a:r>
+            <a:endParaRPr lang="en-US" sz="1200" dirty="0"/>
+          </a:p>
+        </p:txBody>
+      </p:sp>
+      <p:sp>
+        <p:nvSpPr>
+          <p:cNvPr id="20" name="Text 18"/>
           <p:cNvSpPr txBox="1"/>
           <p:nvPr/>
         </p:nvSpPr>
         <p:spPr>
           <a:xfrm>
-            <a:off x="11185855" y="6446520"/>
-            <a:ext cx="731520" cy="274320"/>
+            <a:off x="640080" y="5806440"/>
+            <a:ext cx="10911535" cy="274320"/>
           </a:xfrm>
           <a:prstGeom prst="rect">
             <a:avLst/>
@@ -23330,11 +24190,11 @@
           <a:bodyPr wrap="square" lIns="0" tIns="0" rIns="0" bIns="0" rtlCol="0" anchor="ctr"/>
           <a:lstStyle/>
           <a:p>
-            <a:pPr algn="r" indent="0" marL="0">
+            <a:pPr algn="ctr" indent="0" marL="0">
               <a:buNone/>
             </a:pPr>
             <a:r>
-              <a:rPr lang="en-US" sz="900" dirty="0">
+              <a:rPr lang="en-US" sz="1050" i="1" dirty="0">
                 <a:solidFill>
                   <a:srgbClr val="5B6478"/>
                 </a:solidFill>
@@ -23342,6 +24202,45 @@
                 <a:ea typeface="Calibri" pitchFamily="34" charset="-122"/>
                 <a:cs typeface="Calibri" pitchFamily="34" charset="-120"/>
               </a:rPr>
+              <a:t>mũi tên xanh = forward (sản xuất)   ·   mũi tên đỏ đứt = backward (truy lỗi)</a:t>
+            </a:r>
+            <a:endParaRPr lang="en-US" sz="1050" dirty="0"/>
+          </a:p>
+        </p:txBody>
+      </p:sp>
+      <p:sp>
+        <p:nvSpPr>
+          <p:cNvPr id="21" name="Text 19"/>
+          <p:cNvSpPr txBox="1"/>
+          <p:nvPr/>
+        </p:nvSpPr>
+        <p:spPr>
+          <a:xfrm>
+            <a:off x="11185855" y="6446520"/>
+            <a:ext cx="731520" cy="274320"/>
+          </a:xfrm>
+          <a:prstGeom prst="rect">
+            <a:avLst/>
+          </a:prstGeom>
+          <a:noFill/>
+          <a:ln/>
+        </p:spPr>
+        <p:txBody>
+          <a:bodyPr wrap="square" lIns="0" tIns="0" rIns="0" bIns="0" rtlCol="0" anchor="ctr"/>
+          <a:lstStyle/>
+          <a:p>
+            <a:pPr algn="r" indent="0" marL="0">
+              <a:buNone/>
+            </a:pPr>
+            <a:r>
+              <a:rPr lang="en-US" sz="900" dirty="0">
+                <a:solidFill>
+                  <a:srgbClr val="5B6478"/>
+                </a:solidFill>
+                <a:latin typeface="Calibri" pitchFamily="34" charset="0"/>
+                <a:ea typeface="Calibri" pitchFamily="34" charset="-122"/>
+                <a:cs typeface="Calibri" pitchFamily="34" charset="-120"/>
+              </a:rPr>
               <a:t>8/29</a:t>
             </a:r>
             <a:endParaRPr lang="en-US" sz="900" dirty="0"/>
@@ -23350,7 +24249,7 @@
       </p:sp>
       <p:sp>
         <p:nvSpPr>
-          <p:cNvPr id="9" name="Shape 7"/>
+          <p:cNvPr id="22" name="Shape 20"/>
           <p:cNvSpPr/>
           <p:nvPr/>
         </p:nvSpPr>
@@ -23370,7 +24269,7 @@
       </p:sp>
       <p:sp>
         <p:nvSpPr>
-          <p:cNvPr id="10" name="Shape 8"/>
+          <p:cNvPr id="23" name="Shape 21"/>
           <p:cNvSpPr/>
           <p:nvPr/>
         </p:nvSpPr>
@@ -23390,7 +24289,7 @@
       </p:sp>
       <p:sp>
         <p:nvSpPr>
-          <p:cNvPr id="11" name="Shape 9"/>
+          <p:cNvPr id="24" name="Shape 22"/>
           <p:cNvSpPr/>
           <p:nvPr/>
         </p:nvSpPr>
@@ -23410,7 +24309,7 @@
       </p:sp>
       <p:sp>
         <p:nvSpPr>
-          <p:cNvPr id="12" name="Shape 10"/>
+          <p:cNvPr id="25" name="Shape 23"/>
           <p:cNvSpPr/>
           <p:nvPr/>
         </p:nvSpPr>
@@ -23430,7 +24329,7 @@
       </p:sp>
       <p:sp>
         <p:nvSpPr>
-          <p:cNvPr id="13" name="Text 11"/>
+          <p:cNvPr id="26" name="Text 24"/>
           <p:cNvSpPr txBox="1"/>
           <p:nvPr/>
         </p:nvSpPr>

--- a/report/Slide_Backprop_Initialization.pptx
+++ b/report/Slide_Backprop_Initialization.pptx
@@ -2026,7 +2026,7 @@
           <a:p>
             <a:r>
               <a:rPr lang="en-US" dirty="0"/>
-              <a:t>Đây là phần thể hiện tư duy phản biện — hai nguyên nhân ĐỘC LẬP: (1) trần đạo hàm 0,25 làm tín hiệu yếu, (2) lệch tâm dương làm SGD đi đường dích dắc (như LeCun 1998 'Efficient BackProp' khuyến nghị centering). He vs Xavier cho ReLU: chênh lệch nằm trong nhiễu 1-seed, không có ý nghĩa thống kê, không kết luận dứt khoát được.</a:t>
+              <a:t>Đây là phần thể hiện tư duy phản biện — hai nguyên nhân ĐỘC LẬP: (1) trần đạo hàm 0.25 làm tín hiệu yếu, (2) lệch tâm dương làm SGD đi đường dích dắc (như LeCun 1998 'Efficient BackProp' khuyến nghị centering). He vs Xavier cho ReLU: chênh lệch nằm trong nhiễu 1-seed, không có ý nghĩa thống kê, không kết luận dứt khoát được.</a:t>
             </a:r>
             <a:endParaRPr lang="en-US" dirty="0"/>
           </a:p>
@@ -2202,7 +2202,7 @@
           <a:p>
             <a:r>
               <a:rPr lang="en-US" dirty="0"/>
-              <a:t>Trung thực về giới hạn — không giấu, đây là điểm cộng học thuật khi trả lời câu hỏi phản biện.</a:t>
+              <a:t>Trung thực về giới hạn — không giấu, đây là điểm cộng học thuật khi trả lời câu hỏi phản biện. Cột trái = lựa chọn có chủ đích (không phải sơ suất); cột phải = giới hạn thật + hướng khắc phục.</a:t>
             </a:r>
             <a:endParaRPr lang="en-US" dirty="0"/>
           </a:p>
@@ -2378,7 +2378,7 @@
           <a:p>
             <a:r>
               <a:rPr lang="en-US" dirty="0"/>
-              <a:t>Sẵn sàng nêu nguồn cụ thể nếu giảng viên hỏi 'câu này lấy từ đâu' — 9 nguồn, đều đã verify qua tìm kiếm thực tế, không có nguồn bịa.</a:t>
+              <a:t>Sẵn sàng nêu nguồn cụ thể nếu giảng viên hỏi 'câu này lấy từ đâu' — 11 nguồn, khớp 100% với danh mục tham khảo IEEE trong báo cáo PDF, đều đã verify qua tìm kiếm thực tế, không có nguồn bịa.</a:t>
             </a:r>
             <a:endParaRPr lang="en-US" dirty="0"/>
           </a:p>
@@ -7871,7 +7871,7 @@
                 <a:ea typeface="Cambria" pitchFamily="34" charset="-122"/>
                 <a:cs typeface="Cambria" pitchFamily="34" charset="-120"/>
               </a:rPr>
-              <a:t>0,0</a:t>
+              <a:t>0.0</a:t>
             </a:r>
             <a:endParaRPr lang="en-US" sz="3200" dirty="0"/>
           </a:p>
@@ -8787,7 +8787,7 @@
                 <a:ea typeface="Calibri" pitchFamily="34" charset="-122"/>
                 <a:cs typeface="Calibri" pitchFamily="34" charset="-120"/>
               </a:rPr>
-              <a:t>Thực nghiệm: Tanh + Xavier đạt 69,2% test accuracy (cao nhất trong lưới 20 cấu hình)</a:t>
+              <a:t>Thực nghiệm: Tanh + Xavier đạt 69.2% test accuracy (cao nhất trong lưới 20 cấu hình)</a:t>
             </a:r>
             <a:endParaRPr lang="en-US" sz="1600" dirty="0"/>
           </a:p>
@@ -8826,7 +8826,7 @@
                 <a:ea typeface="Cambria" pitchFamily="34" charset="-122"/>
                 <a:cs typeface="Cambria" pitchFamily="34" charset="-120"/>
               </a:rPr>
-              <a:t>69,2%</a:t>
+              <a:t>69.2%</a:t>
             </a:r>
             <a:endParaRPr lang="en-US" sz="3200" dirty="0"/>
           </a:p>
@@ -9440,7 +9440,7 @@
                 <a:ea typeface="Calibri" pitchFamily="34" charset="-122"/>
                 <a:cs typeface="Calibri" pitchFamily="34" charset="-120"/>
               </a:rPr>
-              <a:t>Hệ quả bậc-1 chưa xử lý: ReLU còn LỆCH TÂM DƯƠNG (E[a]≈0,4σ&gt;0) — động lực cho ELU/SELU tự chuẩn hoá</a:t>
+              <a:t>Hệ quả bậc-1 chưa xử lý: ReLU còn LỆCH TÂM DƯƠNG (E[a]≈0.4σ&gt;0) — động lực cho ELU/SELU tự chuẩn hoá</a:t>
             </a:r>
             <a:endParaRPr lang="en-US" sz="1500" dirty="0"/>
           </a:p>
@@ -9461,7 +9461,7 @@
                 <a:ea typeface="Calibri" pitchFamily="34" charset="-122"/>
                 <a:cs typeface="Calibri" pitchFamily="34" charset="-120"/>
               </a:rPr>
-              <a:t>Thực nghiệm: ReLU+Xavier 67,4% vs. ReLU+He 66,7% (n=1 seed)</a:t>
+              <a:t>Thực nghiệm: ReLU+Xavier 67.4% vs. ReLU+He 66.7% (n=1 seed)</a:t>
             </a:r>
             <a:endParaRPr lang="en-US" sz="1500" dirty="0"/>
           </a:p>
@@ -9880,7 +9880,7 @@
                 <a:ea typeface="Calibri" pitchFamily="34" charset="-122"/>
                 <a:cs typeface="Calibri" pitchFamily="34" charset="-120"/>
               </a:rPr>
-              <a:t>g=0,5, L=50  ⇒  hệ số ≈ 8,9×10⁻¹⁶ (gần bằng 0)</a:t>
+              <a:t>g=0.5, L=50  ⇒  hệ số ≈ 8.9×10⁻¹⁶ (gần bằng 0)</a:t>
             </a:r>
             <a:endParaRPr lang="en-US" sz="1600" dirty="0"/>
           </a:p>
@@ -9901,7 +9901,7 @@
                 <a:ea typeface="Calibri" pitchFamily="34" charset="-122"/>
                 <a:cs typeface="Calibri" pitchFamily="34" charset="-120"/>
               </a:rPr>
-              <a:t>Nguyên nhân kép: activation bão hoà (σ′≤0,25) + weight scale sai</a:t>
+              <a:t>Nguyên nhân kép: activation bão hoà (σ′≤0.25) + weight scale sai</a:t>
             </a:r>
             <a:endParaRPr lang="en-US" sz="1600" dirty="0"/>
           </a:p>
@@ -10245,7 +10245,7 @@
                 <a:ea typeface="Calibri" pitchFamily="34" charset="-122"/>
                 <a:cs typeface="Calibri" pitchFamily="34" charset="-120"/>
               </a:rPr>
-              <a:t>g = 0,5 — độ lớn gradient co lại theo độ sâu</a:t>
+              <a:t>g = 0.5 — độ lớn gradient co lại theo độ sâu</a:t>
             </a:r>
             <a:endParaRPr lang="en-US" sz="1200" dirty="0"/>
           </a:p>
@@ -10570,7 +10570,7 @@
                 <a:ea typeface="Calibri" pitchFamily="34" charset="-122"/>
                 <a:cs typeface="Calibri" pitchFamily="34" charset="-120"/>
               </a:rPr>
-              <a:t>g=2, L=50  ⇒  hệ số ≈ 1,1×10¹⁵</a:t>
+              <a:t>g=2, L=50  ⇒  hệ số ≈ 1.1×10¹⁵</a:t>
             </a:r>
             <a:endParaRPr lang="en-US" sz="1600" dirty="0"/>
           </a:p>
@@ -11281,7 +11281,7 @@
                 <a:ea typeface="Calibri" pitchFamily="34" charset="-122"/>
                 <a:cs typeface="Calibri" pitchFamily="34" charset="-120"/>
               </a:rPr>
-              <a:t>Fashion-MNIST subset: 5.000 train / 1.000 val / 2.000 test</a:t>
+              <a:t>Fashion-MNIST subset: 5,000 train / 1,000 val / 2,000 test</a:t>
             </a:r>
             <a:endParaRPr lang="en-US" sz="1600" dirty="0"/>
           </a:p>
@@ -11302,7 +11302,7 @@
                 <a:ea typeface="Calibri" pitchFamily="34" charset="-122"/>
                 <a:cs typeface="Calibri" pitchFamily="34" charset="-120"/>
               </a:rPr>
-              <a:t>SGD thuần, lr=0,05, batch=128, 15 epoch, seed=42</a:t>
+              <a:t>SGD thuần, lr=0.05, batch=128, 15 epoch, seed=42</a:t>
             </a:r>
             <a:endParaRPr lang="en-US" sz="1600" dirty="0"/>
           </a:p>
@@ -12312,7 +12312,7 @@
                 <a:ea typeface="Calibri" pitchFamily="34" charset="-122"/>
                 <a:cs typeface="Calibri" pitchFamily="34" charset="-120"/>
               </a:rPr>
-              <a:t>Chạy đúng ví dụ 2 lớp ở Slide 9 (x=1,1 → L=0,25205)</a:t>
+              <a:t>Chạy đúng ví dụ 2 lớp ở Slide 9 (x=(1,1) → L=0.25205)</a:t>
             </a:r>
             <a:endParaRPr lang="en-US" sz="1650" dirty="0"/>
           </a:p>
@@ -12333,7 +12333,7 @@
                 <a:ea typeface="Calibri" pitchFamily="34" charset="-122"/>
                 <a:cs typeface="Calibri" pitchFamily="34" charset="-120"/>
               </a:rPr>
-              <a:t>Đối chiếu PyTorch autograd: sai số tuyệt đối = 0,00e+00</a:t>
+              <a:t>Đối chiếu PyTorch autograd: sai số tuyệt đối = 0.00e+00</a:t>
             </a:r>
             <a:endParaRPr lang="en-US" sz="1650" dirty="0"/>
           </a:p>
@@ -12393,7 +12393,7 @@
                 <a:ea typeface="Cambria" pitchFamily="34" charset="-122"/>
                 <a:cs typeface="Cambria" pitchFamily="34" charset="-120"/>
               </a:rPr>
-              <a:t>0,25205</a:t>
+              <a:t>0.25205</a:t>
             </a:r>
             <a:endParaRPr lang="en-US" sz="3200" dirty="0"/>
           </a:p>
@@ -12471,7 +12471,7 @@
                 <a:ea typeface="Cambria" pitchFamily="34" charset="-122"/>
                 <a:cs typeface="Cambria" pitchFamily="34" charset="-120"/>
               </a:rPr>
-              <a:t>0,00e+00</a:t>
+              <a:t>0.00e+00</a:t>
             </a:r>
             <a:endParaRPr lang="en-US" sz="3200" dirty="0"/>
           </a:p>
@@ -12627,7 +12627,7 @@
                 <a:ea typeface="Calibri" pitchFamily="34" charset="-122"/>
                 <a:cs typeface="Calibri" pitchFamily="34" charset="-120"/>
               </a:rPr>
-              <a:t>* 0,00e+00 = đã chạm giới hạn biểu diễn số thực float64 (machine precision ε≈2,2×10⁻¹⁶) — không phải trùng hợp, mà là bằng chứng hai phép tính TOÁN HỌC GIỐNG HỆT NHAU.</a:t>
+              <a:t>* 0.00e+00 = đã chạm giới hạn biểu diễn số thực float64 (machine precision ε≈2.2×10⁻¹⁶) — không phải trùng hợp, mà là bằng chứng hai phép tính TOÁN HỌC GIỐNG HỆT NHAU.</a:t>
             </a:r>
             <a:endParaRPr lang="en-US" sz="1050" dirty="0"/>
           </a:p>
@@ -13859,7 +13859,7 @@
                 <a:ea typeface="Calibri" pitchFamily="34" charset="-122"/>
                 <a:cs typeface="Calibri" pitchFamily="34" charset="-120"/>
               </a:rPr>
-              <a:t>…nhưng VẪN suy giảm — vì σ′(z)≤0,25 bất kể weight scale</a:t>
+              <a:t>…nhưng VẪN suy giảm — vì σ′(z)≤0.25 bất kể weight scale</a:t>
             </a:r>
             <a:endParaRPr lang="en-US" sz="1450" dirty="0"/>
           </a:p>
@@ -14551,7 +14551,7 @@
                             <a:srgbClr val="1A2238"/>
                           </a:solidFill>
                         </a:rPr>
-                        <a:t>0,100</a:t>
+                        <a:t>0.100</a:t>
                       </a:r>
                       <a:endParaRPr lang="en-US" sz="1300" dirty="0"/>
                     </a:p>
@@ -14612,7 +14612,7 @@
                             <a:srgbClr val="1A2238"/>
                           </a:solidFill>
                         </a:rPr>
-                        <a:t>0,100</a:t>
+                        <a:t>0.100</a:t>
                       </a:r>
                       <a:endParaRPr lang="en-US" sz="1300" dirty="0"/>
                     </a:p>
@@ -14673,7 +14673,7 @@
                             <a:srgbClr val="1A2238"/>
                           </a:solidFill>
                         </a:rPr>
-                        <a:t>0,100</a:t>
+                        <a:t>0.100</a:t>
                       </a:r>
                       <a:endParaRPr lang="en-US" sz="1300" dirty="0"/>
                     </a:p>
@@ -14734,7 +14734,7 @@
                             <a:srgbClr val="1A2238"/>
                           </a:solidFill>
                         </a:rPr>
-                        <a:t>0,100</a:t>
+                        <a:t>0.100</a:t>
                       </a:r>
                       <a:endParaRPr lang="en-US" sz="1300" dirty="0"/>
                     </a:p>
@@ -14858,7 +14858,7 @@
                             <a:srgbClr val="1A2238"/>
                           </a:solidFill>
                         </a:rPr>
-                        <a:t>0,100</a:t>
+                        <a:t>0.100</a:t>
                       </a:r>
                       <a:endParaRPr lang="en-US" sz="1300" dirty="0"/>
                     </a:p>
@@ -14919,7 +14919,7 @@
                             <a:srgbClr val="1A2238"/>
                           </a:solidFill>
                         </a:rPr>
-                        <a:t>0,100</a:t>
+                        <a:t>0.100</a:t>
                       </a:r>
                       <a:endParaRPr lang="en-US" sz="1300" dirty="0"/>
                     </a:p>
@@ -14980,7 +14980,7 @@
                             <a:srgbClr val="1A2238"/>
                           </a:solidFill>
                         </a:rPr>
-                        <a:t>0,100</a:t>
+                        <a:t>0.100</a:t>
                       </a:r>
                       <a:endParaRPr lang="en-US" sz="1300" dirty="0"/>
                     </a:p>
@@ -15041,7 +15041,7 @@
                             <a:srgbClr val="1A2238"/>
                           </a:solidFill>
                         </a:rPr>
-                        <a:t>0,100</a:t>
+                        <a:t>0.100</a:t>
                       </a:r>
                       <a:endParaRPr lang="en-US" sz="1300" dirty="0"/>
                     </a:p>
@@ -15165,7 +15165,7 @@
                             <a:srgbClr val="1A2238"/>
                           </a:solidFill>
                         </a:rPr>
-                        <a:t>0,100</a:t>
+                        <a:t>0.100</a:t>
                       </a:r>
                       <a:endParaRPr lang="en-US" sz="1300" dirty="0"/>
                     </a:p>
@@ -15226,7 +15226,7 @@
                             <a:srgbClr val="1A2238"/>
                           </a:solidFill>
                         </a:rPr>
-                        <a:t>0,689</a:t>
+                        <a:t>0.689</a:t>
                       </a:r>
                       <a:endParaRPr lang="en-US" sz="1300" dirty="0"/>
                     </a:p>
@@ -15287,7 +15287,7 @@
                             <a:srgbClr val="1A2238"/>
                           </a:solidFill>
                         </a:rPr>
-                        <a:t>0,638</a:t>
+                        <a:t>0.638</a:t>
                       </a:r>
                       <a:endParaRPr lang="en-US" sz="1300" dirty="0"/>
                     </a:p>
@@ -15348,7 +15348,7 @@
                             <a:srgbClr val="1A2238"/>
                           </a:solidFill>
                         </a:rPr>
-                        <a:t>0,648</a:t>
+                        <a:t>0.648</a:t>
                       </a:r>
                       <a:endParaRPr lang="en-US" sz="1300" dirty="0"/>
                     </a:p>
@@ -15472,7 +15472,7 @@
                             <a:srgbClr val="1A2238"/>
                           </a:solidFill>
                         </a:rPr>
-                        <a:t>0,100</a:t>
+                        <a:t>0.100</a:t>
                       </a:r>
                       <a:endParaRPr lang="en-US" sz="1300" dirty="0"/>
                     </a:p>
@@ -15533,7 +15533,7 @@
                             <a:srgbClr val="1A2238"/>
                           </a:solidFill>
                         </a:rPr>
-                        <a:t>0,692</a:t>
+                        <a:t>0.692</a:t>
                       </a:r>
                       <a:endParaRPr lang="en-US" sz="1300" dirty="0"/>
                     </a:p>
@@ -15594,7 +15594,7 @@
                             <a:srgbClr val="1A2238"/>
                           </a:solidFill>
                         </a:rPr>
-                        <a:t>0,674</a:t>
+                        <a:t>0.674</a:t>
                       </a:r>
                       <a:endParaRPr lang="en-US" sz="1300" dirty="0"/>
                     </a:p>
@@ -15655,7 +15655,7 @@
                             <a:srgbClr val="1A2238"/>
                           </a:solidFill>
                         </a:rPr>
-                        <a:t>0,682</a:t>
+                        <a:t>0.682</a:t>
                       </a:r>
                       <a:endParaRPr lang="en-US" sz="1300" dirty="0"/>
                     </a:p>
@@ -15779,7 +15779,7 @@
                             <a:srgbClr val="1A2238"/>
                           </a:solidFill>
                         </a:rPr>
-                        <a:t>0,100</a:t>
+                        <a:t>0.100</a:t>
                       </a:r>
                       <a:endParaRPr lang="en-US" sz="1300" dirty="0"/>
                     </a:p>
@@ -15840,7 +15840,7 @@
                             <a:srgbClr val="1A2238"/>
                           </a:solidFill>
                         </a:rPr>
-                        <a:t>0,694</a:t>
+                        <a:t>0.694</a:t>
                       </a:r>
                       <a:endParaRPr lang="en-US" sz="1300" dirty="0"/>
                     </a:p>
@@ -15901,7 +15901,7 @@
                             <a:srgbClr val="1A2238"/>
                           </a:solidFill>
                         </a:rPr>
-                        <a:t>0,667</a:t>
+                        <a:t>0.667</a:t>
                       </a:r>
                       <a:endParaRPr lang="en-US" sz="1300" dirty="0"/>
                     </a:p>
@@ -15962,7 +15962,7 @@
                             <a:srgbClr val="1A2238"/>
                           </a:solidFill>
                         </a:rPr>
-                        <a:t>0,634</a:t>
+                        <a:t>0.634</a:t>
                       </a:r>
                       <a:endParaRPr lang="en-US" sz="1300" dirty="0"/>
                     </a:p>
@@ -16470,7 +16470,7 @@
                 <a:ea typeface="Calibri" pitchFamily="34" charset="-122"/>
                 <a:cs typeface="Calibri" pitchFamily="34" charset="-120"/>
               </a:rPr>
-              <a:t>σ′(z) ≤ 0,25 LUÔN đúng, bất kể weight scale</a:t>
+              <a:t>σ′(z) ≤ 0.25 LUÔN đúng, bất kể weight scale</a:t>
             </a:r>
             <a:endParaRPr lang="en-US" sz="1350" dirty="0"/>
           </a:p>
@@ -16491,7 +16491,7 @@
                 <a:ea typeface="Calibri" pitchFamily="34" charset="-122"/>
                 <a:cs typeface="Calibri" pitchFamily="34" charset="-120"/>
               </a:rPr>
-              <a:t>6 lớp ⇒ trần suy giảm: 0,25⁶ ≈ 2,4×10⁻⁴</a:t>
+              <a:t>6 lớp ⇒ trần suy giảm: 0.25⁶ ≈ 2.4×10⁻⁴</a:t>
             </a:r>
             <a:endParaRPr lang="en-US" sz="1350" dirty="0"/>
           </a:p>
@@ -16512,7 +16512,7 @@
                 <a:ea typeface="Calibri" pitchFamily="34" charset="-122"/>
                 <a:cs typeface="Calibri" pitchFamily="34" charset="-120"/>
               </a:rPr>
-              <a:t>Gradient lớp 1 ≈ 1,6×10⁻⁵ — khác 0 nhưng quá nhỏ</a:t>
+              <a:t>Gradient lớp 1 ≈ 1.6×10⁻⁵ — khác 0 nhưng quá nhỏ</a:t>
             </a:r>
             <a:endParaRPr lang="en-US" sz="1350" dirty="0"/>
           </a:p>
@@ -16628,7 +16628,7 @@
                 <a:ea typeface="Calibri" pitchFamily="34" charset="-122"/>
                 <a:cs typeface="Calibri" pitchFamily="34" charset="-120"/>
               </a:rPr>
-              <a:t>σ(z)∈(0,1) không đối xứng quanh 0 (E[σ]≈0,5)</a:t>
+              <a:t>σ(z)∈(0,1) không đối xứng quanh 0 (E[σ]≈0.5)</a:t>
             </a:r>
             <a:endParaRPr lang="en-US" sz="1350" dirty="0"/>
           </a:p>
@@ -17903,14 +17903,87 @@
       </p:sp>
       <p:sp>
         <p:nvSpPr>
-          <p:cNvPr id="4" name="Text 2"/>
+          <p:cNvPr id="4" name="Shape 2"/>
+          <p:cNvSpPr/>
+          <p:nvPr/>
+        </p:nvSpPr>
+        <p:spPr>
+          <a:xfrm>
+            <a:off x="640080" y="1920240"/>
+            <a:ext cx="5120640" cy="4114800"/>
+          </a:xfrm>
+          <a:prstGeom prst="roundRect">
+            <a:avLst>
+              <a:gd name="adj" fmla="val 1778"/>
+            </a:avLst>
+          </a:prstGeom>
+          <a:solidFill>
+            <a:srgbClr val="EAF0FB"/>
+          </a:solidFill>
+          <a:ln w="12700">
+            <a:solidFill>
+              <a:srgbClr val="285AB4"/>
+            </a:solidFill>
+            <a:prstDash val="solid"/>
+          </a:ln>
+          <a:effectLst>
+            <a:outerShdw sx="100000" sy="100000" kx="0" ky="0" algn="bl" rotWithShape="0" blurRad="114300" dist="38100" dir="5400000">
+              <a:srgbClr val="1A1A2E">
+                <a:alpha val="20000"/>
+              </a:srgbClr>
+            </a:outerShdw>
+          </a:effectLst>
+        </p:spPr>
+      </p:sp>
+      <p:sp>
+        <p:nvSpPr>
+          <p:cNvPr id="5" name="Text 3"/>
           <p:cNvSpPr txBox="1"/>
           <p:nvPr/>
         </p:nvSpPr>
         <p:spPr>
           <a:xfrm>
-            <a:off x="640080" y="2011680"/>
-            <a:ext cx="10911535" cy="3566160"/>
+            <a:off x="914400" y="2121408"/>
+            <a:ext cx="4572000" cy="594360"/>
+          </a:xfrm>
+          <a:prstGeom prst="rect">
+            <a:avLst/>
+          </a:prstGeom>
+          <a:noFill/>
+          <a:ln/>
+        </p:spPr>
+        <p:txBody>
+          <a:bodyPr wrap="square" lIns="0" tIns="0" rIns="0" bIns="0" rtlCol="0" anchor="ctr"/>
+          <a:lstStyle/>
+          <a:p>
+            <a:pPr indent="0" marL="0">
+              <a:buNone/>
+            </a:pPr>
+            <a:r>
+              <a:rPr lang="en-US" sz="1450" b="1" dirty="0">
+                <a:solidFill>
+                  <a:srgbClr val="285AB4"/>
+                </a:solidFill>
+                <a:latin typeface="Cambria" pitchFamily="34" charset="0"/>
+                <a:ea typeface="Cambria" pitchFamily="34" charset="-122"/>
+                <a:cs typeface="Cambria" pitchFamily="34" charset="-120"/>
+              </a:rPr>
+              <a:t>Lựa chọn phương pháp luận có chủ đích</a:t>
+            </a:r>
+            <a:endParaRPr lang="en-US" sz="1450" dirty="0"/>
+          </a:p>
+        </p:txBody>
+      </p:sp>
+      <p:sp>
+        <p:nvSpPr>
+          <p:cNvPr id="6" name="Text 4"/>
+          <p:cNvSpPr txBox="1"/>
+          <p:nvPr/>
+        </p:nvSpPr>
+        <p:spPr>
+          <a:xfrm>
+            <a:off x="914400" y="2834640"/>
+            <a:ext cx="4572000" cy="3063240"/>
           </a:xfrm>
           <a:prstGeom prst="rect">
             <a:avLst/>
@@ -17924,13 +17997,13 @@
           <a:p>
             <a:pPr marL="228600" indent="-228600">
               <a:spcAft>
-                <a:spcPts val="1200"/>
+                <a:spcPts val="1000"/>
               </a:spcAft>
               <a:buSzPct val="100000"/>
               <a:buChar char="▪"/>
             </a:pPr>
             <a:r>
-              <a:rPr lang="en-US" sz="1650" dirty="0">
+              <a:rPr lang="en-US" sz="1300" dirty="0">
                 <a:solidFill>
                   <a:srgbClr val="1A2238"/>
                 </a:solidFill>
@@ -17938,20 +18011,20 @@
                 <a:ea typeface="Calibri" pitchFamily="34" charset="-122"/>
                 <a:cs typeface="Calibri" pitchFamily="34" charset="-120"/>
               </a:rPr>
-              <a:t>Subset nhỏ (5.000/1.000/2.000), 15 epoch, 1 seed duy nhất — không đại diện quy mô lớn</a:t>
-            </a:r>
-            <a:endParaRPr lang="en-US" sz="1650" dirty="0"/>
+              <a:t>Không BatchNorm/Dropout/LR schedule — cô lập đúng 1 biến đang khảo sát: initialization</a:t>
+            </a:r>
+            <a:endParaRPr lang="en-US" sz="1300" dirty="0"/>
           </a:p>
           <a:p>
             <a:pPr marL="228600" indent="-228600">
               <a:spcAft>
-                <a:spcPts val="1200"/>
+                <a:spcPts val="1000"/>
               </a:spcAft>
               <a:buSzPct val="100000"/>
               <a:buChar char="▪"/>
             </a:pPr>
             <a:r>
-              <a:rPr lang="en-US" sz="1650" dirty="0">
+              <a:rPr lang="en-US" sz="1300" dirty="0">
                 <a:solidFill>
                   <a:srgbClr val="1A2238"/>
                 </a:solidFill>
@@ -17959,20 +18032,20 @@
                 <a:ea typeface="Calibri" pitchFamily="34" charset="-122"/>
                 <a:cs typeface="Calibri" pitchFamily="34" charset="-120"/>
               </a:rPr>
-              <a:t>SGD thuần, không tinh chỉnh learning rate riêng cho từng cấu hình</a:t>
-            </a:r>
-            <a:endParaRPr lang="en-US" sz="1650" dirty="0"/>
+              <a:t>Kiến trúc, optimizer, seed GIỮ NGUYÊN giữa cả 20 cấu hình (fair experiment)</a:t>
+            </a:r>
+            <a:endParaRPr lang="en-US" sz="1300" dirty="0"/>
           </a:p>
           <a:p>
             <a:pPr marL="228600" indent="-228600">
               <a:spcAft>
-                <a:spcPts val="1200"/>
+                <a:spcPts val="1000"/>
               </a:spcAft>
               <a:buSzPct val="100000"/>
               <a:buChar char="▪"/>
             </a:pPr>
             <a:r>
-              <a:rPr lang="en-US" sz="1650" dirty="0">
+              <a:rPr lang="en-US" sz="1300" dirty="0">
                 <a:solidFill>
                   <a:srgbClr val="1A2238"/>
                 </a:solidFill>
@@ -17980,20 +18053,115 @@
                 <a:ea typeface="Calibri" pitchFamily="34" charset="-122"/>
                 <a:cs typeface="Calibri" pitchFamily="34" charset="-120"/>
               </a:rPr>
-              <a:t>Không BatchNorm/Dropout/LR schedule (cố ý, để cô lập biến initialization)</a:t>
-            </a:r>
-            <a:endParaRPr lang="en-US" sz="1650" dirty="0"/>
-          </a:p>
+              <a:t>Subset nhỏ, chạy nhanh trên CPU — ưu tiên tái lập dễ dàng trên phần cứng phổ thông</a:t>
+            </a:r>
+            <a:endParaRPr lang="en-US" sz="1300" dirty="0"/>
+          </a:p>
+        </p:txBody>
+      </p:sp>
+      <p:sp>
+        <p:nvSpPr>
+          <p:cNvPr id="7" name="Shape 5"/>
+          <p:cNvSpPr/>
+          <p:nvPr/>
+        </p:nvSpPr>
+        <p:spPr>
+          <a:xfrm>
+            <a:off x="6430975" y="1920240"/>
+            <a:ext cx="5120640" cy="4114800"/>
+          </a:xfrm>
+          <a:prstGeom prst="roundRect">
+            <a:avLst>
+              <a:gd name="adj" fmla="val 1778"/>
+            </a:avLst>
+          </a:prstGeom>
+          <a:solidFill>
+            <a:srgbClr val="FBEEEC"/>
+          </a:solidFill>
+          <a:ln w="12700">
+            <a:solidFill>
+              <a:srgbClr val="BE3C32"/>
+            </a:solidFill>
+            <a:prstDash val="solid"/>
+          </a:ln>
+          <a:effectLst>
+            <a:outerShdw sx="100000" sy="100000" kx="0" ky="0" algn="bl" rotWithShape="0" blurRad="114300" dist="38100" dir="5400000">
+              <a:srgbClr val="1A1A2E">
+                <a:alpha val="20000"/>
+              </a:srgbClr>
+            </a:outerShdw>
+          </a:effectLst>
+        </p:spPr>
+      </p:sp>
+      <p:sp>
+        <p:nvSpPr>
+          <p:cNvPr id="8" name="Text 6"/>
+          <p:cNvSpPr txBox="1"/>
+          <p:nvPr/>
+        </p:nvSpPr>
+        <p:spPr>
+          <a:xfrm>
+            <a:off x="6705295" y="2121408"/>
+            <a:ext cx="4572000" cy="594360"/>
+          </a:xfrm>
+          <a:prstGeom prst="rect">
+            <a:avLst/>
+          </a:prstGeom>
+          <a:noFill/>
+          <a:ln/>
+        </p:spPr>
+        <p:txBody>
+          <a:bodyPr wrap="square" lIns="0" tIns="0" rIns="0" bIns="0" rtlCol="0" anchor="ctr"/>
+          <a:lstStyle/>
+          <a:p>
+            <a:pPr indent="0" marL="0">
+              <a:buNone/>
+            </a:pPr>
+            <a:r>
+              <a:rPr lang="en-US" sz="1450" b="1" dirty="0">
+                <a:solidFill>
+                  <a:srgbClr val="BE3C32"/>
+                </a:solidFill>
+                <a:latin typeface="Cambria" pitchFamily="34" charset="0"/>
+                <a:ea typeface="Cambria" pitchFamily="34" charset="-122"/>
+                <a:cs typeface="Cambria" pitchFamily="34" charset="-120"/>
+              </a:rPr>
+              <a:t>Giới hạn thực nghiệm &amp; hướng mở rộng</a:t>
+            </a:r>
+            <a:endParaRPr lang="en-US" sz="1450" dirty="0"/>
+          </a:p>
+        </p:txBody>
+      </p:sp>
+      <p:sp>
+        <p:nvSpPr>
+          <p:cNvPr id="9" name="Text 7"/>
+          <p:cNvSpPr txBox="1"/>
+          <p:nvPr/>
+        </p:nvSpPr>
+        <p:spPr>
+          <a:xfrm>
+            <a:off x="6705295" y="2834640"/>
+            <a:ext cx="4572000" cy="3063240"/>
+          </a:xfrm>
+          <a:prstGeom prst="rect">
+            <a:avLst/>
+          </a:prstGeom>
+          <a:noFill/>
+          <a:ln/>
+        </p:spPr>
+        <p:txBody>
+          <a:bodyPr wrap="square" lIns="0" tIns="0" rIns="0" bIns="0" rtlCol="0" anchor="t"/>
+          <a:lstStyle/>
           <a:p>
             <a:pPr marL="228600" indent="-228600">
               <a:spcAft>
-                <a:spcPts val="1200"/>
+                <a:spcPts val="800"/>
               </a:spcAft>
               <a:buSzPct val="100000"/>
               <a:buChar char="▪"/>
             </a:pPr>
             <a:r>
-              <a:rPr lang="en-US" sz="1650" dirty="0">
+              <a:rPr lang="en-US" sz="1200" dirty="0">
                 <a:solidFill>
                   <a:srgbClr val="1A2238"/>
                 </a:solidFill>
@@ -18001,45 +18169,108 @@
                 <a:ea typeface="Calibri" pitchFamily="34" charset="-122"/>
                 <a:cs typeface="Calibri" pitchFamily="34" charset="-120"/>
               </a:rPr>
-              <a:t>Validation dao động mạnh do tập val chỉ 1.000 mẫu</a:t>
-            </a:r>
-            <a:endParaRPr lang="en-US" sz="1650" dirty="0"/>
-          </a:p>
-        </p:txBody>
-      </p:sp>
-      <p:sp>
-        <p:nvSpPr>
-          <p:cNvPr id="5" name="Text 3"/>
-          <p:cNvSpPr txBox="1"/>
-          <p:nvPr/>
-        </p:nvSpPr>
-        <p:spPr>
-          <a:xfrm>
-            <a:off x="11185855" y="6446520"/>
-            <a:ext cx="731520" cy="274320"/>
-          </a:xfrm>
-          <a:prstGeom prst="rect">
-            <a:avLst/>
-          </a:prstGeom>
-          <a:noFill/>
-          <a:ln/>
-        </p:spPr>
-        <p:txBody>
-          <a:bodyPr wrap="square" lIns="0" tIns="0" rIns="0" bIns="0" rtlCol="0" anchor="ctr"/>
-          <a:lstStyle/>
-          <a:p>
-            <a:pPr algn="r" indent="0" marL="0">
-              <a:buNone/>
-            </a:pPr>
-            <a:r>
-              <a:rPr lang="en-US" sz="900" dirty="0">
-                <a:solidFill>
-                  <a:srgbClr val="5B6478"/>
+              <a:t>1 seed duy nhất — chênh lệch nhỏ (vd. Xavier vs. He) không có ý nghĩa thống kê</a:t>
+            </a:r>
+            <a:endParaRPr lang="en-US" sz="1200" dirty="0"/>
+          </a:p>
+          <a:p>
+            <a:pPr marL="228600" indent="-228600">
+              <a:spcAft>
+                <a:spcPts val="800"/>
+              </a:spcAft>
+              <a:buSzPct val="100000"/>
+              <a:buChar char="▪"/>
+            </a:pPr>
+            <a:r>
+              <a:rPr lang="en-US" sz="1200" dirty="0">
+                <a:solidFill>
+                  <a:srgbClr val="1A2238"/>
                 </a:solidFill>
                 <a:latin typeface="Calibri" pitchFamily="34" charset="0"/>
                 <a:ea typeface="Calibri" pitchFamily="34" charset="-122"/>
                 <a:cs typeface="Calibri" pitchFamily="34" charset="-120"/>
               </a:rPr>
+              <a:t>Không tinh chỉnh learning rate riêng cho từng cấu hình — có thể chưa tối ưu cho một vài scheme</a:t>
+            </a:r>
+            <a:endParaRPr lang="en-US" sz="1200" dirty="0"/>
+          </a:p>
+          <a:p>
+            <a:pPr marL="228600" indent="-228600">
+              <a:spcAft>
+                <a:spcPts val="800"/>
+              </a:spcAft>
+              <a:buSzPct val="100000"/>
+              <a:buChar char="▪"/>
+            </a:pPr>
+            <a:r>
+              <a:rPr lang="en-US" sz="1200" dirty="0">
+                <a:solidFill>
+                  <a:srgbClr val="1A2238"/>
+                </a:solidFill>
+                <a:latin typeface="Calibri" pitchFamily="34" charset="0"/>
+                <a:ea typeface="Calibri" pitchFamily="34" charset="-122"/>
+                <a:cs typeface="Calibri" pitchFamily="34" charset="-120"/>
+              </a:rPr>
+              <a:t>Val chỉ 1,000 mẫu — dao động cao; hướng mở rộng: nhiều seed + k-fold cross-validation</a:t>
+            </a:r>
+            <a:endParaRPr lang="en-US" sz="1200" dirty="0"/>
+          </a:p>
+          <a:p>
+            <a:pPr marL="228600" indent="-228600">
+              <a:spcAft>
+                <a:spcPts val="800"/>
+              </a:spcAft>
+              <a:buSzPct val="100000"/>
+              <a:buChar char="▪"/>
+            </a:pPr>
+            <a:r>
+              <a:rPr lang="en-US" sz="1200" dirty="0">
+                <a:solidFill>
+                  <a:srgbClr val="1A2238"/>
+                </a:solidFill>
+                <a:latin typeface="Calibri" pitchFamily="34" charset="0"/>
+                <a:ea typeface="Calibri" pitchFamily="34" charset="-122"/>
+                <a:cs typeface="Calibri" pitchFamily="34" charset="-120"/>
+              </a:rPr>
+              <a:t>Subset 5,000/1,000/2,000 mẫu — chưa đại diện quy mô full dataset/production</a:t>
+            </a:r>
+            <a:endParaRPr lang="en-US" sz="1200" dirty="0"/>
+          </a:p>
+        </p:txBody>
+      </p:sp>
+      <p:sp>
+        <p:nvSpPr>
+          <p:cNvPr id="10" name="Text 8"/>
+          <p:cNvSpPr txBox="1"/>
+          <p:nvPr/>
+        </p:nvSpPr>
+        <p:spPr>
+          <a:xfrm>
+            <a:off x="11185855" y="6446520"/>
+            <a:ext cx="731520" cy="274320"/>
+          </a:xfrm>
+          <a:prstGeom prst="rect">
+            <a:avLst/>
+          </a:prstGeom>
+          <a:noFill/>
+          <a:ln/>
+        </p:spPr>
+        <p:txBody>
+          <a:bodyPr wrap="square" lIns="0" tIns="0" rIns="0" bIns="0" rtlCol="0" anchor="ctr"/>
+          <a:lstStyle/>
+          <a:p>
+            <a:pPr algn="r" indent="0" marL="0">
+              <a:buNone/>
+            </a:pPr>
+            <a:r>
+              <a:rPr lang="en-US" sz="900" dirty="0">
+                <a:solidFill>
+                  <a:srgbClr val="5B6478"/>
+                </a:solidFill>
+                <a:latin typeface="Calibri" pitchFamily="34" charset="0"/>
+                <a:ea typeface="Calibri" pitchFamily="34" charset="-122"/>
+                <a:cs typeface="Calibri" pitchFamily="34" charset="-120"/>
+              </a:rPr>
               <a:t>27/29</a:t>
             </a:r>
             <a:endParaRPr lang="en-US" sz="900" dirty="0"/>
@@ -18048,7 +18279,7 @@
       </p:sp>
       <p:sp>
         <p:nvSpPr>
-          <p:cNvPr id="6" name="Shape 4"/>
+          <p:cNvPr id="11" name="Shape 9"/>
           <p:cNvSpPr/>
           <p:nvPr/>
         </p:nvSpPr>
@@ -18068,7 +18299,7 @@
       </p:sp>
       <p:sp>
         <p:nvSpPr>
-          <p:cNvPr id="7" name="Shape 5"/>
+          <p:cNvPr id="12" name="Shape 10"/>
           <p:cNvSpPr/>
           <p:nvPr/>
         </p:nvSpPr>
@@ -18088,7 +18319,7 @@
       </p:sp>
       <p:sp>
         <p:nvSpPr>
-          <p:cNvPr id="8" name="Shape 6"/>
+          <p:cNvPr id="13" name="Shape 11"/>
           <p:cNvSpPr/>
           <p:nvPr/>
         </p:nvSpPr>
@@ -18108,7 +18339,7 @@
       </p:sp>
       <p:sp>
         <p:nvSpPr>
-          <p:cNvPr id="9" name="Shape 7"/>
+          <p:cNvPr id="14" name="Shape 12"/>
           <p:cNvSpPr/>
           <p:nvPr/>
         </p:nvSpPr>
@@ -18128,7 +18359,7 @@
       </p:sp>
       <p:sp>
         <p:nvSpPr>
-          <p:cNvPr id="10" name="Text 8"/>
+          <p:cNvPr id="15" name="Text 13"/>
           <p:cNvSpPr txBox="1"/>
           <p:nvPr/>
         </p:nvSpPr>
@@ -18659,8 +18890,8 @@
         </p:nvSpPr>
         <p:spPr>
           <a:xfrm>
-            <a:off x="640080" y="1737360"/>
-            <a:ext cx="10911535" cy="4572000"/>
+            <a:off x="640080" y="1691640"/>
+            <a:ext cx="10911535" cy="4709160"/>
           </a:xfrm>
           <a:prstGeom prst="rect">
             <a:avLst/>
@@ -18672,15 +18903,14 @@
           <a:bodyPr wrap="square" lIns="0" tIns="0" rIns="0" bIns="0" rtlCol="0" anchor="t"/>
           <a:lstStyle/>
           <a:p>
-            <a:pPr marL="203200" indent="-203200">
+            <a:pPr indent="0" marL="0">
               <a:spcAft>
-                <a:spcPts val="800"/>
+                <a:spcPts val="650"/>
               </a:spcAft>
-              <a:buSzPct val="100000"/>
-              <a:buChar char="•"/>
-            </a:pPr>
-            <a:r>
-              <a:rPr lang="en-US" sz="1250" dirty="0">
+              <a:buNone/>
+            </a:pPr>
+            <a:r>
+              <a:rPr lang="en-US" sz="1100" dirty="0">
                 <a:solidFill>
                   <a:srgbClr val="D8E0EF"/>
                 </a:solidFill>
@@ -18688,20 +18918,19 @@
                 <a:ea typeface="Calibri" pitchFamily="34" charset="-122"/>
                 <a:cs typeface="Calibri" pitchFamily="34" charset="-120"/>
               </a:rPr>
-              <a:t>Rumelhart, Hinton &amp; Williams (1986). Learning representations by back-propagating errors. Nature, 323:533–536.</a:t>
-            </a:r>
-            <a:endParaRPr lang="en-US" sz="1250" dirty="0"/>
-          </a:p>
-          <a:p>
-            <a:pPr marL="203200" indent="-203200">
+              <a:t>[1] Rumelhart, Hinton &amp; Williams (1986). Learning representations by back-propagating errors. Nature, 323(6088):533–536. DOI: 10.1038/323533a0.</a:t>
+            </a:r>
+            <a:endParaRPr lang="en-US" sz="1100" dirty="0"/>
+          </a:p>
+          <a:p>
+            <a:pPr indent="0" marL="0">
               <a:spcAft>
-                <a:spcPts val="800"/>
+                <a:spcPts val="650"/>
               </a:spcAft>
-              <a:buSzPct val="100000"/>
-              <a:buChar char="•"/>
-            </a:pPr>
-            <a:r>
-              <a:rPr lang="en-US" sz="1250" dirty="0">
+              <a:buNone/>
+            </a:pPr>
+            <a:r>
+              <a:rPr lang="en-US" sz="1100" dirty="0">
                 <a:solidFill>
                   <a:srgbClr val="D8E0EF"/>
                 </a:solidFill>
@@ -18709,20 +18938,19 @@
                 <a:ea typeface="Calibri" pitchFamily="34" charset="-122"/>
                 <a:cs typeface="Calibri" pitchFamily="34" charset="-120"/>
               </a:rPr>
-              <a:t>Glorot &amp; Bengio (2010). Understanding the difficulty of training deep feedforward neural networks. AISTATS.</a:t>
-            </a:r>
-            <a:endParaRPr lang="en-US" sz="1250" dirty="0"/>
-          </a:p>
-          <a:p>
-            <a:pPr marL="203200" indent="-203200">
+              <a:t>[2] LeCun, Bottou, Orr &amp; Müller (1998/2012). Efficient BackProp. In Neural Networks: Tricks of the Trade, 2nd ed., LNCS vol. 7700. Springer.</a:t>
+            </a:r>
+            <a:endParaRPr lang="en-US" sz="1100" dirty="0"/>
+          </a:p>
+          <a:p>
+            <a:pPr indent="0" marL="0">
               <a:spcAft>
-                <a:spcPts val="800"/>
+                <a:spcPts val="650"/>
               </a:spcAft>
-              <a:buSzPct val="100000"/>
-              <a:buChar char="•"/>
-            </a:pPr>
-            <a:r>
-              <a:rPr lang="en-US" sz="1250" dirty="0">
+              <a:buNone/>
+            </a:pPr>
+            <a:r>
+              <a:rPr lang="en-US" sz="1100" dirty="0">
                 <a:solidFill>
                   <a:srgbClr val="D8E0EF"/>
                 </a:solidFill>
@@ -18730,20 +18958,19 @@
                 <a:ea typeface="Calibri" pitchFamily="34" charset="-122"/>
                 <a:cs typeface="Calibri" pitchFamily="34" charset="-120"/>
               </a:rPr>
-              <a:t>He, Zhang, Ren &amp; Sun (2015). Delving Deep into Rectifiers. ICCV. arXiv:1502.01852.</a:t>
-            </a:r>
-            <a:endParaRPr lang="en-US" sz="1250" dirty="0"/>
-          </a:p>
-          <a:p>
-            <a:pPr marL="203200" indent="-203200">
+              <a:t>[3] Glorot &amp; Bengio (2010). Understanding the difficulty of training deep feedforward neural networks. AISTATS, vol. 9, pp. 249–256.</a:t>
+            </a:r>
+            <a:endParaRPr lang="en-US" sz="1100" dirty="0"/>
+          </a:p>
+          <a:p>
+            <a:pPr indent="0" marL="0">
               <a:spcAft>
-                <a:spcPts val="800"/>
+                <a:spcPts val="650"/>
               </a:spcAft>
-              <a:buSzPct val="100000"/>
-              <a:buChar char="•"/>
-            </a:pPr>
-            <a:r>
-              <a:rPr lang="en-US" sz="1250" dirty="0">
+              <a:buNone/>
+            </a:pPr>
+            <a:r>
+              <a:rPr lang="en-US" sz="1100" dirty="0">
                 <a:solidFill>
                   <a:srgbClr val="D8E0EF"/>
                 </a:solidFill>
@@ -18751,20 +18978,19 @@
                 <a:ea typeface="Calibri" pitchFamily="34" charset="-122"/>
                 <a:cs typeface="Calibri" pitchFamily="34" charset="-120"/>
               </a:rPr>
-              <a:t>LeCun, Bottou, Orr &amp; Müller (1998/2012). Efficient BackProp. Neural Networks: Tricks of the Trade.</a:t>
-            </a:r>
-            <a:endParaRPr lang="en-US" sz="1250" dirty="0"/>
-          </a:p>
-          <a:p>
-            <a:pPr marL="203200" indent="-203200">
+              <a:t>[4] He, Zhang, Ren &amp; Sun (2015). Delving Deep into Rectifiers. ICCV. arXiv:1502.01852.</a:t>
+            </a:r>
+            <a:endParaRPr lang="en-US" sz="1100" dirty="0"/>
+          </a:p>
+          <a:p>
+            <a:pPr indent="0" marL="0">
               <a:spcAft>
-                <a:spcPts val="800"/>
+                <a:spcPts val="650"/>
               </a:spcAft>
-              <a:buSzPct val="100000"/>
-              <a:buChar char="•"/>
-            </a:pPr>
-            <a:r>
-              <a:rPr lang="en-US" sz="1250" dirty="0">
+              <a:buNone/>
+            </a:pPr>
+            <a:r>
+              <a:rPr lang="en-US" sz="1100" dirty="0">
                 <a:solidFill>
                   <a:srgbClr val="D8E0EF"/>
                 </a:solidFill>
@@ -18772,20 +18998,19 @@
                 <a:ea typeface="Calibri" pitchFamily="34" charset="-122"/>
                 <a:cs typeface="Calibri" pitchFamily="34" charset="-120"/>
               </a:rPr>
-              <a:t>Goodfellow, Bengio &amp; Courville (2016). Deep Learning. MIT Press.</a:t>
-            </a:r>
-            <a:endParaRPr lang="en-US" sz="1250" dirty="0"/>
-          </a:p>
-          <a:p>
-            <a:pPr marL="203200" indent="-203200">
+              <a:t>[5] Bishop (2006). Pattern Recognition and Machine Learning. Springer.</a:t>
+            </a:r>
+            <a:endParaRPr lang="en-US" sz="1100" dirty="0"/>
+          </a:p>
+          <a:p>
+            <a:pPr indent="0" marL="0">
               <a:spcAft>
-                <a:spcPts val="800"/>
+                <a:spcPts val="650"/>
               </a:spcAft>
-              <a:buSzPct val="100000"/>
-              <a:buChar char="•"/>
-            </a:pPr>
-            <a:r>
-              <a:rPr lang="en-US" sz="1250" dirty="0">
+              <a:buNone/>
+            </a:pPr>
+            <a:r>
+              <a:rPr lang="en-US" sz="1100" dirty="0">
                 <a:solidFill>
                   <a:srgbClr val="D8E0EF"/>
                 </a:solidFill>
@@ -18793,20 +19018,19 @@
                 <a:ea typeface="Calibri" pitchFamily="34" charset="-122"/>
                 <a:cs typeface="Calibri" pitchFamily="34" charset="-120"/>
               </a:rPr>
-              <a:t>Bishop (2006). Pattern Recognition and Machine Learning. Springer.</a:t>
-            </a:r>
-            <a:endParaRPr lang="en-US" sz="1250" dirty="0"/>
-          </a:p>
-          <a:p>
-            <a:pPr marL="203200" indent="-203200">
+              <a:t>[6] Goodfellow, Bengio &amp; Courville (2016). Deep Learning. MIT Press.</a:t>
+            </a:r>
+            <a:endParaRPr lang="en-US" sz="1100" dirty="0"/>
+          </a:p>
+          <a:p>
+            <a:pPr indent="0" marL="0">
               <a:spcAft>
-                <a:spcPts val="800"/>
+                <a:spcPts val="650"/>
               </a:spcAft>
-              <a:buSzPct val="100000"/>
-              <a:buChar char="•"/>
-            </a:pPr>
-            <a:r>
-              <a:rPr lang="en-US" sz="1250" dirty="0">
+              <a:buNone/>
+            </a:pPr>
+            <a:r>
+              <a:rPr lang="en-US" sz="1100" dirty="0">
                 <a:solidFill>
                   <a:srgbClr val="D8E0EF"/>
                 </a:solidFill>
@@ -18814,20 +19038,19 @@
                 <a:ea typeface="Calibri" pitchFamily="34" charset="-122"/>
                 <a:cs typeface="Calibri" pitchFamily="34" charset="-120"/>
               </a:rPr>
-              <a:t>Kingma &amp; Ba (2015). Adam: A Method for Stochastic Optimization. ICLR. arXiv:1412.6980.</a:t>
-            </a:r>
-            <a:endParaRPr lang="en-US" sz="1250" dirty="0"/>
-          </a:p>
-          <a:p>
-            <a:pPr marL="203200" indent="-203200">
+              <a:t>[7] Kingma &amp; Ba (2015). Adam: A Method for Stochastic Optimization. ICLR. arXiv:1412.6980.</a:t>
+            </a:r>
+            <a:endParaRPr lang="en-US" sz="1100" dirty="0"/>
+          </a:p>
+          <a:p>
+            <a:pPr indent="0" marL="0">
               <a:spcAft>
-                <a:spcPts val="800"/>
+                <a:spcPts val="650"/>
               </a:spcAft>
-              <a:buSzPct val="100000"/>
-              <a:buChar char="•"/>
-            </a:pPr>
-            <a:r>
-              <a:rPr lang="en-US" sz="1250" dirty="0">
+              <a:buNone/>
+            </a:pPr>
+            <a:r>
+              <a:rPr lang="en-US" sz="1100" dirty="0">
                 <a:solidFill>
                   <a:srgbClr val="D8E0EF"/>
                 </a:solidFill>
@@ -18835,20 +19058,19 @@
                 <a:ea typeface="Calibri" pitchFamily="34" charset="-122"/>
                 <a:cs typeface="Calibri" pitchFamily="34" charset="-120"/>
               </a:rPr>
-              <a:t>Xiao, Rasul &amp; Vollgraf (2017). Fashion-MNIST. arXiv:1708.07747.</a:t>
-            </a:r>
-            <a:endParaRPr lang="en-US" sz="1250" dirty="0"/>
-          </a:p>
-          <a:p>
-            <a:pPr marL="203200" indent="-203200">
+              <a:t>[8] Clevert, Unterthiner &amp; Hochreiter (2016). Fast and Accurate Deep Network Learning by Exponential Linear Units (ELUs). ICLR. arXiv:1511.07289.</a:t>
+            </a:r>
+            <a:endParaRPr lang="en-US" sz="1100" dirty="0"/>
+          </a:p>
+          <a:p>
+            <a:pPr indent="0" marL="0">
               <a:spcAft>
-                <a:spcPts val="800"/>
+                <a:spcPts val="650"/>
               </a:spcAft>
-              <a:buSzPct val="100000"/>
-              <a:buChar char="•"/>
-            </a:pPr>
-            <a:r>
-              <a:rPr lang="en-US" sz="1250" dirty="0">
+              <a:buNone/>
+            </a:pPr>
+            <a:r>
+              <a:rPr lang="en-US" sz="1100" dirty="0">
                 <a:solidFill>
                   <a:srgbClr val="D8E0EF"/>
                 </a:solidFill>
@@ -18856,9 +19078,49 @@
                 <a:ea typeface="Calibri" pitchFamily="34" charset="-122"/>
                 <a:cs typeface="Calibri" pitchFamily="34" charset="-120"/>
               </a:rPr>
-              <a:t>Paszke et al. (2019). PyTorch: An Imperative Style, High-Performance Deep Learning Library. NeurIPS.</a:t>
-            </a:r>
-            <a:endParaRPr lang="en-US" sz="1250" dirty="0"/>
+              <a:t>[9] Klambauer, Unterthiner, Mayr &amp; Hochreiter (2017). Self-Normalizing Neural Networks. NeurIPS, vol. 30. arXiv:1706.02515.</a:t>
+            </a:r>
+            <a:endParaRPr lang="en-US" sz="1100" dirty="0"/>
+          </a:p>
+          <a:p>
+            <a:pPr indent="0" marL="0">
+              <a:spcAft>
+                <a:spcPts val="650"/>
+              </a:spcAft>
+              <a:buNone/>
+            </a:pPr>
+            <a:r>
+              <a:rPr lang="en-US" sz="1100" dirty="0">
+                <a:solidFill>
+                  <a:srgbClr val="D8E0EF"/>
+                </a:solidFill>
+                <a:latin typeface="Calibri" pitchFamily="34" charset="0"/>
+                <a:ea typeface="Calibri" pitchFamily="34" charset="-122"/>
+                <a:cs typeface="Calibri" pitchFamily="34" charset="-120"/>
+              </a:rPr>
+              <a:t>[10] Xiao, Rasul &amp; Vollgraf (2017). Fashion-MNIST. arXiv:1708.07747.</a:t>
+            </a:r>
+            <a:endParaRPr lang="en-US" sz="1100" dirty="0"/>
+          </a:p>
+          <a:p>
+            <a:pPr indent="0" marL="0">
+              <a:spcAft>
+                <a:spcPts val="650"/>
+              </a:spcAft>
+              <a:buNone/>
+            </a:pPr>
+            <a:r>
+              <a:rPr lang="en-US" sz="1100" dirty="0">
+                <a:solidFill>
+                  <a:srgbClr val="D8E0EF"/>
+                </a:solidFill>
+                <a:latin typeface="Calibri" pitchFamily="34" charset="0"/>
+                <a:ea typeface="Calibri" pitchFamily="34" charset="-122"/>
+                <a:cs typeface="Calibri" pitchFamily="34" charset="-120"/>
+              </a:rPr>
+              <a:t>[11] Paszke et al. (2019). PyTorch: An Imperative Style, High-Performance Deep Learning Library. NeurIPS, vol. 32. arXiv:1912.01703.</a:t>
+            </a:r>
+            <a:endParaRPr lang="en-US" sz="1100" dirty="0"/>
           </a:p>
         </p:txBody>
       </p:sp>
@@ -21033,7 +21295,7 @@
                 <a:ea typeface="Calibri" pitchFamily="34" charset="-122"/>
                 <a:cs typeface="Calibri" pitchFamily="34" charset="-120"/>
               </a:rPr>
-              <a:t>tại x=1,5: dy/dx = 3</a:t>
+              <a:t>tại x=1.5: dy/dx = 3</a:t>
             </a:r>
             <a:endParaRPr lang="en-US" sz="1150" dirty="0"/>
           </a:p>
@@ -22207,7 +22469,7 @@
                 <a:ea typeface="Calibri" pitchFamily="34" charset="-122"/>
                 <a:cs typeface="Calibri" pitchFamily="34" charset="-120"/>
               </a:rPr>
-              <a:t>x=2, w=0,5, b=−0,3, y=1  ⇒  L=0,045</a:t>
+              <a:t>x=2, w=0.5, b=−0.3, y=1  ⇒  L=0.045</a:t>
             </a:r>
             <a:endParaRPr lang="en-US" sz="1500" dirty="0"/>
           </a:p>
@@ -22228,7 +22490,7 @@
                 <a:ea typeface="Calibri" pitchFamily="34" charset="-122"/>
                 <a:cs typeface="Calibri" pitchFamily="34" charset="-120"/>
               </a:rPr>
-              <a:t>∂L/∂w = −0,6  (khớp PyTorch autograd &amp; finite-difference tuyệt đối)</a:t>
+              <a:t>∂L/∂w = −0.6  (khớp PyTorch autograd &amp; finite-difference tuyệt đối)</a:t>
             </a:r>
             <a:endParaRPr lang="en-US" sz="1500" dirty="0"/>
           </a:p>

--- a/report/Slide_Backprop_Initialization.pptx
+++ b/report/Slide_Backprop_Initialization.pptx
@@ -33,9 +33,10 @@
     <p:sldId id="281" r:id="rId27"/>
     <p:sldId id="282" r:id="rId28"/>
     <p:sldId id="283" r:id="rId29"/>
+    <p:sldId id="284" r:id="rId30"/>
   </p:sldIdLst>
   <p:notesMasterIdLst>
-    <p:notesMasterId r:id="rId30"/>
+    <p:notesMasterId r:id="rId31"/>
   </p:notesMasterIdLst>
   <p:sldSz cx="12191695" cy="6858000"/>
   <p:notesSz cx="6858000" cy="12191695"/>
@@ -617,7 +618,7 @@
           <a:p>
             <a:r>
               <a:rPr lang="en-US" dirty="0"/>
-              <a:t>Minh hoạ trực quan bằng thanh giảm dần — số liệu thực nghiệm CHÍNH XÁC cho trường hợp này sẽ xuất hiện lại ở phần Demo (Experiment 1&amp;2, Depth Experiment).</a:t>
+              <a:t>Minh hoạ trực quan bằng thanh giảm dần (ví dụ đơn giản hoá 1 số vô hướng). Trong thực tế, cơ chế là TÍCH của nhiều Jacobian/weight matrix liên tục co norm — không phải chỉ 'đạo hàm &lt; 1'. Số liệu thực nghiệm cho trường hợp này ở phần Demo (Experiment 1&amp;2, Depth Experiment).</a:t>
             </a:r>
             <a:endParaRPr lang="en-US" dirty="0"/>
           </a:p>
@@ -705,7 +706,7 @@
           <a:p>
             <a:r>
               <a:rPr lang="en-US" dirty="0"/>
-              <a:t>'Hai mặt của cùng một đồng xu' với slide trước — chỉ khác hệ số g&lt;1 hay g&gt;1. Experiment 3 (Random large, std=1.0) sẽ tái hiện đúng hiện tượng này bằng số liệu thật (train loss = NaN).</a:t>
+              <a:t>'Hai mặt của cùng một đồng xu' với slide trước — cùng cơ chế tích luỹ qua nhiều lớp, chỉ khác việc norm gradient bị co lại hay khuếch đại. Tránh nói đơn giản hoá 'chỉ khác dấu của (đạo hàm−1)' — thực tế là hành vi của TÍCH nhiều ma trận/Jacobian, không phải một số vô hướng duy nhất. Experiment 3 (Random large, std=1.0) sẽ tái hiện đúng hiện tượng này bằng số liệu thật (train loss = NaN).</a:t>
             </a:r>
             <a:endParaRPr lang="en-US" dirty="0"/>
           </a:p>
@@ -793,7 +794,7 @@
           <a:p>
             <a:r>
               <a:rPr lang="en-US" dirty="0"/>
-              <a:t>Số liệu bên dưới lấy trực tiếp từ results/logs/run_zero_sigmoid.json — gradient lớp ẩn đo được đúng bằng 0.0, không phải xấp xỉ.</a:t>
+              <a:t>Số liệu bên dưới lấy trực tiếp từ results/logs/run_zero_sigmoid.json — gradient RMS lớp ẩn đo được đúng bằng 0.0 trong thí nghiệm này. Phân biệt quan trọng: vấn đề symmetry là của WEIGHT (mọi hidden unit học giống hệt nhau); bias không gây đối xứng giữa các unit nên vẫn có thể khởi tạo 0.</a:t>
             </a:r>
             <a:endParaRPr lang="en-US" dirty="0"/>
           </a:p>
@@ -881,7 +882,7 @@
           <a:p>
             <a:r>
               <a:rPr lang="en-US" dirty="0"/>
-              <a:t>Bắc cầu trực tiếp sang Xavier/He: cả hai đều là cách CHỌN ĐÚNG variance thay vì chọn tuỳ tiện.</a:t>
+              <a:t>Bắc cầu trực tiếp sang Xavier/He: cả hai đều là cách CHỌN ĐÚNG variance thay vì chọn tuỳ tiện. Lưu ý quan trọng: kết luận 'std lớn → exploding' quan sát được trong experiment này là hành vi của mạng ReLU cụ thể; với sigmoid/tanh, std quá lớn còn có thể đẩy pre-activation vào vùng bão hoà, khiến derivative gần 0 và gây vanishing thay vì exploding.</a:t>
             </a:r>
             <a:endParaRPr lang="en-US" dirty="0"/>
           </a:p>
@@ -1233,7 +1234,7 @@
           <a:p>
             <a:r>
               <a:rPr lang="en-US" dirty="0"/>
-              <a:t>Đóng khung demo như một MINI RESEARCH EXPERIMENT thay vì chỉ 'train CNN rồi show accuracy' — đúng tinh thần đề xuất: cùng kiến trúc/optimizer/dataset, chỉ đổi initialization.</a:t>
+              <a:t>Slide cầu nối ngắn gọn, không đi sâu derivation — chốt lại 'chuyện gì đang cố được giải quyết' trước khi sang phần Demo thực nghiệm kiểm chứng. Var(a) ổn định ở forward và Var(δ) ổn định ở backward là hai mục tiêu tương ứng của Xavier (cân bằng cả hai) và He (ưu tiên forward dưới ReLU).</a:t>
             </a:r>
             <a:endParaRPr lang="en-US" dirty="0"/>
           </a:p>
@@ -1321,7 +1322,7 @@
           <a:p>
             <a:r>
               <a:rPr lang="en-US" dirty="0"/>
-              <a:t>Không chỉ đo accuracy — 4 nhóm metric cho phép PHÂN BIỆT nguyên nhân thất bại (vanishing vs. exploding vs. overfitting) thay vì chỉ thấy 'model tệ'.</a:t>
+              <a:t>Đóng khung demo như một MINI RESEARCH EXPERIMENT thay vì chỉ 'train CNN rồi show accuracy' — đúng tinh thần đề xuất: cùng kiến trúc/optimizer/dataset, chỉ đổi initialization.</a:t>
             </a:r>
             <a:endParaRPr lang="en-US" dirty="0"/>
           </a:p>
@@ -1409,7 +1410,7 @@
           <a:p>
             <a:r>
               <a:rPr lang="en-US" dirty="0"/>
-              <a:t>Số liệu lấy trực tiếp từ results/logs/deep_demo_zero.json và deep_demo_random_normal.json — không làm tròn/che giấu: cả hai đều test_acc=10.0%, đúng mức đoán ngẫu nhiên của bài toán 10 lớp.</a:t>
+              <a:t>Không chỉ đo accuracy — 4 nhóm metric cho phép PHÂN BIỆT nguyên nhân thất bại (vanishing vs. exploding vs. overfitting) thay vì chỉ thấy 'model tệ'. Thứ tự đọc kết quả ưu tiên: activation variance → gradient scale → training loss → test accuracy (accuracy là bằng chứng GIÁN TIẾP nhất, dễ bị nhiễu bởi nhiều yếu tố khác ngoài initialization). Sửa nhất quán thuật ngữ: mọi nơi trong deck đều dùng 'Gradient RMS' đúng với công thức grad.pow(2).mean().sqrt() (= norm/sqrt(n_elements)), không dùng '.norm()' thô.</a:t>
             </a:r>
             <a:endParaRPr lang="en-US" dirty="0"/>
           </a:p>
@@ -1585,7 +1586,7 @@
           <a:p>
             <a:r>
               <a:rPr lang="en-US" dirty="0"/>
-              <a:t>Số liệu thật từ results/logs/deep_demo_random_large.json — không phải minh hoạ lý thuyết, đây là NaN thật xảy ra khi chạy thí nghiệm. Đối xứng hoàn hảo với Experiment 1&amp;2 (vanishing): hai thái cực của cùng một sai lầm 'không scale theo fan_in'.</a:t>
+              <a:t>Số liệu lấy trực tiếp từ results/logs/deep_demo_zero.json và deep_demo_random_normal.json — không làm tròn/che giấu: cả hai đều test_acc=10.0%, đúng mức đoán ngẫu nhiên của bài toán 10 lớp.</a:t>
             </a:r>
             <a:endParaRPr lang="en-US" dirty="0"/>
           </a:p>
@@ -1673,7 +1674,7 @@
           <a:p>
             <a:r>
               <a:rPr lang="en-US" dirty="0"/>
-              <a:t>Số liệu thật từ deep_demo_xavier.json/deep_demo_he.json. Điểm thuyết phục nhất của toàn bộ demo: CÙNG kiến trúc, CÙNG optimizer, CÙNG dataset — chỉ đổi cách khởi tạo mà kết quả lệch từ 10% (ngẫu nhiên/NaN) lên gần 70%.</a:t>
+              <a:t>Số liệu thật từ results/logs/deep_demo_random_large.json — không phải minh hoạ lý thuyết, đây là NaN thật xảy ra khi chạy thí nghiệm. Đối lập rõ ràng với Experiment 1&amp;2 (vanishing): trong setup này, cả hai thái cực (std quá nhỏ / quá lớn) của cùng một sai lầm 'không scale theo fan_in' đều khiến mạng không học được.</a:t>
             </a:r>
             <a:endParaRPr lang="en-US" dirty="0"/>
           </a:p>
@@ -1761,7 +1762,7 @@
           <a:p>
             <a:r>
               <a:rPr lang="en-US" dirty="0"/>
-              <a:t>Biểu đồ tổng hợp cả 5 đường cùng lúc — hình ảnh 'ăn điểm' đầu tiên vì gói gọn toàn bộ câu chuyện demo trong 1 slide.</a:t>
+              <a:t>Số liệu thật từ results/tables/multiseed_xavier_he_summary.csv (5 seed độc lập {42..46}, cùng kiến trúc 10 hidden layer). Đây là điểm chỉnh sửa quan trọng: 1 seed duy nhất KHÔNG đủ để nói 'Xavier tốt hơn He' hay ngược lại — mean±std qua nhiều seed cho thấy chênh lệch accuracy nằm trong nhiễu ngẫu nhiên, trong khi chênh lệch gradient RMS (bậc ~35 lần) lại nhất quán và có ý nghĩa hơn nhiều.</a:t>
             </a:r>
             <a:endParaRPr lang="en-US" dirty="0"/>
           </a:p>
@@ -1849,7 +1850,7 @@
           <a:p>
             <a:r>
               <a:rPr lang="en-US" dirty="0"/>
-              <a:t>Đây là biểu đồ trực quan chứng minh RÕ NHẤT tác động của initialization tới gradient flow — mỗi ô là một số liệu thật, không phải minh hoạ cách điệu.</a:t>
+              <a:t>Biểu đồ tổng hợp cả 5 đường cùng lúc — hình ảnh 'ăn điểm' đầu tiên vì gói gọn toàn bộ câu chuyện demo trong 1 slide.</a:t>
             </a:r>
             <a:endParaRPr lang="en-US" dirty="0"/>
           </a:p>
@@ -1937,7 +1938,7 @@
           <a:p>
             <a:r>
               <a:rPr lang="en-US" dirty="0"/>
-              <a:t>Số liệu thật từ results/logs/depth_experiment_v2.json. He giữ gradient ổn định xuyên suốt (kể cả L=50: grad_rms≈1.08e-2) nhưng test accuracy vẫn dao động (L=12: 32.6%, L=20: 53.6%, L=50: 19.6%) — bằng chứng rằng initialization là ĐIỀU KIỆN CẦN cho gradient flow, không phải điều kiện ĐỦ cho generalization tốt.</a:t>
+              <a:t>Đây là một trong những visualization quan trọng nhất của toàn bộ demo vì thể hiện TRỰC TIẾP gradient flow qua từng layer, không qua trung gian (khác với accuracy — bằng chứng gián tiếp, chịu ảnh hưởng của nhiều yếu tố khác). Mỗi ô là một số liệu thật (RMS = grad.pow(2).mean().sqrt()), không phải minh hoạ cách điệu.</a:t>
             </a:r>
             <a:endParaRPr lang="en-US" dirty="0"/>
           </a:p>
@@ -2025,7 +2026,7 @@
           <a:p>
             <a:r>
               <a:rPr lang="en-US" dirty="0"/>
-              <a:t>Bảng ánh xạ trực tiếp từ CSV thật, kể cả NaN của Random-large — trung thực khoa học, không che giấu kết quả thất bại.</a:t>
+              <a:t>Số liệu thật từ results/logs/depth_experiment_v2.json. Tránh phát biểu phổ quát kiểu "He ổn định ở mọi độ sâu" hay "Xavier thất bại" — đây là quan sát TRONG setup thực nghiệm cụ thể (MLP, ReLU, Fashion-MNIST). He duy trì gradient RMS cùng bậc độ lớn xuyên suốt (kể cả L=50: grad_rms≈1.08e-2) nhưng test accuracy vẫn dao động (L=12: 32.6%, L=20: 53.6%, L=50: 19.6%) — insight quan trọng nhất: stable gradient flow là điều kiện quan trọng cho optimization ổn định, nhưng KHÔNG phải điều kiện đủ để model generalize tốt.</a:t>
             </a:r>
             <a:endParaRPr lang="en-US" dirty="0"/>
           </a:p>
@@ -2113,7 +2114,7 @@
           <a:p>
             <a:r>
               <a:rPr lang="en-US" dirty="0"/>
-              <a:t>Flow tổng kết toàn bộ mạch trình bày — 3 takeaway đọc thẳng ra từ sơ đồ, chốt bằng câu hỏi nghiên cứu đã đặt ra ở Slide 2.</a:t>
+              <a:t>Bảng ánh xạ trực tiếp từ CSV thật, kể cả NaN của Random-large — trung thực khoa học, không che giấu kết quả thất bại. Test accuracy KHÔNG phải bằng chứng duy nhất cho initialization — nó là chỉ số gián tiếp nhất trong 4 nhóm metric (Activation variance, Gradient RMS, Training loss, rồi mới đến Accuracy).</a:t>
             </a:r>
             <a:endParaRPr lang="en-US" dirty="0"/>
           </a:p>
@@ -2201,7 +2202,7 @@
           <a:p>
             <a:r>
               <a:rPr lang="en-US" dirty="0"/>
-              <a:t>Chỉ giới thiệu ngắn, KHÔNG đi sâu — tránh lệch trọng tâm khỏi Backprop + Initialization là chủ đề chính của báo cáo.</a:t>
+              <a:t>Flow tổng kết toàn bộ mạch trình bày — 3 takeaway đọc thẳng ra từ sơ đồ, chốt bằng câu hỏi nghiên cứu đã đặt ra ở Slide 2.</a:t>
             </a:r>
             <a:endParaRPr lang="en-US" dirty="0"/>
           </a:p>
@@ -2289,7 +2290,7 @@
           <a:p>
             <a:r>
               <a:rPr lang="en-US" dirty="0"/>
-              <a:t>11 nguồn, khớp danh mục tham khảo IEEE trong báo cáo LaTeX — không có nguồn bịa.</a:t>
+              <a:t>Chỉ giới thiệu ngắn, KHÔNG đi sâu — tránh lệch trọng tâm khỏi Backprop + Initialization là chủ đề chính của báo cáo.</a:t>
             </a:r>
             <a:endParaRPr lang="en-US" dirty="0"/>
           </a:p>
@@ -2313,6 +2314,94 @@
             <a:fld id="{F7021451-1387-4CA6-816F-3879F97B5CBC}" type="slidenum">
               <a:rPr lang="en-US"/>
               <a:t>28</a:t>
+            </a:fld>
+            <a:endParaRPr lang="en-US"/>
+          </a:p>
+        </p:txBody>
+      </p:sp>
+    </p:spTree>
+    <p:extLst>
+      <p:ext uri="{BB962C8B-B14F-4D97-AF65-F5344CB8AC3E}">
+        <p14:creationId xmlns:p14="http://schemas.microsoft.com/office/powerpoint/2010/main" val="1024086991"/>
+      </p:ext>
+    </p:extLst>
+  </p:cSld>
+  <p:clrMapOvr>
+    <a:masterClrMapping/>
+  </p:clrMapOvr>
+</p:notes>
+</file>
+
+<file path=ppt/notesSlides/notesSlide29.xml><?xml version="1.0" encoding="utf-8"?>
+<p:notes xmlns:a="http://schemas.openxmlformats.org/drawingml/2006/main" xmlns:r="http://schemas.openxmlformats.org/officeDocument/2006/relationships" xmlns:p="http://schemas.openxmlformats.org/presentationml/2006/main">
+  <p:cSld>
+    <p:spTree>
+      <p:nvGrpSpPr>
+        <p:cNvPr id="1" name=""/>
+        <p:cNvGrpSpPr/>
+        <p:nvPr/>
+      </p:nvGrpSpPr>
+      <p:grpSpPr>
+        <a:xfrm>
+          <a:off x="0" y="0"/>
+          <a:ext cx="0" cy="0"/>
+          <a:chOff x="0" y="0"/>
+          <a:chExt cx="0" cy="0"/>
+        </a:xfrm>
+      </p:grpSpPr>
+      <p:sp>
+        <p:nvSpPr>
+          <p:cNvPr id="2" name="Slide Image Placeholder 1"/>
+          <p:cNvSpPr>
+            <a:spLocks noGrp="1" noRot="1" noChangeAspect="1"/>
+          </p:cNvSpPr>
+          <p:nvPr>
+            <p:ph type="sldImg"/>
+          </p:nvPr>
+        </p:nvSpPr>
+        <p:spPr/>
+      </p:sp>
+      <p:sp>
+        <p:nvSpPr>
+          <p:cNvPr id="3" name="Notes Placeholder 2"/>
+          <p:cNvSpPr>
+            <a:spLocks noGrp="1"/>
+          </p:cNvSpPr>
+          <p:nvPr>
+            <p:ph type="body" idx="1"/>
+          </p:nvPr>
+        </p:nvSpPr>
+        <p:spPr/>
+        <p:txBody>
+          <a:bodyPr/>
+          <a:lstStyle/>
+          <a:p>
+            <a:r>
+              <a:rPr lang="en-US" dirty="0"/>
+              <a:t>11 nguồn, khớp danh mục tham khảo IEEE trong báo cáo LaTeX — không có nguồn bịa.</a:t>
+            </a:r>
+            <a:endParaRPr lang="en-US" dirty="0"/>
+          </a:p>
+        </p:txBody>
+      </p:sp>
+      <p:sp>
+        <p:nvSpPr>
+          <p:cNvPr id="4" name="Slide Number Placeholder 3"/>
+          <p:cNvSpPr>
+            <a:spLocks noGrp="1"/>
+          </p:cNvSpPr>
+          <p:nvPr>
+            <p:ph type="sldNum" sz="quarter" idx="10"/>
+          </p:nvPr>
+        </p:nvSpPr>
+        <p:spPr/>
+        <p:txBody>
+          <a:bodyPr/>
+          <a:lstStyle/>
+          <a:p>
+            <a:fld id="{F7021451-1387-4CA6-816F-3879F97B5CBC}" type="slidenum">
+              <a:rPr lang="en-US"/>
+              <a:t>29</a:t>
             </a:fld>
             <a:endParaRPr lang="en-US"/>
           </a:p>
@@ -2465,7 +2554,7 @@
           <a:p>
             <a:r>
               <a:rPr lang="en-US" dirty="0"/>
-              <a:t>Nhấn mạnh: gradient không phải một số, mà là MỘT VECTOR — mỗi toạ độ trả lời câu hỏi riêng cho đúng một tham số.</a:t>
+              <a:t>Nhấn mạnh chính xác: gradient chỉ hướng TĂNG nhanh nhất của Loss — không phải hướng giảm. Gradient Descent phải đi NGƯỢC gradient (−∇L) để giảm Loss. Đây là điểm hay bị phát biểu sai/rút gọn quá mức.</a:t>
             </a:r>
             <a:endParaRPr lang="en-US" dirty="0"/>
           </a:p>
@@ -2641,7 +2730,7 @@
           <a:p>
             <a:r>
               <a:rPr lang="en-US" dirty="0"/>
-              <a:t>Forward pass không liên quan gì tới gradient — chỉ tính giá trị và lưu cache cho backward pass dùng lại (đây là điều PyTorch autograd làm ngầm khi xây computational graph).</a:t>
+              <a:t>Tránh phát biểu tuyệt đối 'forward không liên quan gì tới gradient' — chính xác hơn: forward pass chưa TÍNH gradient, nhưng nó tạo ra (và lưu lại) mọi thứ backward pass cần dùng để tính gradient (đây là điều PyTorch autograd làm ngầm khi xây computational graph).</a:t>
             </a:r>
             <a:endParaRPr lang="en-US" dirty="0"/>
           </a:p>
@@ -2729,7 +2818,7 @@
           <a:p>
             <a:r>
               <a:rPr lang="en-US" dirty="0"/>
-              <a:t>Chain rule đa biến là TOÀN BỘ nội dung toán học của Backpropagation — không có gì thần kỳ hơn thế.</a:t>
+              <a:t>Chain rule đa biến là nội dung toán học cốt lõi của Backpropagation. Ví dụ ở đây là trường hợp scalar để dễ hình dung — trong mạng thực tế, phép nhân đạo hàm cục bộ tổng quát thành vector-Jacobian product (VJP), điều PyTorch autograd tự động hoá.</a:t>
             </a:r>
             <a:endParaRPr lang="en-US" dirty="0"/>
           </a:p>
@@ -6159,7 +6248,7 @@
               <a:buNone/>
             </a:pPr>
             <a:r>
-              <a:rPr lang="en-US" sz="1650" dirty="0">
+              <a:rPr lang="en-US" sz="1500" dirty="0">
                 <a:solidFill>
                   <a:srgbClr val="16213E"/>
                 </a:solidFill>
@@ -6167,9 +6256,9 @@
                 <a:ea typeface="Cambria Math" pitchFamily="34" charset="-122"/>
                 <a:cs typeface="Cambria Math" pitchFamily="34" charset="-120"/>
               </a:rPr>
-              <a:t>Nếu mỗi đạo hàm cục bộ ≈ 0.5, qua 20 layer:  0.5²⁰ ≈ 0.00000095</a:t>
-            </a:r>
-            <a:endParaRPr lang="en-US" sz="1650" dirty="0"/>
+              <a:t>Minh hoạ: nếu mỗi bước co norm gradient theo hệ số ≈0.5, qua 20 layer:  0.5²⁰ ≈ 9.54×10⁻⁷</a:t>
+            </a:r>
+            <a:endParaRPr lang="en-US" sz="1500" dirty="0"/>
           </a:p>
         </p:txBody>
       </p:sp>
@@ -6486,8 +6575,8 @@
         </p:nvSpPr>
         <p:spPr>
           <a:xfrm>
-            <a:off x="640080" y="5532120"/>
-            <a:ext cx="10911535" cy="914400"/>
+            <a:off x="640080" y="5440680"/>
+            <a:ext cx="10911535" cy="1005840"/>
           </a:xfrm>
           <a:prstGeom prst="rect">
             <a:avLst/>
@@ -6507,7 +6596,7 @@
               <a:buChar char="▪"/>
             </a:pPr>
             <a:r>
-              <a:rPr lang="en-US" sz="1400" dirty="0">
+              <a:rPr lang="en-US" sz="1300" dirty="0">
                 <a:solidFill>
                   <a:srgbClr val="1A2238"/>
                 </a:solidFill>
@@ -6515,9 +6604,9 @@
                 <a:ea typeface="Calibri" pitchFamily="34" charset="-122"/>
                 <a:cs typeface="Calibri" pitchFamily="34" charset="-120"/>
               </a:rPr>
-              <a:t>Các layer đầu gần như không nhận được tín hiệu học</a:t>
-            </a:r>
-            <a:endParaRPr lang="en-US" sz="1400" dirty="0"/>
+              <a:t>Gradient trong mạng sâu = tích của nhiều local Jacobian và weight matrix; nếu các phép biến đổi này liên tục CO norm của gradient, gradient sẽ vanish</a:t>
+            </a:r>
+            <a:endParaRPr lang="en-US" sz="1300" dirty="0"/>
           </a:p>
           <a:p>
             <a:pPr marL="228600" indent="-228600">
@@ -6528,7 +6617,7 @@
               <a:buChar char="▪"/>
             </a:pPr>
             <a:r>
-              <a:rPr lang="en-US" sz="1400" dirty="0">
+              <a:rPr lang="en-US" sz="1300" dirty="0">
                 <a:solidFill>
                   <a:srgbClr val="1A2238"/>
                 </a:solidFill>
@@ -6536,9 +6625,9 @@
                 <a:ea typeface="Calibri" pitchFamily="34" charset="-122"/>
                 <a:cs typeface="Calibri" pitchFamily="34" charset="-120"/>
               </a:rPr>
-              <a:t>Weight gần input hầu như đứng yên suốt quá trình huấn luyện</a:t>
-            </a:r>
-            <a:endParaRPr lang="en-US" sz="1400" dirty="0"/>
+              <a:t>Layer càng gần input, gradient càng phải đi qua nhiều phép nhân này — nên thường bị ảnh hưởng nặng nhất</a:t>
+            </a:r>
+            <a:endParaRPr lang="en-US" sz="1300" dirty="0"/>
           </a:p>
         </p:txBody>
       </p:sp>
@@ -6575,7 +6664,7 @@
                 <a:ea typeface="Calibri" pitchFamily="34" charset="-122"/>
                 <a:cs typeface="Calibri" pitchFamily="34" charset="-120"/>
               </a:rPr>
-              <a:t>10/28</a:t>
+              <a:t>10/29</a:t>
             </a:r>
             <a:endParaRPr lang="en-US" sz="900" dirty="0"/>
           </a:p>
@@ -6862,7 +6951,7 @@
               <a:buNone/>
             </a:pPr>
             <a:r>
-              <a:rPr lang="en-US" sz="1650" dirty="0">
+              <a:rPr lang="en-US" sz="1500" dirty="0">
                 <a:solidFill>
                   <a:srgbClr val="16213E"/>
                 </a:solidFill>
@@ -6870,9 +6959,9 @@
                 <a:ea typeface="Cambria Math" pitchFamily="34" charset="-122"/>
                 <a:cs typeface="Cambria Math" pitchFamily="34" charset="-120"/>
               </a:rPr>
-              <a:t>Nếu mỗi đạo hàm cục bộ ≈ 1.5, qua 20 layer:  1.5²⁰ ≈ 3325</a:t>
-            </a:r>
-            <a:endParaRPr lang="en-US" sz="1650" dirty="0"/>
+              <a:t>Minh hoạ: nếu mỗi bước khuếch đại norm gradient theo hệ số ≈1.5, qua 20 layer:  1.5²⁰ ≈ 3325</a:t>
+            </a:r>
+            <a:endParaRPr lang="en-US" sz="1500" dirty="0"/>
           </a:p>
         </p:txBody>
       </p:sp>
@@ -7239,7 +7328,7 @@
                 <a:ea typeface="Calibri" pitchFamily="34" charset="-122"/>
                 <a:cs typeface="Calibri" pitchFamily="34" charset="-120"/>
               </a:rPr>
-              <a:t>Cùng cơ chế với vanishing — chỉ khác dấu của (đạo hàm cục bộ − 1)</a:t>
+              <a:t>Cùng cơ chế với vanishing — TÍCH của Jacobian/weight matrix, nhưng liên tục KHUẾCH ĐẠI thay vì co norm gradient</a:t>
             </a:r>
             <a:endParaRPr lang="en-US" sz="1300" dirty="0"/>
           </a:p>
@@ -7299,7 +7388,7 @@
                 <a:ea typeface="Calibri" pitchFamily="34" charset="-122"/>
                 <a:cs typeface="Calibri" pitchFamily="34" charset="-120"/>
               </a:rPr>
-              <a:t>11/28</a:t>
+              <a:t>11/29</a:t>
             </a:r>
             <a:endParaRPr lang="en-US" sz="900" dirty="0"/>
           </a:p>
@@ -7623,13 +7712,13 @@
           <a:p>
             <a:pPr marL="228600" indent="-228600">
               <a:spcAft>
-                <a:spcPts val="1200"/>
+                <a:spcPts val="1000"/>
               </a:spcAft>
               <a:buSzPct val="100000"/>
               <a:buChar char="▪"/>
             </a:pPr>
             <a:r>
-              <a:rPr lang="en-US" sz="1650" dirty="0">
+              <a:rPr lang="en-US" sz="1500" dirty="0">
                 <a:solidFill>
                   <a:srgbClr val="1A2238"/>
                 </a:solidFill>
@@ -7637,20 +7726,20 @@
                 <a:ea typeface="Calibri" pitchFamily="34" charset="-122"/>
                 <a:cs typeface="Calibri" pitchFamily="34" charset="-120"/>
               </a:rPr>
-              <a:t>Mọi neuron trong 1 lớp nhận CÙNG input, CÙNG weight ⇒ CÙNG z, CÙNG a, CÙNG gradient</a:t>
-            </a:r>
-            <a:endParaRPr lang="en-US" sz="1650" dirty="0"/>
+              <a:t>Mọi HIDDEN UNIT trong 1 lớp nhận CÙNG input, CÙNG weight ⇒ CÙNG z, CÙNG a, CÙNG gradient — giữ SYMMETRY</a:t>
+            </a:r>
+            <a:endParaRPr lang="en-US" sz="1500" dirty="0"/>
           </a:p>
           <a:p>
             <a:pPr marL="228600" indent="-228600">
               <a:spcAft>
-                <a:spcPts val="1200"/>
+                <a:spcPts val="1000"/>
               </a:spcAft>
               <a:buSzPct val="100000"/>
               <a:buChar char="▪"/>
             </a:pPr>
             <a:r>
-              <a:rPr lang="en-US" sz="1650" dirty="0">
+              <a:rPr lang="en-US" sz="1500" dirty="0">
                 <a:solidFill>
                   <a:srgbClr val="1A2238"/>
                 </a:solidFill>
@@ -7658,20 +7747,20 @@
                 <a:ea typeface="Calibri" pitchFamily="34" charset="-122"/>
                 <a:cs typeface="Calibri" pitchFamily="34" charset="-120"/>
               </a:rPr>
-              <a:t>Sau update: trọng số của chúng vẫn giống hệt nhau — MÃI MÃI</a:t>
-            </a:r>
-            <a:endParaRPr lang="en-US" sz="1650" dirty="0"/>
+              <a:t>Sau update: các hidden unit này vẫn giống hệt nhau — vấn đề áp dụng cho WEIGHT, không phải bias (bias thường vẫn khởi tạo 0 được, vì không gây đối xứng giữa các unit)</a:t>
+            </a:r>
+            <a:endParaRPr lang="en-US" sz="1500" dirty="0"/>
           </a:p>
           <a:p>
             <a:pPr marL="228600" indent="-228600">
               <a:spcAft>
-                <a:spcPts val="1200"/>
+                <a:spcPts val="1000"/>
               </a:spcAft>
               <a:buSzPct val="100000"/>
               <a:buChar char="▪"/>
             </a:pPr>
             <a:r>
-              <a:rPr lang="en-US" sz="1650" dirty="0">
+              <a:rPr lang="en-US" sz="1500" dirty="0">
                 <a:solidFill>
                   <a:srgbClr val="1A2238"/>
                 </a:solidFill>
@@ -7679,9 +7768,9 @@
                 <a:ea typeface="Calibri" pitchFamily="34" charset="-122"/>
                 <a:cs typeface="Calibri" pitchFamily="34" charset="-120"/>
               </a:rPr>
-              <a:t>Hiện tượng: Symmetry Problem — mạng có 100 neuron nhưng hoạt động như chỉ có 1 neuron duy nhất</a:t>
-            </a:r>
-            <a:endParaRPr lang="en-US" sz="1650" dirty="0"/>
+              <a:t>Trong kiến trúc đang khảo sát: zero-init khiến hidden-layer gradient bằng 0, mạng không học được representation hữu ích</a:t>
+            </a:r>
+            <a:endParaRPr lang="en-US" sz="1500" dirty="0"/>
           </a:p>
         </p:txBody>
       </p:sp>
@@ -7757,7 +7846,7 @@
                 <a:ea typeface="Calibri" pitchFamily="34" charset="-122"/>
                 <a:cs typeface="Calibri" pitchFamily="34" charset="-120"/>
               </a:rPr>
-              <a:t>gradient lớp ẩn đo được (thực nghiệm thật, Zero-init) — test acc = 10.0%</a:t>
+              <a:t>gradient RMS lớp ẩn đo được (thực nghiệm thật, Zero-init) — test acc = 10.0%</a:t>
             </a:r>
             <a:endParaRPr lang="en-US" sz="1100" dirty="0"/>
           </a:p>
@@ -7788,7 +7877,7 @@
               <a:buNone/>
             </a:pPr>
             <a:r>
-              <a:rPr lang="en-US" sz="1350" i="1" dirty="0">
+              <a:rPr lang="en-US" sz="1300" i="1" dirty="0">
                 <a:solidFill>
                   <a:srgbClr val="5B6478"/>
                 </a:solidFill>
@@ -7796,9 +7885,9 @@
                 <a:ea typeface="Calibri" pitchFamily="34" charset="-122"/>
                 <a:cs typeface="Calibri" pitchFamily="34" charset="-120"/>
               </a:rPr>
-              <a:t>Số liệu thật: Zero-init không phải "rất nhỏ" mà là CHẶN ĐỨNG tuyệt đối</a:t>
-            </a:r>
-            <a:endParaRPr lang="en-US" sz="1350" dirty="0"/>
+              <a:t>Số liệu thật: trong setup này, Zero-init cho hidden-layer gradient RMS bằng 0.0 (không phải xấp xỉ)</a:t>
+            </a:r>
+            <a:endParaRPr lang="en-US" sz="1300" dirty="0"/>
           </a:p>
         </p:txBody>
       </p:sp>
@@ -7835,7 +7924,7 @@
                 <a:ea typeface="Calibri" pitchFamily="34" charset="-122"/>
                 <a:cs typeface="Calibri" pitchFamily="34" charset="-120"/>
               </a:rPr>
-              <a:t>12/28</a:t>
+              <a:t>12/29</a:t>
             </a:r>
             <a:endParaRPr lang="en-US" sz="900" dirty="0"/>
           </a:p>
@@ -8144,12 +8233,12 @@
         </p:nvSpPr>
         <p:spPr>
           <a:xfrm>
-            <a:off x="640080" y="2606040"/>
-            <a:ext cx="5120640" cy="2651760"/>
+            <a:off x="640080" y="2514600"/>
+            <a:ext cx="5120640" cy="2880360"/>
           </a:xfrm>
           <a:prstGeom prst="roundRect">
             <a:avLst>
-              <a:gd name="adj" fmla="val 2759"/>
+              <a:gd name="adj" fmla="val 2540"/>
             </a:avLst>
           </a:prstGeom>
           <a:solidFill>
@@ -8178,7 +8267,7 @@
         </p:nvSpPr>
         <p:spPr>
           <a:xfrm>
-            <a:off x="914400" y="2807208"/>
+            <a:off x="914400" y="2715768"/>
             <a:ext cx="4572000" cy="548640"/>
           </a:xfrm>
           <a:prstGeom prst="rect">
@@ -8217,8 +8306,8 @@
         </p:nvSpPr>
         <p:spPr>
           <a:xfrm>
-            <a:off x="914400" y="3474720"/>
-            <a:ext cx="4572000" cy="1645920"/>
+            <a:off x="914400" y="3383280"/>
+            <a:ext cx="4572000" cy="1874520"/>
           </a:xfrm>
           <a:prstGeom prst="rect">
             <a:avLst/>
@@ -8238,7 +8327,7 @@
               <a:buChar char="▪"/>
             </a:pPr>
             <a:r>
-              <a:rPr lang="en-US" sz="1500" dirty="0">
+              <a:rPr lang="en-US" sz="1350" dirty="0">
                 <a:solidFill>
                   <a:srgbClr val="1A2238"/>
                 </a:solidFill>
@@ -8248,7 +8337,7 @@
               </a:rPr>
               <a:t>weight nhỏ → activation nhỏ</a:t>
             </a:r>
-            <a:endParaRPr lang="en-US" sz="1500" dirty="0"/>
+            <a:endParaRPr lang="en-US" sz="1350" dirty="0"/>
           </a:p>
           <a:p>
             <a:pPr marL="228600" indent="-228600">
@@ -8259,7 +8348,7 @@
               <a:buChar char="▪"/>
             </a:pPr>
             <a:r>
-              <a:rPr lang="en-US" sz="1500" dirty="0">
+              <a:rPr lang="en-US" sz="1350" dirty="0">
                 <a:solidFill>
                   <a:srgbClr val="1A2238"/>
                 </a:solidFill>
@@ -8269,7 +8358,7 @@
               </a:rPr>
               <a:t>→ gradient nhỏ dần qua mỗi lớp</a:t>
             </a:r>
-            <a:endParaRPr lang="en-US" sz="1500" dirty="0"/>
+            <a:endParaRPr lang="en-US" sz="1350" dirty="0"/>
           </a:p>
           <a:p>
             <a:pPr marL="228600" indent="-228600">
@@ -8280,7 +8369,7 @@
               <a:buChar char="▪"/>
             </a:pPr>
             <a:r>
-              <a:rPr lang="en-US" sz="1500" dirty="0">
+              <a:rPr lang="en-US" sz="1350" dirty="0">
                 <a:solidFill>
                   <a:srgbClr val="1A2238"/>
                 </a:solidFill>
@@ -8288,9 +8377,9 @@
                 <a:ea typeface="Calibri" pitchFamily="34" charset="-122"/>
                 <a:cs typeface="Calibri" pitchFamily="34" charset="-120"/>
               </a:rPr>
-              <a:t>→ VANISHING GRADIENT</a:t>
-            </a:r>
-            <a:endParaRPr lang="en-US" sz="1500" dirty="0"/>
+              <a:t>→ có xu hướng VANISHING GRADIENT</a:t>
+            </a:r>
+            <a:endParaRPr lang="en-US" sz="1350" dirty="0"/>
           </a:p>
         </p:txBody>
       </p:sp>
@@ -8302,12 +8391,12 @@
         </p:nvSpPr>
         <p:spPr>
           <a:xfrm>
-            <a:off x="6430975" y="2606040"/>
-            <a:ext cx="5120640" cy="2651760"/>
+            <a:off x="6430975" y="2514600"/>
+            <a:ext cx="5120640" cy="2880360"/>
           </a:xfrm>
           <a:prstGeom prst="roundRect">
             <a:avLst>
-              <a:gd name="adj" fmla="val 2759"/>
+              <a:gd name="adj" fmla="val 2540"/>
             </a:avLst>
           </a:prstGeom>
           <a:solidFill>
@@ -8336,7 +8425,7 @@
         </p:nvSpPr>
         <p:spPr>
           <a:xfrm>
-            <a:off x="6705295" y="2807208"/>
+            <a:off x="6705295" y="2715768"/>
             <a:ext cx="4572000" cy="548640"/>
           </a:xfrm>
           <a:prstGeom prst="rect">
@@ -8375,8 +8464,8 @@
         </p:nvSpPr>
         <p:spPr>
           <a:xfrm>
-            <a:off x="6705295" y="3474720"/>
-            <a:ext cx="4572000" cy="1645920"/>
+            <a:off x="6705295" y="3383280"/>
+            <a:ext cx="4572000" cy="1874520"/>
           </a:xfrm>
           <a:prstGeom prst="rect">
             <a:avLst/>
@@ -8396,7 +8485,7 @@
               <a:buChar char="▪"/>
             </a:pPr>
             <a:r>
-              <a:rPr lang="en-US" sz="1500" dirty="0">
+              <a:rPr lang="en-US" sz="1350" dirty="0">
                 <a:solidFill>
                   <a:srgbClr val="1A2238"/>
                 </a:solidFill>
@@ -8404,9 +8493,9 @@
                 <a:ea typeface="Calibri" pitchFamily="34" charset="-122"/>
                 <a:cs typeface="Calibri" pitchFamily="34" charset="-120"/>
               </a:rPr>
-              <a:t>weight lớn → activation bùng nổ</a:t>
-            </a:r>
-            <a:endParaRPr lang="en-US" sz="1500" dirty="0"/>
+              <a:t>weight lớn → activation/pre-activation lớn</a:t>
+            </a:r>
+            <a:endParaRPr lang="en-US" sz="1350" dirty="0"/>
           </a:p>
           <a:p>
             <a:pPr marL="228600" indent="-228600">
@@ -8417,7 +8506,7 @@
               <a:buChar char="▪"/>
             </a:pPr>
             <a:r>
-              <a:rPr lang="en-US" sz="1500" dirty="0">
+              <a:rPr lang="en-US" sz="1350" dirty="0">
                 <a:solidFill>
                   <a:srgbClr val="1A2238"/>
                 </a:solidFill>
@@ -8425,9 +8514,9 @@
                 <a:ea typeface="Calibri" pitchFamily="34" charset="-122"/>
                 <a:cs typeface="Calibri" pitchFamily="34" charset="-120"/>
               </a:rPr>
-              <a:t>→ gradient tăng vọt qua mỗi lớp</a:t>
-            </a:r>
-            <a:endParaRPr lang="en-US" sz="1500" dirty="0"/>
+              <a:t>ReLU: gradient có xu hướng tăng vọt qua mỗi lớp → EXPLODING</a:t>
+            </a:r>
+            <a:endParaRPr lang="en-US" sz="1350" dirty="0"/>
           </a:p>
           <a:p>
             <a:pPr marL="228600" indent="-228600">
@@ -8438,7 +8527,7 @@
               <a:buChar char="▪"/>
             </a:pPr>
             <a:r>
-              <a:rPr lang="en-US" sz="1500" dirty="0">
+              <a:rPr lang="en-US" sz="1350" dirty="0">
                 <a:solidFill>
                   <a:srgbClr val="1A2238"/>
                 </a:solidFill>
@@ -8446,9 +8535,9 @@
                 <a:ea typeface="Calibri" pitchFamily="34" charset="-122"/>
                 <a:cs typeface="Calibri" pitchFamily="34" charset="-120"/>
               </a:rPr>
-              <a:t>→ EXPLODING GRADIENT</a:t>
-            </a:r>
-            <a:endParaRPr lang="en-US" sz="1500" dirty="0"/>
+              <a:t>Sigmoid/Tanh: pre-activation dễ rơi vào vùng BÃO HOÀ → derivative ≈ 0 → cũng VANISHING</a:t>
+            </a:r>
+            <a:endParaRPr lang="en-US" sz="1350" dirty="0"/>
           </a:p>
         </p:txBody>
       </p:sp>
@@ -8460,7 +8549,7 @@
         </p:nvSpPr>
         <p:spPr>
           <a:xfrm>
-            <a:off x="640080" y="5440680"/>
+            <a:off x="640080" y="5532120"/>
             <a:ext cx="10911535" cy="914400"/>
           </a:xfrm>
           <a:prstGeom prst="rect">
@@ -8477,7 +8566,7 @@
               <a:buNone/>
             </a:pPr>
             <a:r>
-              <a:rPr lang="en-US" sz="1350" i="1" dirty="0">
+              <a:rPr lang="en-US" sz="1200" i="1" dirty="0">
                 <a:solidFill>
                   <a:srgbClr val="5B6478"/>
                 </a:solidFill>
@@ -8485,9 +8574,9 @@
                 <a:ea typeface="Calibri" pitchFamily="34" charset="-122"/>
                 <a:cs typeface="Calibri" pitchFamily="34" charset="-120"/>
               </a:rPr>
-              <a:t>Random giải quyết được Symmetry Problem — nhưng chọn sai variance thì vẫn thất bại theo 1 trong 2 hướng trên. Hai thí nghiệm sau (Experiment 2 &amp; 3) sẽ tái hiện đúng cả hai bằng số liệu thật.</a:t>
-            </a:r>
-            <a:endParaRPr lang="en-US" sz="1350" dirty="0"/>
+              <a:t>Hai thí nghiệm sau (Experiment 2 &amp; 3, mạng ReLU) tái hiện std-nhỏ → vanishing và std-lớn → exploding bằng số liệu thật. Với activation bão hoà (sigmoid/tanh), std lớn còn có thể gây vanishing theo cơ chế khác (bão hoà), không chỉ exploding.</a:t>
+            </a:r>
+            <a:endParaRPr lang="en-US" sz="1200" dirty="0"/>
           </a:p>
         </p:txBody>
       </p:sp>
@@ -8524,7 +8613,7 @@
                 <a:ea typeface="Calibri" pitchFamily="34" charset="-122"/>
                 <a:cs typeface="Calibri" pitchFamily="34" charset="-120"/>
               </a:rPr>
-              <a:t>13/28</a:t>
+              <a:t>13/29</a:t>
             </a:r>
             <a:endParaRPr lang="en-US" sz="900" dirty="0"/>
           </a:p>
@@ -8819,7 +8908,7 @@
                 <a:ea typeface="Cambria Math" pitchFamily="34" charset="-122"/>
                 <a:cs typeface="Cambria Math" pitchFamily="34" charset="-120"/>
               </a:rPr>
-              <a:t>Var(W) = 2 / (n_in + n_out)          [dành cho Tanh / Sigmoid]</a:t>
+              <a:t>Xavier/Glorot Normal:   W_ij ~ N(0, 2/(n_in+n_out))</a:t>
             </a:r>
             <a:endParaRPr lang="en-US" sz="1800" dirty="0"/>
           </a:p>
@@ -8848,13 +8937,13 @@
           <a:p>
             <a:pPr marL="228600" indent="-228600">
               <a:spcAft>
-                <a:spcPts val="1200"/>
+                <a:spcPts val="1000"/>
               </a:spcAft>
               <a:buSzPct val="100000"/>
               <a:buChar char="▪"/>
             </a:pPr>
             <a:r>
-              <a:rPr lang="en-US" sz="1600" dirty="0">
+              <a:rPr lang="en-US" sz="1500" dirty="0">
                 <a:solidFill>
                   <a:srgbClr val="1A2238"/>
                 </a:solidFill>
@@ -8864,18 +8953,18 @@
               </a:rPr>
               <a:t>Mục tiêu: giữ variance của tín hiệu ỔN ĐỊNH qua từng lớp (Layer 1 variance ≈ Layer 2 ≈ Layer 3 ≈ ...)</a:t>
             </a:r>
-            <a:endParaRPr lang="en-US" sz="1600" dirty="0"/>
+            <a:endParaRPr lang="en-US" sz="1500" dirty="0"/>
           </a:p>
           <a:p>
             <a:pPr marL="228600" indent="-228600">
               <a:spcAft>
-                <a:spcPts val="1200"/>
+                <a:spcPts val="1000"/>
               </a:spcAft>
               <a:buSzPct val="100000"/>
               <a:buChar char="▪"/>
             </a:pPr>
             <a:r>
-              <a:rPr lang="en-US" sz="1600" dirty="0">
+              <a:rPr lang="en-US" sz="1500" dirty="0">
                 <a:solidFill>
                   <a:srgbClr val="1A2238"/>
                 </a:solidFill>
@@ -8885,18 +8974,18 @@
               </a:rPr>
               <a:t>Cân bằng 2 điều kiện: giữ Var(z) khi forward VÀ giữ Var(gradient) khi backward</a:t>
             </a:r>
-            <a:endParaRPr lang="en-US" sz="1600" dirty="0"/>
+            <a:endParaRPr lang="en-US" sz="1500" dirty="0"/>
           </a:p>
           <a:p>
             <a:pPr marL="228600" indent="-228600">
               <a:spcAft>
-                <a:spcPts val="1200"/>
+                <a:spcPts val="1000"/>
               </a:spcAft>
               <a:buSzPct val="100000"/>
               <a:buChar char="▪"/>
             </a:pPr>
             <a:r>
-              <a:rPr lang="en-US" sz="1600" dirty="0">
+              <a:rPr lang="en-US" sz="1500" dirty="0">
                 <a:solidFill>
                   <a:srgbClr val="1A2238"/>
                 </a:solidFill>
@@ -8904,9 +8993,9 @@
                 <a:ea typeface="Calibri" pitchFamily="34" charset="-122"/>
                 <a:cs typeface="Calibri" pitchFamily="34" charset="-120"/>
               </a:rPr>
-              <a:t>Phù hợp với activation đối xứng quanh 0 (Tanh, Sigmoid)</a:t>
-            </a:r>
-            <a:endParaRPr lang="en-US" sz="1600" dirty="0"/>
+              <a:t>Thường dùng với Tanh hoặc activation có gain phù hợp — riêng Tanh còn có lợi thế ZERO-CENTERED (Sigmoid thì KHÔNG zero-centered)</a:t>
+            </a:r>
+            <a:endParaRPr lang="en-US" sz="1500" dirty="0"/>
           </a:p>
         </p:txBody>
       </p:sp>
@@ -9021,7 +9110,7 @@
                 <a:ea typeface="Calibri" pitchFamily="34" charset="-122"/>
                 <a:cs typeface="Calibri" pitchFamily="34" charset="-120"/>
               </a:rPr>
-              <a:t>14/28</a:t>
+              <a:t>14/29</a:t>
             </a:r>
             <a:endParaRPr lang="en-US" sz="900" dirty="0"/>
           </a:p>
@@ -9308,7 +9397,7 @@
               <a:buNone/>
             </a:pPr>
             <a:r>
-              <a:rPr lang="en-US" sz="1800" dirty="0">
+              <a:rPr lang="en-US" sz="1700" dirty="0">
                 <a:solidFill>
                   <a:srgbClr val="16213E"/>
                 </a:solidFill>
@@ -9316,9 +9405,9 @@
                 <a:ea typeface="Cambria Math" pitchFamily="34" charset="-122"/>
                 <a:cs typeface="Cambria Math" pitchFamily="34" charset="-120"/>
               </a:rPr>
-              <a:t>Var(W) = 2 / n_in          [dành cho ReLU / Leaky ReLU]</a:t>
-            </a:r>
-            <a:endParaRPr lang="en-US" sz="1800" dirty="0"/>
+              <a:t>He/Kaiming Normal:   W_ij ~ N(0, 2/n_in)          [ReLU / Leaky ReLU]</a:t>
+            </a:r>
+            <a:endParaRPr lang="en-US" sz="1700" dirty="0"/>
           </a:p>
         </p:txBody>
       </p:sp>
@@ -9345,13 +9434,13 @@
           <a:p>
             <a:pPr marL="228600" indent="-228600">
               <a:spcAft>
-                <a:spcPts val="1200"/>
+                <a:spcPts val="1000"/>
               </a:spcAft>
               <a:buSzPct val="100000"/>
               <a:buChar char="▪"/>
             </a:pPr>
             <a:r>
-              <a:rPr lang="en-US" sz="1600" dirty="0">
+              <a:rPr lang="en-US" sz="1500" dirty="0">
                 <a:solidFill>
                   <a:srgbClr val="1A2238"/>
                 </a:solidFill>
@@ -9359,20 +9448,20 @@
                 <a:ea typeface="Calibri" pitchFamily="34" charset="-122"/>
                 <a:cs typeface="Calibri" pitchFamily="34" charset="-120"/>
               </a:rPr>
-              <a:t>ReLU triệt tiêu khoảng MỘT NỬA output (phần z&lt;0 → 0)</a:t>
-            </a:r>
-            <a:endParaRPr lang="en-US" sz="1600" dirty="0"/>
+              <a:t>Dưới giả định pre-activation gần đối xứng quanh 0, ReLU đặt khoảng một nửa giá trị về 0</a:t>
+            </a:r>
+            <a:endParaRPr lang="en-US" sz="1500" dirty="0"/>
           </a:p>
           <a:p>
             <a:pPr marL="228600" indent="-228600">
               <a:spcAft>
-                <a:spcPts val="1200"/>
+                <a:spcPts val="1000"/>
               </a:spcAft>
               <a:buSzPct val="100000"/>
               <a:buChar char="▪"/>
             </a:pPr>
             <a:r>
-              <a:rPr lang="en-US" sz="1600" dirty="0">
+              <a:rPr lang="en-US" sz="1500" dirty="0">
                 <a:solidFill>
                   <a:srgbClr val="1A2238"/>
                 </a:solidFill>
@@ -9380,20 +9469,20 @@
                 <a:ea typeface="Calibri" pitchFamily="34" charset="-122"/>
                 <a:cs typeface="Calibri" pitchFamily="34" charset="-120"/>
               </a:rPr>
-              <a:t>He nhân đôi variance so với công thức forward-preserving thuần (1/n_in) để bù phần 'mất' này</a:t>
-            </a:r>
-            <a:endParaRPr lang="en-US" sz="1600" dirty="0"/>
+              <a:t>He dùng scale 2/n_in để bù sự suy giảm second moment (variance) do ReLU gây ra — gấp đôi công thức forward-preserving thuần (1/n_in)</a:t>
+            </a:r>
+            <a:endParaRPr lang="en-US" sz="1500" dirty="0"/>
           </a:p>
           <a:p>
             <a:pPr marL="228600" indent="-228600">
               <a:spcAft>
-                <a:spcPts val="1200"/>
+                <a:spcPts val="1000"/>
               </a:spcAft>
               <a:buSzPct val="100000"/>
               <a:buChar char="▪"/>
             </a:pPr>
             <a:r>
-              <a:rPr lang="en-US" sz="1600" dirty="0">
+              <a:rPr lang="en-US" sz="1500" dirty="0">
                 <a:solidFill>
                   <a:srgbClr val="1A2238"/>
                 </a:solidFill>
@@ -9401,9 +9490,9 @@
                 <a:ea typeface="Calibri" pitchFamily="34" charset="-122"/>
                 <a:cs typeface="Calibri" pitchFamily="34" charset="-120"/>
               </a:rPr>
-              <a:t>Kết quả: giữ Var(a) ≈ Var(x) qua mỗi lớp ReLU, kể cả mạng rất sâu</a:t>
-            </a:r>
-            <a:endParaRPr lang="en-US" sz="1600" dirty="0"/>
+              <a:t>Trong nhiều thiết lập, cách này giúp giữ Var(a) cùng bậc độ lớn với Var(x) qua các lớp ReLU</a:t>
+            </a:r>
+            <a:endParaRPr lang="en-US" sz="1500" dirty="0"/>
           </a:p>
         </p:txBody>
       </p:sp>
@@ -9518,7 +9607,7 @@
                 <a:ea typeface="Calibri" pitchFamily="34" charset="-122"/>
                 <a:cs typeface="Calibri" pitchFamily="34" charset="-120"/>
               </a:rPr>
-              <a:t>15/28</a:t>
+              <a:t>15/29</a:t>
             </a:r>
             <a:endParaRPr lang="en-US" sz="900" dirty="0"/>
           </a:p>
@@ -10465,7 +10554,7 @@
                             <a:srgbClr val="1A2238"/>
                           </a:solidFill>
                         </a:rPr>
-                        <a:t>Sigmoid / Tanh</a:t>
+                        <a:t>Tanh (zero-centered)</a:t>
                       </a:r>
                       <a:endParaRPr lang="en-US" sz="1400" dirty="0"/>
                     </a:p>
@@ -10999,7 +11088,7 @@
                 <a:ea typeface="Calibri" pitchFamily="34" charset="-122"/>
                 <a:cs typeface="Calibri" pitchFamily="34" charset="-120"/>
               </a:rPr>
-              <a:t>16/28</a:t>
+              <a:t>16/29</a:t>
             </a:r>
             <a:endParaRPr lang="en-US" sz="900" dirty="0"/>
           </a:p>
@@ -11182,7 +11271,7 @@
                 <a:ea typeface="Calibri" pitchFamily="34" charset="-122"/>
                 <a:cs typeface="Calibri" pitchFamily="34" charset="-120"/>
               </a:rPr>
-              <a:t>DEMO — MINI RESEARCH EXPERIMENT</a:t>
+              <a:t>PARAMETER INITIALIZATION — SYNTHESIS</a:t>
             </a:r>
             <a:endParaRPr lang="en-US" sz="1300" dirty="0"/>
           </a:p>
@@ -11221,7 +11310,7 @@
                 <a:ea typeface="Cambria" pitchFamily="34" charset="-122"/>
                 <a:cs typeface="Cambria" pitchFamily="34" charset="-120"/>
               </a:rPr>
-              <a:t>Thiết kế thực nghiệm</a:t>
+              <a:t>Xavier và He đang cố giữ điều gì?</a:t>
             </a:r>
             <a:endParaRPr lang="en-US" sz="2600" dirty="0"/>
           </a:p>
@@ -11235,12 +11324,286 @@
         </p:nvSpPr>
         <p:spPr>
           <a:xfrm>
-            <a:off x="640080" y="1600200"/>
-            <a:ext cx="10911535" cy="594360"/>
+            <a:off x="640080" y="1965960"/>
+            <a:ext cx="5120640" cy="1965960"/>
           </a:xfrm>
           <a:prstGeom prst="roundRect">
             <a:avLst>
-              <a:gd name="adj" fmla="val 12308"/>
+              <a:gd name="adj" fmla="val 3721"/>
+            </a:avLst>
+          </a:prstGeom>
+          <a:solidFill>
+            <a:srgbClr val="EAF0FB"/>
+          </a:solidFill>
+          <a:ln w="12700">
+            <a:solidFill>
+              <a:srgbClr val="285AB4"/>
+            </a:solidFill>
+            <a:prstDash val="solid"/>
+          </a:ln>
+          <a:effectLst>
+            <a:outerShdw sx="100000" sy="100000" kx="0" ky="0" algn="bl" rotWithShape="0" blurRad="114300" dist="38100" dir="5400000">
+              <a:srgbClr val="1A1A2E">
+                <a:alpha val="20000"/>
+              </a:srgbClr>
+            </a:outerShdw>
+          </a:effectLst>
+        </p:spPr>
+      </p:sp>
+      <p:sp>
+        <p:nvSpPr>
+          <p:cNvPr id="5" name="Text 3"/>
+          <p:cNvSpPr txBox="1"/>
+          <p:nvPr/>
+        </p:nvSpPr>
+        <p:spPr>
+          <a:xfrm>
+            <a:off x="914400" y="2167128"/>
+            <a:ext cx="4572000" cy="548640"/>
+          </a:xfrm>
+          <a:prstGeom prst="rect">
+            <a:avLst/>
+          </a:prstGeom>
+          <a:noFill/>
+          <a:ln/>
+        </p:spPr>
+        <p:txBody>
+          <a:bodyPr wrap="square" lIns="0" tIns="0" rIns="0" bIns="0" rtlCol="0" anchor="ctr"/>
+          <a:lstStyle/>
+          <a:p>
+            <a:pPr indent="0" marL="0">
+              <a:buNone/>
+            </a:pPr>
+            <a:r>
+              <a:rPr lang="en-US" sz="1450" b="1" dirty="0">
+                <a:solidFill>
+                  <a:srgbClr val="285AB4"/>
+                </a:solidFill>
+                <a:latin typeface="Cambria" pitchFamily="34" charset="0"/>
+                <a:ea typeface="Cambria" pitchFamily="34" charset="-122"/>
+                <a:cs typeface="Cambria" pitchFamily="34" charset="-120"/>
+              </a:rPr>
+              <a:t>Forward</a:t>
+            </a:r>
+            <a:endParaRPr lang="en-US" sz="1450" dirty="0"/>
+          </a:p>
+        </p:txBody>
+      </p:sp>
+      <p:sp>
+        <p:nvSpPr>
+          <p:cNvPr id="6" name="Text 4"/>
+          <p:cNvSpPr txBox="1"/>
+          <p:nvPr/>
+        </p:nvSpPr>
+        <p:spPr>
+          <a:xfrm>
+            <a:off x="914400" y="2834640"/>
+            <a:ext cx="4572000" cy="960120"/>
+          </a:xfrm>
+          <a:prstGeom prst="rect">
+            <a:avLst/>
+          </a:prstGeom>
+          <a:noFill/>
+          <a:ln/>
+        </p:spPr>
+        <p:txBody>
+          <a:bodyPr wrap="square" lIns="0" tIns="0" rIns="0" bIns="0" rtlCol="0" anchor="t"/>
+          <a:lstStyle/>
+          <a:p>
+            <a:pPr marL="228600" indent="-228600">
+              <a:spcAft>
+                <a:spcPts val="900"/>
+              </a:spcAft>
+              <a:buSzPct val="100000"/>
+              <a:buChar char="▪"/>
+            </a:pPr>
+            <a:r>
+              <a:rPr lang="en-US" sz="1450" dirty="0">
+                <a:solidFill>
+                  <a:srgbClr val="1A2238"/>
+                </a:solidFill>
+                <a:latin typeface="Calibri" pitchFamily="34" charset="0"/>
+                <a:ea typeface="Calibri" pitchFamily="34" charset="-122"/>
+                <a:cs typeface="Calibri" pitchFamily="34" charset="-120"/>
+              </a:rPr>
+              <a:t>Var(a⁽ˡ⁾) ≈ ổn định qua các layer</a:t>
+            </a:r>
+            <a:endParaRPr lang="en-US" sz="1450" dirty="0"/>
+          </a:p>
+          <a:p>
+            <a:pPr marL="228600" indent="-228600">
+              <a:spcAft>
+                <a:spcPts val="900"/>
+              </a:spcAft>
+              <a:buSzPct val="100000"/>
+              <a:buChar char="▪"/>
+            </a:pPr>
+            <a:r>
+              <a:rPr lang="en-US" sz="1450" dirty="0">
+                <a:solidFill>
+                  <a:srgbClr val="1A2238"/>
+                </a:solidFill>
+                <a:latin typeface="Calibri" pitchFamily="34" charset="0"/>
+                <a:ea typeface="Calibri" pitchFamily="34" charset="-122"/>
+                <a:cs typeface="Calibri" pitchFamily="34" charset="-120"/>
+              </a:rPr>
+              <a:t>(không co cụm về 0, không bùng nổ khi đi qua nhiều lớp)</a:t>
+            </a:r>
+            <a:endParaRPr lang="en-US" sz="1450" dirty="0"/>
+          </a:p>
+        </p:txBody>
+      </p:sp>
+      <p:sp>
+        <p:nvSpPr>
+          <p:cNvPr id="7" name="Shape 5"/>
+          <p:cNvSpPr/>
+          <p:nvPr/>
+        </p:nvSpPr>
+        <p:spPr>
+          <a:xfrm>
+            <a:off x="6430975" y="1965960"/>
+            <a:ext cx="5120640" cy="1965960"/>
+          </a:xfrm>
+          <a:prstGeom prst="roundRect">
+            <a:avLst>
+              <a:gd name="adj" fmla="val 3721"/>
+            </a:avLst>
+          </a:prstGeom>
+          <a:solidFill>
+            <a:srgbClr val="FBEEEC"/>
+          </a:solidFill>
+          <a:ln w="12700">
+            <a:solidFill>
+              <a:srgbClr val="BE3C32"/>
+            </a:solidFill>
+            <a:prstDash val="solid"/>
+          </a:ln>
+          <a:effectLst>
+            <a:outerShdw sx="100000" sy="100000" kx="0" ky="0" algn="bl" rotWithShape="0" blurRad="114300" dist="38100" dir="5400000">
+              <a:srgbClr val="1A1A2E">
+                <a:alpha val="20000"/>
+              </a:srgbClr>
+            </a:outerShdw>
+          </a:effectLst>
+        </p:spPr>
+      </p:sp>
+      <p:sp>
+        <p:nvSpPr>
+          <p:cNvPr id="8" name="Text 6"/>
+          <p:cNvSpPr txBox="1"/>
+          <p:nvPr/>
+        </p:nvSpPr>
+        <p:spPr>
+          <a:xfrm>
+            <a:off x="6705295" y="2167128"/>
+            <a:ext cx="4572000" cy="548640"/>
+          </a:xfrm>
+          <a:prstGeom prst="rect">
+            <a:avLst/>
+          </a:prstGeom>
+          <a:noFill/>
+          <a:ln/>
+        </p:spPr>
+        <p:txBody>
+          <a:bodyPr wrap="square" lIns="0" tIns="0" rIns="0" bIns="0" rtlCol="0" anchor="ctr"/>
+          <a:lstStyle/>
+          <a:p>
+            <a:pPr indent="0" marL="0">
+              <a:buNone/>
+            </a:pPr>
+            <a:r>
+              <a:rPr lang="en-US" sz="1450" b="1" dirty="0">
+                <a:solidFill>
+                  <a:srgbClr val="BE3C32"/>
+                </a:solidFill>
+                <a:latin typeface="Cambria" pitchFamily="34" charset="0"/>
+                <a:ea typeface="Cambria" pitchFamily="34" charset="-122"/>
+                <a:cs typeface="Cambria" pitchFamily="34" charset="-120"/>
+              </a:rPr>
+              <a:t>Backward</a:t>
+            </a:r>
+            <a:endParaRPr lang="en-US" sz="1450" dirty="0"/>
+          </a:p>
+        </p:txBody>
+      </p:sp>
+      <p:sp>
+        <p:nvSpPr>
+          <p:cNvPr id="9" name="Text 7"/>
+          <p:cNvSpPr txBox="1"/>
+          <p:nvPr/>
+        </p:nvSpPr>
+        <p:spPr>
+          <a:xfrm>
+            <a:off x="6705295" y="2834640"/>
+            <a:ext cx="4572000" cy="960120"/>
+          </a:xfrm>
+          <a:prstGeom prst="rect">
+            <a:avLst/>
+          </a:prstGeom>
+          <a:noFill/>
+          <a:ln/>
+        </p:spPr>
+        <p:txBody>
+          <a:bodyPr wrap="square" lIns="0" tIns="0" rIns="0" bIns="0" rtlCol="0" anchor="t"/>
+          <a:lstStyle/>
+          <a:p>
+            <a:pPr marL="228600" indent="-228600">
+              <a:spcAft>
+                <a:spcPts val="900"/>
+              </a:spcAft>
+              <a:buSzPct val="100000"/>
+              <a:buChar char="▪"/>
+            </a:pPr>
+            <a:r>
+              <a:rPr lang="en-US" sz="1450" dirty="0">
+                <a:solidFill>
+                  <a:srgbClr val="1A2238"/>
+                </a:solidFill>
+                <a:latin typeface="Calibri" pitchFamily="34" charset="0"/>
+                <a:ea typeface="Calibri" pitchFamily="34" charset="-122"/>
+                <a:cs typeface="Calibri" pitchFamily="34" charset="-120"/>
+              </a:rPr>
+              <a:t>Var(δ⁽ˡ⁾) ≈ ổn định qua các layer</a:t>
+            </a:r>
+            <a:endParaRPr lang="en-US" sz="1450" dirty="0"/>
+          </a:p>
+          <a:p>
+            <a:pPr marL="228600" indent="-228600">
+              <a:spcAft>
+                <a:spcPts val="900"/>
+              </a:spcAft>
+              <a:buSzPct val="100000"/>
+              <a:buChar char="▪"/>
+            </a:pPr>
+            <a:r>
+              <a:rPr lang="en-US" sz="1450" dirty="0">
+                <a:solidFill>
+                  <a:srgbClr val="1A2238"/>
+                </a:solidFill>
+                <a:latin typeface="Calibri" pitchFamily="34" charset="0"/>
+                <a:ea typeface="Calibri" pitchFamily="34" charset="-122"/>
+                <a:cs typeface="Calibri" pitchFamily="34" charset="-120"/>
+              </a:rPr>
+              <a:t>(δ = ∂L/∂z — cùng logic áp dụng cho gradient khi lan truyền ngược)</a:t>
+            </a:r>
+            <a:endParaRPr lang="en-US" sz="1450" dirty="0"/>
+          </a:p>
+        </p:txBody>
+      </p:sp>
+      <p:sp>
+        <p:nvSpPr>
+          <p:cNvPr id="10" name="Shape 8"/>
+          <p:cNvSpPr/>
+          <p:nvPr/>
+        </p:nvSpPr>
+        <p:spPr>
+          <a:xfrm>
+            <a:off x="640080" y="4343400"/>
+            <a:ext cx="10911535" cy="1051560"/>
+          </a:xfrm>
+          <a:prstGeom prst="roundRect">
+            <a:avLst>
+              <a:gd name="adj" fmla="val 6957"/>
             </a:avLst>
           </a:prstGeom>
           <a:solidFill>
@@ -11263,14 +11626,14 @@
       </p:sp>
       <p:sp>
         <p:nvSpPr>
-          <p:cNvPr id="5" name="Text 3"/>
-          <p:cNvSpPr txBox="1"/>
-          <p:nvPr/>
-        </p:nvSpPr>
-        <p:spPr>
-          <a:xfrm>
-            <a:off x="868680" y="1600200"/>
-            <a:ext cx="10454335" cy="594360"/>
+          <p:cNvPr id="11" name="Text 9"/>
+          <p:cNvSpPr txBox="1"/>
+          <p:nvPr/>
+        </p:nvSpPr>
+        <p:spPr>
+          <a:xfrm>
+            <a:off x="868680" y="4343400"/>
+            <a:ext cx="10454335" cy="1051560"/>
           </a:xfrm>
           <a:prstGeom prst="rect">
             <a:avLst/>
@@ -11286,7 +11649,7 @@
               <a:buNone/>
             </a:pPr>
             <a:r>
-              <a:rPr lang="en-US" sz="1550" dirty="0">
+              <a:rPr lang="en-US" sz="1500" dirty="0">
                 <a:solidFill>
                   <a:srgbClr val="16213E"/>
                 </a:solidFill>
@@ -11294,49 +11657,22 @@
                 <a:ea typeface="Cambria Math" pitchFamily="34" charset="-122"/>
                 <a:cs typeface="Cambria Math" pitchFamily="34" charset="-120"/>
               </a:rPr>
-              <a:t>How does weight initialization affect gradient flow and convergence?</a:t>
-            </a:r>
-            <a:endParaRPr lang="en-US" sz="1550" dirty="0"/>
-          </a:p>
-        </p:txBody>
-      </p:sp>
-      <p:sp>
-        <p:nvSpPr>
-          <p:cNvPr id="6" name="Shape 4"/>
-          <p:cNvSpPr/>
-          <p:nvPr/>
-        </p:nvSpPr>
-        <p:spPr>
-          <a:xfrm>
-            <a:off x="640080" y="2450592"/>
-            <a:ext cx="1828800" cy="310896"/>
-          </a:xfrm>
-          <a:prstGeom prst="roundRect">
-            <a:avLst>
-              <a:gd name="adj" fmla="val 17647"/>
-            </a:avLst>
-          </a:prstGeom>
-          <a:solidFill>
-            <a:srgbClr val="F1F4F9"/>
-          </a:solidFill>
-          <a:ln w="15875">
-            <a:solidFill>
-              <a:srgbClr val="D9DEE8"/>
-            </a:solidFill>
-            <a:prstDash val="solid"/>
-          </a:ln>
-        </p:spPr>
-      </p:sp>
-      <p:sp>
-        <p:nvSpPr>
-          <p:cNvPr id="7" name="Text 5"/>
-          <p:cNvSpPr txBox="1"/>
-          <p:nvPr/>
-        </p:nvSpPr>
-        <p:spPr>
-          <a:xfrm>
-            <a:off x="640080" y="2450592"/>
-            <a:ext cx="1828800" cy="310896"/>
+              <a:t>Good initialization attempts to prevent the scale of signals and gradients from systematically collapsing or exploding as depth increases.</a:t>
+            </a:r>
+            <a:endParaRPr lang="en-US" sz="1500" dirty="0"/>
+          </a:p>
+        </p:txBody>
+      </p:sp>
+      <p:sp>
+        <p:nvSpPr>
+          <p:cNvPr id="12" name="Text 10"/>
+          <p:cNvSpPr txBox="1"/>
+          <p:nvPr/>
+        </p:nvSpPr>
+        <p:spPr>
+          <a:xfrm>
+            <a:off x="640080" y="5577840"/>
+            <a:ext cx="10911535" cy="640080"/>
           </a:xfrm>
           <a:prstGeom prst="rect">
             <a:avLst/>
@@ -11348,811 +11684,177 @@
           <a:bodyPr wrap="square" lIns="0" tIns="0" rIns="0" bIns="0" rtlCol="0" anchor="ctr"/>
           <a:lstStyle/>
           <a:p>
-            <a:pPr algn="ctr" indent="0" marL="0">
-              <a:buNone/>
-            </a:pPr>
-            <a:r>
-              <a:rPr lang="en-US" sz="1100" dirty="0">
-                <a:solidFill>
-                  <a:srgbClr val="1A2238"/>
-                </a:solidFill>
-                <a:latin typeface="Cambria Math" pitchFamily="34" charset="0"/>
-                <a:ea typeface="Cambria Math" pitchFamily="34" charset="-122"/>
-                <a:cs typeface="Cambria Math" pitchFamily="34" charset="-120"/>
-              </a:rPr>
-              <a:t>Input 784</a:t>
-            </a:r>
-            <a:endParaRPr lang="en-US" sz="1100" dirty="0"/>
-          </a:p>
-        </p:txBody>
-      </p:sp>
-      <p:sp>
-        <p:nvSpPr>
-          <p:cNvPr id="8" name="Shape 6"/>
-          <p:cNvSpPr/>
-          <p:nvPr/>
-        </p:nvSpPr>
-        <p:spPr>
-          <a:xfrm>
-            <a:off x="640080" y="2852928"/>
-            <a:ext cx="1828800" cy="310896"/>
-          </a:xfrm>
-          <a:prstGeom prst="roundRect">
-            <a:avLst>
-              <a:gd name="adj" fmla="val 17647"/>
-            </a:avLst>
-          </a:prstGeom>
-          <a:solidFill>
-            <a:srgbClr val="F1F4F9"/>
-          </a:solidFill>
-          <a:ln w="15875">
-            <a:solidFill>
-              <a:srgbClr val="D9DEE8"/>
-            </a:solidFill>
-            <a:prstDash val="solid"/>
-          </a:ln>
-        </p:spPr>
-      </p:sp>
-      <p:sp>
-        <p:nvSpPr>
-          <p:cNvPr id="9" name="Text 7"/>
-          <p:cNvSpPr txBox="1"/>
-          <p:nvPr/>
-        </p:nvSpPr>
-        <p:spPr>
-          <a:xfrm>
-            <a:off x="640080" y="2852928"/>
-            <a:ext cx="1828800" cy="310896"/>
-          </a:xfrm>
-          <a:prstGeom prst="rect">
-            <a:avLst/>
-          </a:prstGeom>
-          <a:noFill/>
-          <a:ln/>
-        </p:spPr>
-        <p:txBody>
-          <a:bodyPr wrap="square" lIns="0" tIns="0" rIns="0" bIns="0" rtlCol="0" anchor="ctr"/>
-          <a:lstStyle/>
-          <a:p>
-            <a:pPr algn="ctr" indent="0" marL="0">
-              <a:buNone/>
-            </a:pPr>
-            <a:r>
-              <a:rPr lang="en-US" sz="1100" dirty="0">
-                <a:solidFill>
-                  <a:srgbClr val="1A2238"/>
-                </a:solidFill>
-                <a:latin typeface="Cambria Math" pitchFamily="34" charset="0"/>
-                <a:ea typeface="Cambria Math" pitchFamily="34" charset="-122"/>
-                <a:cs typeface="Cambria Math" pitchFamily="34" charset="-120"/>
-              </a:rPr>
-              <a:t>Linear 128</a:t>
-            </a:r>
-            <a:endParaRPr lang="en-US" sz="1100" dirty="0"/>
-          </a:p>
-        </p:txBody>
-      </p:sp>
-      <p:sp>
-        <p:nvSpPr>
-          <p:cNvPr id="10" name="Shape 8"/>
-          <p:cNvSpPr/>
-          <p:nvPr/>
-        </p:nvSpPr>
-        <p:spPr>
-          <a:xfrm>
-            <a:off x="640080" y="3255264"/>
-            <a:ext cx="1828800" cy="310896"/>
-          </a:xfrm>
-          <a:prstGeom prst="roundRect">
-            <a:avLst>
-              <a:gd name="adj" fmla="val 17647"/>
-            </a:avLst>
-          </a:prstGeom>
-          <a:solidFill>
-            <a:srgbClr val="EAF0FB"/>
-          </a:solidFill>
-          <a:ln w="15875">
-            <a:solidFill>
-              <a:srgbClr val="285AB4"/>
-            </a:solidFill>
-            <a:prstDash val="solid"/>
-          </a:ln>
-        </p:spPr>
-      </p:sp>
-      <p:sp>
-        <p:nvSpPr>
-          <p:cNvPr id="11" name="Text 9"/>
-          <p:cNvSpPr txBox="1"/>
-          <p:nvPr/>
-        </p:nvSpPr>
-        <p:spPr>
-          <a:xfrm>
-            <a:off x="640080" y="3255264"/>
-            <a:ext cx="1828800" cy="310896"/>
-          </a:xfrm>
-          <a:prstGeom prst="rect">
-            <a:avLst/>
-          </a:prstGeom>
-          <a:noFill/>
-          <a:ln/>
-        </p:spPr>
-        <p:txBody>
-          <a:bodyPr wrap="square" lIns="0" tIns="0" rIns="0" bIns="0" rtlCol="0" anchor="ctr"/>
-          <a:lstStyle/>
-          <a:p>
-            <a:pPr algn="ctr" indent="0" marL="0">
-              <a:buNone/>
-            </a:pPr>
-            <a:r>
-              <a:rPr lang="en-US" sz="1100" dirty="0">
-                <a:solidFill>
-                  <a:srgbClr val="1A2238"/>
-                </a:solidFill>
-                <a:latin typeface="Cambria Math" pitchFamily="34" charset="0"/>
-                <a:ea typeface="Cambria Math" pitchFamily="34" charset="-122"/>
-                <a:cs typeface="Cambria Math" pitchFamily="34" charset="-120"/>
-              </a:rPr>
-              <a:t>ReLU</a:t>
-            </a:r>
-            <a:endParaRPr lang="en-US" sz="1100" dirty="0"/>
-          </a:p>
-        </p:txBody>
-      </p:sp>
-      <p:sp>
-        <p:nvSpPr>
-          <p:cNvPr id="12" name="Shape 10"/>
-          <p:cNvSpPr/>
-          <p:nvPr/>
-        </p:nvSpPr>
-        <p:spPr>
-          <a:xfrm>
-            <a:off x="640080" y="3657600"/>
-            <a:ext cx="1828800" cy="310896"/>
-          </a:xfrm>
-          <a:prstGeom prst="roundRect">
-            <a:avLst>
-              <a:gd name="adj" fmla="val 17647"/>
-            </a:avLst>
-          </a:prstGeom>
-          <a:solidFill>
-            <a:srgbClr val="F1F4F9"/>
-          </a:solidFill>
-          <a:ln w="15875">
-            <a:solidFill>
-              <a:srgbClr val="D9DEE8"/>
-            </a:solidFill>
-            <a:prstDash val="solid"/>
-          </a:ln>
-        </p:spPr>
-      </p:sp>
-      <p:sp>
-        <p:nvSpPr>
-          <p:cNvPr id="13" name="Text 11"/>
-          <p:cNvSpPr txBox="1"/>
-          <p:nvPr/>
-        </p:nvSpPr>
-        <p:spPr>
-          <a:xfrm>
-            <a:off x="640080" y="3657600"/>
-            <a:ext cx="1828800" cy="310896"/>
-          </a:xfrm>
-          <a:prstGeom prst="rect">
-            <a:avLst/>
-          </a:prstGeom>
-          <a:noFill/>
-          <a:ln/>
-        </p:spPr>
-        <p:txBody>
-          <a:bodyPr wrap="square" lIns="0" tIns="0" rIns="0" bIns="0" rtlCol="0" anchor="ctr"/>
-          <a:lstStyle/>
-          <a:p>
-            <a:pPr algn="ctr" indent="0" marL="0">
-              <a:buNone/>
-            </a:pPr>
-            <a:r>
-              <a:rPr lang="en-US" sz="1100" dirty="0">
-                <a:solidFill>
-                  <a:srgbClr val="1A2238"/>
-                </a:solidFill>
-                <a:latin typeface="Cambria Math" pitchFamily="34" charset="0"/>
-                <a:ea typeface="Cambria Math" pitchFamily="34" charset="-122"/>
-                <a:cs typeface="Cambria Math" pitchFamily="34" charset="-120"/>
-              </a:rPr>
-              <a:t>Linear 128</a:t>
-            </a:r>
-            <a:endParaRPr lang="en-US" sz="1100" dirty="0"/>
-          </a:p>
-        </p:txBody>
-      </p:sp>
-      <p:sp>
-        <p:nvSpPr>
-          <p:cNvPr id="14" name="Shape 12"/>
-          <p:cNvSpPr/>
-          <p:nvPr/>
-        </p:nvSpPr>
-        <p:spPr>
-          <a:xfrm>
-            <a:off x="640080" y="4059936"/>
-            <a:ext cx="1828800" cy="310896"/>
-          </a:xfrm>
-          <a:prstGeom prst="roundRect">
-            <a:avLst>
-              <a:gd name="adj" fmla="val 17647"/>
-            </a:avLst>
-          </a:prstGeom>
-          <a:solidFill>
-            <a:srgbClr val="EAF0FB"/>
-          </a:solidFill>
-          <a:ln w="15875">
-            <a:solidFill>
-              <a:srgbClr val="285AB4"/>
-            </a:solidFill>
-            <a:prstDash val="solid"/>
-          </a:ln>
-        </p:spPr>
-      </p:sp>
-      <p:sp>
-        <p:nvSpPr>
-          <p:cNvPr id="15" name="Text 13"/>
-          <p:cNvSpPr txBox="1"/>
-          <p:nvPr/>
-        </p:nvSpPr>
-        <p:spPr>
-          <a:xfrm>
-            <a:off x="640080" y="4059936"/>
-            <a:ext cx="1828800" cy="310896"/>
-          </a:xfrm>
-          <a:prstGeom prst="rect">
-            <a:avLst/>
-          </a:prstGeom>
-          <a:noFill/>
-          <a:ln/>
-        </p:spPr>
-        <p:txBody>
-          <a:bodyPr wrap="square" lIns="0" tIns="0" rIns="0" bIns="0" rtlCol="0" anchor="ctr"/>
-          <a:lstStyle/>
-          <a:p>
-            <a:pPr algn="ctr" indent="0" marL="0">
-              <a:buNone/>
-            </a:pPr>
-            <a:r>
-              <a:rPr lang="en-US" sz="1100" dirty="0">
-                <a:solidFill>
-                  <a:srgbClr val="1A2238"/>
-                </a:solidFill>
-                <a:latin typeface="Cambria Math" pitchFamily="34" charset="0"/>
-                <a:ea typeface="Cambria Math" pitchFamily="34" charset="-122"/>
-                <a:cs typeface="Cambria Math" pitchFamily="34" charset="-120"/>
-              </a:rPr>
-              <a:t>ReLU</a:t>
-            </a:r>
-            <a:endParaRPr lang="en-US" sz="1100" dirty="0"/>
-          </a:p>
-        </p:txBody>
-      </p:sp>
-      <p:sp>
-        <p:nvSpPr>
-          <p:cNvPr id="16" name="Shape 14"/>
-          <p:cNvSpPr/>
-          <p:nvPr/>
-        </p:nvSpPr>
-        <p:spPr>
-          <a:xfrm>
-            <a:off x="640080" y="4462272"/>
-            <a:ext cx="1828800" cy="310896"/>
-          </a:xfrm>
-          <a:prstGeom prst="roundRect">
-            <a:avLst>
-              <a:gd name="adj" fmla="val 17647"/>
-            </a:avLst>
-          </a:prstGeom>
-          <a:solidFill>
-            <a:srgbClr val="F1F4F9"/>
-          </a:solidFill>
-          <a:ln w="15875">
-            <a:solidFill>
-              <a:srgbClr val="D9DEE8"/>
-            </a:solidFill>
-            <a:prstDash val="solid"/>
-          </a:ln>
-        </p:spPr>
-      </p:sp>
-      <p:sp>
-        <p:nvSpPr>
-          <p:cNvPr id="17" name="Text 15"/>
-          <p:cNvSpPr txBox="1"/>
-          <p:nvPr/>
-        </p:nvSpPr>
-        <p:spPr>
-          <a:xfrm>
-            <a:off x="640080" y="4462272"/>
-            <a:ext cx="1828800" cy="310896"/>
-          </a:xfrm>
-          <a:prstGeom prst="rect">
-            <a:avLst/>
-          </a:prstGeom>
-          <a:noFill/>
-          <a:ln/>
-        </p:spPr>
-        <p:txBody>
-          <a:bodyPr wrap="square" lIns="0" tIns="0" rIns="0" bIns="0" rtlCol="0" anchor="ctr"/>
-          <a:lstStyle/>
-          <a:p>
-            <a:pPr algn="ctr" indent="0" marL="0">
-              <a:buNone/>
-            </a:pPr>
-            <a:r>
-              <a:rPr lang="en-US" sz="1100" dirty="0">
-                <a:solidFill>
-                  <a:srgbClr val="1A2238"/>
-                </a:solidFill>
-                <a:latin typeface="Cambria Math" pitchFamily="34" charset="0"/>
-                <a:ea typeface="Cambria Math" pitchFamily="34" charset="-122"/>
-                <a:cs typeface="Cambria Math" pitchFamily="34" charset="-120"/>
-              </a:rPr>
-              <a:t>...</a:t>
-            </a:r>
-            <a:endParaRPr lang="en-US" sz="1100" dirty="0"/>
-          </a:p>
-        </p:txBody>
-      </p:sp>
-      <p:sp>
-        <p:nvSpPr>
-          <p:cNvPr id="18" name="Shape 16"/>
-          <p:cNvSpPr/>
-          <p:nvPr/>
-        </p:nvSpPr>
-        <p:spPr>
-          <a:xfrm>
-            <a:off x="640080" y="4864608"/>
-            <a:ext cx="1828800" cy="310896"/>
-          </a:xfrm>
-          <a:prstGeom prst="roundRect">
-            <a:avLst>
-              <a:gd name="adj" fmla="val 17647"/>
-            </a:avLst>
-          </a:prstGeom>
-          <a:solidFill>
-            <a:srgbClr val="F1F4F9"/>
-          </a:solidFill>
-          <a:ln w="15875">
-            <a:solidFill>
-              <a:srgbClr val="D9DEE8"/>
-            </a:solidFill>
-            <a:prstDash val="solid"/>
-          </a:ln>
-        </p:spPr>
-      </p:sp>
-      <p:sp>
-        <p:nvSpPr>
-          <p:cNvPr id="19" name="Text 17"/>
-          <p:cNvSpPr txBox="1"/>
-          <p:nvPr/>
-        </p:nvSpPr>
-        <p:spPr>
-          <a:xfrm>
-            <a:off x="640080" y="4864608"/>
-            <a:ext cx="1828800" cy="310896"/>
-          </a:xfrm>
-          <a:prstGeom prst="rect">
-            <a:avLst/>
-          </a:prstGeom>
-          <a:noFill/>
-          <a:ln/>
-        </p:spPr>
-        <p:txBody>
-          <a:bodyPr wrap="square" lIns="0" tIns="0" rIns="0" bIns="0" rtlCol="0" anchor="ctr"/>
-          <a:lstStyle/>
-          <a:p>
-            <a:pPr algn="ctr" indent="0" marL="0">
-              <a:buNone/>
-            </a:pPr>
-            <a:r>
-              <a:rPr lang="en-US" sz="1100" dirty="0">
-                <a:solidFill>
-                  <a:srgbClr val="1A2238"/>
-                </a:solidFill>
-                <a:latin typeface="Cambria Math" pitchFamily="34" charset="0"/>
-                <a:ea typeface="Cambria Math" pitchFamily="34" charset="-122"/>
-                <a:cs typeface="Cambria Math" pitchFamily="34" charset="-120"/>
-              </a:rPr>
-              <a:t>Linear 128</a:t>
-            </a:r>
-            <a:endParaRPr lang="en-US" sz="1100" dirty="0"/>
-          </a:p>
-        </p:txBody>
-      </p:sp>
-      <p:sp>
-        <p:nvSpPr>
-          <p:cNvPr id="20" name="Shape 18"/>
-          <p:cNvSpPr/>
-          <p:nvPr/>
-        </p:nvSpPr>
-        <p:spPr>
-          <a:xfrm>
-            <a:off x="640080" y="5266944"/>
-            <a:ext cx="1828800" cy="310896"/>
-          </a:xfrm>
-          <a:prstGeom prst="roundRect">
-            <a:avLst>
-              <a:gd name="adj" fmla="val 17647"/>
-            </a:avLst>
-          </a:prstGeom>
-          <a:solidFill>
-            <a:srgbClr val="EAF0FB"/>
-          </a:solidFill>
-          <a:ln w="15875">
-            <a:solidFill>
-              <a:srgbClr val="285AB4"/>
-            </a:solidFill>
-            <a:prstDash val="solid"/>
-          </a:ln>
-        </p:spPr>
-      </p:sp>
-      <p:sp>
-        <p:nvSpPr>
-          <p:cNvPr id="21" name="Text 19"/>
-          <p:cNvSpPr txBox="1"/>
-          <p:nvPr/>
-        </p:nvSpPr>
-        <p:spPr>
-          <a:xfrm>
-            <a:off x="640080" y="5266944"/>
-            <a:ext cx="1828800" cy="310896"/>
-          </a:xfrm>
-          <a:prstGeom prst="rect">
-            <a:avLst/>
-          </a:prstGeom>
-          <a:noFill/>
-          <a:ln/>
-        </p:spPr>
-        <p:txBody>
-          <a:bodyPr wrap="square" lIns="0" tIns="0" rIns="0" bIns="0" rtlCol="0" anchor="ctr"/>
-          <a:lstStyle/>
-          <a:p>
-            <a:pPr algn="ctr" indent="0" marL="0">
-              <a:buNone/>
-            </a:pPr>
-            <a:r>
-              <a:rPr lang="en-US" sz="1100" dirty="0">
-                <a:solidFill>
-                  <a:srgbClr val="1A2238"/>
-                </a:solidFill>
-                <a:latin typeface="Cambria Math" pitchFamily="34" charset="0"/>
-                <a:ea typeface="Cambria Math" pitchFamily="34" charset="-122"/>
-                <a:cs typeface="Cambria Math" pitchFamily="34" charset="-120"/>
-              </a:rPr>
-              <a:t>ReLU</a:t>
-            </a:r>
-            <a:endParaRPr lang="en-US" sz="1100" dirty="0"/>
-          </a:p>
-        </p:txBody>
-      </p:sp>
-      <p:sp>
-        <p:nvSpPr>
-          <p:cNvPr id="22" name="Shape 20"/>
-          <p:cNvSpPr/>
-          <p:nvPr/>
-        </p:nvSpPr>
-        <p:spPr>
-          <a:xfrm>
-            <a:off x="640080" y="5669280"/>
-            <a:ext cx="1828800" cy="310896"/>
-          </a:xfrm>
-          <a:prstGeom prst="roundRect">
-            <a:avLst>
-              <a:gd name="adj" fmla="val 17647"/>
-            </a:avLst>
-          </a:prstGeom>
-          <a:solidFill>
-            <a:srgbClr val="F1F4F9"/>
-          </a:solidFill>
-          <a:ln w="15875">
-            <a:solidFill>
-              <a:srgbClr val="D9DEE8"/>
-            </a:solidFill>
-            <a:prstDash val="solid"/>
-          </a:ln>
-        </p:spPr>
-      </p:sp>
-      <p:sp>
-        <p:nvSpPr>
-          <p:cNvPr id="23" name="Text 21"/>
-          <p:cNvSpPr txBox="1"/>
-          <p:nvPr/>
-        </p:nvSpPr>
-        <p:spPr>
-          <a:xfrm>
-            <a:off x="640080" y="5669280"/>
-            <a:ext cx="1828800" cy="310896"/>
-          </a:xfrm>
-          <a:prstGeom prst="rect">
-            <a:avLst/>
-          </a:prstGeom>
-          <a:noFill/>
-          <a:ln/>
-        </p:spPr>
-        <p:txBody>
-          <a:bodyPr wrap="square" lIns="0" tIns="0" rIns="0" bIns="0" rtlCol="0" anchor="ctr"/>
-          <a:lstStyle/>
-          <a:p>
-            <a:pPr algn="ctr" indent="0" marL="0">
-              <a:buNone/>
-            </a:pPr>
-            <a:r>
-              <a:rPr lang="en-US" sz="1100" dirty="0">
-                <a:solidFill>
-                  <a:srgbClr val="1A2238"/>
-                </a:solidFill>
-                <a:latin typeface="Cambria Math" pitchFamily="34" charset="0"/>
-                <a:ea typeface="Cambria Math" pitchFamily="34" charset="-122"/>
-                <a:cs typeface="Cambria Math" pitchFamily="34" charset="-120"/>
-              </a:rPr>
-              <a:t>Linear 10</a:t>
-            </a:r>
-            <a:endParaRPr lang="en-US" sz="1100" dirty="0"/>
-          </a:p>
-        </p:txBody>
-      </p:sp>
-      <p:sp>
-        <p:nvSpPr>
-          <p:cNvPr id="24" name="Text 22"/>
-          <p:cNvSpPr txBox="1"/>
-          <p:nvPr/>
-        </p:nvSpPr>
-        <p:spPr>
-          <a:xfrm>
-            <a:off x="3017520" y="2450592"/>
-            <a:ext cx="8534095" cy="3931920"/>
-          </a:xfrm>
-          <a:prstGeom prst="rect">
-            <a:avLst/>
-          </a:prstGeom>
-          <a:noFill/>
-          <a:ln/>
-        </p:spPr>
-        <p:txBody>
-          <a:bodyPr wrap="square" lIns="0" tIns="0" rIns="0" bIns="0" rtlCol="0" anchor="t"/>
-          <a:lstStyle/>
-          <a:p>
-            <a:pPr marL="228600" indent="-228600">
-              <a:spcAft>
-                <a:spcPts val="1400"/>
-              </a:spcAft>
-              <a:buSzPct val="100000"/>
-              <a:buChar char="▪"/>
-            </a:pPr>
-            <a:r>
-              <a:rPr lang="en-US" sz="1400" dirty="0">
-                <a:solidFill>
-                  <a:srgbClr val="1A2238"/>
+            <a:pPr indent="0" marL="0">
+              <a:buNone/>
+            </a:pPr>
+            <a:r>
+              <a:rPr lang="en-US" sz="1200" i="1" dirty="0">
+                <a:solidFill>
+                  <a:srgbClr val="5B6478"/>
                 </a:solidFill>
                 <a:latin typeface="Calibri" pitchFamily="34" charset="0"/>
                 <a:ea typeface="Calibri" pitchFamily="34" charset="-122"/>
                 <a:cs typeface="Calibri" pitchFamily="34" charset="-120"/>
               </a:rPr>
-              <a:t>Kiến trúc: 784 → (Linear 128 → ReLU) × 10 → 10 — cố tình khá sâu (10 hidden layer) để vấn đề gradient thể hiện rõ</a:t>
-            </a:r>
-            <a:endParaRPr lang="en-US" sz="1400" dirty="0"/>
-          </a:p>
-          <a:p>
-            <a:pPr marL="228600" indent="-228600">
-              <a:spcAft>
-                <a:spcPts val="1400"/>
-              </a:spcAft>
-              <a:buSzPct val="100000"/>
-              <a:buChar char="▪"/>
-            </a:pPr>
-            <a:r>
-              <a:rPr lang="en-US" sz="1400" dirty="0">
-                <a:solidFill>
-                  <a:srgbClr val="1A2238"/>
+              <a:t>Đây là MỤC TIÊU chung của Xavier/He, dưới các giả định đơn giản hoá (activation gần tuyến tính quanh 0, weight độc lập...) — không phải một đảm bảo toán học tuyệt đối trong mọi kiến trúc/activation thực tế.</a:t>
+            </a:r>
+            <a:endParaRPr lang="en-US" sz="1200" dirty="0"/>
+          </a:p>
+        </p:txBody>
+      </p:sp>
+      <p:sp>
+        <p:nvSpPr>
+          <p:cNvPr id="13" name="Text 11"/>
+          <p:cNvSpPr txBox="1"/>
+          <p:nvPr/>
+        </p:nvSpPr>
+        <p:spPr>
+          <a:xfrm>
+            <a:off x="11185855" y="6446520"/>
+            <a:ext cx="731520" cy="274320"/>
+          </a:xfrm>
+          <a:prstGeom prst="rect">
+            <a:avLst/>
+          </a:prstGeom>
+          <a:noFill/>
+          <a:ln/>
+        </p:spPr>
+        <p:txBody>
+          <a:bodyPr wrap="square" lIns="0" tIns="0" rIns="0" bIns="0" rtlCol="0" anchor="ctr"/>
+          <a:lstStyle/>
+          <a:p>
+            <a:pPr algn="r" indent="0" marL="0">
+              <a:buNone/>
+            </a:pPr>
+            <a:r>
+              <a:rPr lang="en-US" sz="900" dirty="0">
+                <a:solidFill>
+                  <a:srgbClr val="5B6478"/>
                 </a:solidFill>
                 <a:latin typeface="Calibri" pitchFamily="34" charset="0"/>
                 <a:ea typeface="Calibri" pitchFamily="34" charset="-122"/>
                 <a:cs typeface="Calibri" pitchFamily="34" charset="-120"/>
               </a:rPr>
-              <a:t>Dataset: Fashion-MNIST subset (5,000 train / 1,000 val / 2,000 test) — giống hệt lưới thực nghiệm chính</a:t>
-            </a:r>
-            <a:endParaRPr lang="en-US" sz="1400" dirty="0"/>
-          </a:p>
-          <a:p>
-            <a:pPr marL="228600" indent="-228600">
-              <a:spcAft>
-                <a:spcPts val="1400"/>
-              </a:spcAft>
-              <a:buSzPct val="100000"/>
-              <a:buChar char="▪"/>
-            </a:pPr>
-            <a:r>
-              <a:rPr lang="en-US" sz="1400" dirty="0">
-                <a:solidFill>
-                  <a:srgbClr val="1A2238"/>
+              <a:t>17/29</a:t>
+            </a:r>
+            <a:endParaRPr lang="en-US" sz="900" dirty="0"/>
+          </a:p>
+        </p:txBody>
+      </p:sp>
+      <p:sp>
+        <p:nvSpPr>
+          <p:cNvPr id="14" name="Shape 12"/>
+          <p:cNvSpPr/>
+          <p:nvPr/>
+        </p:nvSpPr>
+        <p:spPr>
+          <a:xfrm>
+            <a:off x="610362" y="6473952"/>
+            <a:ext cx="59436" cy="59436"/>
+          </a:xfrm>
+          <a:prstGeom prst="ellipse">
+            <a:avLst/>
+          </a:prstGeom>
+          <a:solidFill>
+            <a:srgbClr val="D9DEE8"/>
+          </a:solidFill>
+          <a:ln/>
+        </p:spPr>
+      </p:sp>
+      <p:sp>
+        <p:nvSpPr>
+          <p:cNvPr id="15" name="Shape 13"/>
+          <p:cNvSpPr/>
+          <p:nvPr/>
+        </p:nvSpPr>
+        <p:spPr>
+          <a:xfrm>
+            <a:off x="814959" y="6459093"/>
+            <a:ext cx="89154" cy="89154"/>
+          </a:xfrm>
+          <a:prstGeom prst="ellipse">
+            <a:avLst/>
+          </a:prstGeom>
+          <a:solidFill>
+            <a:srgbClr val="285AB4"/>
+          </a:solidFill>
+          <a:ln/>
+        </p:spPr>
+      </p:sp>
+      <p:sp>
+        <p:nvSpPr>
+          <p:cNvPr id="16" name="Shape 14"/>
+          <p:cNvSpPr/>
+          <p:nvPr/>
+        </p:nvSpPr>
+        <p:spPr>
+          <a:xfrm>
+            <a:off x="1049274" y="6473952"/>
+            <a:ext cx="59436" cy="59436"/>
+          </a:xfrm>
+          <a:prstGeom prst="ellipse">
+            <a:avLst/>
+          </a:prstGeom>
+          <a:solidFill>
+            <a:srgbClr val="D9DEE8"/>
+          </a:solidFill>
+          <a:ln/>
+        </p:spPr>
+      </p:sp>
+      <p:sp>
+        <p:nvSpPr>
+          <p:cNvPr id="17" name="Shape 15"/>
+          <p:cNvSpPr/>
+          <p:nvPr/>
+        </p:nvSpPr>
+        <p:spPr>
+          <a:xfrm>
+            <a:off x="1268730" y="6473952"/>
+            <a:ext cx="59436" cy="59436"/>
+          </a:xfrm>
+          <a:prstGeom prst="ellipse">
+            <a:avLst/>
+          </a:prstGeom>
+          <a:solidFill>
+            <a:srgbClr val="D9DEE8"/>
+          </a:solidFill>
+          <a:ln/>
+        </p:spPr>
+      </p:sp>
+      <p:sp>
+        <p:nvSpPr>
+          <p:cNvPr id="18" name="Text 16"/>
+          <p:cNvSpPr txBox="1"/>
+          <p:nvPr/>
+        </p:nvSpPr>
+        <p:spPr>
+          <a:xfrm>
+            <a:off x="1563624" y="6391656"/>
+            <a:ext cx="3291840" cy="274320"/>
+          </a:xfrm>
+          <a:prstGeom prst="rect">
+            <a:avLst/>
+          </a:prstGeom>
+          <a:noFill/>
+          <a:ln/>
+        </p:spPr>
+        <p:txBody>
+          <a:bodyPr wrap="square" lIns="0" tIns="0" rIns="0" bIns="0" rtlCol="0" anchor="ctr"/>
+          <a:lstStyle/>
+          <a:p>
+            <a:pPr indent="0" marL="0">
+              <a:buNone/>
+            </a:pPr>
+            <a:r>
+              <a:rPr lang="en-US" sz="850" spc="50" kern="0" dirty="0">
+                <a:solidFill>
+                  <a:srgbClr val="5B6478"/>
                 </a:solidFill>
                 <a:latin typeface="Calibri" pitchFamily="34" charset="0"/>
                 <a:ea typeface="Calibri" pitchFamily="34" charset="-122"/>
                 <a:cs typeface="Calibri" pitchFamily="34" charset="-120"/>
               </a:rPr>
-              <a:t>Biến duy nhất thay đổi: cách khởi tạo weight (Zero, Random nhỏ, Random lớn, Xavier, He)</a:t>
-            </a:r>
-            <a:endParaRPr lang="en-US" sz="1400" dirty="0"/>
-          </a:p>
-          <a:p>
-            <a:pPr marL="228600" indent="-228600">
-              <a:spcAft>
-                <a:spcPts val="1400"/>
-              </a:spcAft>
-              <a:buSzPct val="100000"/>
-              <a:buChar char="▪"/>
-            </a:pPr>
-            <a:r>
-              <a:rPr lang="en-US" sz="1400" dirty="0">
-                <a:solidFill>
-                  <a:srgbClr val="1A2238"/>
-                </a:solidFill>
-                <a:latin typeface="Calibri" pitchFamily="34" charset="0"/>
-                <a:ea typeface="Calibri" pitchFamily="34" charset="-122"/>
-                <a:cs typeface="Calibri" pitchFamily="34" charset="-120"/>
-              </a:rPr>
-              <a:t>Mọi thứ khác GIỮ NGUYÊN: cùng optimizer (SGD, lr=0.05), cùng seed=42, cùng 15 epoch — fair experiment</a:t>
-            </a:r>
-            <a:endParaRPr lang="en-US" sz="1400" dirty="0"/>
-          </a:p>
-        </p:txBody>
-      </p:sp>
-      <p:sp>
-        <p:nvSpPr>
-          <p:cNvPr id="25" name="Text 23"/>
-          <p:cNvSpPr txBox="1"/>
-          <p:nvPr/>
-        </p:nvSpPr>
-        <p:spPr>
-          <a:xfrm>
-            <a:off x="11185855" y="6446520"/>
-            <a:ext cx="731520" cy="274320"/>
-          </a:xfrm>
-          <a:prstGeom prst="rect">
-            <a:avLst/>
-          </a:prstGeom>
-          <a:noFill/>
-          <a:ln/>
-        </p:spPr>
-        <p:txBody>
-          <a:bodyPr wrap="square" lIns="0" tIns="0" rIns="0" bIns="0" rtlCol="0" anchor="ctr"/>
-          <a:lstStyle/>
-          <a:p>
-            <a:pPr algn="r" indent="0" marL="0">
-              <a:buNone/>
-            </a:pPr>
-            <a:r>
-              <a:rPr lang="en-US" sz="900" dirty="0">
-                <a:solidFill>
-                  <a:srgbClr val="5B6478"/>
-                </a:solidFill>
-                <a:latin typeface="Calibri" pitchFamily="34" charset="0"/>
-                <a:ea typeface="Calibri" pitchFamily="34" charset="-122"/>
-                <a:cs typeface="Calibri" pitchFamily="34" charset="-120"/>
-              </a:rPr>
-              <a:t>17/28</a:t>
-            </a:r>
-            <a:endParaRPr lang="en-US" sz="900" dirty="0"/>
-          </a:p>
-        </p:txBody>
-      </p:sp>
-      <p:sp>
-        <p:nvSpPr>
-          <p:cNvPr id="26" name="Shape 24"/>
-          <p:cNvSpPr/>
-          <p:nvPr/>
-        </p:nvSpPr>
-        <p:spPr>
-          <a:xfrm>
-            <a:off x="610362" y="6473952"/>
-            <a:ext cx="59436" cy="59436"/>
-          </a:xfrm>
-          <a:prstGeom prst="ellipse">
-            <a:avLst/>
-          </a:prstGeom>
-          <a:solidFill>
-            <a:srgbClr val="D9DEE8"/>
-          </a:solidFill>
-          <a:ln/>
-        </p:spPr>
-      </p:sp>
-      <p:sp>
-        <p:nvSpPr>
-          <p:cNvPr id="27" name="Shape 25"/>
-          <p:cNvSpPr/>
-          <p:nvPr/>
-        </p:nvSpPr>
-        <p:spPr>
-          <a:xfrm>
-            <a:off x="829818" y="6473952"/>
-            <a:ext cx="59436" cy="59436"/>
-          </a:xfrm>
-          <a:prstGeom prst="ellipse">
-            <a:avLst/>
-          </a:prstGeom>
-          <a:solidFill>
-            <a:srgbClr val="D9DEE8"/>
-          </a:solidFill>
-          <a:ln/>
-        </p:spPr>
-      </p:sp>
-      <p:sp>
-        <p:nvSpPr>
-          <p:cNvPr id="28" name="Shape 26"/>
-          <p:cNvSpPr/>
-          <p:nvPr/>
-        </p:nvSpPr>
-        <p:spPr>
-          <a:xfrm>
-            <a:off x="1034415" y="6459093"/>
-            <a:ext cx="89154" cy="89154"/>
-          </a:xfrm>
-          <a:prstGeom prst="ellipse">
-            <a:avLst/>
-          </a:prstGeom>
-          <a:solidFill>
-            <a:srgbClr val="285AB4"/>
-          </a:solidFill>
-          <a:ln/>
-        </p:spPr>
-      </p:sp>
-      <p:sp>
-        <p:nvSpPr>
-          <p:cNvPr id="29" name="Shape 27"/>
-          <p:cNvSpPr/>
-          <p:nvPr/>
-        </p:nvSpPr>
-        <p:spPr>
-          <a:xfrm>
-            <a:off x="1268730" y="6473952"/>
-            <a:ext cx="59436" cy="59436"/>
-          </a:xfrm>
-          <a:prstGeom prst="ellipse">
-            <a:avLst/>
-          </a:prstGeom>
-          <a:solidFill>
-            <a:srgbClr val="D9DEE8"/>
-          </a:solidFill>
-          <a:ln/>
-        </p:spPr>
-      </p:sp>
-      <p:sp>
-        <p:nvSpPr>
-          <p:cNvPr id="30" name="Text 28"/>
-          <p:cNvSpPr txBox="1"/>
-          <p:nvPr/>
-        </p:nvSpPr>
-        <p:spPr>
-          <a:xfrm>
-            <a:off x="1563624" y="6391656"/>
-            <a:ext cx="3291840" cy="274320"/>
-          </a:xfrm>
-          <a:prstGeom prst="rect">
-            <a:avLst/>
-          </a:prstGeom>
-          <a:noFill/>
-          <a:ln/>
-        </p:spPr>
-        <p:txBody>
-          <a:bodyPr wrap="square" lIns="0" tIns="0" rIns="0" bIns="0" rtlCol="0" anchor="ctr"/>
-          <a:lstStyle/>
-          <a:p>
-            <a:pPr indent="0" marL="0">
-              <a:buNone/>
-            </a:pPr>
-            <a:r>
-              <a:rPr lang="en-US" sz="850" spc="50" kern="0" dirty="0">
-                <a:solidFill>
-                  <a:srgbClr val="5B6478"/>
-                </a:solidFill>
-                <a:latin typeface="Calibri" pitchFamily="34" charset="0"/>
-                <a:ea typeface="Calibri" pitchFamily="34" charset="-122"/>
-                <a:cs typeface="Calibri" pitchFamily="34" charset="-120"/>
-              </a:rPr>
-              <a:t>EXPERIMENT</a:t>
+              <a:t>VANISHING/EXPLODING &amp; INIT</a:t>
             </a:r>
             <a:endParaRPr lang="en-US" sz="850" dirty="0"/>
           </a:p>
@@ -12247,7 +11949,7 @@
               <a:buNone/>
             </a:pPr>
             <a:r>
-              <a:rPr lang="en-US" sz="2900" b="1" dirty="0">
+              <a:rPr lang="en-US" sz="2600" b="1" dirty="0">
                 <a:solidFill>
                   <a:srgbClr val="1A2238"/>
                 </a:solidFill>
@@ -12255,9 +11957,9 @@
                 <a:ea typeface="Cambria" pitchFamily="34" charset="-122"/>
                 <a:cs typeface="Cambria" pitchFamily="34" charset="-120"/>
               </a:rPr>
-              <a:t>4 nhóm metric được log mỗi cấu hình</a:t>
-            </a:r>
-            <a:endParaRPr lang="en-US" sz="2900" dirty="0"/>
+              <a:t>Thiết kế thực nghiệm</a:t>
+            </a:r>
+            <a:endParaRPr lang="en-US" sz="2600" dirty="0"/>
           </a:p>
         </p:txBody>
       </p:sp>
@@ -12269,18 +11971,18 @@
         </p:nvSpPr>
         <p:spPr>
           <a:xfrm>
-            <a:off x="640080" y="1920240"/>
-            <a:ext cx="10911535" cy="914400"/>
+            <a:off x="640080" y="1600200"/>
+            <a:ext cx="10911535" cy="594360"/>
           </a:xfrm>
           <a:prstGeom prst="roundRect">
             <a:avLst>
-              <a:gd name="adj" fmla="val 6000"/>
+              <a:gd name="adj" fmla="val 12308"/>
             </a:avLst>
           </a:prstGeom>
           <a:solidFill>
             <a:srgbClr val="F1F4F9"/>
           </a:solidFill>
-          <a:ln w="6350">
+          <a:ln w="9525">
             <a:solidFill>
               <a:srgbClr val="D9DEE8"/>
             </a:solidFill>
@@ -12303,8 +12005,8 @@
         </p:nvSpPr>
         <p:spPr>
           <a:xfrm>
-            <a:off x="914400" y="1920240"/>
-            <a:ext cx="3931920" cy="914400"/>
+            <a:off x="868680" y="1600200"/>
+            <a:ext cx="10454335" cy="594360"/>
           </a:xfrm>
           <a:prstGeom prst="rect">
             <a:avLst/>
@@ -12316,107 +12018,61 @@
           <a:bodyPr wrap="square" lIns="0" tIns="0" rIns="0" bIns="0" rtlCol="0" anchor="ctr"/>
           <a:lstStyle/>
           <a:p>
-            <a:pPr indent="0" marL="0">
-              <a:buNone/>
-            </a:pPr>
-            <a:r>
-              <a:rPr lang="en-US" sz="1500" b="1" dirty="0">
+            <a:pPr algn="ctr" indent="0" marL="0">
+              <a:buNone/>
+            </a:pPr>
+            <a:r>
+              <a:rPr lang="en-US" sz="1550" dirty="0">
                 <a:solidFill>
                   <a:srgbClr val="16213E"/>
                 </a:solidFill>
-                <a:latin typeface="Calibri" pitchFamily="34" charset="0"/>
-                <a:ea typeface="Calibri" pitchFamily="34" charset="-122"/>
-                <a:cs typeface="Calibri" pitchFamily="34" charset="-120"/>
-              </a:rPr>
-              <a:t>1. Training Loss &amp; Accuracy</a:t>
-            </a:r>
-            <a:endParaRPr lang="en-US" sz="1500" dirty="0"/>
-          </a:p>
-        </p:txBody>
-      </p:sp>
-      <p:sp>
-        <p:nvSpPr>
-          <p:cNvPr id="6" name="Text 4"/>
-          <p:cNvSpPr txBox="1"/>
-          <p:nvPr/>
-        </p:nvSpPr>
-        <p:spPr>
-          <a:xfrm>
-            <a:off x="4937760" y="1920240"/>
-            <a:ext cx="6339535" cy="914400"/>
-          </a:xfrm>
-          <a:prstGeom prst="rect">
-            <a:avLst/>
-          </a:prstGeom>
-          <a:noFill/>
-          <a:ln/>
-        </p:spPr>
-        <p:txBody>
-          <a:bodyPr wrap="square" lIns="0" tIns="0" rIns="0" bIns="0" rtlCol="0" anchor="ctr"/>
-          <a:lstStyle/>
-          <a:p>
-            <a:pPr indent="0" marL="0">
-              <a:buNone/>
-            </a:pPr>
-            <a:r>
-              <a:rPr lang="en-US" sz="1300" dirty="0">
-                <a:solidFill>
-                  <a:srgbClr val="5B6478"/>
-                </a:solidFill>
-                <a:latin typeface="Calibri" pitchFamily="34" charset="0"/>
-                <a:ea typeface="Calibri" pitchFamily="34" charset="-122"/>
-                <a:cs typeface="Calibri" pitchFamily="34" charset="-120"/>
-              </a:rPr>
-              <a:t>mỗi epoch — train + validation</a:t>
-            </a:r>
-            <a:endParaRPr lang="en-US" sz="1300" dirty="0"/>
-          </a:p>
-        </p:txBody>
-      </p:sp>
-      <p:sp>
-        <p:nvSpPr>
-          <p:cNvPr id="7" name="Shape 5"/>
-          <p:cNvSpPr/>
-          <p:nvPr/>
-        </p:nvSpPr>
-        <p:spPr>
-          <a:xfrm>
-            <a:off x="640080" y="2971800"/>
-            <a:ext cx="10911535" cy="914400"/>
+                <a:latin typeface="Cambria Math" pitchFamily="34" charset="0"/>
+                <a:ea typeface="Cambria Math" pitchFamily="34" charset="-122"/>
+                <a:cs typeface="Cambria Math" pitchFamily="34" charset="-120"/>
+              </a:rPr>
+              <a:t>How does weight initialization affect gradient flow and convergence?</a:t>
+            </a:r>
+            <a:endParaRPr lang="en-US" sz="1550" dirty="0"/>
+          </a:p>
+        </p:txBody>
+      </p:sp>
+      <p:sp>
+        <p:nvSpPr>
+          <p:cNvPr id="6" name="Shape 4"/>
+          <p:cNvSpPr/>
+          <p:nvPr/>
+        </p:nvSpPr>
+        <p:spPr>
+          <a:xfrm>
+            <a:off x="640080" y="2450592"/>
+            <a:ext cx="1828800" cy="310896"/>
           </a:xfrm>
           <a:prstGeom prst="roundRect">
             <a:avLst>
-              <a:gd name="adj" fmla="val 6000"/>
+              <a:gd name="adj" fmla="val 17647"/>
             </a:avLst>
           </a:prstGeom>
           <a:solidFill>
             <a:srgbClr val="F1F4F9"/>
           </a:solidFill>
-          <a:ln w="6350">
+          <a:ln w="15875">
             <a:solidFill>
               <a:srgbClr val="D9DEE8"/>
             </a:solidFill>
             <a:prstDash val="solid"/>
           </a:ln>
-          <a:effectLst>
-            <a:outerShdw sx="100000" sy="100000" kx="0" ky="0" algn="bl" rotWithShape="0" blurRad="114300" dist="38100" dir="5400000">
-              <a:srgbClr val="1A1A2E">
-                <a:alpha val="20000"/>
-              </a:srgbClr>
-            </a:outerShdw>
-          </a:effectLst>
-        </p:spPr>
-      </p:sp>
-      <p:sp>
-        <p:nvSpPr>
-          <p:cNvPr id="8" name="Text 6"/>
-          <p:cNvSpPr txBox="1"/>
-          <p:nvPr/>
-        </p:nvSpPr>
-        <p:spPr>
-          <a:xfrm>
-            <a:off x="914400" y="2971800"/>
-            <a:ext cx="3931920" cy="914400"/>
+        </p:spPr>
+      </p:sp>
+      <p:sp>
+        <p:nvSpPr>
+          <p:cNvPr id="7" name="Text 5"/>
+          <p:cNvSpPr txBox="1"/>
+          <p:nvPr/>
+        </p:nvSpPr>
+        <p:spPr>
+          <a:xfrm>
+            <a:off x="640080" y="2450592"/>
+            <a:ext cx="1828800" cy="310896"/>
           </a:xfrm>
           <a:prstGeom prst="rect">
             <a:avLst/>
@@ -12428,107 +12084,61 @@
           <a:bodyPr wrap="square" lIns="0" tIns="0" rIns="0" bIns="0" rtlCol="0" anchor="ctr"/>
           <a:lstStyle/>
           <a:p>
-            <a:pPr indent="0" marL="0">
-              <a:buNone/>
-            </a:pPr>
-            <a:r>
-              <a:rPr lang="en-US" sz="1500" b="1" dirty="0">
-                <a:solidFill>
-                  <a:srgbClr val="16213E"/>
-                </a:solidFill>
-                <a:latin typeface="Calibri" pitchFamily="34" charset="0"/>
-                <a:ea typeface="Calibri" pitchFamily="34" charset="-122"/>
-                <a:cs typeface="Calibri" pitchFamily="34" charset="-120"/>
-              </a:rPr>
-              <a:t>2. Gradient Norm theo layer</a:t>
-            </a:r>
-            <a:endParaRPr lang="en-US" sz="1500" dirty="0"/>
-          </a:p>
-        </p:txBody>
-      </p:sp>
-      <p:sp>
-        <p:nvSpPr>
-          <p:cNvPr id="9" name="Text 7"/>
-          <p:cNvSpPr txBox="1"/>
-          <p:nvPr/>
-        </p:nvSpPr>
-        <p:spPr>
-          <a:xfrm>
-            <a:off x="4937760" y="2971800"/>
-            <a:ext cx="6339535" cy="914400"/>
-          </a:xfrm>
-          <a:prstGeom prst="rect">
-            <a:avLst/>
-          </a:prstGeom>
-          <a:noFill/>
-          <a:ln/>
-        </p:spPr>
-        <p:txBody>
-          <a:bodyPr wrap="square" lIns="0" tIns="0" rIns="0" bIns="0" rtlCol="0" anchor="ctr"/>
-          <a:lstStyle/>
-          <a:p>
-            <a:pPr indent="0" marL="0">
-              <a:buNone/>
-            </a:pPr>
-            <a:r>
-              <a:rPr lang="en-US" sz="1300" dirty="0">
-                <a:solidFill>
-                  <a:srgbClr val="5B6478"/>
-                </a:solidFill>
-                <a:latin typeface="Calibri" pitchFamily="34" charset="0"/>
-                <a:ea typeface="Calibri" pitchFamily="34" charset="-122"/>
-                <a:cs typeface="Calibri" pitchFamily="34" charset="-120"/>
-              </a:rPr>
-              <a:t>RMS(∂L/∂W⁽ˡ⁾) tại bước khởi tạo đầu tiên — layer.weight.grad.norm()</a:t>
-            </a:r>
-            <a:endParaRPr lang="en-US" sz="1300" dirty="0"/>
-          </a:p>
-        </p:txBody>
-      </p:sp>
-      <p:sp>
-        <p:nvSpPr>
-          <p:cNvPr id="10" name="Shape 8"/>
-          <p:cNvSpPr/>
-          <p:nvPr/>
-        </p:nvSpPr>
-        <p:spPr>
-          <a:xfrm>
-            <a:off x="640080" y="4023360"/>
-            <a:ext cx="10911535" cy="914400"/>
+            <a:pPr algn="ctr" indent="0" marL="0">
+              <a:buNone/>
+            </a:pPr>
+            <a:r>
+              <a:rPr lang="en-US" sz="1100" dirty="0">
+                <a:solidFill>
+                  <a:srgbClr val="1A2238"/>
+                </a:solidFill>
+                <a:latin typeface="Cambria Math" pitchFamily="34" charset="0"/>
+                <a:ea typeface="Cambria Math" pitchFamily="34" charset="-122"/>
+                <a:cs typeface="Cambria Math" pitchFamily="34" charset="-120"/>
+              </a:rPr>
+              <a:t>Input 784</a:t>
+            </a:r>
+            <a:endParaRPr lang="en-US" sz="1100" dirty="0"/>
+          </a:p>
+        </p:txBody>
+      </p:sp>
+      <p:sp>
+        <p:nvSpPr>
+          <p:cNvPr id="8" name="Shape 6"/>
+          <p:cNvSpPr/>
+          <p:nvPr/>
+        </p:nvSpPr>
+        <p:spPr>
+          <a:xfrm>
+            <a:off x="640080" y="2852928"/>
+            <a:ext cx="1828800" cy="310896"/>
           </a:xfrm>
           <a:prstGeom prst="roundRect">
             <a:avLst>
-              <a:gd name="adj" fmla="val 6000"/>
+              <a:gd name="adj" fmla="val 17647"/>
             </a:avLst>
           </a:prstGeom>
           <a:solidFill>
             <a:srgbClr val="F1F4F9"/>
           </a:solidFill>
-          <a:ln w="6350">
+          <a:ln w="15875">
             <a:solidFill>
               <a:srgbClr val="D9DEE8"/>
             </a:solidFill>
             <a:prstDash val="solid"/>
           </a:ln>
-          <a:effectLst>
-            <a:outerShdw sx="100000" sy="100000" kx="0" ky="0" algn="bl" rotWithShape="0" blurRad="114300" dist="38100" dir="5400000">
-              <a:srgbClr val="1A1A2E">
-                <a:alpha val="20000"/>
-              </a:srgbClr>
-            </a:outerShdw>
-          </a:effectLst>
-        </p:spPr>
-      </p:sp>
-      <p:sp>
-        <p:nvSpPr>
-          <p:cNvPr id="11" name="Text 9"/>
-          <p:cNvSpPr txBox="1"/>
-          <p:nvPr/>
-        </p:nvSpPr>
-        <p:spPr>
-          <a:xfrm>
-            <a:off x="914400" y="4023360"/>
-            <a:ext cx="3931920" cy="914400"/>
+        </p:spPr>
+      </p:sp>
+      <p:sp>
+        <p:nvSpPr>
+          <p:cNvPr id="9" name="Text 7"/>
+          <p:cNvSpPr txBox="1"/>
+          <p:nvPr/>
+        </p:nvSpPr>
+        <p:spPr>
+          <a:xfrm>
+            <a:off x="640080" y="2852928"/>
+            <a:ext cx="1828800" cy="310896"/>
           </a:xfrm>
           <a:prstGeom prst="rect">
             <a:avLst/>
@@ -12540,107 +12150,127 @@
           <a:bodyPr wrap="square" lIns="0" tIns="0" rIns="0" bIns="0" rtlCol="0" anchor="ctr"/>
           <a:lstStyle/>
           <a:p>
-            <a:pPr indent="0" marL="0">
-              <a:buNone/>
-            </a:pPr>
-            <a:r>
-              <a:rPr lang="en-US" sz="1500" b="1" dirty="0">
-                <a:solidFill>
-                  <a:srgbClr val="16213E"/>
-                </a:solidFill>
-                <a:latin typeface="Calibri" pitchFamily="34" charset="0"/>
-                <a:ea typeface="Calibri" pitchFamily="34" charset="-122"/>
-                <a:cs typeface="Calibri" pitchFamily="34" charset="-120"/>
-              </a:rPr>
-              <a:t>3. Activation Variance theo layer</a:t>
-            </a:r>
-            <a:endParaRPr lang="en-US" sz="1500" dirty="0"/>
-          </a:p>
-        </p:txBody>
-      </p:sp>
-      <p:sp>
-        <p:nvSpPr>
-          <p:cNvPr id="12" name="Text 10"/>
-          <p:cNvSpPr txBox="1"/>
-          <p:nvPr/>
-        </p:nvSpPr>
-        <p:spPr>
-          <a:xfrm>
-            <a:off x="4937760" y="4023360"/>
-            <a:ext cx="6339535" cy="914400"/>
-          </a:xfrm>
-          <a:prstGeom prst="rect">
-            <a:avLst/>
-          </a:prstGeom>
-          <a:noFill/>
-          <a:ln/>
-        </p:spPr>
-        <p:txBody>
-          <a:bodyPr wrap="square" lIns="0" tIns="0" rIns="0" bIns="0" rtlCol="0" anchor="ctr"/>
-          <a:lstStyle/>
-          <a:p>
-            <a:pPr indent="0" marL="0">
-              <a:buNone/>
-            </a:pPr>
-            <a:r>
-              <a:rPr lang="en-US" sz="1300" dirty="0">
-                <a:solidFill>
-                  <a:srgbClr val="5B6478"/>
-                </a:solidFill>
-                <a:latin typeface="Calibri" pitchFamily="34" charset="0"/>
-                <a:ea typeface="Calibri" pitchFamily="34" charset="-122"/>
-                <a:cs typeface="Calibri" pitchFamily="34" charset="-120"/>
-              </a:rPr>
-              <a:t>Var(A⁽ˡ⁾) tại bước khởi tạo — phát hiện bão hoà/co cụm</a:t>
-            </a:r>
-            <a:endParaRPr lang="en-US" sz="1300" dirty="0"/>
-          </a:p>
-        </p:txBody>
-      </p:sp>
-      <p:sp>
-        <p:nvSpPr>
-          <p:cNvPr id="13" name="Shape 11"/>
-          <p:cNvSpPr/>
-          <p:nvPr/>
-        </p:nvSpPr>
-        <p:spPr>
-          <a:xfrm>
-            <a:off x="640080" y="5074920"/>
-            <a:ext cx="10911535" cy="914400"/>
+            <a:pPr algn="ctr" indent="0" marL="0">
+              <a:buNone/>
+            </a:pPr>
+            <a:r>
+              <a:rPr lang="en-US" sz="1100" dirty="0">
+                <a:solidFill>
+                  <a:srgbClr val="1A2238"/>
+                </a:solidFill>
+                <a:latin typeface="Cambria Math" pitchFamily="34" charset="0"/>
+                <a:ea typeface="Cambria Math" pitchFamily="34" charset="-122"/>
+                <a:cs typeface="Cambria Math" pitchFamily="34" charset="-120"/>
+              </a:rPr>
+              <a:t>Linear 128</a:t>
+            </a:r>
+            <a:endParaRPr lang="en-US" sz="1100" dirty="0"/>
+          </a:p>
+        </p:txBody>
+      </p:sp>
+      <p:sp>
+        <p:nvSpPr>
+          <p:cNvPr id="10" name="Shape 8"/>
+          <p:cNvSpPr/>
+          <p:nvPr/>
+        </p:nvSpPr>
+        <p:spPr>
+          <a:xfrm>
+            <a:off x="640080" y="3255264"/>
+            <a:ext cx="1828800" cy="310896"/>
           </a:xfrm>
           <a:prstGeom prst="roundRect">
             <a:avLst>
-              <a:gd name="adj" fmla="val 6000"/>
+              <a:gd name="adj" fmla="val 17647"/>
+            </a:avLst>
+          </a:prstGeom>
+          <a:solidFill>
+            <a:srgbClr val="EAF0FB"/>
+          </a:solidFill>
+          <a:ln w="15875">
+            <a:solidFill>
+              <a:srgbClr val="285AB4"/>
+            </a:solidFill>
+            <a:prstDash val="solid"/>
+          </a:ln>
+        </p:spPr>
+      </p:sp>
+      <p:sp>
+        <p:nvSpPr>
+          <p:cNvPr id="11" name="Text 9"/>
+          <p:cNvSpPr txBox="1"/>
+          <p:nvPr/>
+        </p:nvSpPr>
+        <p:spPr>
+          <a:xfrm>
+            <a:off x="640080" y="3255264"/>
+            <a:ext cx="1828800" cy="310896"/>
+          </a:xfrm>
+          <a:prstGeom prst="rect">
+            <a:avLst/>
+          </a:prstGeom>
+          <a:noFill/>
+          <a:ln/>
+        </p:spPr>
+        <p:txBody>
+          <a:bodyPr wrap="square" lIns="0" tIns="0" rIns="0" bIns="0" rtlCol="0" anchor="ctr"/>
+          <a:lstStyle/>
+          <a:p>
+            <a:pPr algn="ctr" indent="0" marL="0">
+              <a:buNone/>
+            </a:pPr>
+            <a:r>
+              <a:rPr lang="en-US" sz="1100" dirty="0">
+                <a:solidFill>
+                  <a:srgbClr val="1A2238"/>
+                </a:solidFill>
+                <a:latin typeface="Cambria Math" pitchFamily="34" charset="0"/>
+                <a:ea typeface="Cambria Math" pitchFamily="34" charset="-122"/>
+                <a:cs typeface="Cambria Math" pitchFamily="34" charset="-120"/>
+              </a:rPr>
+              <a:t>ReLU</a:t>
+            </a:r>
+            <a:endParaRPr lang="en-US" sz="1100" dirty="0"/>
+          </a:p>
+        </p:txBody>
+      </p:sp>
+      <p:sp>
+        <p:nvSpPr>
+          <p:cNvPr id="12" name="Shape 10"/>
+          <p:cNvSpPr/>
+          <p:nvPr/>
+        </p:nvSpPr>
+        <p:spPr>
+          <a:xfrm>
+            <a:off x="640080" y="3657600"/>
+            <a:ext cx="1828800" cy="310896"/>
+          </a:xfrm>
+          <a:prstGeom prst="roundRect">
+            <a:avLst>
+              <a:gd name="adj" fmla="val 17647"/>
             </a:avLst>
           </a:prstGeom>
           <a:solidFill>
             <a:srgbClr val="F1F4F9"/>
           </a:solidFill>
-          <a:ln w="6350">
+          <a:ln w="15875">
             <a:solidFill>
               <a:srgbClr val="D9DEE8"/>
             </a:solidFill>
             <a:prstDash val="solid"/>
           </a:ln>
-          <a:effectLst>
-            <a:outerShdw sx="100000" sy="100000" kx="0" ky="0" algn="bl" rotWithShape="0" blurRad="114300" dist="38100" dir="5400000">
-              <a:srgbClr val="1A1A2E">
-                <a:alpha val="20000"/>
-              </a:srgbClr>
-            </a:outerShdw>
-          </a:effectLst>
-        </p:spPr>
-      </p:sp>
-      <p:sp>
-        <p:nvSpPr>
-          <p:cNvPr id="14" name="Text 12"/>
-          <p:cNvSpPr txBox="1"/>
-          <p:nvPr/>
-        </p:nvSpPr>
-        <p:spPr>
-          <a:xfrm>
-            <a:off x="914400" y="5074920"/>
-            <a:ext cx="3931920" cy="914400"/>
+        </p:spPr>
+      </p:sp>
+      <p:sp>
+        <p:nvSpPr>
+          <p:cNvPr id="13" name="Text 11"/>
+          <p:cNvSpPr txBox="1"/>
+          <p:nvPr/>
+        </p:nvSpPr>
+        <p:spPr>
+          <a:xfrm>
+            <a:off x="640080" y="3657600"/>
+            <a:ext cx="1828800" cy="310896"/>
           </a:xfrm>
           <a:prstGeom prst="rect">
             <a:avLst/>
@@ -12652,97 +12282,494 @@
           <a:bodyPr wrap="square" lIns="0" tIns="0" rIns="0" bIns="0" rtlCol="0" anchor="ctr"/>
           <a:lstStyle/>
           <a:p>
-            <a:pPr indent="0" marL="0">
-              <a:buNone/>
-            </a:pPr>
-            <a:r>
-              <a:rPr lang="en-US" sz="1500" b="1" dirty="0">
-                <a:solidFill>
-                  <a:srgbClr val="16213E"/>
+            <a:pPr algn="ctr" indent="0" marL="0">
+              <a:buNone/>
+            </a:pPr>
+            <a:r>
+              <a:rPr lang="en-US" sz="1100" dirty="0">
+                <a:solidFill>
+                  <a:srgbClr val="1A2238"/>
+                </a:solidFill>
+                <a:latin typeface="Cambria Math" pitchFamily="34" charset="0"/>
+                <a:ea typeface="Cambria Math" pitchFamily="34" charset="-122"/>
+                <a:cs typeface="Cambria Math" pitchFamily="34" charset="-120"/>
+              </a:rPr>
+              <a:t>Linear 128</a:t>
+            </a:r>
+            <a:endParaRPr lang="en-US" sz="1100" dirty="0"/>
+          </a:p>
+        </p:txBody>
+      </p:sp>
+      <p:sp>
+        <p:nvSpPr>
+          <p:cNvPr id="14" name="Shape 12"/>
+          <p:cNvSpPr/>
+          <p:nvPr/>
+        </p:nvSpPr>
+        <p:spPr>
+          <a:xfrm>
+            <a:off x="640080" y="4059936"/>
+            <a:ext cx="1828800" cy="310896"/>
+          </a:xfrm>
+          <a:prstGeom prst="roundRect">
+            <a:avLst>
+              <a:gd name="adj" fmla="val 17647"/>
+            </a:avLst>
+          </a:prstGeom>
+          <a:solidFill>
+            <a:srgbClr val="EAF0FB"/>
+          </a:solidFill>
+          <a:ln w="15875">
+            <a:solidFill>
+              <a:srgbClr val="285AB4"/>
+            </a:solidFill>
+            <a:prstDash val="solid"/>
+          </a:ln>
+        </p:spPr>
+      </p:sp>
+      <p:sp>
+        <p:nvSpPr>
+          <p:cNvPr id="15" name="Text 13"/>
+          <p:cNvSpPr txBox="1"/>
+          <p:nvPr/>
+        </p:nvSpPr>
+        <p:spPr>
+          <a:xfrm>
+            <a:off x="640080" y="4059936"/>
+            <a:ext cx="1828800" cy="310896"/>
+          </a:xfrm>
+          <a:prstGeom prst="rect">
+            <a:avLst/>
+          </a:prstGeom>
+          <a:noFill/>
+          <a:ln/>
+        </p:spPr>
+        <p:txBody>
+          <a:bodyPr wrap="square" lIns="0" tIns="0" rIns="0" bIns="0" rtlCol="0" anchor="ctr"/>
+          <a:lstStyle/>
+          <a:p>
+            <a:pPr algn="ctr" indent="0" marL="0">
+              <a:buNone/>
+            </a:pPr>
+            <a:r>
+              <a:rPr lang="en-US" sz="1100" dirty="0">
+                <a:solidFill>
+                  <a:srgbClr val="1A2238"/>
+                </a:solidFill>
+                <a:latin typeface="Cambria Math" pitchFamily="34" charset="0"/>
+                <a:ea typeface="Cambria Math" pitchFamily="34" charset="-122"/>
+                <a:cs typeface="Cambria Math" pitchFamily="34" charset="-120"/>
+              </a:rPr>
+              <a:t>ReLU</a:t>
+            </a:r>
+            <a:endParaRPr lang="en-US" sz="1100" dirty="0"/>
+          </a:p>
+        </p:txBody>
+      </p:sp>
+      <p:sp>
+        <p:nvSpPr>
+          <p:cNvPr id="16" name="Shape 14"/>
+          <p:cNvSpPr/>
+          <p:nvPr/>
+        </p:nvSpPr>
+        <p:spPr>
+          <a:xfrm>
+            <a:off x="640080" y="4462272"/>
+            <a:ext cx="1828800" cy="310896"/>
+          </a:xfrm>
+          <a:prstGeom prst="roundRect">
+            <a:avLst>
+              <a:gd name="adj" fmla="val 17647"/>
+            </a:avLst>
+          </a:prstGeom>
+          <a:solidFill>
+            <a:srgbClr val="F1F4F9"/>
+          </a:solidFill>
+          <a:ln w="15875">
+            <a:solidFill>
+              <a:srgbClr val="D9DEE8"/>
+            </a:solidFill>
+            <a:prstDash val="solid"/>
+          </a:ln>
+        </p:spPr>
+      </p:sp>
+      <p:sp>
+        <p:nvSpPr>
+          <p:cNvPr id="17" name="Text 15"/>
+          <p:cNvSpPr txBox="1"/>
+          <p:nvPr/>
+        </p:nvSpPr>
+        <p:spPr>
+          <a:xfrm>
+            <a:off x="640080" y="4462272"/>
+            <a:ext cx="1828800" cy="310896"/>
+          </a:xfrm>
+          <a:prstGeom prst="rect">
+            <a:avLst/>
+          </a:prstGeom>
+          <a:noFill/>
+          <a:ln/>
+        </p:spPr>
+        <p:txBody>
+          <a:bodyPr wrap="square" lIns="0" tIns="0" rIns="0" bIns="0" rtlCol="0" anchor="ctr"/>
+          <a:lstStyle/>
+          <a:p>
+            <a:pPr algn="ctr" indent="0" marL="0">
+              <a:buNone/>
+            </a:pPr>
+            <a:r>
+              <a:rPr lang="en-US" sz="1100" dirty="0">
+                <a:solidFill>
+                  <a:srgbClr val="1A2238"/>
+                </a:solidFill>
+                <a:latin typeface="Cambria Math" pitchFamily="34" charset="0"/>
+                <a:ea typeface="Cambria Math" pitchFamily="34" charset="-122"/>
+                <a:cs typeface="Cambria Math" pitchFamily="34" charset="-120"/>
+              </a:rPr>
+              <a:t>...</a:t>
+            </a:r>
+            <a:endParaRPr lang="en-US" sz="1100" dirty="0"/>
+          </a:p>
+        </p:txBody>
+      </p:sp>
+      <p:sp>
+        <p:nvSpPr>
+          <p:cNvPr id="18" name="Shape 16"/>
+          <p:cNvSpPr/>
+          <p:nvPr/>
+        </p:nvSpPr>
+        <p:spPr>
+          <a:xfrm>
+            <a:off x="640080" y="4864608"/>
+            <a:ext cx="1828800" cy="310896"/>
+          </a:xfrm>
+          <a:prstGeom prst="roundRect">
+            <a:avLst>
+              <a:gd name="adj" fmla="val 17647"/>
+            </a:avLst>
+          </a:prstGeom>
+          <a:solidFill>
+            <a:srgbClr val="F1F4F9"/>
+          </a:solidFill>
+          <a:ln w="15875">
+            <a:solidFill>
+              <a:srgbClr val="D9DEE8"/>
+            </a:solidFill>
+            <a:prstDash val="solid"/>
+          </a:ln>
+        </p:spPr>
+      </p:sp>
+      <p:sp>
+        <p:nvSpPr>
+          <p:cNvPr id="19" name="Text 17"/>
+          <p:cNvSpPr txBox="1"/>
+          <p:nvPr/>
+        </p:nvSpPr>
+        <p:spPr>
+          <a:xfrm>
+            <a:off x="640080" y="4864608"/>
+            <a:ext cx="1828800" cy="310896"/>
+          </a:xfrm>
+          <a:prstGeom prst="rect">
+            <a:avLst/>
+          </a:prstGeom>
+          <a:noFill/>
+          <a:ln/>
+        </p:spPr>
+        <p:txBody>
+          <a:bodyPr wrap="square" lIns="0" tIns="0" rIns="0" bIns="0" rtlCol="0" anchor="ctr"/>
+          <a:lstStyle/>
+          <a:p>
+            <a:pPr algn="ctr" indent="0" marL="0">
+              <a:buNone/>
+            </a:pPr>
+            <a:r>
+              <a:rPr lang="en-US" sz="1100" dirty="0">
+                <a:solidFill>
+                  <a:srgbClr val="1A2238"/>
+                </a:solidFill>
+                <a:latin typeface="Cambria Math" pitchFamily="34" charset="0"/>
+                <a:ea typeface="Cambria Math" pitchFamily="34" charset="-122"/>
+                <a:cs typeface="Cambria Math" pitchFamily="34" charset="-120"/>
+              </a:rPr>
+              <a:t>Linear 128</a:t>
+            </a:r>
+            <a:endParaRPr lang="en-US" sz="1100" dirty="0"/>
+          </a:p>
+        </p:txBody>
+      </p:sp>
+      <p:sp>
+        <p:nvSpPr>
+          <p:cNvPr id="20" name="Shape 18"/>
+          <p:cNvSpPr/>
+          <p:nvPr/>
+        </p:nvSpPr>
+        <p:spPr>
+          <a:xfrm>
+            <a:off x="640080" y="5266944"/>
+            <a:ext cx="1828800" cy="310896"/>
+          </a:xfrm>
+          <a:prstGeom prst="roundRect">
+            <a:avLst>
+              <a:gd name="adj" fmla="val 17647"/>
+            </a:avLst>
+          </a:prstGeom>
+          <a:solidFill>
+            <a:srgbClr val="EAF0FB"/>
+          </a:solidFill>
+          <a:ln w="15875">
+            <a:solidFill>
+              <a:srgbClr val="285AB4"/>
+            </a:solidFill>
+            <a:prstDash val="solid"/>
+          </a:ln>
+        </p:spPr>
+      </p:sp>
+      <p:sp>
+        <p:nvSpPr>
+          <p:cNvPr id="21" name="Text 19"/>
+          <p:cNvSpPr txBox="1"/>
+          <p:nvPr/>
+        </p:nvSpPr>
+        <p:spPr>
+          <a:xfrm>
+            <a:off x="640080" y="5266944"/>
+            <a:ext cx="1828800" cy="310896"/>
+          </a:xfrm>
+          <a:prstGeom prst="rect">
+            <a:avLst/>
+          </a:prstGeom>
+          <a:noFill/>
+          <a:ln/>
+        </p:spPr>
+        <p:txBody>
+          <a:bodyPr wrap="square" lIns="0" tIns="0" rIns="0" bIns="0" rtlCol="0" anchor="ctr"/>
+          <a:lstStyle/>
+          <a:p>
+            <a:pPr algn="ctr" indent="0" marL="0">
+              <a:buNone/>
+            </a:pPr>
+            <a:r>
+              <a:rPr lang="en-US" sz="1100" dirty="0">
+                <a:solidFill>
+                  <a:srgbClr val="1A2238"/>
+                </a:solidFill>
+                <a:latin typeface="Cambria Math" pitchFamily="34" charset="0"/>
+                <a:ea typeface="Cambria Math" pitchFamily="34" charset="-122"/>
+                <a:cs typeface="Cambria Math" pitchFamily="34" charset="-120"/>
+              </a:rPr>
+              <a:t>ReLU</a:t>
+            </a:r>
+            <a:endParaRPr lang="en-US" sz="1100" dirty="0"/>
+          </a:p>
+        </p:txBody>
+      </p:sp>
+      <p:sp>
+        <p:nvSpPr>
+          <p:cNvPr id="22" name="Shape 20"/>
+          <p:cNvSpPr/>
+          <p:nvPr/>
+        </p:nvSpPr>
+        <p:spPr>
+          <a:xfrm>
+            <a:off x="640080" y="5669280"/>
+            <a:ext cx="1828800" cy="310896"/>
+          </a:xfrm>
+          <a:prstGeom prst="roundRect">
+            <a:avLst>
+              <a:gd name="adj" fmla="val 17647"/>
+            </a:avLst>
+          </a:prstGeom>
+          <a:solidFill>
+            <a:srgbClr val="F1F4F9"/>
+          </a:solidFill>
+          <a:ln w="15875">
+            <a:solidFill>
+              <a:srgbClr val="D9DEE8"/>
+            </a:solidFill>
+            <a:prstDash val="solid"/>
+          </a:ln>
+        </p:spPr>
+      </p:sp>
+      <p:sp>
+        <p:nvSpPr>
+          <p:cNvPr id="23" name="Text 21"/>
+          <p:cNvSpPr txBox="1"/>
+          <p:nvPr/>
+        </p:nvSpPr>
+        <p:spPr>
+          <a:xfrm>
+            <a:off x="640080" y="5669280"/>
+            <a:ext cx="1828800" cy="310896"/>
+          </a:xfrm>
+          <a:prstGeom prst="rect">
+            <a:avLst/>
+          </a:prstGeom>
+          <a:noFill/>
+          <a:ln/>
+        </p:spPr>
+        <p:txBody>
+          <a:bodyPr wrap="square" lIns="0" tIns="0" rIns="0" bIns="0" rtlCol="0" anchor="ctr"/>
+          <a:lstStyle/>
+          <a:p>
+            <a:pPr algn="ctr" indent="0" marL="0">
+              <a:buNone/>
+            </a:pPr>
+            <a:r>
+              <a:rPr lang="en-US" sz="1100" dirty="0">
+                <a:solidFill>
+                  <a:srgbClr val="1A2238"/>
+                </a:solidFill>
+                <a:latin typeface="Cambria Math" pitchFamily="34" charset="0"/>
+                <a:ea typeface="Cambria Math" pitchFamily="34" charset="-122"/>
+                <a:cs typeface="Cambria Math" pitchFamily="34" charset="-120"/>
+              </a:rPr>
+              <a:t>Linear 10</a:t>
+            </a:r>
+            <a:endParaRPr lang="en-US" sz="1100" dirty="0"/>
+          </a:p>
+        </p:txBody>
+      </p:sp>
+      <p:sp>
+        <p:nvSpPr>
+          <p:cNvPr id="24" name="Text 22"/>
+          <p:cNvSpPr txBox="1"/>
+          <p:nvPr/>
+        </p:nvSpPr>
+        <p:spPr>
+          <a:xfrm>
+            <a:off x="3017520" y="2450592"/>
+            <a:ext cx="8534095" cy="3931920"/>
+          </a:xfrm>
+          <a:prstGeom prst="rect">
+            <a:avLst/>
+          </a:prstGeom>
+          <a:noFill/>
+          <a:ln/>
+        </p:spPr>
+        <p:txBody>
+          <a:bodyPr wrap="square" lIns="0" tIns="0" rIns="0" bIns="0" rtlCol="0" anchor="t"/>
+          <a:lstStyle/>
+          <a:p>
+            <a:pPr marL="228600" indent="-228600">
+              <a:spcAft>
+                <a:spcPts val="1400"/>
+              </a:spcAft>
+              <a:buSzPct val="100000"/>
+              <a:buChar char="▪"/>
+            </a:pPr>
+            <a:r>
+              <a:rPr lang="en-US" sz="1400" dirty="0">
+                <a:solidFill>
+                  <a:srgbClr val="1A2238"/>
                 </a:solidFill>
                 <a:latin typeface="Calibri" pitchFamily="34" charset="0"/>
                 <a:ea typeface="Calibri" pitchFamily="34" charset="-122"/>
                 <a:cs typeface="Calibri" pitchFamily="34" charset="-120"/>
               </a:rPr>
-              <a:t>4. Weight Variance theo layer</a:t>
-            </a:r>
-            <a:endParaRPr lang="en-US" sz="1500" dirty="0"/>
-          </a:p>
-        </p:txBody>
-      </p:sp>
-      <p:sp>
-        <p:nvSpPr>
-          <p:cNvPr id="15" name="Text 13"/>
-          <p:cNvSpPr txBox="1"/>
-          <p:nvPr/>
-        </p:nvSpPr>
-        <p:spPr>
-          <a:xfrm>
-            <a:off x="4937760" y="5074920"/>
-            <a:ext cx="6339535" cy="914400"/>
-          </a:xfrm>
-          <a:prstGeom prst="rect">
-            <a:avLst/>
-          </a:prstGeom>
-          <a:noFill/>
-          <a:ln/>
-        </p:spPr>
-        <p:txBody>
-          <a:bodyPr wrap="square" lIns="0" tIns="0" rIns="0" bIns="0" rtlCol="0" anchor="ctr"/>
-          <a:lstStyle/>
-          <a:p>
-            <a:pPr indent="0" marL="0">
-              <a:buNone/>
-            </a:pPr>
-            <a:r>
-              <a:rPr lang="en-US" sz="1300" dirty="0">
-                <a:solidFill>
-                  <a:srgbClr val="5B6478"/>
+              <a:t>Kiến trúc: 784 → (Linear 128 → ReLU) × 10 → 10 — cố tình khá sâu (10 hidden layer) để vấn đề gradient thể hiện rõ</a:t>
+            </a:r>
+            <a:endParaRPr lang="en-US" sz="1400" dirty="0"/>
+          </a:p>
+          <a:p>
+            <a:pPr marL="228600" indent="-228600">
+              <a:spcAft>
+                <a:spcPts val="1400"/>
+              </a:spcAft>
+              <a:buSzPct val="100000"/>
+              <a:buChar char="▪"/>
+            </a:pPr>
+            <a:r>
+              <a:rPr lang="en-US" sz="1400" dirty="0">
+                <a:solidFill>
+                  <a:srgbClr val="1A2238"/>
                 </a:solidFill>
                 <a:latin typeface="Calibri" pitchFamily="34" charset="0"/>
                 <a:ea typeface="Calibri" pitchFamily="34" charset="-122"/>
                 <a:cs typeface="Calibri" pitchFamily="34" charset="-120"/>
               </a:rPr>
-              <a:t>đối chiếu Var(W) đo thực tế vs. công thức lý thuyết</a:t>
-            </a:r>
-            <a:endParaRPr lang="en-US" sz="1300" dirty="0"/>
-          </a:p>
-        </p:txBody>
-      </p:sp>
-      <p:sp>
-        <p:nvSpPr>
-          <p:cNvPr id="16" name="Text 14"/>
-          <p:cNvSpPr txBox="1"/>
-          <p:nvPr/>
-        </p:nvSpPr>
-        <p:spPr>
-          <a:xfrm>
-            <a:off x="11185855" y="6446520"/>
-            <a:ext cx="731520" cy="274320"/>
-          </a:xfrm>
-          <a:prstGeom prst="rect">
-            <a:avLst/>
-          </a:prstGeom>
-          <a:noFill/>
-          <a:ln/>
-        </p:spPr>
-        <p:txBody>
-          <a:bodyPr wrap="square" lIns="0" tIns="0" rIns="0" bIns="0" rtlCol="0" anchor="ctr"/>
-          <a:lstStyle/>
-          <a:p>
-            <a:pPr algn="r" indent="0" marL="0">
-              <a:buNone/>
-            </a:pPr>
-            <a:r>
-              <a:rPr lang="en-US" sz="900" dirty="0">
-                <a:solidFill>
-                  <a:srgbClr val="5B6478"/>
+              <a:t>Dataset: Fashion-MNIST subset (5,000 train / 1,000 val / 2,000 test) — giống hệt lưới thực nghiệm chính</a:t>
+            </a:r>
+            <a:endParaRPr lang="en-US" sz="1400" dirty="0"/>
+          </a:p>
+          <a:p>
+            <a:pPr marL="228600" indent="-228600">
+              <a:spcAft>
+                <a:spcPts val="1400"/>
+              </a:spcAft>
+              <a:buSzPct val="100000"/>
+              <a:buChar char="▪"/>
+            </a:pPr>
+            <a:r>
+              <a:rPr lang="en-US" sz="1400" dirty="0">
+                <a:solidFill>
+                  <a:srgbClr val="1A2238"/>
                 </a:solidFill>
                 <a:latin typeface="Calibri" pitchFamily="34" charset="0"/>
                 <a:ea typeface="Calibri" pitchFamily="34" charset="-122"/>
                 <a:cs typeface="Calibri" pitchFamily="34" charset="-120"/>
               </a:rPr>
-              <a:t>18/28</a:t>
+              <a:t>Biến duy nhất thay đổi: cách khởi tạo weight (Zero, Random nhỏ, Random lớn, Xavier, He)</a:t>
+            </a:r>
+            <a:endParaRPr lang="en-US" sz="1400" dirty="0"/>
+          </a:p>
+          <a:p>
+            <a:pPr marL="228600" indent="-228600">
+              <a:spcAft>
+                <a:spcPts val="1400"/>
+              </a:spcAft>
+              <a:buSzPct val="100000"/>
+              <a:buChar char="▪"/>
+            </a:pPr>
+            <a:r>
+              <a:rPr lang="en-US" sz="1400" dirty="0">
+                <a:solidFill>
+                  <a:srgbClr val="1A2238"/>
+                </a:solidFill>
+                <a:latin typeface="Calibri" pitchFamily="34" charset="0"/>
+                <a:ea typeface="Calibri" pitchFamily="34" charset="-122"/>
+                <a:cs typeface="Calibri" pitchFamily="34" charset="-120"/>
+              </a:rPr>
+              <a:t>Mọi thứ khác GIỮ NGUYÊN: cùng optimizer (SGD, lr=0.05), cùng 15 epoch — cùng seed giúp reproducibility và giảm một nguồn randomness khi so sánh (không thay thế cho việc lặp lại nhiều seed — xem slide Multi-seed)</a:t>
+            </a:r>
+            <a:endParaRPr lang="en-US" sz="1400" dirty="0"/>
+          </a:p>
+        </p:txBody>
+      </p:sp>
+      <p:sp>
+        <p:nvSpPr>
+          <p:cNvPr id="25" name="Text 23"/>
+          <p:cNvSpPr txBox="1"/>
+          <p:nvPr/>
+        </p:nvSpPr>
+        <p:spPr>
+          <a:xfrm>
+            <a:off x="11185855" y="6446520"/>
+            <a:ext cx="731520" cy="274320"/>
+          </a:xfrm>
+          <a:prstGeom prst="rect">
+            <a:avLst/>
+          </a:prstGeom>
+          <a:noFill/>
+          <a:ln/>
+        </p:spPr>
+        <p:txBody>
+          <a:bodyPr wrap="square" lIns="0" tIns="0" rIns="0" bIns="0" rtlCol="0" anchor="ctr"/>
+          <a:lstStyle/>
+          <a:p>
+            <a:pPr algn="r" indent="0" marL="0">
+              <a:buNone/>
+            </a:pPr>
+            <a:r>
+              <a:rPr lang="en-US" sz="900" dirty="0">
+                <a:solidFill>
+                  <a:srgbClr val="5B6478"/>
+                </a:solidFill>
+                <a:latin typeface="Calibri" pitchFamily="34" charset="0"/>
+                <a:ea typeface="Calibri" pitchFamily="34" charset="-122"/>
+                <a:cs typeface="Calibri" pitchFamily="34" charset="-120"/>
+              </a:rPr>
+              <a:t>18/29</a:t>
             </a:r>
             <a:endParaRPr lang="en-US" sz="900" dirty="0"/>
           </a:p>
@@ -12750,7 +12777,7 @@
       </p:sp>
       <p:sp>
         <p:nvSpPr>
-          <p:cNvPr id="17" name="Shape 15"/>
+          <p:cNvPr id="26" name="Shape 24"/>
           <p:cNvSpPr/>
           <p:nvPr/>
         </p:nvSpPr>
@@ -12770,7 +12797,7 @@
       </p:sp>
       <p:sp>
         <p:nvSpPr>
-          <p:cNvPr id="18" name="Shape 16"/>
+          <p:cNvPr id="27" name="Shape 25"/>
           <p:cNvSpPr/>
           <p:nvPr/>
         </p:nvSpPr>
@@ -12790,7 +12817,7 @@
       </p:sp>
       <p:sp>
         <p:nvSpPr>
-          <p:cNvPr id="19" name="Shape 17"/>
+          <p:cNvPr id="28" name="Shape 26"/>
           <p:cNvSpPr/>
           <p:nvPr/>
         </p:nvSpPr>
@@ -12810,7 +12837,7 @@
       </p:sp>
       <p:sp>
         <p:nvSpPr>
-          <p:cNvPr id="20" name="Shape 18"/>
+          <p:cNvPr id="29" name="Shape 27"/>
           <p:cNvSpPr/>
           <p:nvPr/>
         </p:nvSpPr>
@@ -12830,7 +12857,7 @@
       </p:sp>
       <p:sp>
         <p:nvSpPr>
-          <p:cNvPr id="21" name="Text 19"/>
+          <p:cNvPr id="30" name="Text 28"/>
           <p:cNvSpPr txBox="1"/>
           <p:nvPr/>
         </p:nvSpPr>
@@ -12925,7 +12952,7 @@
                 <a:ea typeface="Calibri" pitchFamily="34" charset="-122"/>
                 <a:cs typeface="Calibri" pitchFamily="34" charset="-120"/>
               </a:rPr>
-              <a:t>DEMO — EXPERIMENT 1 &amp; 2</a:t>
+              <a:t>DEMO — MINI RESEARCH EXPERIMENT</a:t>
             </a:r>
             <a:endParaRPr lang="en-US" sz="1300" dirty="0"/>
           </a:p>
@@ -12956,7 +12983,7 @@
               <a:buNone/>
             </a:pPr>
             <a:r>
-              <a:rPr lang="en-US" sz="2400" b="1" dirty="0">
+              <a:rPr lang="en-US" sz="2900" b="1" dirty="0">
                 <a:solidFill>
                   <a:srgbClr val="1A2238"/>
                 </a:solidFill>
@@ -12964,9 +12991,9 @@
                 <a:ea typeface="Cambria" pitchFamily="34" charset="-122"/>
                 <a:cs typeface="Cambria" pitchFamily="34" charset="-120"/>
               </a:rPr>
-              <a:t>Zero vs. Random nhỏ (std=0.01) — cả hai đều VANISHING</a:t>
-            </a:r>
-            <a:endParaRPr lang="en-US" sz="2400" dirty="0"/>
+              <a:t>4 nhóm metric được log mỗi cấu hình</a:t>
+            </a:r>
+            <a:endParaRPr lang="en-US" sz="2900" dirty="0"/>
           </a:p>
         </p:txBody>
       </p:sp>
@@ -12978,18 +13005,30 @@
         </p:nvSpPr>
         <p:spPr>
           <a:xfrm>
-            <a:off x="640080" y="1691640"/>
-            <a:ext cx="10911535" cy="1554480"/>
+            <a:off x="640080" y="1920240"/>
+            <a:ext cx="10911535" cy="914400"/>
           </a:xfrm>
           <a:prstGeom prst="roundRect">
             <a:avLst>
-              <a:gd name="adj" fmla="val 2941"/>
+              <a:gd name="adj" fmla="val 6000"/>
             </a:avLst>
           </a:prstGeom>
           <a:solidFill>
-            <a:srgbClr val="1E2A44"/>
+            <a:srgbClr val="F1F4F9"/>
           </a:solidFill>
-          <a:ln/>
+          <a:ln w="6350">
+            <a:solidFill>
+              <a:srgbClr val="D9DEE8"/>
+            </a:solidFill>
+            <a:prstDash val="solid"/>
+          </a:ln>
+          <a:effectLst>
+            <a:outerShdw sx="100000" sy="100000" kx="0" ky="0" algn="bl" rotWithShape="0" blurRad="114300" dist="38100" dir="5400000">
+              <a:srgbClr val="1A1A2E">
+                <a:alpha val="20000"/>
+              </a:srgbClr>
+            </a:outerShdw>
+          </a:effectLst>
         </p:spPr>
       </p:sp>
       <p:sp>
@@ -13000,231 +13039,63 @@
         </p:nvSpPr>
         <p:spPr>
           <a:xfrm>
-            <a:off x="868680" y="1801368"/>
-            <a:ext cx="10454335" cy="1371600"/>
-          </a:xfrm>
-          <a:prstGeom prst="rect">
-            <a:avLst/>
-          </a:prstGeom>
-          <a:noFill/>
-          <a:ln/>
-        </p:spPr>
-        <p:txBody>
-          <a:bodyPr wrap="square" lIns="0" tIns="0" rIns="0" bIns="0" rtlCol="0" anchor="t"/>
+            <a:off x="914400" y="1920240"/>
+            <a:ext cx="3931920" cy="914400"/>
+          </a:xfrm>
+          <a:prstGeom prst="rect">
+            <a:avLst/>
+          </a:prstGeom>
+          <a:noFill/>
+          <a:ln/>
+        </p:spPr>
+        <p:txBody>
+          <a:bodyPr wrap="square" lIns="0" tIns="0" rIns="0" bIns="0" rtlCol="0" anchor="ctr"/>
           <a:lstStyle/>
           <a:p>
             <a:pPr indent="0" marL="0">
               <a:buNone/>
             </a:pPr>
             <a:r>
-              <a:rPr lang="en-US" sz="1250" dirty="0">
-                <a:solidFill>
-                  <a:srgbClr val="D8E0EF"/>
-                </a:solidFill>
-                <a:latin typeface="Consolas" pitchFamily="34" charset="0"/>
-                <a:ea typeface="Consolas" pitchFamily="34" charset="-122"/>
-                <a:cs typeface="Consolas" pitchFamily="34" charset="-120"/>
-              </a:rPr>
-              <a:t>for layer in model.modules():</a:t>
-            </a:r>
-            <a:endParaRPr lang="en-US" sz="1250" dirty="0"/>
-          </a:p>
-          <a:p>
-            <a:pPr indent="0" marL="0">
-              <a:buNone/>
-            </a:pPr>
-            <a:r>
-              <a:rPr lang="en-US" sz="1250" dirty="0">
-                <a:solidFill>
-                  <a:srgbClr val="D8E0EF"/>
-                </a:solidFill>
-                <a:latin typeface="Consolas" pitchFamily="34" charset="0"/>
-                <a:ea typeface="Consolas" pitchFamily="34" charset="-122"/>
-                <a:cs typeface="Consolas" pitchFamily="34" charset="-120"/>
-              </a:rPr>
-              <a:t>    if isinstance(layer, nn.Linear):</a:t>
-            </a:r>
-            <a:endParaRPr lang="en-US" sz="1250" dirty="0"/>
-          </a:p>
-          <a:p>
-            <a:pPr indent="0" marL="0">
-              <a:buNone/>
-            </a:pPr>
-            <a:r>
-              <a:rPr lang="en-US" sz="1250" dirty="0">
-                <a:solidFill>
-                  <a:srgbClr val="D8E0EF"/>
-                </a:solidFill>
-                <a:latin typeface="Consolas" pitchFamily="34" charset="0"/>
-                <a:ea typeface="Consolas" pitchFamily="34" charset="-122"/>
-                <a:cs typeface="Consolas" pitchFamily="34" charset="-120"/>
-              </a:rPr>
-              <a:t>        nn.init.zeros_(layer.weight)          # Experiment 1</a:t>
-            </a:r>
-            <a:endParaRPr lang="en-US" sz="1250" dirty="0"/>
-          </a:p>
-          <a:p>
-            <a:pPr indent="0" marL="0">
-              <a:buNone/>
-            </a:pPr>
-            <a:r>
-              <a:rPr lang="en-US" sz="1250" dirty="0">
-                <a:solidFill>
-                  <a:srgbClr val="D8E0EF"/>
-                </a:solidFill>
-                <a:latin typeface="Consolas" pitchFamily="34" charset="0"/>
-                <a:ea typeface="Consolas" pitchFamily="34" charset="-122"/>
-                <a:cs typeface="Consolas" pitchFamily="34" charset="-120"/>
-              </a:rPr>
-              <a:t>        # hoặc: nn.init.normal_(layer.weight, std=0.01)   # Experiment 2</a:t>
-            </a:r>
-            <a:endParaRPr lang="en-US" sz="1250" dirty="0"/>
-          </a:p>
-        </p:txBody>
-      </p:sp>
-      <p:sp>
-        <p:nvSpPr>
-          <p:cNvPr id="6" name="Text 4"/>
-          <p:cNvSpPr txBox="1"/>
-          <p:nvPr/>
-        </p:nvSpPr>
-        <p:spPr>
-          <a:xfrm>
-            <a:off x="640080" y="3566160"/>
-            <a:ext cx="3454298" cy="768096"/>
-          </a:xfrm>
-          <a:prstGeom prst="rect">
-            <a:avLst/>
-          </a:prstGeom>
-          <a:noFill/>
-          <a:ln/>
-        </p:spPr>
-        <p:txBody>
-          <a:bodyPr wrap="square" lIns="0" tIns="0" rIns="0" bIns="0" rtlCol="0" anchor="b"/>
-          <a:lstStyle/>
-          <a:p>
-            <a:pPr algn="ctr" indent="0" marL="0">
-              <a:buNone/>
-            </a:pPr>
-            <a:r>
-              <a:rPr lang="en-US" sz="3000" b="1" dirty="0">
-                <a:solidFill>
-                  <a:srgbClr val="BE3C32"/>
-                </a:solidFill>
-                <a:latin typeface="Cambria" pitchFamily="34" charset="0"/>
-                <a:ea typeface="Cambria" pitchFamily="34" charset="-122"/>
-                <a:cs typeface="Cambria" pitchFamily="34" charset="-120"/>
-              </a:rPr>
-              <a:t>0.0</a:t>
-            </a:r>
-            <a:endParaRPr lang="en-US" sz="3000" dirty="0"/>
-          </a:p>
-        </p:txBody>
-      </p:sp>
-      <p:sp>
-        <p:nvSpPr>
-          <p:cNvPr id="7" name="Text 5"/>
-          <p:cNvSpPr txBox="1"/>
-          <p:nvPr/>
-        </p:nvSpPr>
-        <p:spPr>
-          <a:xfrm>
-            <a:off x="640080" y="4334256"/>
-            <a:ext cx="3454298" cy="512064"/>
-          </a:xfrm>
-          <a:prstGeom prst="rect">
-            <a:avLst/>
-          </a:prstGeom>
-          <a:noFill/>
-          <a:ln/>
-        </p:spPr>
-        <p:txBody>
-          <a:bodyPr wrap="square" lIns="0" tIns="0" rIns="0" bIns="0" rtlCol="0" anchor="t"/>
-          <a:lstStyle/>
-          <a:p>
-            <a:pPr algn="ctr" indent="0" marL="0">
-              <a:buNone/>
-            </a:pPr>
-            <a:r>
-              <a:rPr lang="en-US" sz="1100" dirty="0">
-                <a:solidFill>
-                  <a:srgbClr val="5B6478"/>
+              <a:rPr lang="en-US" sz="1500" b="1" dirty="0">
+                <a:solidFill>
+                  <a:srgbClr val="16213E"/>
                 </a:solidFill>
                 <a:latin typeface="Calibri" pitchFamily="34" charset="0"/>
                 <a:ea typeface="Calibri" pitchFamily="34" charset="-122"/>
                 <a:cs typeface="Calibri" pitchFamily="34" charset="-120"/>
               </a:rPr>
-              <a:t>Zero — gradient RMS lớp 1 (khởi tạo)</a:t>
-            </a:r>
-            <a:endParaRPr lang="en-US" sz="1100" dirty="0"/>
-          </a:p>
-        </p:txBody>
-      </p:sp>
-      <p:sp>
-        <p:nvSpPr>
-          <p:cNvPr id="8" name="Text 6"/>
-          <p:cNvSpPr txBox="1"/>
-          <p:nvPr/>
-        </p:nvSpPr>
-        <p:spPr>
-          <a:xfrm>
-            <a:off x="4368698" y="3566160"/>
-            <a:ext cx="3454298" cy="768096"/>
-          </a:xfrm>
-          <a:prstGeom prst="rect">
-            <a:avLst/>
-          </a:prstGeom>
-          <a:noFill/>
-          <a:ln/>
-        </p:spPr>
-        <p:txBody>
-          <a:bodyPr wrap="square" lIns="0" tIns="0" rIns="0" bIns="0" rtlCol="0" anchor="b"/>
-          <a:lstStyle/>
-          <a:p>
-            <a:pPr algn="ctr" indent="0" marL="0">
-              <a:buNone/>
-            </a:pPr>
-            <a:r>
-              <a:rPr lang="en-US" sz="3000" b="1" dirty="0">
-                <a:solidFill>
-                  <a:srgbClr val="BE3C32"/>
-                </a:solidFill>
-                <a:latin typeface="Cambria" pitchFamily="34" charset="0"/>
-                <a:ea typeface="Cambria" pitchFamily="34" charset="-122"/>
-                <a:cs typeface="Cambria" pitchFamily="34" charset="-120"/>
-              </a:rPr>
-              <a:t>1.13e-13</a:t>
-            </a:r>
-            <a:endParaRPr lang="en-US" sz="3000" dirty="0"/>
-          </a:p>
-        </p:txBody>
-      </p:sp>
-      <p:sp>
-        <p:nvSpPr>
-          <p:cNvPr id="9" name="Text 7"/>
-          <p:cNvSpPr txBox="1"/>
-          <p:nvPr/>
-        </p:nvSpPr>
-        <p:spPr>
-          <a:xfrm>
-            <a:off x="4368698" y="4334256"/>
-            <a:ext cx="3454298" cy="512064"/>
-          </a:xfrm>
-          <a:prstGeom prst="rect">
-            <a:avLst/>
-          </a:prstGeom>
-          <a:noFill/>
-          <a:ln/>
-        </p:spPr>
-        <p:txBody>
-          <a:bodyPr wrap="square" lIns="0" tIns="0" rIns="0" bIns="0" rtlCol="0" anchor="t"/>
-          <a:lstStyle/>
-          <a:p>
-            <a:pPr algn="ctr" indent="0" marL="0">
-              <a:buNone/>
-            </a:pPr>
-            <a:r>
-              <a:rPr lang="en-US" sz="1100" dirty="0">
+              <a:t>1. Activation Variance theo layer</a:t>
+            </a:r>
+            <a:endParaRPr lang="en-US" sz="1500" dirty="0"/>
+          </a:p>
+        </p:txBody>
+      </p:sp>
+      <p:sp>
+        <p:nvSpPr>
+          <p:cNvPr id="6" name="Text 4"/>
+          <p:cNvSpPr txBox="1"/>
+          <p:nvPr/>
+        </p:nvSpPr>
+        <p:spPr>
+          <a:xfrm>
+            <a:off x="4937760" y="1920240"/>
+            <a:ext cx="6339535" cy="914400"/>
+          </a:xfrm>
+          <a:prstGeom prst="rect">
+            <a:avLst/>
+          </a:prstGeom>
+          <a:noFill/>
+          <a:ln/>
+        </p:spPr>
+        <p:txBody>
+          <a:bodyPr wrap="square" lIns="0" tIns="0" rIns="0" bIns="0" rtlCol="0" anchor="ctr"/>
+          <a:lstStyle/>
+          <a:p>
+            <a:pPr indent="0" marL="0">
+              <a:buNone/>
+            </a:pPr>
+            <a:r>
+              <a:rPr lang="en-US" sz="1300" dirty="0">
                 <a:solidFill>
                   <a:srgbClr val="5B6478"/>
                 </a:solidFill>
@@ -13232,127 +13103,168 @@
                 <a:ea typeface="Calibri" pitchFamily="34" charset="-122"/>
                 <a:cs typeface="Calibri" pitchFamily="34" charset="-120"/>
               </a:rPr>
-              <a:t>Random nhỏ — gradient RMS lớp 1</a:t>
-            </a:r>
-            <a:endParaRPr lang="en-US" sz="1100" dirty="0"/>
-          </a:p>
-        </p:txBody>
-      </p:sp>
-      <p:sp>
-        <p:nvSpPr>
-          <p:cNvPr id="10" name="Text 8"/>
-          <p:cNvSpPr txBox="1"/>
-          <p:nvPr/>
-        </p:nvSpPr>
-        <p:spPr>
-          <a:xfrm>
-            <a:off x="8097317" y="3566160"/>
-            <a:ext cx="3454298" cy="768096"/>
-          </a:xfrm>
-          <a:prstGeom prst="rect">
-            <a:avLst/>
-          </a:prstGeom>
-          <a:noFill/>
-          <a:ln/>
-        </p:spPr>
-        <p:txBody>
-          <a:bodyPr wrap="square" lIns="0" tIns="0" rIns="0" bIns="0" rtlCol="0" anchor="b"/>
-          <a:lstStyle/>
-          <a:p>
-            <a:pPr algn="ctr" indent="0" marL="0">
-              <a:buNone/>
-            </a:pPr>
-            <a:r>
-              <a:rPr lang="en-US" sz="3000" b="1" dirty="0">
-                <a:solidFill>
-                  <a:srgbClr val="5B6478"/>
-                </a:solidFill>
-                <a:latin typeface="Cambria" pitchFamily="34" charset="0"/>
-                <a:ea typeface="Cambria" pitchFamily="34" charset="-122"/>
-                <a:cs typeface="Cambria" pitchFamily="34" charset="-120"/>
-              </a:rPr>
-              <a:t>10.0%</a:t>
-            </a:r>
-            <a:endParaRPr lang="en-US" sz="3000" dirty="0"/>
-          </a:p>
-        </p:txBody>
-      </p:sp>
-      <p:sp>
-        <p:nvSpPr>
-          <p:cNvPr id="11" name="Text 9"/>
-          <p:cNvSpPr txBox="1"/>
-          <p:nvPr/>
-        </p:nvSpPr>
-        <p:spPr>
-          <a:xfrm>
-            <a:off x="8097317" y="4334256"/>
-            <a:ext cx="3454298" cy="512064"/>
-          </a:xfrm>
-          <a:prstGeom prst="rect">
-            <a:avLst/>
-          </a:prstGeom>
-          <a:noFill/>
-          <a:ln/>
-        </p:spPr>
-        <p:txBody>
-          <a:bodyPr wrap="square" lIns="0" tIns="0" rIns="0" bIns="0" rtlCol="0" anchor="t"/>
-          <a:lstStyle/>
-          <a:p>
-            <a:pPr algn="ctr" indent="0" marL="0">
-              <a:buNone/>
-            </a:pPr>
-            <a:r>
-              <a:rPr lang="en-US" sz="1100" dirty="0">
-                <a:solidFill>
-                  <a:srgbClr val="5B6478"/>
+              <a:t>Var(A⁽ˡ⁾) tại bước khởi tạo — tín hiệu SỚM NHẤT cho co cụm/bão hoà, ưu tiên đọc đầu tiên</a:t>
+            </a:r>
+            <a:endParaRPr lang="en-US" sz="1300" dirty="0"/>
+          </a:p>
+        </p:txBody>
+      </p:sp>
+      <p:sp>
+        <p:nvSpPr>
+          <p:cNvPr id="7" name="Shape 5"/>
+          <p:cNvSpPr/>
+          <p:nvPr/>
+        </p:nvSpPr>
+        <p:spPr>
+          <a:xfrm>
+            <a:off x="640080" y="2971800"/>
+            <a:ext cx="10911535" cy="914400"/>
+          </a:xfrm>
+          <a:prstGeom prst="roundRect">
+            <a:avLst>
+              <a:gd name="adj" fmla="val 6000"/>
+            </a:avLst>
+          </a:prstGeom>
+          <a:solidFill>
+            <a:srgbClr val="F1F4F9"/>
+          </a:solidFill>
+          <a:ln w="6350">
+            <a:solidFill>
+              <a:srgbClr val="D9DEE8"/>
+            </a:solidFill>
+            <a:prstDash val="solid"/>
+          </a:ln>
+          <a:effectLst>
+            <a:outerShdw sx="100000" sy="100000" kx="0" ky="0" algn="bl" rotWithShape="0" blurRad="114300" dist="38100" dir="5400000">
+              <a:srgbClr val="1A1A2E">
+                <a:alpha val="20000"/>
+              </a:srgbClr>
+            </a:outerShdw>
+          </a:effectLst>
+        </p:spPr>
+      </p:sp>
+      <p:sp>
+        <p:nvSpPr>
+          <p:cNvPr id="8" name="Text 6"/>
+          <p:cNvSpPr txBox="1"/>
+          <p:nvPr/>
+        </p:nvSpPr>
+        <p:spPr>
+          <a:xfrm>
+            <a:off x="914400" y="2971800"/>
+            <a:ext cx="3931920" cy="914400"/>
+          </a:xfrm>
+          <a:prstGeom prst="rect">
+            <a:avLst/>
+          </a:prstGeom>
+          <a:noFill/>
+          <a:ln/>
+        </p:spPr>
+        <p:txBody>
+          <a:bodyPr wrap="square" lIns="0" tIns="0" rIns="0" bIns="0" rtlCol="0" anchor="ctr"/>
+          <a:lstStyle/>
+          <a:p>
+            <a:pPr indent="0" marL="0">
+              <a:buNone/>
+            </a:pPr>
+            <a:r>
+              <a:rPr lang="en-US" sz="1500" b="1" dirty="0">
+                <a:solidFill>
+                  <a:srgbClr val="16213E"/>
                 </a:solidFill>
                 <a:latin typeface="Calibri" pitchFamily="34" charset="0"/>
                 <a:ea typeface="Calibri" pitchFamily="34" charset="-122"/>
                 <a:cs typeface="Calibri" pitchFamily="34" charset="-120"/>
               </a:rPr>
-              <a:t>Test accuracy — cả 2 cấu hình (mức ngẫu nhiên)</a:t>
-            </a:r>
-            <a:endParaRPr lang="en-US" sz="1100" dirty="0"/>
-          </a:p>
-        </p:txBody>
-      </p:sp>
-      <p:sp>
-        <p:nvSpPr>
-          <p:cNvPr id="12" name="Shape 10"/>
-          <p:cNvSpPr/>
-          <p:nvPr/>
-        </p:nvSpPr>
-        <p:spPr>
-          <a:xfrm>
-            <a:off x="640080" y="5120640"/>
-            <a:ext cx="10911535" cy="777240"/>
+              <a:t>2. Gradient RMS theo layer</a:t>
+            </a:r>
+            <a:endParaRPr lang="en-US" sz="1500" dirty="0"/>
+          </a:p>
+        </p:txBody>
+      </p:sp>
+      <p:sp>
+        <p:nvSpPr>
+          <p:cNvPr id="9" name="Text 7"/>
+          <p:cNvSpPr txBox="1"/>
+          <p:nvPr/>
+        </p:nvSpPr>
+        <p:spPr>
+          <a:xfrm>
+            <a:off x="4937760" y="2971800"/>
+            <a:ext cx="6339535" cy="914400"/>
+          </a:xfrm>
+          <a:prstGeom prst="rect">
+            <a:avLst/>
+          </a:prstGeom>
+          <a:noFill/>
+          <a:ln/>
+        </p:spPr>
+        <p:txBody>
+          <a:bodyPr wrap="square" lIns="0" tIns="0" rIns="0" bIns="0" rtlCol="0" anchor="ctr"/>
+          <a:lstStyle/>
+          <a:p>
+            <a:pPr indent="0" marL="0">
+              <a:buNone/>
+            </a:pPr>
+            <a:r>
+              <a:rPr lang="en-US" sz="1300" dirty="0">
+                <a:solidFill>
+                  <a:srgbClr val="5B6478"/>
+                </a:solidFill>
+                <a:latin typeface="Calibri" pitchFamily="34" charset="0"/>
+                <a:ea typeface="Calibri" pitchFamily="34" charset="-122"/>
+                <a:cs typeface="Calibri" pitchFamily="34" charset="-120"/>
+              </a:rPr>
+              <a:t>RMS(∂L/∂W⁽ˡ⁾) = grad.pow(2).mean().sqrt() — chuẩn hoá theo số phần tử, so sánh công bằng giữa các layer</a:t>
+            </a:r>
+            <a:endParaRPr lang="en-US" sz="1300" dirty="0"/>
+          </a:p>
+        </p:txBody>
+      </p:sp>
+      <p:sp>
+        <p:nvSpPr>
+          <p:cNvPr id="10" name="Shape 8"/>
+          <p:cNvSpPr/>
+          <p:nvPr/>
+        </p:nvSpPr>
+        <p:spPr>
+          <a:xfrm>
+            <a:off x="640080" y="4023360"/>
+            <a:ext cx="10911535" cy="914400"/>
           </a:xfrm>
           <a:prstGeom prst="roundRect">
             <a:avLst>
-              <a:gd name="adj" fmla="val 7059"/>
+              <a:gd name="adj" fmla="val 6000"/>
             </a:avLst>
           </a:prstGeom>
           <a:solidFill>
-            <a:srgbClr val="FBEEEC"/>
+            <a:srgbClr val="F1F4F9"/>
           </a:solidFill>
-          <a:ln w="9525">
+          <a:ln w="6350">
             <a:solidFill>
-              <a:srgbClr val="BE3C32"/>
+              <a:srgbClr val="D9DEE8"/>
             </a:solidFill>
             <a:prstDash val="solid"/>
           </a:ln>
-        </p:spPr>
-      </p:sp>
-      <p:sp>
-        <p:nvSpPr>
-          <p:cNvPr id="13" name="Text 11"/>
-          <p:cNvSpPr txBox="1"/>
-          <p:nvPr/>
-        </p:nvSpPr>
-        <p:spPr>
-          <a:xfrm>
-            <a:off x="914400" y="5120640"/>
-            <a:ext cx="10362895" cy="777240"/>
+          <a:effectLst>
+            <a:outerShdw sx="100000" sy="100000" kx="0" ky="0" algn="bl" rotWithShape="0" blurRad="114300" dist="38100" dir="5400000">
+              <a:srgbClr val="1A1A2E">
+                <a:alpha val="20000"/>
+              </a:srgbClr>
+            </a:outerShdw>
+          </a:effectLst>
+        </p:spPr>
+      </p:sp>
+      <p:sp>
+        <p:nvSpPr>
+          <p:cNvPr id="11" name="Text 9"/>
+          <p:cNvSpPr txBox="1"/>
+          <p:nvPr/>
+        </p:nvSpPr>
+        <p:spPr>
+          <a:xfrm>
+            <a:off x="914400" y="4023360"/>
+            <a:ext cx="3931920" cy="914400"/>
           </a:xfrm>
           <a:prstGeom prst="rect">
             <a:avLst/>
@@ -13368,30 +13280,30 @@
               <a:buNone/>
             </a:pPr>
             <a:r>
-              <a:rPr lang="en-US" sz="1450" b="1" dirty="0">
-                <a:solidFill>
-                  <a:srgbClr val="BE3C32"/>
+              <a:rPr lang="en-US" sz="1500" b="1" dirty="0">
+                <a:solidFill>
+                  <a:srgbClr val="16213E"/>
                 </a:solidFill>
                 <a:latin typeface="Calibri" pitchFamily="34" charset="0"/>
                 <a:ea typeface="Calibri" pitchFamily="34" charset="-122"/>
                 <a:cs typeface="Calibri" pitchFamily="34" charset="-120"/>
               </a:rPr>
-              <a:t>Kết quả thật (10 hidden layer, ReLU, 15 epoch): CẢ HAI kẹt đúng ở mức ngẫu nhiên 10.0% — Zero vì symmetry breaking, Random nhỏ vì gradient co lại theo hàm mũ qua 10 lớp.</a:t>
-            </a:r>
-            <a:endParaRPr lang="en-US" sz="1450" dirty="0"/>
-          </a:p>
-        </p:txBody>
-      </p:sp>
-      <p:sp>
-        <p:nvSpPr>
-          <p:cNvPr id="14" name="Text 12"/>
-          <p:cNvSpPr txBox="1"/>
-          <p:nvPr/>
-        </p:nvSpPr>
-        <p:spPr>
-          <a:xfrm>
-            <a:off x="11185855" y="6446520"/>
-            <a:ext cx="731520" cy="274320"/>
+              <a:t>3. Training Loss &amp; Accuracy</a:t>
+            </a:r>
+            <a:endParaRPr lang="en-US" sz="1500" dirty="0"/>
+          </a:p>
+        </p:txBody>
+      </p:sp>
+      <p:sp>
+        <p:nvSpPr>
+          <p:cNvPr id="12" name="Text 10"/>
+          <p:cNvSpPr txBox="1"/>
+          <p:nvPr/>
+        </p:nvSpPr>
+        <p:spPr>
+          <a:xfrm>
+            <a:off x="4937760" y="4023360"/>
+            <a:ext cx="6339535" cy="914400"/>
           </a:xfrm>
           <a:prstGeom prst="rect">
             <a:avLst/>
@@ -13403,11 +13315,11 @@
           <a:bodyPr wrap="square" lIns="0" tIns="0" rIns="0" bIns="0" rtlCol="0" anchor="ctr"/>
           <a:lstStyle/>
           <a:p>
-            <a:pPr algn="r" indent="0" marL="0">
-              <a:buNone/>
-            </a:pPr>
-            <a:r>
-              <a:rPr lang="en-US" sz="900" dirty="0">
+            <a:pPr indent="0" marL="0">
+              <a:buNone/>
+            </a:pPr>
+            <a:r>
+              <a:rPr lang="en-US" sz="1300" dirty="0">
                 <a:solidFill>
                   <a:srgbClr val="5B6478"/>
                 </a:solidFill>
@@ -13415,7 +13327,158 @@
                 <a:ea typeface="Calibri" pitchFamily="34" charset="-122"/>
                 <a:cs typeface="Calibri" pitchFamily="34" charset="-120"/>
               </a:rPr>
-              <a:t>19/28</a:t>
+              <a:t>mỗi epoch — train + validation, theo dõi hội tụ theo thời gian</a:t>
+            </a:r>
+            <a:endParaRPr lang="en-US" sz="1300" dirty="0"/>
+          </a:p>
+        </p:txBody>
+      </p:sp>
+      <p:sp>
+        <p:nvSpPr>
+          <p:cNvPr id="13" name="Shape 11"/>
+          <p:cNvSpPr/>
+          <p:nvPr/>
+        </p:nvSpPr>
+        <p:spPr>
+          <a:xfrm>
+            <a:off x="640080" y="5074920"/>
+            <a:ext cx="10911535" cy="914400"/>
+          </a:xfrm>
+          <a:prstGeom prst="roundRect">
+            <a:avLst>
+              <a:gd name="adj" fmla="val 6000"/>
+            </a:avLst>
+          </a:prstGeom>
+          <a:solidFill>
+            <a:srgbClr val="F1F4F9"/>
+          </a:solidFill>
+          <a:ln w="6350">
+            <a:solidFill>
+              <a:srgbClr val="D9DEE8"/>
+            </a:solidFill>
+            <a:prstDash val="solid"/>
+          </a:ln>
+          <a:effectLst>
+            <a:outerShdw sx="100000" sy="100000" kx="0" ky="0" algn="bl" rotWithShape="0" blurRad="114300" dist="38100" dir="5400000">
+              <a:srgbClr val="1A1A2E">
+                <a:alpha val="20000"/>
+              </a:srgbClr>
+            </a:outerShdw>
+          </a:effectLst>
+        </p:spPr>
+      </p:sp>
+      <p:sp>
+        <p:nvSpPr>
+          <p:cNvPr id="14" name="Text 12"/>
+          <p:cNvSpPr txBox="1"/>
+          <p:nvPr/>
+        </p:nvSpPr>
+        <p:spPr>
+          <a:xfrm>
+            <a:off x="914400" y="5074920"/>
+            <a:ext cx="3931920" cy="914400"/>
+          </a:xfrm>
+          <a:prstGeom prst="rect">
+            <a:avLst/>
+          </a:prstGeom>
+          <a:noFill/>
+          <a:ln/>
+        </p:spPr>
+        <p:txBody>
+          <a:bodyPr wrap="square" lIns="0" tIns="0" rIns="0" bIns="0" rtlCol="0" anchor="ctr"/>
+          <a:lstStyle/>
+          <a:p>
+            <a:pPr indent="0" marL="0">
+              <a:buNone/>
+            </a:pPr>
+            <a:r>
+              <a:rPr lang="en-US" sz="1500" b="1" dirty="0">
+                <a:solidFill>
+                  <a:srgbClr val="16213E"/>
+                </a:solidFill>
+                <a:latin typeface="Calibri" pitchFamily="34" charset="0"/>
+                <a:ea typeface="Calibri" pitchFamily="34" charset="-122"/>
+                <a:cs typeface="Calibri" pitchFamily="34" charset="-120"/>
+              </a:rPr>
+              <a:t>4. Weight Variance theo layer</a:t>
+            </a:r>
+            <a:endParaRPr lang="en-US" sz="1500" dirty="0"/>
+          </a:p>
+        </p:txBody>
+      </p:sp>
+      <p:sp>
+        <p:nvSpPr>
+          <p:cNvPr id="15" name="Text 13"/>
+          <p:cNvSpPr txBox="1"/>
+          <p:nvPr/>
+        </p:nvSpPr>
+        <p:spPr>
+          <a:xfrm>
+            <a:off x="4937760" y="5074920"/>
+            <a:ext cx="6339535" cy="914400"/>
+          </a:xfrm>
+          <a:prstGeom prst="rect">
+            <a:avLst/>
+          </a:prstGeom>
+          <a:noFill/>
+          <a:ln/>
+        </p:spPr>
+        <p:txBody>
+          <a:bodyPr wrap="square" lIns="0" tIns="0" rIns="0" bIns="0" rtlCol="0" anchor="ctr"/>
+          <a:lstStyle/>
+          <a:p>
+            <a:pPr indent="0" marL="0">
+              <a:buNone/>
+            </a:pPr>
+            <a:r>
+              <a:rPr lang="en-US" sz="1300" dirty="0">
+                <a:solidFill>
+                  <a:srgbClr val="5B6478"/>
+                </a:solidFill>
+                <a:latin typeface="Calibri" pitchFamily="34" charset="0"/>
+                <a:ea typeface="Calibri" pitchFamily="34" charset="-122"/>
+                <a:cs typeface="Calibri" pitchFamily="34" charset="-120"/>
+              </a:rPr>
+              <a:t>đối chiếu Var(W) đo thực tế vs. công thức lý thuyết</a:t>
+            </a:r>
+            <a:endParaRPr lang="en-US" sz="1300" dirty="0"/>
+          </a:p>
+        </p:txBody>
+      </p:sp>
+      <p:sp>
+        <p:nvSpPr>
+          <p:cNvPr id="16" name="Text 14"/>
+          <p:cNvSpPr txBox="1"/>
+          <p:nvPr/>
+        </p:nvSpPr>
+        <p:spPr>
+          <a:xfrm>
+            <a:off x="11185855" y="6446520"/>
+            <a:ext cx="731520" cy="274320"/>
+          </a:xfrm>
+          <a:prstGeom prst="rect">
+            <a:avLst/>
+          </a:prstGeom>
+          <a:noFill/>
+          <a:ln/>
+        </p:spPr>
+        <p:txBody>
+          <a:bodyPr wrap="square" lIns="0" tIns="0" rIns="0" bIns="0" rtlCol="0" anchor="ctr"/>
+          <a:lstStyle/>
+          <a:p>
+            <a:pPr algn="r" indent="0" marL="0">
+              <a:buNone/>
+            </a:pPr>
+            <a:r>
+              <a:rPr lang="en-US" sz="900" dirty="0">
+                <a:solidFill>
+                  <a:srgbClr val="5B6478"/>
+                </a:solidFill>
+                <a:latin typeface="Calibri" pitchFamily="34" charset="0"/>
+                <a:ea typeface="Calibri" pitchFamily="34" charset="-122"/>
+                <a:cs typeface="Calibri" pitchFamily="34" charset="-120"/>
+              </a:rPr>
+              <a:t>19/29</a:t>
             </a:r>
             <a:endParaRPr lang="en-US" sz="900" dirty="0"/>
           </a:p>
@@ -13423,7 +13486,7 @@
       </p:sp>
       <p:sp>
         <p:nvSpPr>
-          <p:cNvPr id="15" name="Shape 13"/>
+          <p:cNvPr id="17" name="Shape 15"/>
           <p:cNvSpPr/>
           <p:nvPr/>
         </p:nvSpPr>
@@ -13443,7 +13506,7 @@
       </p:sp>
       <p:sp>
         <p:nvSpPr>
-          <p:cNvPr id="16" name="Shape 14"/>
+          <p:cNvPr id="18" name="Shape 16"/>
           <p:cNvSpPr/>
           <p:nvPr/>
         </p:nvSpPr>
@@ -13463,7 +13526,7 @@
       </p:sp>
       <p:sp>
         <p:nvSpPr>
-          <p:cNvPr id="17" name="Shape 15"/>
+          <p:cNvPr id="19" name="Shape 17"/>
           <p:cNvSpPr/>
           <p:nvPr/>
         </p:nvSpPr>
@@ -13483,7 +13546,7 @@
       </p:sp>
       <p:sp>
         <p:nvSpPr>
-          <p:cNvPr id="18" name="Shape 16"/>
+          <p:cNvPr id="20" name="Shape 18"/>
           <p:cNvSpPr/>
           <p:nvPr/>
         </p:nvSpPr>
@@ -13503,7 +13566,7 @@
       </p:sp>
       <p:sp>
         <p:nvSpPr>
-          <p:cNvPr id="19" name="Text 17"/>
+          <p:cNvPr id="21" name="Text 19"/>
           <p:cNvSpPr txBox="1"/>
           <p:nvPr/>
         </p:nvSpPr>
@@ -14404,7 +14467,7 @@
                 <a:ea typeface="Calibri" pitchFamily="34" charset="-122"/>
                 <a:cs typeface="Calibri" pitchFamily="34" charset="-120"/>
               </a:rPr>
-              <a:t>2/28</a:t>
+              <a:t>2/29</a:t>
             </a:r>
             <a:endParaRPr lang="en-US" sz="900" dirty="0"/>
           </a:p>
@@ -14587,7 +14650,7 @@
                 <a:ea typeface="Calibri" pitchFamily="34" charset="-122"/>
                 <a:cs typeface="Calibri" pitchFamily="34" charset="-120"/>
               </a:rPr>
-              <a:t>DEMO — EXPERIMENT 3</a:t>
+              <a:t>DEMO — EXPERIMENT 1 &amp; 2</a:t>
             </a:r>
             <a:endParaRPr lang="en-US" sz="1300" dirty="0"/>
           </a:p>
@@ -14626,7 +14689,7 @@
                 <a:ea typeface="Cambria" pitchFamily="34" charset="-122"/>
                 <a:cs typeface="Cambria" pitchFamily="34" charset="-120"/>
               </a:rPr>
-              <a:t>Random LỚN (std=1.0) — EXPLODING GRADIENT thật sự</a:t>
+              <a:t>Zero vs. Random nhỏ (std=0.01) — cả hai đều VANISHING</a:t>
             </a:r>
             <a:endParaRPr lang="en-US" sz="2400" dirty="0"/>
           </a:p>
@@ -14641,11 +14704,11 @@
         <p:spPr>
           <a:xfrm>
             <a:off x="640080" y="1691640"/>
-            <a:ext cx="10911535" cy="594360"/>
+            <a:ext cx="10911535" cy="1554480"/>
           </a:xfrm>
           <a:prstGeom prst="roundRect">
             <a:avLst>
-              <a:gd name="adj" fmla="val 7692"/>
+              <a:gd name="adj" fmla="val 2941"/>
             </a:avLst>
           </a:prstGeom>
           <a:solidFill>
@@ -14663,7 +14726,7 @@
         <p:spPr>
           <a:xfrm>
             <a:off x="868680" y="1801368"/>
-            <a:ext cx="10454335" cy="411480"/>
+            <a:ext cx="10454335" cy="1371600"/>
           </a:xfrm>
           <a:prstGeom prst="rect">
             <a:avLst/>
@@ -14687,10 +14750,61 @@
                 <a:ea typeface="Consolas" pitchFamily="34" charset="-122"/>
                 <a:cs typeface="Consolas" pitchFamily="34" charset="-120"/>
               </a:rPr>
-              <a:t>nn.init.normal_(layer.weight, mean=0, std=1.0)   # Experiment 3</a:t>
+              <a:t>for layer in model.modules():</a:t>
             </a:r>
             <a:endParaRPr lang="en-US" sz="1250" dirty="0"/>
           </a:p>
+          <a:p>
+            <a:pPr indent="0" marL="0">
+              <a:buNone/>
+            </a:pPr>
+            <a:r>
+              <a:rPr lang="en-US" sz="1250" dirty="0">
+                <a:solidFill>
+                  <a:srgbClr val="D8E0EF"/>
+                </a:solidFill>
+                <a:latin typeface="Consolas" pitchFamily="34" charset="0"/>
+                <a:ea typeface="Consolas" pitchFamily="34" charset="-122"/>
+                <a:cs typeface="Consolas" pitchFamily="34" charset="-120"/>
+              </a:rPr>
+              <a:t>    if isinstance(layer, nn.Linear):</a:t>
+            </a:r>
+            <a:endParaRPr lang="en-US" sz="1250" dirty="0"/>
+          </a:p>
+          <a:p>
+            <a:pPr indent="0" marL="0">
+              <a:buNone/>
+            </a:pPr>
+            <a:r>
+              <a:rPr lang="en-US" sz="1250" dirty="0">
+                <a:solidFill>
+                  <a:srgbClr val="D8E0EF"/>
+                </a:solidFill>
+                <a:latin typeface="Consolas" pitchFamily="34" charset="0"/>
+                <a:ea typeface="Consolas" pitchFamily="34" charset="-122"/>
+                <a:cs typeface="Consolas" pitchFamily="34" charset="-120"/>
+              </a:rPr>
+              <a:t>        nn.init.zeros_(layer.weight)          # Experiment 1</a:t>
+            </a:r>
+            <a:endParaRPr lang="en-US" sz="1250" dirty="0"/>
+          </a:p>
+          <a:p>
+            <a:pPr indent="0" marL="0">
+              <a:buNone/>
+            </a:pPr>
+            <a:r>
+              <a:rPr lang="en-US" sz="1250" dirty="0">
+                <a:solidFill>
+                  <a:srgbClr val="D8E0EF"/>
+                </a:solidFill>
+                <a:latin typeface="Consolas" pitchFamily="34" charset="0"/>
+                <a:ea typeface="Consolas" pitchFamily="34" charset="-122"/>
+                <a:cs typeface="Consolas" pitchFamily="34" charset="-120"/>
+              </a:rPr>
+              <a:t>        # hoặc: nn.init.normal_(layer.weight, std=0.01)   # Experiment 2</a:t>
+            </a:r>
+            <a:endParaRPr lang="en-US" sz="1250" dirty="0"/>
+          </a:p>
         </p:txBody>
       </p:sp>
       <p:sp>
@@ -14701,7 +14815,7 @@
         </p:nvSpPr>
         <p:spPr>
           <a:xfrm>
-            <a:off x="640080" y="2606040"/>
+            <a:off x="640080" y="3566160"/>
             <a:ext cx="3454298" cy="768096"/>
           </a:xfrm>
           <a:prstGeom prst="rect">
@@ -14720,13 +14834,13 @@
             <a:r>
               <a:rPr lang="en-US" sz="3000" b="1" dirty="0">
                 <a:solidFill>
-                  <a:srgbClr val="7D3C98"/>
+                  <a:srgbClr val="BE3C32"/>
                 </a:solidFill>
                 <a:latin typeface="Cambria" pitchFamily="34" charset="0"/>
                 <a:ea typeface="Cambria" pitchFamily="34" charset="-122"/>
                 <a:cs typeface="Cambria" pitchFamily="34" charset="-120"/>
               </a:rPr>
-              <a:t>1.87e+7</a:t>
+              <a:t>0.0</a:t>
             </a:r>
             <a:endParaRPr lang="en-US" sz="3000" dirty="0"/>
           </a:p>
@@ -14740,7 +14854,7 @@
         </p:nvSpPr>
         <p:spPr>
           <a:xfrm>
-            <a:off x="640080" y="3374136"/>
+            <a:off x="640080" y="4334256"/>
             <a:ext cx="3454298" cy="512064"/>
           </a:xfrm>
           <a:prstGeom prst="rect">
@@ -14765,7 +14879,7 @@
                 <a:ea typeface="Calibri" pitchFamily="34" charset="-122"/>
                 <a:cs typeface="Calibri" pitchFamily="34" charset="-120"/>
               </a:rPr>
-              <a:t>Gradient RMS lớp 1 (khởi tạo) — bùng nổ</a:t>
+              <a:t>Zero — gradient RMS lớp 1 (khởi tạo)</a:t>
             </a:r>
             <a:endParaRPr lang="en-US" sz="1100" dirty="0"/>
           </a:p>
@@ -14779,7 +14893,7 @@
         </p:nvSpPr>
         <p:spPr>
           <a:xfrm>
-            <a:off x="4368698" y="2606040"/>
+            <a:off x="4368698" y="3566160"/>
             <a:ext cx="3454298" cy="768096"/>
           </a:xfrm>
           <a:prstGeom prst="rect">
@@ -14798,13 +14912,13 @@
             <a:r>
               <a:rPr lang="en-US" sz="3000" b="1" dirty="0">
                 <a:solidFill>
-                  <a:srgbClr val="7D3C98"/>
+                  <a:srgbClr val="BE3C32"/>
                 </a:solidFill>
                 <a:latin typeface="Cambria" pitchFamily="34" charset="0"/>
                 <a:ea typeface="Cambria" pitchFamily="34" charset="-122"/>
                 <a:cs typeface="Cambria" pitchFamily="34" charset="-120"/>
               </a:rPr>
-              <a:t>NaN</a:t>
+              <a:t>1.13e-13</a:t>
             </a:r>
             <a:endParaRPr lang="en-US" sz="3000" dirty="0"/>
           </a:p>
@@ -14818,7 +14932,7 @@
         </p:nvSpPr>
         <p:spPr>
           <a:xfrm>
-            <a:off x="4368698" y="3374136"/>
+            <a:off x="4368698" y="4334256"/>
             <a:ext cx="3454298" cy="512064"/>
           </a:xfrm>
           <a:prstGeom prst="rect">
@@ -14843,7 +14957,7 @@
                 <a:ea typeface="Calibri" pitchFamily="34" charset="-122"/>
                 <a:cs typeface="Calibri" pitchFamily="34" charset="-120"/>
               </a:rPr>
-              <a:t>Train loss ngay từ epoch 1 — huấn luyện PHÂN KỲ</a:t>
+              <a:t>Random nhỏ — gradient RMS lớp 1</a:t>
             </a:r>
             <a:endParaRPr lang="en-US" sz="1100" dirty="0"/>
           </a:p>
@@ -14857,7 +14971,7 @@
         </p:nvSpPr>
         <p:spPr>
           <a:xfrm>
-            <a:off x="8097317" y="2606040"/>
+            <a:off x="8097317" y="3566160"/>
             <a:ext cx="3454298" cy="768096"/>
           </a:xfrm>
           <a:prstGeom prst="rect">
@@ -14896,7 +15010,7 @@
         </p:nvSpPr>
         <p:spPr>
           <a:xfrm>
-            <a:off x="8097317" y="3374136"/>
+            <a:off x="8097317" y="4334256"/>
             <a:ext cx="3454298" cy="512064"/>
           </a:xfrm>
           <a:prstGeom prst="rect">
@@ -14921,7 +15035,7 @@
                 <a:ea typeface="Calibri" pitchFamily="34" charset="-122"/>
                 <a:cs typeface="Calibri" pitchFamily="34" charset="-120"/>
               </a:rPr>
-              <a:t>Test accuracy cuối cùng (không học được gì)</a:t>
+              <a:t>Test accuracy — cả 2 cấu hình (mức ngẫu nhiên)</a:t>
             </a:r>
             <a:endParaRPr lang="en-US" sz="1100" dirty="0"/>
           </a:p>
@@ -14935,7 +15049,7 @@
         </p:nvSpPr>
         <p:spPr>
           <a:xfrm>
-            <a:off x="640080" y="4160520"/>
+            <a:off x="640080" y="5120640"/>
             <a:ext cx="10911535" cy="777240"/>
           </a:xfrm>
           <a:prstGeom prst="roundRect">
@@ -14948,7 +15062,7 @@
           </a:solidFill>
           <a:ln w="9525">
             <a:solidFill>
-              <a:srgbClr val="7D3C98"/>
+              <a:srgbClr val="BE3C32"/>
             </a:solidFill>
             <a:prstDash val="solid"/>
           </a:ln>
@@ -14962,7 +15076,7 @@
         </p:nvSpPr>
         <p:spPr>
           <a:xfrm>
-            <a:off x="914400" y="4160520"/>
+            <a:off x="914400" y="5120640"/>
             <a:ext cx="10362895" cy="777240"/>
           </a:xfrm>
           <a:prstGeom prst="rect">
@@ -14981,13 +15095,13 @@
             <a:r>
               <a:rPr lang="en-US" sz="1450" b="1" dirty="0">
                 <a:solidFill>
-                  <a:srgbClr val="7D3C98"/>
+                  <a:srgbClr val="BE3C32"/>
                 </a:solidFill>
                 <a:latin typeface="Calibri" pitchFamily="34" charset="0"/>
                 <a:ea typeface="Calibri" pitchFamily="34" charset="-122"/>
                 <a:cs typeface="Calibri" pitchFamily="34" charset="-120"/>
               </a:rPr>
-              <a:t>Đây là bằng chứng thực nghiệm TRỰC TIẾP cho Slide "Exploding Gradient": std quá lớn (1.0) trên 10 lớp khiến gradient bùng nổ tới 1.9e+7 ngay bước đầu, loss thành NaN vĩnh viễn.</a:t>
+              <a:t>Kết quả thật (10 hidden layer, ReLU, 15 epoch): CẢ HAI kẹt đúng ở mức ngẫu nhiên 10.0% — Zero vì symmetry breaking, Random nhỏ vì gradient co lại theo hàm mũ qua 10 lớp.</a:t>
             </a:r>
             <a:endParaRPr lang="en-US" sz="1450" dirty="0"/>
           </a:p>
@@ -15026,7 +15140,7 @@
                 <a:ea typeface="Calibri" pitchFamily="34" charset="-122"/>
                 <a:cs typeface="Calibri" pitchFamily="34" charset="-120"/>
               </a:rPr>
-              <a:t>20/28</a:t>
+              <a:t>20/29</a:t>
             </a:r>
             <a:endParaRPr lang="en-US" sz="900" dirty="0"/>
           </a:p>
@@ -15209,7 +15323,7 @@
                 <a:ea typeface="Calibri" pitchFamily="34" charset="-122"/>
                 <a:cs typeface="Calibri" pitchFamily="34" charset="-120"/>
               </a:rPr>
-              <a:t>DEMO — EXPERIMENT 4 &amp; 5</a:t>
+              <a:t>DEMO — EXPERIMENT 3</a:t>
             </a:r>
             <a:endParaRPr lang="en-US" sz="1300" dirty="0"/>
           </a:p>
@@ -15248,7 +15362,7 @@
                 <a:ea typeface="Cambria" pitchFamily="34" charset="-122"/>
                 <a:cs typeface="Cambria" pitchFamily="34" charset="-120"/>
               </a:rPr>
-              <a:t>Xavier vs. He — cả hai ỔN ĐỊNH và học được</a:t>
+              <a:t>Random LỚN (std=1.0) — EXPLODING GRADIENT thật sự</a:t>
             </a:r>
             <a:endParaRPr lang="en-US" sz="2400" dirty="0"/>
           </a:p>
@@ -15263,11 +15377,11 @@
         <p:spPr>
           <a:xfrm>
             <a:off x="640080" y="1691640"/>
-            <a:ext cx="10911535" cy="914400"/>
+            <a:ext cx="10911535" cy="594360"/>
           </a:xfrm>
           <a:prstGeom prst="roundRect">
             <a:avLst>
-              <a:gd name="adj" fmla="val 5000"/>
+              <a:gd name="adj" fmla="val 7692"/>
             </a:avLst>
           </a:prstGeom>
           <a:solidFill>
@@ -15285,7 +15399,7 @@
         <p:spPr>
           <a:xfrm>
             <a:off x="868680" y="1801368"/>
-            <a:ext cx="10454335" cy="731520"/>
+            <a:ext cx="10454335" cy="411480"/>
           </a:xfrm>
           <a:prstGeom prst="rect">
             <a:avLst/>
@@ -15309,27 +15423,10 @@
                 <a:ea typeface="Consolas" pitchFamily="34" charset="-122"/>
                 <a:cs typeface="Consolas" pitchFamily="34" charset="-120"/>
               </a:rPr>
-              <a:t>nn.init.xavier_normal_(layer.weight)                                    # Experiment 4</a:t>
+              <a:t>nn.init.normal_(layer.weight, mean=0, std=1.0)   # Experiment 3</a:t>
             </a:r>
             <a:endParaRPr lang="en-US" sz="1250" dirty="0"/>
           </a:p>
-          <a:p>
-            <a:pPr indent="0" marL="0">
-              <a:buNone/>
-            </a:pPr>
-            <a:r>
-              <a:rPr lang="en-US" sz="1250" dirty="0">
-                <a:solidFill>
-                  <a:srgbClr val="D8E0EF"/>
-                </a:solidFill>
-                <a:latin typeface="Consolas" pitchFamily="34" charset="0"/>
-                <a:ea typeface="Consolas" pitchFamily="34" charset="-122"/>
-                <a:cs typeface="Consolas" pitchFamily="34" charset="-120"/>
-              </a:rPr>
-              <a:t>nn.init.kaiming_normal_(layer.weight, mode='fan_in', nonlinearity='relu')  # Experiment 5</a:t>
-            </a:r>
-            <a:endParaRPr lang="en-US" sz="1250" dirty="0"/>
-          </a:p>
         </p:txBody>
       </p:sp>
       <p:sp>
@@ -15340,7 +15437,7 @@
         </p:nvSpPr>
         <p:spPr>
           <a:xfrm>
-            <a:off x="640080" y="2926080"/>
+            <a:off x="640080" y="2606040"/>
             <a:ext cx="3454298" cy="768096"/>
           </a:xfrm>
           <a:prstGeom prst="rect">
@@ -15359,13 +15456,13 @@
             <a:r>
               <a:rPr lang="en-US" sz="3000" b="1" dirty="0">
                 <a:solidFill>
-                  <a:srgbClr val="2E7D5B"/>
+                  <a:srgbClr val="7D3C98"/>
                 </a:solidFill>
                 <a:latin typeface="Cambria" pitchFamily="34" charset="0"/>
                 <a:ea typeface="Cambria" pitchFamily="34" charset="-122"/>
                 <a:cs typeface="Cambria" pitchFamily="34" charset="-120"/>
               </a:rPr>
-              <a:t>68.2%</a:t>
+              <a:t>1.87e+7</a:t>
             </a:r>
             <a:endParaRPr lang="en-US" sz="3000" dirty="0"/>
           </a:p>
@@ -15379,7 +15476,7 @@
         </p:nvSpPr>
         <p:spPr>
           <a:xfrm>
-            <a:off x="640080" y="3694176"/>
+            <a:off x="640080" y="3374136"/>
             <a:ext cx="3454298" cy="512064"/>
           </a:xfrm>
           <a:prstGeom prst="rect">
@@ -15404,7 +15501,7 @@
                 <a:ea typeface="Calibri" pitchFamily="34" charset="-122"/>
                 <a:cs typeface="Calibri" pitchFamily="34" charset="-120"/>
               </a:rPr>
-              <a:t>Xavier — test accuracy (10 hidden layer, ReLU)</a:t>
+              <a:t>Gradient RMS lớp 1 (khởi tạo) — bùng nổ</a:t>
             </a:r>
             <a:endParaRPr lang="en-US" sz="1100" dirty="0"/>
           </a:p>
@@ -15418,7 +15515,7 @@
         </p:nvSpPr>
         <p:spPr>
           <a:xfrm>
-            <a:off x="4368698" y="2926080"/>
+            <a:off x="4368698" y="2606040"/>
             <a:ext cx="3454298" cy="768096"/>
           </a:xfrm>
           <a:prstGeom prst="rect">
@@ -15437,13 +15534,13 @@
             <a:r>
               <a:rPr lang="en-US" sz="3000" b="1" dirty="0">
                 <a:solidFill>
-                  <a:srgbClr val="2E7D5B"/>
+                  <a:srgbClr val="7D3C98"/>
                 </a:solidFill>
                 <a:latin typeface="Cambria" pitchFamily="34" charset="0"/>
                 <a:ea typeface="Cambria" pitchFamily="34" charset="-122"/>
                 <a:cs typeface="Cambria" pitchFamily="34" charset="-120"/>
               </a:rPr>
-              <a:t>67.4%</a:t>
+              <a:t>NaN</a:t>
             </a:r>
             <a:endParaRPr lang="en-US" sz="3000" dirty="0"/>
           </a:p>
@@ -15457,7 +15554,7 @@
         </p:nvSpPr>
         <p:spPr>
           <a:xfrm>
-            <a:off x="4368698" y="3694176"/>
+            <a:off x="4368698" y="3374136"/>
             <a:ext cx="3454298" cy="512064"/>
           </a:xfrm>
           <a:prstGeom prst="rect">
@@ -15482,7 +15579,7 @@
                 <a:ea typeface="Calibri" pitchFamily="34" charset="-122"/>
                 <a:cs typeface="Calibri" pitchFamily="34" charset="-120"/>
               </a:rPr>
-              <a:t>He — test accuracy (10 hidden layer, ReLU)</a:t>
+              <a:t>Train loss ngay từ epoch 1 — huấn luyện PHÂN KỲ</a:t>
             </a:r>
             <a:endParaRPr lang="en-US" sz="1100" dirty="0"/>
           </a:p>
@@ -15496,7 +15593,7 @@
         </p:nvSpPr>
         <p:spPr>
           <a:xfrm>
-            <a:off x="8097317" y="2926080"/>
+            <a:off x="8097317" y="2606040"/>
             <a:ext cx="3454298" cy="768096"/>
           </a:xfrm>
           <a:prstGeom prst="rect">
@@ -15515,13 +15612,13 @@
             <a:r>
               <a:rPr lang="en-US" sz="3000" b="1" dirty="0">
                 <a:solidFill>
-                  <a:srgbClr val="2E7D5B"/>
+                  <a:srgbClr val="5B6478"/>
                 </a:solidFill>
                 <a:latin typeface="Cambria" pitchFamily="34" charset="0"/>
                 <a:ea typeface="Cambria" pitchFamily="34" charset="-122"/>
                 <a:cs typeface="Cambria" pitchFamily="34" charset="-120"/>
               </a:rPr>
-              <a:t>1.11e-2</a:t>
+              <a:t>10.0%</a:t>
             </a:r>
             <a:endParaRPr lang="en-US" sz="3000" dirty="0"/>
           </a:p>
@@ -15535,7 +15632,7 @@
         </p:nvSpPr>
         <p:spPr>
           <a:xfrm>
-            <a:off x="8097317" y="3694176"/>
+            <a:off x="8097317" y="3374136"/>
             <a:ext cx="3454298" cy="512064"/>
           </a:xfrm>
           <a:prstGeom prst="rect">
@@ -15560,7 +15657,7 @@
                 <a:ea typeface="Calibri" pitchFamily="34" charset="-122"/>
                 <a:cs typeface="Calibri" pitchFamily="34" charset="-120"/>
               </a:rPr>
-              <a:t>He — gradient RMS lớp 1 (ổn định, không vanish/explode)</a:t>
+              <a:t>Test accuracy cuối cùng (không học được gì)</a:t>
             </a:r>
             <a:endParaRPr lang="en-US" sz="1100" dirty="0"/>
           </a:p>
@@ -15574,7 +15671,7 @@
         </p:nvSpPr>
         <p:spPr>
           <a:xfrm>
-            <a:off x="640080" y="4480560"/>
+            <a:off x="640080" y="4160520"/>
             <a:ext cx="10911535" cy="777240"/>
           </a:xfrm>
           <a:prstGeom prst="roundRect">
@@ -15583,11 +15680,11 @@
             </a:avLst>
           </a:prstGeom>
           <a:solidFill>
-            <a:srgbClr val="EAF3EE"/>
+            <a:srgbClr val="FBEEEC"/>
           </a:solidFill>
           <a:ln w="9525">
             <a:solidFill>
-              <a:srgbClr val="2E7D5B"/>
+              <a:srgbClr val="7D3C98"/>
             </a:solidFill>
             <a:prstDash val="solid"/>
           </a:ln>
@@ -15601,7 +15698,7 @@
         </p:nvSpPr>
         <p:spPr>
           <a:xfrm>
-            <a:off x="914400" y="4480560"/>
+            <a:off x="914400" y="4160520"/>
             <a:ext cx="10362895" cy="777240"/>
           </a:xfrm>
           <a:prstGeom prst="rect">
@@ -15620,13 +15717,13 @@
             <a:r>
               <a:rPr lang="en-US" sz="1450" b="1" dirty="0">
                 <a:solidFill>
-                  <a:srgbClr val="2E7D5B"/>
+                  <a:srgbClr val="7D3C98"/>
                 </a:solidFill>
                 <a:latin typeface="Calibri" pitchFamily="34" charset="0"/>
                 <a:ea typeface="Calibri" pitchFamily="34" charset="-122"/>
                 <a:cs typeface="Calibri" pitchFamily="34" charset="-120"/>
               </a:rPr>
-              <a:t>Cùng kiến trúc 10 lớp mà Zero/Random thất bại hoàn toàn — Xavier và He đều học được thật, chênh lệch nhỏ giữa hai scheme nằm trong biên độ nhiễu 1-seed (không kết luận cái nào vượt trội cho ReLU).</a:t>
+              <a:t>Bằng chứng thực nghiệm trực tiếp cho hiện tượng mô tả ở slide "Exploding Gradient": std quá lớn (1.0) trên 10 lớp khiến gradient RMS bùng nổ tới 1.9e+7 ngay bước đầu, loss thành NaN và không phục hồi trong suốt 15 epoch.</a:t>
             </a:r>
             <a:endParaRPr lang="en-US" sz="1450" dirty="0"/>
           </a:p>
@@ -15665,7 +15762,7 @@
                 <a:ea typeface="Calibri" pitchFamily="34" charset="-122"/>
                 <a:cs typeface="Calibri" pitchFamily="34" charset="-120"/>
               </a:rPr>
-              <a:t>21/28</a:t>
+              <a:t>21/29</a:t>
             </a:r>
             <a:endParaRPr lang="en-US" sz="900" dirty="0"/>
           </a:p>
@@ -15848,7 +15945,7 @@
                 <a:ea typeface="Calibri" pitchFamily="34" charset="-122"/>
                 <a:cs typeface="Calibri" pitchFamily="34" charset="-120"/>
               </a:rPr>
-              <a:t>DEMO — KẾT QUẢ TỔNG HỢP</a:t>
+              <a:t>DEMO — EXPERIMENT 4 &amp; 5 (5 SEEDS MỖI SCHEME)</a:t>
             </a:r>
             <a:endParaRPr lang="en-US" sz="1300" dirty="0"/>
           </a:p>
@@ -15879,7 +15976,7 @@
               <a:buNone/>
             </a:pPr>
             <a:r>
-              <a:rPr lang="en-US" sz="2500" b="1" dirty="0">
+              <a:rPr lang="en-US" sz="2400" b="1" dirty="0">
                 <a:solidFill>
                   <a:srgbClr val="1A2238"/>
                 </a:solidFill>
@@ -15887,46 +15984,44 @@
                 <a:ea typeface="Cambria" pitchFamily="34" charset="-122"/>
                 <a:cs typeface="Cambria" pitchFamily="34" charset="-120"/>
               </a:rPr>
-              <a:t>5 thí nghiệm, 1 kiến trúc, 1 biểu đồ</a:t>
-            </a:r>
-            <a:endParaRPr lang="en-US" sz="2500" dirty="0"/>
-          </a:p>
-        </p:txBody>
-      </p:sp>
-      <p:pic>
-        <p:nvPicPr>
-          <p:cNvPr id="4" name="Image 0" descr="..\results\figures\deep_demo_accuracy_slide.png">    </p:cNvPr>
-          <p:cNvPicPr>
-            <a:picLocks noChangeAspect="1"/>
-          </p:cNvPicPr>
-          <p:nvPr/>
-        </p:nvPicPr>
-        <p:blipFill>
-          <a:blip r:embed="rId1"/>
-          <a:stretch>
-            <a:fillRect/>
-          </a:stretch>
-        </p:blipFill>
-        <p:spPr>
-          <a:xfrm>
-            <a:off x="3306928" y="1554480"/>
-            <a:ext cx="5577840" cy="3842512"/>
-          </a:xfrm>
-          <a:prstGeom prst="rect">
-            <a:avLst/>
-          </a:prstGeom>
-        </p:spPr>
-      </p:pic>
-      <p:sp>
-        <p:nvSpPr>
-          <p:cNvPr id="5" name="Text 2"/>
-          <p:cNvSpPr txBox="1"/>
-          <p:nvPr/>
-        </p:nvSpPr>
-        <p:spPr>
-          <a:xfrm>
-            <a:off x="640080" y="5534152"/>
-            <a:ext cx="10911535" cy="1005840"/>
+              <a:t>Xavier vs. He — cả hai học được, chênh lệch KHÔNG đủ ý nghĩa</a:t>
+            </a:r>
+            <a:endParaRPr lang="en-US" sz="2400" dirty="0"/>
+          </a:p>
+        </p:txBody>
+      </p:sp>
+      <p:sp>
+        <p:nvSpPr>
+          <p:cNvPr id="4" name="Shape 2"/>
+          <p:cNvSpPr/>
+          <p:nvPr/>
+        </p:nvSpPr>
+        <p:spPr>
+          <a:xfrm>
+            <a:off x="640080" y="1691640"/>
+            <a:ext cx="10911535" cy="1234440"/>
+          </a:xfrm>
+          <a:prstGeom prst="roundRect">
+            <a:avLst>
+              <a:gd name="adj" fmla="val 3704"/>
+            </a:avLst>
+          </a:prstGeom>
+          <a:solidFill>
+            <a:srgbClr val="1E2A44"/>
+          </a:solidFill>
+          <a:ln/>
+        </p:spPr>
+      </p:sp>
+      <p:sp>
+        <p:nvSpPr>
+          <p:cNvPr id="5" name="Text 3"/>
+          <p:cNvSpPr txBox="1"/>
+          <p:nvPr/>
+        </p:nvSpPr>
+        <p:spPr>
+          <a:xfrm>
+            <a:off x="868680" y="1801368"/>
+            <a:ext cx="10454335" cy="1051560"/>
           </a:xfrm>
           <a:prstGeom prst="rect">
             <a:avLst/>
@@ -15938,80 +16033,329 @@
           <a:bodyPr wrap="square" lIns="0" tIns="0" rIns="0" bIns="0" rtlCol="0" anchor="t"/>
           <a:lstStyle/>
           <a:p>
-            <a:pPr marL="228600" indent="-228600">
-              <a:spcAft>
-                <a:spcPts val="500"/>
-              </a:spcAft>
-              <a:buSzPct val="100000"/>
-              <a:buChar char="▪"/>
-            </a:pPr>
-            <a:r>
-              <a:rPr lang="en-US" sz="1350" dirty="0">
-                <a:solidFill>
-                  <a:srgbClr val="1A2238"/>
+            <a:pPr indent="0" marL="0">
+              <a:buNone/>
+            </a:pPr>
+            <a:r>
+              <a:rPr lang="en-US" sz="1250" dirty="0">
+                <a:solidFill>
+                  <a:srgbClr val="D8E0EF"/>
+                </a:solidFill>
+                <a:latin typeface="Consolas" pitchFamily="34" charset="0"/>
+                <a:ea typeface="Consolas" pitchFamily="34" charset="-122"/>
+                <a:cs typeface="Consolas" pitchFamily="34" charset="-120"/>
+              </a:rPr>
+              <a:t>nn.init.xavier_normal_(layer.weight)                                       # Experiment 4</a:t>
+            </a:r>
+            <a:endParaRPr lang="en-US" sz="1250" dirty="0"/>
+          </a:p>
+          <a:p>
+            <a:pPr indent="0" marL="0">
+              <a:buNone/>
+            </a:pPr>
+            <a:r>
+              <a:rPr lang="en-US" sz="1250" dirty="0">
+                <a:solidFill>
+                  <a:srgbClr val="D8E0EF"/>
+                </a:solidFill>
+                <a:latin typeface="Consolas" pitchFamily="34" charset="0"/>
+                <a:ea typeface="Consolas" pitchFamily="34" charset="-122"/>
+                <a:cs typeface="Consolas" pitchFamily="34" charset="-120"/>
+              </a:rPr>
+              <a:t>nn.init.kaiming_normal_(layer.weight, mode='fan_in', nonlinearity='relu')  # Experiment 5</a:t>
+            </a:r>
+            <a:endParaRPr lang="en-US" sz="1250" dirty="0"/>
+          </a:p>
+          <a:p>
+            <a:pPr indent="0" marL="0">
+              <a:buNone/>
+            </a:pPr>
+            <a:r>
+              <a:rPr lang="en-US" sz="1250" dirty="0">
+                <a:solidFill>
+                  <a:srgbClr val="D8E0EF"/>
+                </a:solidFill>
+                <a:latin typeface="Consolas" pitchFamily="34" charset="0"/>
+                <a:ea typeface="Consolas" pitchFamily="34" charset="-122"/>
+                <a:cs typeface="Consolas" pitchFamily="34" charset="-120"/>
+              </a:rPr>
+              <a:t># chạy độc lập với 5 seed {42..46}, báo cáo mean ± std</a:t>
+            </a:r>
+            <a:endParaRPr lang="en-US" sz="1250" dirty="0"/>
+          </a:p>
+        </p:txBody>
+      </p:sp>
+      <p:sp>
+        <p:nvSpPr>
+          <p:cNvPr id="6" name="Text 4"/>
+          <p:cNvSpPr txBox="1"/>
+          <p:nvPr/>
+        </p:nvSpPr>
+        <p:spPr>
+          <a:xfrm>
+            <a:off x="640080" y="3246120"/>
+            <a:ext cx="3454298" cy="768096"/>
+          </a:xfrm>
+          <a:prstGeom prst="rect">
+            <a:avLst/>
+          </a:prstGeom>
+          <a:noFill/>
+          <a:ln/>
+        </p:spPr>
+        <p:txBody>
+          <a:bodyPr wrap="square" lIns="0" tIns="0" rIns="0" bIns="0" rtlCol="0" anchor="b"/>
+          <a:lstStyle/>
+          <a:p>
+            <a:pPr algn="ctr" indent="0" marL="0">
+              <a:buNone/>
+            </a:pPr>
+            <a:r>
+              <a:rPr lang="en-US" sz="3000" b="1" dirty="0">
+                <a:solidFill>
+                  <a:srgbClr val="2E7D5B"/>
+                </a:solidFill>
+                <a:latin typeface="Cambria" pitchFamily="34" charset="0"/>
+                <a:ea typeface="Cambria" pitchFamily="34" charset="-122"/>
+                <a:cs typeface="Cambria" pitchFamily="34" charset="-120"/>
+              </a:rPr>
+              <a:t>69.1% ± 4.7pp</a:t>
+            </a:r>
+            <a:endParaRPr lang="en-US" sz="3000" dirty="0"/>
+          </a:p>
+        </p:txBody>
+      </p:sp>
+      <p:sp>
+        <p:nvSpPr>
+          <p:cNvPr id="7" name="Text 5"/>
+          <p:cNvSpPr txBox="1"/>
+          <p:nvPr/>
+        </p:nvSpPr>
+        <p:spPr>
+          <a:xfrm>
+            <a:off x="640080" y="4014216"/>
+            <a:ext cx="3454298" cy="512064"/>
+          </a:xfrm>
+          <a:prstGeom prst="rect">
+            <a:avLst/>
+          </a:prstGeom>
+          <a:noFill/>
+          <a:ln/>
+        </p:spPr>
+        <p:txBody>
+          <a:bodyPr wrap="square" lIns="0" tIns="0" rIns="0" bIns="0" rtlCol="0" anchor="t"/>
+          <a:lstStyle/>
+          <a:p>
+            <a:pPr algn="ctr" indent="0" marL="0">
+              <a:buNone/>
+            </a:pPr>
+            <a:r>
+              <a:rPr lang="en-US" sz="1100" dirty="0">
+                <a:solidFill>
+                  <a:srgbClr val="5B6478"/>
                 </a:solidFill>
                 <a:latin typeface="Calibri" pitchFamily="34" charset="0"/>
                 <a:ea typeface="Calibri" pitchFamily="34" charset="-122"/>
                 <a:cs typeface="Calibri" pitchFamily="34" charset="-120"/>
               </a:rPr>
-              <a:t>Zero &amp; Random nhỏ: đường phẳng ngang mức 10% — không học được gì</a:t>
-            </a:r>
-            <a:endParaRPr lang="en-US" sz="1350" dirty="0"/>
-          </a:p>
-          <a:p>
-            <a:pPr marL="228600" indent="-228600">
-              <a:spcAft>
-                <a:spcPts val="500"/>
-              </a:spcAft>
-              <a:buSzPct val="100000"/>
-              <a:buChar char="▪"/>
-            </a:pPr>
-            <a:r>
-              <a:rPr lang="en-US" sz="1350" dirty="0">
-                <a:solidFill>
-                  <a:srgbClr val="1A2238"/>
+              <a:t>Xavier — test accuracy, mean ± std (n=5 seeds)</a:t>
+            </a:r>
+            <a:endParaRPr lang="en-US" sz="1100" dirty="0"/>
+          </a:p>
+        </p:txBody>
+      </p:sp>
+      <p:sp>
+        <p:nvSpPr>
+          <p:cNvPr id="8" name="Text 6"/>
+          <p:cNvSpPr txBox="1"/>
+          <p:nvPr/>
+        </p:nvSpPr>
+        <p:spPr>
+          <a:xfrm>
+            <a:off x="4368698" y="3246120"/>
+            <a:ext cx="3454298" cy="768096"/>
+          </a:xfrm>
+          <a:prstGeom prst="rect">
+            <a:avLst/>
+          </a:prstGeom>
+          <a:noFill/>
+          <a:ln/>
+        </p:spPr>
+        <p:txBody>
+          <a:bodyPr wrap="square" lIns="0" tIns="0" rIns="0" bIns="0" rtlCol="0" anchor="b"/>
+          <a:lstStyle/>
+          <a:p>
+            <a:pPr algn="ctr" indent="0" marL="0">
+              <a:buNone/>
+            </a:pPr>
+            <a:r>
+              <a:rPr lang="en-US" sz="3000" b="1" dirty="0">
+                <a:solidFill>
+                  <a:srgbClr val="2E7D5B"/>
+                </a:solidFill>
+                <a:latin typeface="Cambria" pitchFamily="34" charset="0"/>
+                <a:ea typeface="Cambria" pitchFamily="34" charset="-122"/>
+                <a:cs typeface="Cambria" pitchFamily="34" charset="-120"/>
+              </a:rPr>
+              <a:t>70.5% ± 5.7pp</a:t>
+            </a:r>
+            <a:endParaRPr lang="en-US" sz="3000" dirty="0"/>
+          </a:p>
+        </p:txBody>
+      </p:sp>
+      <p:sp>
+        <p:nvSpPr>
+          <p:cNvPr id="9" name="Text 7"/>
+          <p:cNvSpPr txBox="1"/>
+          <p:nvPr/>
+        </p:nvSpPr>
+        <p:spPr>
+          <a:xfrm>
+            <a:off x="4368698" y="4014216"/>
+            <a:ext cx="3454298" cy="512064"/>
+          </a:xfrm>
+          <a:prstGeom prst="rect">
+            <a:avLst/>
+          </a:prstGeom>
+          <a:noFill/>
+          <a:ln/>
+        </p:spPr>
+        <p:txBody>
+          <a:bodyPr wrap="square" lIns="0" tIns="0" rIns="0" bIns="0" rtlCol="0" anchor="t"/>
+          <a:lstStyle/>
+          <a:p>
+            <a:pPr algn="ctr" indent="0" marL="0">
+              <a:buNone/>
+            </a:pPr>
+            <a:r>
+              <a:rPr lang="en-US" sz="1100" dirty="0">
+                <a:solidFill>
+                  <a:srgbClr val="5B6478"/>
                 </a:solidFill>
                 <a:latin typeface="Calibri" pitchFamily="34" charset="0"/>
                 <a:ea typeface="Calibri" pitchFamily="34" charset="-122"/>
                 <a:cs typeface="Calibri" pitchFamily="34" charset="-120"/>
               </a:rPr>
-              <a:t>Random lớn: không xuất hiện trên biểu đồ (loss = NaN ngay từ epoch 1)</a:t>
-            </a:r>
-            <a:endParaRPr lang="en-US" sz="1350" dirty="0"/>
-          </a:p>
-          <a:p>
-            <a:pPr marL="228600" indent="-228600">
-              <a:spcAft>
-                <a:spcPts val="500"/>
-              </a:spcAft>
-              <a:buSzPct val="100000"/>
-              <a:buChar char="▪"/>
-            </a:pPr>
-            <a:r>
-              <a:rPr lang="en-US" sz="1350" dirty="0">
-                <a:solidFill>
-                  <a:srgbClr val="1A2238"/>
+              <a:t>He — test accuracy, mean ± std (n=5 seeds)</a:t>
+            </a:r>
+            <a:endParaRPr lang="en-US" sz="1100" dirty="0"/>
+          </a:p>
+        </p:txBody>
+      </p:sp>
+      <p:sp>
+        <p:nvSpPr>
+          <p:cNvPr id="10" name="Text 8"/>
+          <p:cNvSpPr txBox="1"/>
+          <p:nvPr/>
+        </p:nvSpPr>
+        <p:spPr>
+          <a:xfrm>
+            <a:off x="8097317" y="3246120"/>
+            <a:ext cx="3454298" cy="768096"/>
+          </a:xfrm>
+          <a:prstGeom prst="rect">
+            <a:avLst/>
+          </a:prstGeom>
+          <a:noFill/>
+          <a:ln/>
+        </p:spPr>
+        <p:txBody>
+          <a:bodyPr wrap="square" lIns="0" tIns="0" rIns="0" bIns="0" rtlCol="0" anchor="b"/>
+          <a:lstStyle/>
+          <a:p>
+            <a:pPr algn="ctr" indent="0" marL="0">
+              <a:buNone/>
+            </a:pPr>
+            <a:r>
+              <a:rPr lang="en-US" sz="3000" b="1" dirty="0">
+                <a:solidFill>
+                  <a:srgbClr val="2E7D5B"/>
+                </a:solidFill>
+                <a:latin typeface="Cambria" pitchFamily="34" charset="0"/>
+                <a:ea typeface="Cambria" pitchFamily="34" charset="-122"/>
+                <a:cs typeface="Cambria" pitchFamily="34" charset="-120"/>
+              </a:rPr>
+              <a:t>1.5e-2 vs 4.2e-4</a:t>
+            </a:r>
+            <a:endParaRPr lang="en-US" sz="3000" dirty="0"/>
+          </a:p>
+        </p:txBody>
+      </p:sp>
+      <p:sp>
+        <p:nvSpPr>
+          <p:cNvPr id="11" name="Text 9"/>
+          <p:cNvSpPr txBox="1"/>
+          <p:nvPr/>
+        </p:nvSpPr>
+        <p:spPr>
+          <a:xfrm>
+            <a:off x="8097317" y="4014216"/>
+            <a:ext cx="3454298" cy="512064"/>
+          </a:xfrm>
+          <a:prstGeom prst="rect">
+            <a:avLst/>
+          </a:prstGeom>
+          <a:noFill/>
+          <a:ln/>
+        </p:spPr>
+        <p:txBody>
+          <a:bodyPr wrap="square" lIns="0" tIns="0" rIns="0" bIns="0" rtlCol="0" anchor="t"/>
+          <a:lstStyle/>
+          <a:p>
+            <a:pPr algn="ctr" indent="0" marL="0">
+              <a:buNone/>
+            </a:pPr>
+            <a:r>
+              <a:rPr lang="en-US" sz="1100" dirty="0">
+                <a:solidFill>
+                  <a:srgbClr val="5B6478"/>
                 </a:solidFill>
                 <a:latin typeface="Calibri" pitchFamily="34" charset="0"/>
                 <a:ea typeface="Calibri" pitchFamily="34" charset="-122"/>
                 <a:cs typeface="Calibri" pitchFamily="34" charset="-120"/>
               </a:rPr>
-              <a:t>Xavier &amp; He: hội tụ rõ ràng, đạt ~67–68% dù kiến trúc sâu tới 10 lớp</a:t>
-            </a:r>
-            <a:endParaRPr lang="en-US" sz="1350" dirty="0"/>
-          </a:p>
-        </p:txBody>
-      </p:sp>
-      <p:sp>
-        <p:nvSpPr>
-          <p:cNvPr id="6" name="Text 3"/>
-          <p:cNvSpPr txBox="1"/>
-          <p:nvPr/>
-        </p:nvSpPr>
-        <p:spPr>
-          <a:xfrm>
-            <a:off x="11185855" y="6446520"/>
-            <a:ext cx="731520" cy="274320"/>
+              <a:t>Gradient RMS lớp 1, mean — He vs. Xavier (chênh lệch ~35×, ổn định qua seed)</a:t>
+            </a:r>
+            <a:endParaRPr lang="en-US" sz="1100" dirty="0"/>
+          </a:p>
+        </p:txBody>
+      </p:sp>
+      <p:sp>
+        <p:nvSpPr>
+          <p:cNvPr id="12" name="Shape 10"/>
+          <p:cNvSpPr/>
+          <p:nvPr/>
+        </p:nvSpPr>
+        <p:spPr>
+          <a:xfrm>
+            <a:off x="640080" y="4800600"/>
+            <a:ext cx="10911535" cy="777240"/>
+          </a:xfrm>
+          <a:prstGeom prst="roundRect">
+            <a:avLst>
+              <a:gd name="adj" fmla="val 7059"/>
+            </a:avLst>
+          </a:prstGeom>
+          <a:solidFill>
+            <a:srgbClr val="EAF3EE"/>
+          </a:solidFill>
+          <a:ln w="9525">
+            <a:solidFill>
+              <a:srgbClr val="2E7D5B"/>
+            </a:solidFill>
+            <a:prstDash val="solid"/>
+          </a:ln>
+        </p:spPr>
+      </p:sp>
+      <p:sp>
+        <p:nvSpPr>
+          <p:cNvPr id="13" name="Text 11"/>
+          <p:cNvSpPr txBox="1"/>
+          <p:nvPr/>
+        </p:nvSpPr>
+        <p:spPr>
+          <a:xfrm>
+            <a:off x="914400" y="4800600"/>
+            <a:ext cx="10362895" cy="777240"/>
           </a:xfrm>
           <a:prstGeom prst="rect">
             <a:avLst/>
@@ -16023,19 +16367,58 @@
           <a:bodyPr wrap="square" lIns="0" tIns="0" rIns="0" bIns="0" rtlCol="0" anchor="ctr"/>
           <a:lstStyle/>
           <a:p>
-            <a:pPr algn="r" indent="0" marL="0">
-              <a:buNone/>
-            </a:pPr>
-            <a:r>
-              <a:rPr lang="en-US" sz="900" dirty="0">
-                <a:solidFill>
-                  <a:srgbClr val="5B6478"/>
+            <a:pPr indent="0" marL="0">
+              <a:buNone/>
+            </a:pPr>
+            <a:r>
+              <a:rPr lang="en-US" sz="1450" b="1" dirty="0">
+                <a:solidFill>
+                  <a:srgbClr val="2E7D5B"/>
                 </a:solidFill>
                 <a:latin typeface="Calibri" pitchFamily="34" charset="0"/>
                 <a:ea typeface="Calibri" pitchFamily="34" charset="-122"/>
                 <a:cs typeface="Calibri" pitchFamily="34" charset="-120"/>
               </a:rPr>
-              <a:t>22/28</a:t>
+              <a:t>Accuracy: Xavier 69.1%±4.7pp vs. He 70.5%±5.7pp — khoảng std CHỒNG LẤN nhau, không đủ cơ sở kết luận scheme nào vượt trội cho ReLU trong setup này. Khác biệt rõ ràng và nhất quán hơn nằm ở gradient RMS (He &gt; Xavier ở mọi seed).</a:t>
+            </a:r>
+            <a:endParaRPr lang="en-US" sz="1450" dirty="0"/>
+          </a:p>
+        </p:txBody>
+      </p:sp>
+      <p:sp>
+        <p:nvSpPr>
+          <p:cNvPr id="14" name="Text 12"/>
+          <p:cNvSpPr txBox="1"/>
+          <p:nvPr/>
+        </p:nvSpPr>
+        <p:spPr>
+          <a:xfrm>
+            <a:off x="11185855" y="6446520"/>
+            <a:ext cx="731520" cy="274320"/>
+          </a:xfrm>
+          <a:prstGeom prst="rect">
+            <a:avLst/>
+          </a:prstGeom>
+          <a:noFill/>
+          <a:ln/>
+        </p:spPr>
+        <p:txBody>
+          <a:bodyPr wrap="square" lIns="0" tIns="0" rIns="0" bIns="0" rtlCol="0" anchor="ctr"/>
+          <a:lstStyle/>
+          <a:p>
+            <a:pPr algn="r" indent="0" marL="0">
+              <a:buNone/>
+            </a:pPr>
+            <a:r>
+              <a:rPr lang="en-US" sz="900" dirty="0">
+                <a:solidFill>
+                  <a:srgbClr val="5B6478"/>
+                </a:solidFill>
+                <a:latin typeface="Calibri" pitchFamily="34" charset="0"/>
+                <a:ea typeface="Calibri" pitchFamily="34" charset="-122"/>
+                <a:cs typeface="Calibri" pitchFamily="34" charset="-120"/>
+              </a:rPr>
+              <a:t>22/29</a:t>
             </a:r>
             <a:endParaRPr lang="en-US" sz="900" dirty="0"/>
           </a:p>
@@ -16043,7 +16426,7 @@
       </p:sp>
       <p:sp>
         <p:nvSpPr>
-          <p:cNvPr id="7" name="Shape 4"/>
+          <p:cNvPr id="15" name="Shape 13"/>
           <p:cNvSpPr/>
           <p:nvPr/>
         </p:nvSpPr>
@@ -16063,7 +16446,7 @@
       </p:sp>
       <p:sp>
         <p:nvSpPr>
-          <p:cNvPr id="8" name="Shape 5"/>
+          <p:cNvPr id="16" name="Shape 14"/>
           <p:cNvSpPr/>
           <p:nvPr/>
         </p:nvSpPr>
@@ -16083,7 +16466,7 @@
       </p:sp>
       <p:sp>
         <p:nvSpPr>
-          <p:cNvPr id="9" name="Shape 6"/>
+          <p:cNvPr id="17" name="Shape 15"/>
           <p:cNvSpPr/>
           <p:nvPr/>
         </p:nvSpPr>
@@ -16103,7 +16486,7 @@
       </p:sp>
       <p:sp>
         <p:nvSpPr>
-          <p:cNvPr id="10" name="Shape 7"/>
+          <p:cNvPr id="18" name="Shape 16"/>
           <p:cNvSpPr/>
           <p:nvPr/>
         </p:nvSpPr>
@@ -16123,7 +16506,7 @@
       </p:sp>
       <p:sp>
         <p:nvSpPr>
-          <p:cNvPr id="11" name="Text 8"/>
+          <p:cNvPr id="19" name="Text 17"/>
           <p:cNvSpPr txBox="1"/>
           <p:nvPr/>
         </p:nvSpPr>
@@ -16218,7 +16601,7 @@
                 <a:ea typeface="Calibri" pitchFamily="34" charset="-122"/>
                 <a:cs typeface="Calibri" pitchFamily="34" charset="-120"/>
               </a:rPr>
-              <a:t>DEMO — VISUALIZATION</a:t>
+              <a:t>DEMO — KẾT QUẢ TỔNG HỢP</a:t>
             </a:r>
             <a:endParaRPr lang="en-US" sz="1300" dirty="0"/>
           </a:p>
@@ -16249,7 +16632,7 @@
               <a:buNone/>
             </a:pPr>
             <a:r>
-              <a:rPr lang="en-US" sz="2300" b="1" dirty="0">
+              <a:rPr lang="en-US" sz="2500" b="1" dirty="0">
                 <a:solidFill>
                   <a:srgbClr val="1A2238"/>
                 </a:solidFill>
@@ -16257,15 +16640,15 @@
                 <a:ea typeface="Cambria" pitchFamily="34" charset="-122"/>
                 <a:cs typeface="Cambria" pitchFamily="34" charset="-120"/>
               </a:rPr>
-              <a:t>Gradient Norm Heatmap — layer × initialization</a:t>
-            </a:r>
-            <a:endParaRPr lang="en-US" sz="2300" dirty="0"/>
+              <a:t>5 thí nghiệm, 1 kiến trúc, 1 biểu đồ</a:t>
+            </a:r>
+            <a:endParaRPr lang="en-US" sz="2500" dirty="0"/>
           </a:p>
         </p:txBody>
       </p:sp>
       <p:pic>
         <p:nvPicPr>
-          <p:cNvPr id="4" name="Image 0" descr="..\results\figures\gradient_heatmap_slide.png">    </p:cNvPr>
+          <p:cNvPr id="4" name="Image 0" descr="..\results\figures\deep_demo_accuracy_slide.png">    </p:cNvPr>
           <p:cNvPicPr>
             <a:picLocks noChangeAspect="1"/>
           </p:cNvPicPr>
@@ -16279,8 +16662,8 @@
         </p:blipFill>
         <p:spPr>
           <a:xfrm>
-            <a:off x="1798168" y="1600200"/>
-            <a:ext cx="8595360" cy="4063261"/>
+            <a:off x="3306928" y="1554480"/>
+            <a:ext cx="5577840" cy="3842512"/>
           </a:xfrm>
           <a:prstGeom prst="rect">
             <a:avLst/>
@@ -16295,71 +16678,117 @@
         </p:nvSpPr>
         <p:spPr>
           <a:xfrm>
-            <a:off x="640080" y="5754901"/>
-            <a:ext cx="10911535" cy="548640"/>
-          </a:xfrm>
-          <a:prstGeom prst="rect">
-            <a:avLst/>
-          </a:prstGeom>
-          <a:noFill/>
-          <a:ln/>
-        </p:spPr>
-        <p:txBody>
-          <a:bodyPr wrap="square" lIns="0" tIns="0" rIns="0" bIns="0" rtlCol="0" anchor="ctr"/>
-          <a:lstStyle/>
-          <a:p>
-            <a:pPr indent="0" marL="0">
-              <a:buNone/>
-            </a:pPr>
-            <a:r>
-              <a:rPr lang="en-US" sz="1250" i="1" dirty="0">
-                <a:solidFill>
-                  <a:srgbClr val="5B6478"/>
+            <a:off x="640080" y="5534152"/>
+            <a:ext cx="10911535" cy="1005840"/>
+          </a:xfrm>
+          <a:prstGeom prst="rect">
+            <a:avLst/>
+          </a:prstGeom>
+          <a:noFill/>
+          <a:ln/>
+        </p:spPr>
+        <p:txBody>
+          <a:bodyPr wrap="square" lIns="0" tIns="0" rIns="0" bIns="0" rtlCol="0" anchor="t"/>
+          <a:lstStyle/>
+          <a:p>
+            <a:pPr marL="228600" indent="-228600">
+              <a:spcAft>
+                <a:spcPts val="500"/>
+              </a:spcAft>
+              <a:buSzPct val="100000"/>
+              <a:buChar char="▪"/>
+            </a:pPr>
+            <a:r>
+              <a:rPr lang="en-US" sz="1350" dirty="0">
+                <a:solidFill>
+                  <a:srgbClr val="1A2238"/>
                 </a:solidFill>
                 <a:latin typeface="Calibri" pitchFamily="34" charset="0"/>
                 <a:ea typeface="Calibri" pitchFamily="34" charset="-122"/>
                 <a:cs typeface="Calibri" pitchFamily="34" charset="-120"/>
               </a:rPr>
-              <a:t>log₁₀(RMS gradient) đo thật tại bước khởi tạo, 10 hidden layer, activation ReLU — xanh dương = quá nhỏ (vanish), đỏ = quá lớn (explode), cam nhạt/vàng = vùng ổn định.</a:t>
-            </a:r>
-            <a:endParaRPr lang="en-US" sz="1250" dirty="0"/>
-          </a:p>
-        </p:txBody>
-      </p:sp>
-      <p:sp>
-        <p:nvSpPr>
-          <p:cNvPr id="6" name="Text 3"/>
-          <p:cNvSpPr txBox="1"/>
-          <p:nvPr/>
-        </p:nvSpPr>
-        <p:spPr>
-          <a:xfrm>
-            <a:off x="11185855" y="6446520"/>
-            <a:ext cx="731520" cy="274320"/>
-          </a:xfrm>
-          <a:prstGeom prst="rect">
-            <a:avLst/>
-          </a:prstGeom>
-          <a:noFill/>
-          <a:ln/>
-        </p:spPr>
-        <p:txBody>
-          <a:bodyPr wrap="square" lIns="0" tIns="0" rIns="0" bIns="0" rtlCol="0" anchor="ctr"/>
-          <a:lstStyle/>
-          <a:p>
-            <a:pPr algn="r" indent="0" marL="0">
-              <a:buNone/>
-            </a:pPr>
-            <a:r>
-              <a:rPr lang="en-US" sz="900" dirty="0">
-                <a:solidFill>
-                  <a:srgbClr val="5B6478"/>
+              <a:t>Zero &amp; Random nhỏ: đường phẳng ngang mức 10% — không học được gì</a:t>
+            </a:r>
+            <a:endParaRPr lang="en-US" sz="1350" dirty="0"/>
+          </a:p>
+          <a:p>
+            <a:pPr marL="228600" indent="-228600">
+              <a:spcAft>
+                <a:spcPts val="500"/>
+              </a:spcAft>
+              <a:buSzPct val="100000"/>
+              <a:buChar char="▪"/>
+            </a:pPr>
+            <a:r>
+              <a:rPr lang="en-US" sz="1350" dirty="0">
+                <a:solidFill>
+                  <a:srgbClr val="1A2238"/>
                 </a:solidFill>
                 <a:latin typeface="Calibri" pitchFamily="34" charset="0"/>
                 <a:ea typeface="Calibri" pitchFamily="34" charset="-122"/>
                 <a:cs typeface="Calibri" pitchFamily="34" charset="-120"/>
               </a:rPr>
-              <a:t>23/28</a:t>
+              <a:t>Random lớn: không xuất hiện trên biểu đồ (loss = NaN ngay từ epoch 1)</a:t>
+            </a:r>
+            <a:endParaRPr lang="en-US" sz="1350" dirty="0"/>
+          </a:p>
+          <a:p>
+            <a:pPr marL="228600" indent="-228600">
+              <a:spcAft>
+                <a:spcPts val="500"/>
+              </a:spcAft>
+              <a:buSzPct val="100000"/>
+              <a:buChar char="▪"/>
+            </a:pPr>
+            <a:r>
+              <a:rPr lang="en-US" sz="1350" dirty="0">
+                <a:solidFill>
+                  <a:srgbClr val="1A2238"/>
+                </a:solidFill>
+                <a:latin typeface="Calibri" pitchFamily="34" charset="0"/>
+                <a:ea typeface="Calibri" pitchFamily="34" charset="-122"/>
+                <a:cs typeface="Calibri" pitchFamily="34" charset="-120"/>
+              </a:rPr>
+              <a:t>Xavier &amp; He: hội tụ rõ ràng, đạt ~67–68% dù kiến trúc sâu tới 10 lớp</a:t>
+            </a:r>
+            <a:endParaRPr lang="en-US" sz="1350" dirty="0"/>
+          </a:p>
+        </p:txBody>
+      </p:sp>
+      <p:sp>
+        <p:nvSpPr>
+          <p:cNvPr id="6" name="Text 3"/>
+          <p:cNvSpPr txBox="1"/>
+          <p:nvPr/>
+        </p:nvSpPr>
+        <p:spPr>
+          <a:xfrm>
+            <a:off x="11185855" y="6446520"/>
+            <a:ext cx="731520" cy="274320"/>
+          </a:xfrm>
+          <a:prstGeom prst="rect">
+            <a:avLst/>
+          </a:prstGeom>
+          <a:noFill/>
+          <a:ln/>
+        </p:spPr>
+        <p:txBody>
+          <a:bodyPr wrap="square" lIns="0" tIns="0" rIns="0" bIns="0" rtlCol="0" anchor="ctr"/>
+          <a:lstStyle/>
+          <a:p>
+            <a:pPr algn="r" indent="0" marL="0">
+              <a:buNone/>
+            </a:pPr>
+            <a:r>
+              <a:rPr lang="en-US" sz="900" dirty="0">
+                <a:solidFill>
+                  <a:srgbClr val="5B6478"/>
+                </a:solidFill>
+                <a:latin typeface="Calibri" pitchFamily="34" charset="0"/>
+                <a:ea typeface="Calibri" pitchFamily="34" charset="-122"/>
+                <a:cs typeface="Calibri" pitchFamily="34" charset="-120"/>
+              </a:rPr>
+              <a:t>23/29</a:t>
             </a:r>
             <a:endParaRPr lang="en-US" sz="900" dirty="0"/>
           </a:p>
@@ -16542,7 +16971,7 @@
                 <a:ea typeface="Calibri" pitchFamily="34" charset="-122"/>
                 <a:cs typeface="Calibri" pitchFamily="34" charset="-120"/>
               </a:rPr>
-              <a:t>DEMO — DEPTH EXPERIMENT</a:t>
+              <a:t>DEMO — VISUALIZATION QUAN TRỌNG NHẤT</a:t>
             </a:r>
             <a:endParaRPr lang="en-US" sz="1300" dirty="0"/>
           </a:p>
@@ -16573,7 +17002,7 @@
               <a:buNone/>
             </a:pPr>
             <a:r>
-              <a:rPr lang="en-US" sz="2200" b="1" dirty="0">
+              <a:rPr lang="en-US" sz="2300" b="1" dirty="0">
                 <a:solidFill>
                   <a:srgbClr val="1A2238"/>
                 </a:solidFill>
@@ -16581,15 +17010,15 @@
                 <a:ea typeface="Cambria" pitchFamily="34" charset="-122"/>
                 <a:cs typeface="Cambria" pitchFamily="34" charset="-120"/>
               </a:rPr>
-              <a:t>Random vs. Xavier vs. He — theo độ sâu (2→50 lớp)</a:t>
-            </a:r>
-            <a:endParaRPr lang="en-US" sz="2200" dirty="0"/>
+              <a:t>Gradient RMS Heatmap — layer × initialization</a:t>
+            </a:r>
+            <a:endParaRPr lang="en-US" sz="2300" dirty="0"/>
           </a:p>
         </p:txBody>
       </p:sp>
       <p:pic>
         <p:nvPicPr>
-          <p:cNvPr id="4" name="Image 0" descr="..\results\figures\depth_comparison_v2_slide.png">    </p:cNvPr>
+          <p:cNvPr id="4" name="Image 0" descr="..\results\figures\gradient_heatmap_slide.png">    </p:cNvPr>
           <p:cNvPicPr>
             <a:picLocks noChangeAspect="1"/>
           </p:cNvPicPr>
@@ -16603,8 +17032,8 @@
         </p:blipFill>
         <p:spPr>
           <a:xfrm>
-            <a:off x="640080" y="1737360"/>
-            <a:ext cx="6035040" cy="4157472"/>
+            <a:off x="1798168" y="1600200"/>
+            <a:ext cx="8595360" cy="4063261"/>
           </a:xfrm>
           <a:prstGeom prst="rect">
             <a:avLst/>
@@ -16619,138 +17048,71 @@
         </p:nvSpPr>
         <p:spPr>
           <a:xfrm>
-            <a:off x="7040880" y="1828800"/>
-            <a:ext cx="4510735" cy="4206240"/>
-          </a:xfrm>
-          <a:prstGeom prst="rect">
-            <a:avLst/>
-          </a:prstGeom>
-          <a:noFill/>
-          <a:ln/>
-        </p:spPr>
-        <p:txBody>
-          <a:bodyPr wrap="square" lIns="0" tIns="0" rIns="0" bIns="0" rtlCol="0" anchor="t"/>
-          <a:lstStyle/>
-          <a:p>
-            <a:pPr marL="228600" indent="-228600">
-              <a:spcAft>
-                <a:spcPts val="1000"/>
-              </a:spcAft>
-              <a:buSzPct val="100000"/>
-              <a:buChar char="▪"/>
-            </a:pPr>
-            <a:r>
-              <a:rPr lang="en-US" sz="1300" dirty="0">
-                <a:solidFill>
-                  <a:srgbClr val="1A2238"/>
+            <a:off x="640080" y="5754901"/>
+            <a:ext cx="10911535" cy="548640"/>
+          </a:xfrm>
+          <a:prstGeom prst="rect">
+            <a:avLst/>
+          </a:prstGeom>
+          <a:noFill/>
+          <a:ln/>
+        </p:spPr>
+        <p:txBody>
+          <a:bodyPr wrap="square" lIns="0" tIns="0" rIns="0" bIns="0" rtlCol="0" anchor="ctr"/>
+          <a:lstStyle/>
+          <a:p>
+            <a:pPr indent="0" marL="0">
+              <a:buNone/>
+            </a:pPr>
+            <a:r>
+              <a:rPr lang="en-US" sz="1250" i="1" dirty="0">
+                <a:solidFill>
+                  <a:srgbClr val="5B6478"/>
                 </a:solidFill>
                 <a:latin typeface="Calibri" pitchFamily="34" charset="0"/>
                 <a:ea typeface="Calibri" pitchFamily="34" charset="-122"/>
                 <a:cs typeface="Calibri" pitchFamily="34" charset="-120"/>
               </a:rPr>
-              <a:t>Random (naive): gradient chết hẳn (=0.0) từ độ sâu 20 trở lên</a:t>
-            </a:r>
-            <a:endParaRPr lang="en-US" sz="1300" dirty="0"/>
-          </a:p>
-          <a:p>
-            <a:pPr marL="228600" indent="-228600">
-              <a:spcAft>
-                <a:spcPts val="1000"/>
-              </a:spcAft>
-              <a:buSzPct val="100000"/>
-              <a:buChar char="▪"/>
-            </a:pPr>
-            <a:r>
-              <a:rPr lang="en-US" sz="1300" dirty="0">
-                <a:solidFill>
-                  <a:srgbClr val="1A2238"/>
+              <a:t>log₁₀(RMS gradient) đo thật tại bước khởi tạo, 10 hidden layer, activation ReLU — xanh dương = quá nhỏ (vanish), đỏ = quá lớn (explode), cam nhạt/vàng = vùng ổn định.</a:t>
+            </a:r>
+            <a:endParaRPr lang="en-US" sz="1250" dirty="0"/>
+          </a:p>
+        </p:txBody>
+      </p:sp>
+      <p:sp>
+        <p:nvSpPr>
+          <p:cNvPr id="6" name="Text 3"/>
+          <p:cNvSpPr txBox="1"/>
+          <p:nvPr/>
+        </p:nvSpPr>
+        <p:spPr>
+          <a:xfrm>
+            <a:off x="11185855" y="6446520"/>
+            <a:ext cx="731520" cy="274320"/>
+          </a:xfrm>
+          <a:prstGeom prst="rect">
+            <a:avLst/>
+          </a:prstGeom>
+          <a:noFill/>
+          <a:ln/>
+        </p:spPr>
+        <p:txBody>
+          <a:bodyPr wrap="square" lIns="0" tIns="0" rIns="0" bIns="0" rtlCol="0" anchor="ctr"/>
+          <a:lstStyle/>
+          <a:p>
+            <a:pPr algn="r" indent="0" marL="0">
+              <a:buNone/>
+            </a:pPr>
+            <a:r>
+              <a:rPr lang="en-US" sz="900" dirty="0">
+                <a:solidFill>
+                  <a:srgbClr val="5B6478"/>
                 </a:solidFill>
                 <a:latin typeface="Calibri" pitchFamily="34" charset="0"/>
                 <a:ea typeface="Calibri" pitchFamily="34" charset="-122"/>
                 <a:cs typeface="Calibri" pitchFamily="34" charset="-120"/>
               </a:rPr>
-              <a:t>Xavier: suy giảm dần đều — sụp hẳn ở độ sâu 50 (≈3×10⁻¹⁰)</a:t>
-            </a:r>
-            <a:endParaRPr lang="en-US" sz="1300" dirty="0"/>
-          </a:p>
-          <a:p>
-            <a:pPr marL="228600" indent="-228600">
-              <a:spcAft>
-                <a:spcPts val="1000"/>
-              </a:spcAft>
-              <a:buSzPct val="100000"/>
-              <a:buChar char="▪"/>
-            </a:pPr>
-            <a:r>
-              <a:rPr lang="en-US" sz="1300" dirty="0">
-                <a:solidFill>
-                  <a:srgbClr val="1A2238"/>
-                </a:solidFill>
-                <a:latin typeface="Calibri" pitchFamily="34" charset="0"/>
-                <a:ea typeface="Calibri" pitchFamily="34" charset="-122"/>
-                <a:cs typeface="Calibri" pitchFamily="34" charset="-120"/>
-              </a:rPr>
-              <a:t>He: giữ gradient ổn định (~10⁻²) ở MỌI độ sâu, kể cả 50 lớp</a:t>
-            </a:r>
-            <a:endParaRPr lang="en-US" sz="1300" dirty="0"/>
-          </a:p>
-          <a:p>
-            <a:pPr marL="228600" indent="-228600">
-              <a:spcAft>
-                <a:spcPts val="1000"/>
-              </a:spcAft>
-              <a:buSzPct val="100000"/>
-              <a:buChar char="▪"/>
-            </a:pPr>
-            <a:r>
-              <a:rPr lang="en-US" sz="1300" dirty="0">
-                <a:solidFill>
-                  <a:srgbClr val="1A2238"/>
-                </a:solidFill>
-                <a:latin typeface="Calibri" pitchFamily="34" charset="0"/>
-                <a:ea typeface="Calibri" pitchFamily="34" charset="-122"/>
-                <a:cs typeface="Calibri" pitchFamily="34" charset="-120"/>
-              </a:rPr>
-              <a:t>Nhưng giữ được gradient KHÔNG đồng nghĩa học tốt: He@L=12 test acc chỉ 32.6% (overfitting, không phải vanishing — khớp đúng phát hiện của báo cáo chính)</a:t>
-            </a:r>
-            <a:endParaRPr lang="en-US" sz="1300" dirty="0"/>
-          </a:p>
-        </p:txBody>
-      </p:sp>
-      <p:sp>
-        <p:nvSpPr>
-          <p:cNvPr id="6" name="Text 3"/>
-          <p:cNvSpPr txBox="1"/>
-          <p:nvPr/>
-        </p:nvSpPr>
-        <p:spPr>
-          <a:xfrm>
-            <a:off x="11185855" y="6446520"/>
-            <a:ext cx="731520" cy="274320"/>
-          </a:xfrm>
-          <a:prstGeom prst="rect">
-            <a:avLst/>
-          </a:prstGeom>
-          <a:noFill/>
-          <a:ln/>
-        </p:spPr>
-        <p:txBody>
-          <a:bodyPr wrap="square" lIns="0" tIns="0" rIns="0" bIns="0" rtlCol="0" anchor="ctr"/>
-          <a:lstStyle/>
-          <a:p>
-            <a:pPr algn="r" indent="0" marL="0">
-              <a:buNone/>
-            </a:pPr>
-            <a:r>
-              <a:rPr lang="en-US" sz="900" dirty="0">
-                <a:solidFill>
-                  <a:srgbClr val="5B6478"/>
-                </a:solidFill>
-                <a:latin typeface="Calibri" pitchFamily="34" charset="0"/>
-                <a:ea typeface="Calibri" pitchFamily="34" charset="-122"/>
-                <a:cs typeface="Calibri" pitchFamily="34" charset="-120"/>
-              </a:rPr>
-              <a:t>24/28</a:t>
+              <a:t>24/29</a:t>
             </a:r>
             <a:endParaRPr lang="en-US" sz="900" dirty="0"/>
           </a:p>
@@ -16933,7 +17295,7 @@
                 <a:ea typeface="Calibri" pitchFamily="34" charset="-122"/>
                 <a:cs typeface="Calibri" pitchFamily="34" charset="-120"/>
               </a:rPr>
-              <a:t>KẾT QUẢ</a:t>
+              <a:t>DEMO — DEPTH EXPERIMENT</a:t>
             </a:r>
             <a:endParaRPr lang="en-US" sz="1300" dirty="0"/>
           </a:p>
@@ -16964,7 +17326,7 @@
               <a:buNone/>
             </a:pPr>
             <a:r>
-              <a:rPr lang="en-US" sz="2400" b="1" dirty="0">
+              <a:rPr lang="en-US" sz="2200" b="1" dirty="0">
                 <a:solidFill>
                   <a:srgbClr val="1A2238"/>
                 </a:solidFill>
@@ -16972,15 +17334,445 @@
                 <a:ea typeface="Cambria" pitchFamily="34" charset="-122"/>
                 <a:cs typeface="Cambria" pitchFamily="34" charset="-120"/>
               </a:rPr>
+              <a:t>Random vs. Xavier vs. He — theo độ sâu (2→50 lớp)</a:t>
+            </a:r>
+            <a:endParaRPr lang="en-US" sz="2200" dirty="0"/>
+          </a:p>
+        </p:txBody>
+      </p:sp>
+      <p:pic>
+        <p:nvPicPr>
+          <p:cNvPr id="4" name="Image 0" descr="..\results\figures\depth_comparison_v2_slide.png">    </p:cNvPr>
+          <p:cNvPicPr>
+            <a:picLocks noChangeAspect="1"/>
+          </p:cNvPicPr>
+          <p:nvPr/>
+        </p:nvPicPr>
+        <p:blipFill>
+          <a:blip r:embed="rId1"/>
+          <a:stretch>
+            <a:fillRect/>
+          </a:stretch>
+        </p:blipFill>
+        <p:spPr>
+          <a:xfrm>
+            <a:off x="640080" y="1737360"/>
+            <a:ext cx="6035040" cy="4157472"/>
+          </a:xfrm>
+          <a:prstGeom prst="rect">
+            <a:avLst/>
+          </a:prstGeom>
+        </p:spPr>
+      </p:pic>
+      <p:sp>
+        <p:nvSpPr>
+          <p:cNvPr id="5" name="Text 2"/>
+          <p:cNvSpPr txBox="1"/>
+          <p:nvPr/>
+        </p:nvSpPr>
+        <p:spPr>
+          <a:xfrm>
+            <a:off x="7040880" y="1828800"/>
+            <a:ext cx="4510735" cy="4206240"/>
+          </a:xfrm>
+          <a:prstGeom prst="rect">
+            <a:avLst/>
+          </a:prstGeom>
+          <a:noFill/>
+          <a:ln/>
+        </p:spPr>
+        <p:txBody>
+          <a:bodyPr wrap="square" lIns="0" tIns="0" rIns="0" bIns="0" rtlCol="0" anchor="t"/>
+          <a:lstStyle/>
+          <a:p>
+            <a:pPr marL="228600" indent="-228600">
+              <a:spcAft>
+                <a:spcPts val="900"/>
+              </a:spcAft>
+              <a:buSzPct val="100000"/>
+              <a:buChar char="▪"/>
+            </a:pPr>
+            <a:r>
+              <a:rPr lang="en-US" sz="1250" dirty="0">
+                <a:solidFill>
+                  <a:srgbClr val="1A2238"/>
+                </a:solidFill>
+                <a:latin typeface="Calibri" pitchFamily="34" charset="0"/>
+                <a:ea typeface="Calibri" pitchFamily="34" charset="-122"/>
+                <a:cs typeface="Calibri" pitchFamily="34" charset="-120"/>
+              </a:rPr>
+              <a:t>Random (naive): trong thiết lập này, gradient RMS về xấp xỉ 0 từ độ sâu 20 trở lên</a:t>
+            </a:r>
+            <a:endParaRPr lang="en-US" sz="1250" dirty="0"/>
+          </a:p>
+          <a:p>
+            <a:pPr marL="228600" indent="-228600">
+              <a:spcAft>
+                <a:spcPts val="900"/>
+              </a:spcAft>
+              <a:buSzPct val="100000"/>
+              <a:buChar char="▪"/>
+            </a:pPr>
+            <a:r>
+              <a:rPr lang="en-US" sz="1250" dirty="0">
+                <a:solidFill>
+                  <a:srgbClr val="1A2238"/>
+                </a:solidFill>
+                <a:latin typeface="Calibri" pitchFamily="34" charset="0"/>
+                <a:ea typeface="Calibri" pitchFamily="34" charset="-122"/>
+                <a:cs typeface="Calibri" pitchFamily="34" charset="-120"/>
+              </a:rPr>
+              <a:t>Xavier: suy giảm dần đều — cho gradient RMS rất nhỏ tại depth=50 (≈3×10⁻¹⁰)</a:t>
+            </a:r>
+            <a:endParaRPr lang="en-US" sz="1250" dirty="0"/>
+          </a:p>
+          <a:p>
+            <a:pPr marL="228600" indent="-228600">
+              <a:spcAft>
+                <a:spcPts val="900"/>
+              </a:spcAft>
+              <a:buSzPct val="100000"/>
+              <a:buChar char="▪"/>
+            </a:pPr>
+            <a:r>
+              <a:rPr lang="en-US" sz="1250" dirty="0">
+                <a:solidFill>
+                  <a:srgbClr val="1A2238"/>
+                </a:solidFill>
+                <a:latin typeface="Calibri" pitchFamily="34" charset="0"/>
+                <a:ea typeface="Calibri" pitchFamily="34" charset="-122"/>
+                <a:cs typeface="Calibri" pitchFamily="34" charset="-120"/>
+              </a:rPr>
+              <a:t>He: duy trì gradient RMS cùng order of magnitude (~10⁻²) đến depth=50, trong architecture và training setup đang xét</a:t>
+            </a:r>
+            <a:endParaRPr lang="en-US" sz="1250" dirty="0"/>
+          </a:p>
+          <a:p>
+            <a:pPr marL="228600" indent="-228600">
+              <a:spcAft>
+                <a:spcPts val="900"/>
+              </a:spcAft>
+              <a:buSzPct val="100000"/>
+              <a:buChar char="▪"/>
+            </a:pPr>
+            <a:r>
+              <a:rPr lang="en-US" sz="1250" dirty="0">
+                <a:solidFill>
+                  <a:srgbClr val="1A2238"/>
+                </a:solidFill>
+                <a:latin typeface="Calibri" pitchFamily="34" charset="0"/>
+                <a:ea typeface="Calibri" pitchFamily="34" charset="-122"/>
+                <a:cs typeface="Calibri" pitchFamily="34" charset="-120"/>
+              </a:rPr>
+              <a:t>Nhưng gradient ổn định KHÔNG đồng nghĩa học tốt: He@L=12 test acc chỉ 32.6% (overfitting quan sát được, không phải vanishing — khớp phát hiện của báo cáo chính)</a:t>
+            </a:r>
+            <a:endParaRPr lang="en-US" sz="1250" dirty="0"/>
+          </a:p>
+        </p:txBody>
+      </p:sp>
+      <p:sp>
+        <p:nvSpPr>
+          <p:cNvPr id="6" name="Text 3"/>
+          <p:cNvSpPr txBox="1"/>
+          <p:nvPr/>
+        </p:nvSpPr>
+        <p:spPr>
+          <a:xfrm>
+            <a:off x="11185855" y="6446520"/>
+            <a:ext cx="731520" cy="274320"/>
+          </a:xfrm>
+          <a:prstGeom prst="rect">
+            <a:avLst/>
+          </a:prstGeom>
+          <a:noFill/>
+          <a:ln/>
+        </p:spPr>
+        <p:txBody>
+          <a:bodyPr wrap="square" lIns="0" tIns="0" rIns="0" bIns="0" rtlCol="0" anchor="ctr"/>
+          <a:lstStyle/>
+          <a:p>
+            <a:pPr algn="r" indent="0" marL="0">
+              <a:buNone/>
+            </a:pPr>
+            <a:r>
+              <a:rPr lang="en-US" sz="900" dirty="0">
+                <a:solidFill>
+                  <a:srgbClr val="5B6478"/>
+                </a:solidFill>
+                <a:latin typeface="Calibri" pitchFamily="34" charset="0"/>
+                <a:ea typeface="Calibri" pitchFamily="34" charset="-122"/>
+                <a:cs typeface="Calibri" pitchFamily="34" charset="-120"/>
+              </a:rPr>
+              <a:t>25/29</a:t>
+            </a:r>
+            <a:endParaRPr lang="en-US" sz="900" dirty="0"/>
+          </a:p>
+        </p:txBody>
+      </p:sp>
+      <p:sp>
+        <p:nvSpPr>
+          <p:cNvPr id="7" name="Shape 4"/>
+          <p:cNvSpPr/>
+          <p:nvPr/>
+        </p:nvSpPr>
+        <p:spPr>
+          <a:xfrm>
+            <a:off x="610362" y="6473952"/>
+            <a:ext cx="59436" cy="59436"/>
+          </a:xfrm>
+          <a:prstGeom prst="ellipse">
+            <a:avLst/>
+          </a:prstGeom>
+          <a:solidFill>
+            <a:srgbClr val="D9DEE8"/>
+          </a:solidFill>
+          <a:ln/>
+        </p:spPr>
+      </p:sp>
+      <p:sp>
+        <p:nvSpPr>
+          <p:cNvPr id="8" name="Shape 5"/>
+          <p:cNvSpPr/>
+          <p:nvPr/>
+        </p:nvSpPr>
+        <p:spPr>
+          <a:xfrm>
+            <a:off x="829818" y="6473952"/>
+            <a:ext cx="59436" cy="59436"/>
+          </a:xfrm>
+          <a:prstGeom prst="ellipse">
+            <a:avLst/>
+          </a:prstGeom>
+          <a:solidFill>
+            <a:srgbClr val="D9DEE8"/>
+          </a:solidFill>
+          <a:ln/>
+        </p:spPr>
+      </p:sp>
+      <p:sp>
+        <p:nvSpPr>
+          <p:cNvPr id="9" name="Shape 6"/>
+          <p:cNvSpPr/>
+          <p:nvPr/>
+        </p:nvSpPr>
+        <p:spPr>
+          <a:xfrm>
+            <a:off x="1034415" y="6459093"/>
+            <a:ext cx="89154" cy="89154"/>
+          </a:xfrm>
+          <a:prstGeom prst="ellipse">
+            <a:avLst/>
+          </a:prstGeom>
+          <a:solidFill>
+            <a:srgbClr val="285AB4"/>
+          </a:solidFill>
+          <a:ln/>
+        </p:spPr>
+      </p:sp>
+      <p:sp>
+        <p:nvSpPr>
+          <p:cNvPr id="10" name="Shape 7"/>
+          <p:cNvSpPr/>
+          <p:nvPr/>
+        </p:nvSpPr>
+        <p:spPr>
+          <a:xfrm>
+            <a:off x="1268730" y="6473952"/>
+            <a:ext cx="59436" cy="59436"/>
+          </a:xfrm>
+          <a:prstGeom prst="ellipse">
+            <a:avLst/>
+          </a:prstGeom>
+          <a:solidFill>
+            <a:srgbClr val="D9DEE8"/>
+          </a:solidFill>
+          <a:ln/>
+        </p:spPr>
+      </p:sp>
+      <p:sp>
+        <p:nvSpPr>
+          <p:cNvPr id="11" name="Text 8"/>
+          <p:cNvSpPr txBox="1"/>
+          <p:nvPr/>
+        </p:nvSpPr>
+        <p:spPr>
+          <a:xfrm>
+            <a:off x="1563624" y="6391656"/>
+            <a:ext cx="3291840" cy="274320"/>
+          </a:xfrm>
+          <a:prstGeom prst="rect">
+            <a:avLst/>
+          </a:prstGeom>
+          <a:noFill/>
+          <a:ln/>
+        </p:spPr>
+        <p:txBody>
+          <a:bodyPr wrap="square" lIns="0" tIns="0" rIns="0" bIns="0" rtlCol="0" anchor="ctr"/>
+          <a:lstStyle/>
+          <a:p>
+            <a:pPr indent="0" marL="0">
+              <a:buNone/>
+            </a:pPr>
+            <a:r>
+              <a:rPr lang="en-US" sz="850" spc="50" kern="0" dirty="0">
+                <a:solidFill>
+                  <a:srgbClr val="5B6478"/>
+                </a:solidFill>
+                <a:latin typeface="Calibri" pitchFamily="34" charset="0"/>
+                <a:ea typeface="Calibri" pitchFamily="34" charset="-122"/>
+                <a:cs typeface="Calibri" pitchFamily="34" charset="-120"/>
+              </a:rPr>
+              <a:t>EXPERIMENT</a:t>
+            </a:r>
+            <a:endParaRPr lang="en-US" sz="850" dirty="0"/>
+          </a:p>
+        </p:txBody>
+      </p:sp>
+    </p:spTree>
+  </p:cSld>
+  <p:clrMapOvr>
+    <a:masterClrMapping/>
+  </p:clrMapOvr>
+</p:sld>
+</file>
+
+<file path=ppt/slides/slide26.xml><?xml version="1.0" encoding="utf-8"?>
+<p:sld xmlns:a="http://schemas.openxmlformats.org/drawingml/2006/main" xmlns:r="http://schemas.openxmlformats.org/officeDocument/2006/relationships" xmlns:p="http://schemas.openxmlformats.org/presentationml/2006/main">
+  <p:cSld name="Slide 26">
+    <p:spTree>
+      <p:nvGrpSpPr>
+        <p:cNvPr id="1" name=""/>
+        <p:cNvGrpSpPr/>
+        <p:nvPr/>
+      </p:nvGrpSpPr>
+      <p:grpSpPr>
+        <a:xfrm>
+          <a:off x="0" y="0"/>
+          <a:ext cx="0" cy="0"/>
+          <a:chOff x="0" y="0"/>
+          <a:chExt cx="0" cy="0"/>
+        </a:xfrm>
+      </p:grpSpPr>
+      <p:sp>
+        <p:nvSpPr>
+          <p:cNvPr id="2" name="Text 0"/>
+          <p:cNvSpPr txBox="1"/>
+          <p:nvPr/>
+        </p:nvSpPr>
+        <p:spPr>
+          <a:xfrm>
+            <a:off x="640080" y="457200"/>
+            <a:ext cx="9144000" cy="320040"/>
+          </a:xfrm>
+          <a:prstGeom prst="rect">
+            <a:avLst/>
+          </a:prstGeom>
+          <a:noFill/>
+          <a:ln/>
+        </p:spPr>
+        <p:txBody>
+          <a:bodyPr wrap="square" lIns="0" tIns="0" rIns="0" bIns="0" rtlCol="0" anchor="ctr"/>
+          <a:lstStyle/>
+          <a:p>
+            <a:pPr indent="0" marL="0">
+              <a:buNone/>
+            </a:pPr>
+            <a:r>
+              <a:rPr lang="en-US" sz="1300" b="1" spc="100" kern="0" dirty="0">
+                <a:solidFill>
+                  <a:srgbClr val="285AB4"/>
+                </a:solidFill>
+                <a:latin typeface="Calibri" pitchFamily="34" charset="0"/>
+                <a:ea typeface="Calibri" pitchFamily="34" charset="-122"/>
+                <a:cs typeface="Calibri" pitchFamily="34" charset="-120"/>
+              </a:rPr>
+              <a:t>KẾT QUẢ</a:t>
+            </a:r>
+            <a:endParaRPr lang="en-US" sz="1300" dirty="0"/>
+          </a:p>
+        </p:txBody>
+      </p:sp>
+      <p:sp>
+        <p:nvSpPr>
+          <p:cNvPr id="3" name="Text 1"/>
+          <p:cNvSpPr txBox="1"/>
+          <p:nvPr/>
+        </p:nvSpPr>
+        <p:spPr>
+          <a:xfrm>
+            <a:off x="640080" y="749808"/>
+            <a:ext cx="10911535" cy="822960"/>
+          </a:xfrm>
+          <a:prstGeom prst="rect">
+            <a:avLst/>
+          </a:prstGeom>
+          <a:noFill/>
+          <a:ln/>
+        </p:spPr>
+        <p:txBody>
+          <a:bodyPr wrap="square" lIns="0" tIns="0" rIns="0" bIns="0" rtlCol="0" anchor="t"/>
+          <a:lstStyle/>
+          <a:p>
+            <a:pPr indent="0" marL="0">
+              <a:buNone/>
+            </a:pPr>
+            <a:r>
+              <a:rPr lang="en-US" sz="2400" b="1" dirty="0">
+                <a:solidFill>
+                  <a:srgbClr val="1A2238"/>
+                </a:solidFill>
+                <a:latin typeface="Cambria" pitchFamily="34" charset="0"/>
+                <a:ea typeface="Cambria" pitchFamily="34" charset="-122"/>
+                <a:cs typeface="Cambria" pitchFamily="34" charset="-120"/>
+              </a:rPr>
               <a:t>Bảng tổng hợp — 5 thí nghiệm, số liệu thật</a:t>
             </a:r>
             <a:endParaRPr lang="en-US" sz="2400" dirty="0"/>
+          </a:p>
+        </p:txBody>
+      </p:sp>
+      <p:sp>
+        <p:nvSpPr>
+          <p:cNvPr id="4" name="Text 2"/>
+          <p:cNvSpPr txBox="1"/>
+          <p:nvPr/>
+        </p:nvSpPr>
+        <p:spPr>
+          <a:xfrm>
+            <a:off x="640080" y="1572768"/>
+            <a:ext cx="10911535" cy="320040"/>
+          </a:xfrm>
+          <a:prstGeom prst="rect">
+            <a:avLst/>
+          </a:prstGeom>
+          <a:noFill/>
+          <a:ln/>
+        </p:spPr>
+        <p:txBody>
+          <a:bodyPr wrap="square" lIns="0" tIns="0" rIns="0" bIns="0" rtlCol="0" anchor="ctr"/>
+          <a:lstStyle/>
+          <a:p>
+            <a:pPr indent="0" marL="0">
+              <a:buNone/>
+            </a:pPr>
+            <a:r>
+              <a:rPr lang="en-US" sz="1250" i="1" dirty="0">
+                <a:solidFill>
+                  <a:srgbClr val="5B6478"/>
+                </a:solidFill>
+                <a:latin typeface="Calibri" pitchFamily="34" charset="0"/>
+                <a:ea typeface="Calibri" pitchFamily="34" charset="-122"/>
+                <a:cs typeface="Calibri" pitchFamily="34" charset="-120"/>
+              </a:rPr>
+              <a:t>Thứ tự đọc kết quả (từ trực tiếp nhất): Gradient RMS → Training Loss → Test Accuracy</a:t>
+            </a:r>
+            <a:endParaRPr lang="en-US" sz="1250" dirty="0"/>
           </a:p>
         </p:txBody>
       </p:sp>
       <p:graphicFrame>
         <p:nvGraphicFramePr>
-          <p:cNvPr id="26" name="Table 0"/>
+          <p:cNvPr id="27" name="Table 0"/>
           <p:cNvGraphicFramePr>
             <a:graphicFrameLocks noGrp="1"/>
           </p:cNvGraphicFramePr>
@@ -16993,7 +17785,7 @@
           </p:nvPr>
         </p:nvGraphicFramePr>
         <p:xfrm>
-          <a:off x="640080" y="1920240"/>
+          <a:off x="640080" y="1965960"/>
           <a:ext cx="10911535" cy="2743200"/>
         </p:xfrm>
         <a:graphic>
@@ -17001,10 +17793,11 @@
             <a:tbl>
               <a:tblPr/>
               <a:tblGrid>
-                <a:gridCol w="2679192"/>
-                <a:gridCol w="2679192"/>
-                <a:gridCol w="2679192"/>
-                <a:gridCol w="2898648"/>
+                <a:gridCol w="2130552"/>
+                <a:gridCol w="2130552"/>
+                <a:gridCol w="2130552"/>
+                <a:gridCol w="2130552"/>
+                <a:gridCol w="2450592"/>
               </a:tblGrid>
               <a:tr h="457200">
                 <a:tc>
@@ -17016,14 +17809,14 @@
                         <a:buNone/>
                       </a:pPr>
                       <a:r>
-                        <a:rPr lang="en-US" sz="1400" b="1" dirty="0">
+                        <a:rPr lang="en-US" sz="1300" b="1" dirty="0">
                           <a:solidFill>
                             <a:srgbClr val="FFFFFF"/>
                           </a:solidFill>
                         </a:rPr>
                         <a:t>Init</a:t>
                       </a:r>
-                      <a:endParaRPr lang="en-US" sz="1400" dirty="0"/>
+                      <a:endParaRPr lang="en-US" sz="1300" dirty="0"/>
                     </a:p>
                   </a:txBody>
                   <a:tcPr marL="91440" marR="91440" marT="45720" marB="45720">
@@ -17077,14 +17870,14 @@
                         <a:buNone/>
                       </a:pPr>
                       <a:r>
-                        <a:rPr lang="en-US" sz="1400" b="1" dirty="0">
+                        <a:rPr lang="en-US" sz="1300" b="1" dirty="0">
                           <a:solidFill>
                             <a:srgbClr val="FFFFFF"/>
                           </a:solidFill>
                         </a:rPr>
-                        <a:t>Final Loss</a:t>
+                        <a:t>Grad RMS (L1)</a:t>
                       </a:r>
-                      <a:endParaRPr lang="en-US" sz="1400" dirty="0"/>
+                      <a:endParaRPr lang="en-US" sz="1300" dirty="0"/>
                     </a:p>
                   </a:txBody>
                   <a:tcPr marL="91440" marR="91440" marT="45720" marB="45720">
@@ -17138,14 +17931,14 @@
                         <a:buNone/>
                       </a:pPr>
                       <a:r>
-                        <a:rPr lang="en-US" sz="1400" b="1" dirty="0">
+                        <a:rPr lang="en-US" sz="1300" b="1" dirty="0">
                           <a:solidFill>
                             <a:srgbClr val="FFFFFF"/>
                           </a:solidFill>
                         </a:rPr>
-                        <a:t>Accuracy</a:t>
+                        <a:t>Final Loss</a:t>
                       </a:r>
-                      <a:endParaRPr lang="en-US" sz="1400" dirty="0"/>
+                      <a:endParaRPr lang="en-US" sz="1300" dirty="0"/>
                     </a:p>
                   </a:txBody>
                   <a:tcPr marL="91440" marR="91440" marT="45720" marB="45720">
@@ -17199,14 +17992,75 @@
                         <a:buNone/>
                       </a:pPr>
                       <a:r>
-                        <a:rPr lang="en-US" sz="1400" b="1" dirty="0">
+                        <a:rPr lang="en-US" sz="1300" b="1" dirty="0">
                           <a:solidFill>
                             <a:srgbClr val="FFFFFF"/>
                           </a:solidFill>
                         </a:rPr>
-                        <a:t>Gradient stability</a:t>
+                        <a:t>Accuracy</a:t>
                       </a:r>
-                      <a:endParaRPr lang="en-US" sz="1400" dirty="0"/>
+                      <a:endParaRPr lang="en-US" sz="1300" dirty="0"/>
+                    </a:p>
+                  </a:txBody>
+                  <a:tcPr marL="91440" marR="91440" marT="45720" marB="45720">
+                    <a:lnL w="6350" cap="flat" cmpd="sng" algn="ctr">
+                      <a:solidFill>
+                        <a:srgbClr val="D9DEE8"/>
+                      </a:solidFill>
+                      <a:prstDash val="solid"/>
+                      <a:round/>
+                      <a:headEnd type="none" w="med" len="med"/>
+                      <a:tailEnd type="none" w="med" len="med"/>
+                    </a:lnL>
+                    <a:lnR w="6350" cap="flat" cmpd="sng" algn="ctr">
+                      <a:solidFill>
+                        <a:srgbClr val="D9DEE8"/>
+                      </a:solidFill>
+                      <a:prstDash val="solid"/>
+                      <a:round/>
+                      <a:headEnd type="none" w="med" len="med"/>
+                      <a:tailEnd type="none" w="med" len="med"/>
+                    </a:lnR>
+                    <a:lnT w="6350" cap="flat" cmpd="sng" algn="ctr">
+                      <a:solidFill>
+                        <a:srgbClr val="D9DEE8"/>
+                      </a:solidFill>
+                      <a:prstDash val="solid"/>
+                      <a:round/>
+                      <a:headEnd type="none" w="med" len="med"/>
+                      <a:tailEnd type="none" w="med" len="med"/>
+                    </a:lnT>
+                    <a:lnB w="6350" cap="flat" cmpd="sng" algn="ctr">
+                      <a:solidFill>
+                        <a:srgbClr val="D9DEE8"/>
+                      </a:solidFill>
+                      <a:prstDash val="solid"/>
+                      <a:round/>
+                      <a:headEnd type="none" w="med" len="med"/>
+                      <a:tailEnd type="none" w="med" len="med"/>
+                    </a:lnB>
+                    <a:solidFill>
+                      <a:srgbClr val="16213E"/>
+                    </a:solidFill>
+                  </a:tcPr>
+                </a:tc>
+                <a:tc>
+                  <a:txBody>
+                    <a:bodyPr/>
+                    <a:lstStyle/>
+                    <a:p>
+                      <a:pPr indent="0" marL="0">
+                        <a:buNone/>
+                      </a:pPr>
+                      <a:r>
+                        <a:rPr lang="en-US" sz="1300" b="1" dirty="0">
+                          <a:solidFill>
+                            <a:srgbClr val="FFFFFF"/>
+                          </a:solidFill>
+                        </a:rPr>
+                        <a:t>Gradient behavior</a:t>
+                      </a:r>
+                      <a:endParaRPr lang="en-US" sz="1300" dirty="0"/>
                     </a:p>
                   </a:txBody>
                   <a:tcPr marL="91440" marR="91440" marT="45720" marB="45720">
@@ -17262,14 +18116,14 @@
                         <a:buNone/>
                       </a:pPr>
                       <a:r>
-                        <a:rPr lang="en-US" sz="1400" b="1" dirty="0">
+                        <a:rPr lang="en-US" sz="1300" b="1" dirty="0">
                           <a:solidFill>
                             <a:srgbClr val="1A2238"/>
                           </a:solidFill>
                         </a:rPr>
                         <a:t>Zero</a:t>
                       </a:r>
-                      <a:endParaRPr lang="en-US" sz="1400" dirty="0"/>
+                      <a:endParaRPr lang="en-US" sz="1300" dirty="0"/>
                     </a:p>
                   </a:txBody>
                   <a:tcPr marL="91440" marR="91440" marT="45720" marB="45720">
@@ -17323,14 +18177,14 @@
                         <a:buNone/>
                       </a:pPr>
                       <a:r>
-                        <a:rPr lang="en-US" sz="1400" dirty="0">
+                        <a:rPr lang="en-US" sz="1300" dirty="0">
                           <a:solidFill>
                             <a:srgbClr val="1A2238"/>
                           </a:solidFill>
                         </a:rPr>
-                        <a:t>2.303</a:t>
+                        <a:t>0.0e+0</a:t>
                       </a:r>
-                      <a:endParaRPr lang="en-US" sz="1400" dirty="0"/>
+                      <a:endParaRPr lang="en-US" sz="1300" dirty="0"/>
                     </a:p>
                   </a:txBody>
                   <a:tcPr marL="91440" marR="91440" marT="45720" marB="45720">
@@ -17384,14 +18238,14 @@
                         <a:buNone/>
                       </a:pPr>
                       <a:r>
-                        <a:rPr lang="en-US" sz="1400" dirty="0">
+                        <a:rPr lang="en-US" sz="1300" dirty="0">
                           <a:solidFill>
                             <a:srgbClr val="1A2238"/>
                           </a:solidFill>
                         </a:rPr>
-                        <a:t>10.0%</a:t>
+                        <a:t>2.303</a:t>
                       </a:r>
-                      <a:endParaRPr lang="en-US" sz="1400" dirty="0"/>
+                      <a:endParaRPr lang="en-US" sz="1300" dirty="0"/>
                     </a:p>
                   </a:txBody>
                   <a:tcPr marL="91440" marR="91440" marT="45720" marB="45720">
@@ -17445,14 +18299,75 @@
                         <a:buNone/>
                       </a:pPr>
                       <a:r>
-                        <a:rPr lang="en-US" sz="1400" b="1" dirty="0">
+                        <a:rPr lang="en-US" sz="1300" dirty="0">
+                          <a:solidFill>
+                            <a:srgbClr val="1A2238"/>
+                          </a:solidFill>
+                        </a:rPr>
+                        <a:t>10.0%</a:t>
+                      </a:r>
+                      <a:endParaRPr lang="en-US" sz="1300" dirty="0"/>
+                    </a:p>
+                  </a:txBody>
+                  <a:tcPr marL="91440" marR="91440" marT="45720" marB="45720">
+                    <a:lnL w="6350" cap="flat" cmpd="sng" algn="ctr">
+                      <a:solidFill>
+                        <a:srgbClr val="D9DEE8"/>
+                      </a:solidFill>
+                      <a:prstDash val="solid"/>
+                      <a:round/>
+                      <a:headEnd type="none" w="med" len="med"/>
+                      <a:tailEnd type="none" w="med" len="med"/>
+                    </a:lnL>
+                    <a:lnR w="6350" cap="flat" cmpd="sng" algn="ctr">
+                      <a:solidFill>
+                        <a:srgbClr val="D9DEE8"/>
+                      </a:solidFill>
+                      <a:prstDash val="solid"/>
+                      <a:round/>
+                      <a:headEnd type="none" w="med" len="med"/>
+                      <a:tailEnd type="none" w="med" len="med"/>
+                    </a:lnR>
+                    <a:lnT w="6350" cap="flat" cmpd="sng" algn="ctr">
+                      <a:solidFill>
+                        <a:srgbClr val="D9DEE8"/>
+                      </a:solidFill>
+                      <a:prstDash val="solid"/>
+                      <a:round/>
+                      <a:headEnd type="none" w="med" len="med"/>
+                      <a:tailEnd type="none" w="med" len="med"/>
+                    </a:lnT>
+                    <a:lnB w="6350" cap="flat" cmpd="sng" algn="ctr">
+                      <a:solidFill>
+                        <a:srgbClr val="D9DEE8"/>
+                      </a:solidFill>
+                      <a:prstDash val="solid"/>
+                      <a:round/>
+                      <a:headEnd type="none" w="med" len="med"/>
+                      <a:tailEnd type="none" w="med" len="med"/>
+                    </a:lnB>
+                    <a:solidFill>
+                      <a:srgbClr val="F1F4F9"/>
+                    </a:solidFill>
+                  </a:tcPr>
+                </a:tc>
+                <a:tc>
+                  <a:txBody>
+                    <a:bodyPr/>
+                    <a:lstStyle/>
+                    <a:p>
+                      <a:pPr algn="ctr" indent="0" marL="0">
+                        <a:buNone/>
+                      </a:pPr>
+                      <a:r>
+                        <a:rPr lang="en-US" sz="1300" b="1" dirty="0">
                           <a:solidFill>
                             <a:srgbClr val="BE3C32"/>
                           </a:solidFill>
                         </a:rPr>
                         <a:t>Vanishing</a:t>
                       </a:r>
-                      <a:endParaRPr lang="en-US" sz="1400" dirty="0"/>
+                      <a:endParaRPr lang="en-US" sz="1300" dirty="0"/>
                     </a:p>
                   </a:txBody>
                   <a:tcPr marL="91440" marR="91440" marT="45720" marB="45720">
@@ -17508,14 +18423,14 @@
                         <a:buNone/>
                       </a:pPr>
                       <a:r>
-                        <a:rPr lang="en-US" sz="1400" b="1" dirty="0">
+                        <a:rPr lang="en-US" sz="1300" b="1" dirty="0">
                           <a:solidFill>
                             <a:srgbClr val="1A2238"/>
                           </a:solidFill>
                         </a:rPr>
                         <a:t>Random (small)</a:t>
                       </a:r>
-                      <a:endParaRPr lang="en-US" sz="1400" dirty="0"/>
+                      <a:endParaRPr lang="en-US" sz="1300" dirty="0"/>
                     </a:p>
                   </a:txBody>
                   <a:tcPr marL="91440" marR="91440" marT="45720" marB="45720">
@@ -17569,14 +18484,14 @@
                         <a:buNone/>
                       </a:pPr>
                       <a:r>
-                        <a:rPr lang="en-US" sz="1400" dirty="0">
+                        <a:rPr lang="en-US" sz="1300" dirty="0">
                           <a:solidFill>
                             <a:srgbClr val="1A2238"/>
                           </a:solidFill>
                         </a:rPr>
-                        <a:t>2.303</a:t>
+                        <a:t>1.1e-13</a:t>
                       </a:r>
-                      <a:endParaRPr lang="en-US" sz="1400" dirty="0"/>
+                      <a:endParaRPr lang="en-US" sz="1300" dirty="0"/>
                     </a:p>
                   </a:txBody>
                   <a:tcPr marL="91440" marR="91440" marT="45720" marB="45720">
@@ -17630,14 +18545,14 @@
                         <a:buNone/>
                       </a:pPr>
                       <a:r>
-                        <a:rPr lang="en-US" sz="1400" dirty="0">
+                        <a:rPr lang="en-US" sz="1300" dirty="0">
                           <a:solidFill>
                             <a:srgbClr val="1A2238"/>
                           </a:solidFill>
                         </a:rPr>
-                        <a:t>10.0%</a:t>
+                        <a:t>2.303</a:t>
                       </a:r>
-                      <a:endParaRPr lang="en-US" sz="1400" dirty="0"/>
+                      <a:endParaRPr lang="en-US" sz="1300" dirty="0"/>
                     </a:p>
                   </a:txBody>
                   <a:tcPr marL="91440" marR="91440" marT="45720" marB="45720">
@@ -17691,14 +18606,75 @@
                         <a:buNone/>
                       </a:pPr>
                       <a:r>
-                        <a:rPr lang="en-US" sz="1400" b="1" dirty="0">
+                        <a:rPr lang="en-US" sz="1300" dirty="0">
+                          <a:solidFill>
+                            <a:srgbClr val="1A2238"/>
+                          </a:solidFill>
+                        </a:rPr>
+                        <a:t>10.0%</a:t>
+                      </a:r>
+                      <a:endParaRPr lang="en-US" sz="1300" dirty="0"/>
+                    </a:p>
+                  </a:txBody>
+                  <a:tcPr marL="91440" marR="91440" marT="45720" marB="45720">
+                    <a:lnL w="6350" cap="flat" cmpd="sng" algn="ctr">
+                      <a:solidFill>
+                        <a:srgbClr val="D9DEE8"/>
+                      </a:solidFill>
+                      <a:prstDash val="solid"/>
+                      <a:round/>
+                      <a:headEnd type="none" w="med" len="med"/>
+                      <a:tailEnd type="none" w="med" len="med"/>
+                    </a:lnL>
+                    <a:lnR w="6350" cap="flat" cmpd="sng" algn="ctr">
+                      <a:solidFill>
+                        <a:srgbClr val="D9DEE8"/>
+                      </a:solidFill>
+                      <a:prstDash val="solid"/>
+                      <a:round/>
+                      <a:headEnd type="none" w="med" len="med"/>
+                      <a:tailEnd type="none" w="med" len="med"/>
+                    </a:lnR>
+                    <a:lnT w="6350" cap="flat" cmpd="sng" algn="ctr">
+                      <a:solidFill>
+                        <a:srgbClr val="D9DEE8"/>
+                      </a:solidFill>
+                      <a:prstDash val="solid"/>
+                      <a:round/>
+                      <a:headEnd type="none" w="med" len="med"/>
+                      <a:tailEnd type="none" w="med" len="med"/>
+                    </a:lnT>
+                    <a:lnB w="6350" cap="flat" cmpd="sng" algn="ctr">
+                      <a:solidFill>
+                        <a:srgbClr val="D9DEE8"/>
+                      </a:solidFill>
+                      <a:prstDash val="solid"/>
+                      <a:round/>
+                      <a:headEnd type="none" w="med" len="med"/>
+                      <a:tailEnd type="none" w="med" len="med"/>
+                    </a:lnB>
+                    <a:solidFill>
+                      <a:srgbClr val="FFFFFF"/>
+                    </a:solidFill>
+                  </a:tcPr>
+                </a:tc>
+                <a:tc>
+                  <a:txBody>
+                    <a:bodyPr/>
+                    <a:lstStyle/>
+                    <a:p>
+                      <a:pPr algn="ctr" indent="0" marL="0">
+                        <a:buNone/>
+                      </a:pPr>
+                      <a:r>
+                        <a:rPr lang="en-US" sz="1300" b="1" dirty="0">
                           <a:solidFill>
                             <a:srgbClr val="BE3C32"/>
                           </a:solidFill>
                         </a:rPr>
                         <a:t>Vanishing</a:t>
                       </a:r>
-                      <a:endParaRPr lang="en-US" sz="1400" dirty="0"/>
+                      <a:endParaRPr lang="en-US" sz="1300" dirty="0"/>
                     </a:p>
                   </a:txBody>
                   <a:tcPr marL="91440" marR="91440" marT="45720" marB="45720">
@@ -17754,14 +18730,14 @@
                         <a:buNone/>
                       </a:pPr>
                       <a:r>
-                        <a:rPr lang="en-US" sz="1400" b="1" dirty="0">
+                        <a:rPr lang="en-US" sz="1300" b="1" dirty="0">
                           <a:solidFill>
                             <a:srgbClr val="1A2238"/>
                           </a:solidFill>
                         </a:rPr>
                         <a:t>Random (large)</a:t>
                       </a:r>
-                      <a:endParaRPr lang="en-US" sz="1400" dirty="0"/>
+                      <a:endParaRPr lang="en-US" sz="1300" dirty="0"/>
                     </a:p>
                   </a:txBody>
                   <a:tcPr marL="91440" marR="91440" marT="45720" marB="45720">
@@ -17815,14 +18791,14 @@
                         <a:buNone/>
                       </a:pPr>
                       <a:r>
-                        <a:rPr lang="en-US" sz="1400" dirty="0">
+                        <a:rPr lang="en-US" sz="1300" dirty="0">
                           <a:solidFill>
                             <a:srgbClr val="1A2238"/>
                           </a:solidFill>
                         </a:rPr>
-                        <a:t>NaN</a:t>
+                        <a:t>1.9e+7</a:t>
                       </a:r>
-                      <a:endParaRPr lang="en-US" sz="1400" dirty="0"/>
+                      <a:endParaRPr lang="en-US" sz="1300" dirty="0"/>
                     </a:p>
                   </a:txBody>
                   <a:tcPr marL="91440" marR="91440" marT="45720" marB="45720">
@@ -17876,14 +18852,14 @@
                         <a:buNone/>
                       </a:pPr>
                       <a:r>
-                        <a:rPr lang="en-US" sz="1400" dirty="0">
+                        <a:rPr lang="en-US" sz="1300" dirty="0">
                           <a:solidFill>
                             <a:srgbClr val="1A2238"/>
                           </a:solidFill>
                         </a:rPr>
-                        <a:t>10.0%</a:t>
+                        <a:t>NaN</a:t>
                       </a:r>
-                      <a:endParaRPr lang="en-US" sz="1400" dirty="0"/>
+                      <a:endParaRPr lang="en-US" sz="1300" dirty="0"/>
                     </a:p>
                   </a:txBody>
                   <a:tcPr marL="91440" marR="91440" marT="45720" marB="45720">
@@ -17937,14 +18913,75 @@
                         <a:buNone/>
                       </a:pPr>
                       <a:r>
-                        <a:rPr lang="en-US" sz="1400" b="1" dirty="0">
+                        <a:rPr lang="en-US" sz="1300" dirty="0">
+                          <a:solidFill>
+                            <a:srgbClr val="1A2238"/>
+                          </a:solidFill>
+                        </a:rPr>
+                        <a:t>10.0%</a:t>
+                      </a:r>
+                      <a:endParaRPr lang="en-US" sz="1300" dirty="0"/>
+                    </a:p>
+                  </a:txBody>
+                  <a:tcPr marL="91440" marR="91440" marT="45720" marB="45720">
+                    <a:lnL w="6350" cap="flat" cmpd="sng" algn="ctr">
+                      <a:solidFill>
+                        <a:srgbClr val="D9DEE8"/>
+                      </a:solidFill>
+                      <a:prstDash val="solid"/>
+                      <a:round/>
+                      <a:headEnd type="none" w="med" len="med"/>
+                      <a:tailEnd type="none" w="med" len="med"/>
+                    </a:lnL>
+                    <a:lnR w="6350" cap="flat" cmpd="sng" algn="ctr">
+                      <a:solidFill>
+                        <a:srgbClr val="D9DEE8"/>
+                      </a:solidFill>
+                      <a:prstDash val="solid"/>
+                      <a:round/>
+                      <a:headEnd type="none" w="med" len="med"/>
+                      <a:tailEnd type="none" w="med" len="med"/>
+                    </a:lnR>
+                    <a:lnT w="6350" cap="flat" cmpd="sng" algn="ctr">
+                      <a:solidFill>
+                        <a:srgbClr val="D9DEE8"/>
+                      </a:solidFill>
+                      <a:prstDash val="solid"/>
+                      <a:round/>
+                      <a:headEnd type="none" w="med" len="med"/>
+                      <a:tailEnd type="none" w="med" len="med"/>
+                    </a:lnT>
+                    <a:lnB w="6350" cap="flat" cmpd="sng" algn="ctr">
+                      <a:solidFill>
+                        <a:srgbClr val="D9DEE8"/>
+                      </a:solidFill>
+                      <a:prstDash val="solid"/>
+                      <a:round/>
+                      <a:headEnd type="none" w="med" len="med"/>
+                      <a:tailEnd type="none" w="med" len="med"/>
+                    </a:lnB>
+                    <a:solidFill>
+                      <a:srgbClr val="F1F4F9"/>
+                    </a:solidFill>
+                  </a:tcPr>
+                </a:tc>
+                <a:tc>
+                  <a:txBody>
+                    <a:bodyPr/>
+                    <a:lstStyle/>
+                    <a:p>
+                      <a:pPr algn="ctr" indent="0" marL="0">
+                        <a:buNone/>
+                      </a:pPr>
+                      <a:r>
+                        <a:rPr lang="en-US" sz="1300" b="1" dirty="0">
                           <a:solidFill>
                             <a:srgbClr val="7D3C98"/>
                           </a:solidFill>
                         </a:rPr>
                         <a:t>Exploding (NaN)</a:t>
                       </a:r>
-                      <a:endParaRPr lang="en-US" sz="1400" dirty="0"/>
+                      <a:endParaRPr lang="en-US" sz="1300" dirty="0"/>
                     </a:p>
                   </a:txBody>
                   <a:tcPr marL="91440" marR="91440" marT="45720" marB="45720">
@@ -18000,14 +19037,14 @@
                         <a:buNone/>
                       </a:pPr>
                       <a:r>
-                        <a:rPr lang="en-US" sz="1400" b="1" dirty="0">
+                        <a:rPr lang="en-US" sz="1300" b="1" dirty="0">
                           <a:solidFill>
                             <a:srgbClr val="1A2238"/>
                           </a:solidFill>
                         </a:rPr>
                         <a:t>Xavier</a:t>
                       </a:r>
-                      <a:endParaRPr lang="en-US" sz="1400" dirty="0"/>
+                      <a:endParaRPr lang="en-US" sz="1300" dirty="0"/>
                     </a:p>
                   </a:txBody>
                   <a:tcPr marL="91440" marR="91440" marT="45720" marB="45720">
@@ -18061,14 +19098,14 @@
                         <a:buNone/>
                       </a:pPr>
                       <a:r>
-                        <a:rPr lang="en-US" sz="1400" dirty="0">
+                        <a:rPr lang="en-US" sz="1300" dirty="0">
                           <a:solidFill>
                             <a:srgbClr val="1A2238"/>
                           </a:solidFill>
                         </a:rPr>
-                        <a:t>0.474</a:t>
+                        <a:t>4.4e-4</a:t>
                       </a:r>
-                      <a:endParaRPr lang="en-US" sz="1400" dirty="0"/>
+                      <a:endParaRPr lang="en-US" sz="1300" dirty="0"/>
                     </a:p>
                   </a:txBody>
                   <a:tcPr marL="91440" marR="91440" marT="45720" marB="45720">
@@ -18122,14 +19159,14 @@
                         <a:buNone/>
                       </a:pPr>
                       <a:r>
-                        <a:rPr lang="en-US" sz="1400" dirty="0">
+                        <a:rPr lang="en-US" sz="1300" dirty="0">
                           <a:solidFill>
                             <a:srgbClr val="1A2238"/>
                           </a:solidFill>
                         </a:rPr>
-                        <a:t>68.2%</a:t>
+                        <a:t>0.474</a:t>
                       </a:r>
-                      <a:endParaRPr lang="en-US" sz="1400" dirty="0"/>
+                      <a:endParaRPr lang="en-US" sz="1300" dirty="0"/>
                     </a:p>
                   </a:txBody>
                   <a:tcPr marL="91440" marR="91440" marT="45720" marB="45720">
@@ -18183,14 +19220,75 @@
                         <a:buNone/>
                       </a:pPr>
                       <a:r>
-                        <a:rPr lang="en-US" sz="1400" b="1" dirty="0">
+                        <a:rPr lang="en-US" sz="1300" dirty="0">
+                          <a:solidFill>
+                            <a:srgbClr val="1A2238"/>
+                          </a:solidFill>
+                        </a:rPr>
+                        <a:t>68.2%</a:t>
+                      </a:r>
+                      <a:endParaRPr lang="en-US" sz="1300" dirty="0"/>
+                    </a:p>
+                  </a:txBody>
+                  <a:tcPr marL="91440" marR="91440" marT="45720" marB="45720">
+                    <a:lnL w="6350" cap="flat" cmpd="sng" algn="ctr">
+                      <a:solidFill>
+                        <a:srgbClr val="D9DEE8"/>
+                      </a:solidFill>
+                      <a:prstDash val="solid"/>
+                      <a:round/>
+                      <a:headEnd type="none" w="med" len="med"/>
+                      <a:tailEnd type="none" w="med" len="med"/>
+                    </a:lnL>
+                    <a:lnR w="6350" cap="flat" cmpd="sng" algn="ctr">
+                      <a:solidFill>
+                        <a:srgbClr val="D9DEE8"/>
+                      </a:solidFill>
+                      <a:prstDash val="solid"/>
+                      <a:round/>
+                      <a:headEnd type="none" w="med" len="med"/>
+                      <a:tailEnd type="none" w="med" len="med"/>
+                    </a:lnR>
+                    <a:lnT w="6350" cap="flat" cmpd="sng" algn="ctr">
+                      <a:solidFill>
+                        <a:srgbClr val="D9DEE8"/>
+                      </a:solidFill>
+                      <a:prstDash val="solid"/>
+                      <a:round/>
+                      <a:headEnd type="none" w="med" len="med"/>
+                      <a:tailEnd type="none" w="med" len="med"/>
+                    </a:lnT>
+                    <a:lnB w="6350" cap="flat" cmpd="sng" algn="ctr">
+                      <a:solidFill>
+                        <a:srgbClr val="D9DEE8"/>
+                      </a:solidFill>
+                      <a:prstDash val="solid"/>
+                      <a:round/>
+                      <a:headEnd type="none" w="med" len="med"/>
+                      <a:tailEnd type="none" w="med" len="med"/>
+                    </a:lnB>
+                    <a:solidFill>
+                      <a:srgbClr val="FFFFFF"/>
+                    </a:solidFill>
+                  </a:tcPr>
+                </a:tc>
+                <a:tc>
+                  <a:txBody>
+                    <a:bodyPr/>
+                    <a:lstStyle/>
+                    <a:p>
+                      <a:pPr algn="ctr" indent="0" marL="0">
+                        <a:buNone/>
+                      </a:pPr>
+                      <a:r>
+                        <a:rPr lang="en-US" sz="1300" b="1" dirty="0">
                           <a:solidFill>
                             <a:srgbClr val="2E7D5B"/>
                           </a:solidFill>
                         </a:rPr>
                         <a:t>Ổn định</a:t>
                       </a:r>
-                      <a:endParaRPr lang="en-US" sz="1400" dirty="0"/>
+                      <a:endParaRPr lang="en-US" sz="1300" dirty="0"/>
                     </a:p>
                   </a:txBody>
                   <a:tcPr marL="91440" marR="91440" marT="45720" marB="45720">
@@ -18246,14 +19344,14 @@
                         <a:buNone/>
                       </a:pPr>
                       <a:r>
-                        <a:rPr lang="en-US" sz="1400" b="1" dirty="0">
+                        <a:rPr lang="en-US" sz="1300" b="1" dirty="0">
                           <a:solidFill>
                             <a:srgbClr val="1A2238"/>
                           </a:solidFill>
                         </a:rPr>
                         <a:t>He</a:t>
                       </a:r>
-                      <a:endParaRPr lang="en-US" sz="1400" dirty="0"/>
+                      <a:endParaRPr lang="en-US" sz="1300" dirty="0"/>
                     </a:p>
                   </a:txBody>
                   <a:tcPr marL="91440" marR="91440" marT="45720" marB="45720">
@@ -18307,14 +19405,14 @@
                         <a:buNone/>
                       </a:pPr>
                       <a:r>
-                        <a:rPr lang="en-US" sz="1400" dirty="0">
+                        <a:rPr lang="en-US" sz="1300" dirty="0">
                           <a:solidFill>
                             <a:srgbClr val="1A2238"/>
                           </a:solidFill>
                         </a:rPr>
-                        <a:t>0.365</a:t>
+                        <a:t>1.1e-2</a:t>
                       </a:r>
-                      <a:endParaRPr lang="en-US" sz="1400" dirty="0"/>
+                      <a:endParaRPr lang="en-US" sz="1300" dirty="0"/>
                     </a:p>
                   </a:txBody>
                   <a:tcPr marL="91440" marR="91440" marT="45720" marB="45720">
@@ -18368,14 +19466,14 @@
                         <a:buNone/>
                       </a:pPr>
                       <a:r>
-                        <a:rPr lang="en-US" sz="1400" dirty="0">
+                        <a:rPr lang="en-US" sz="1300" dirty="0">
                           <a:solidFill>
                             <a:srgbClr val="1A2238"/>
                           </a:solidFill>
                         </a:rPr>
-                        <a:t>67.4%</a:t>
+                        <a:t>0.365</a:t>
                       </a:r>
-                      <a:endParaRPr lang="en-US" sz="1400" dirty="0"/>
+                      <a:endParaRPr lang="en-US" sz="1300" dirty="0"/>
                     </a:p>
                   </a:txBody>
                   <a:tcPr marL="91440" marR="91440" marT="45720" marB="45720">
@@ -18429,14 +19527,75 @@
                         <a:buNone/>
                       </a:pPr>
                       <a:r>
-                        <a:rPr lang="en-US" sz="1400" b="1" dirty="0">
+                        <a:rPr lang="en-US" sz="1300" dirty="0">
+                          <a:solidFill>
+                            <a:srgbClr val="1A2238"/>
+                          </a:solidFill>
+                        </a:rPr>
+                        <a:t>67.4%</a:t>
+                      </a:r>
+                      <a:endParaRPr lang="en-US" sz="1300" dirty="0"/>
+                    </a:p>
+                  </a:txBody>
+                  <a:tcPr marL="91440" marR="91440" marT="45720" marB="45720">
+                    <a:lnL w="6350" cap="flat" cmpd="sng" algn="ctr">
+                      <a:solidFill>
+                        <a:srgbClr val="D9DEE8"/>
+                      </a:solidFill>
+                      <a:prstDash val="solid"/>
+                      <a:round/>
+                      <a:headEnd type="none" w="med" len="med"/>
+                      <a:tailEnd type="none" w="med" len="med"/>
+                    </a:lnL>
+                    <a:lnR w="6350" cap="flat" cmpd="sng" algn="ctr">
+                      <a:solidFill>
+                        <a:srgbClr val="D9DEE8"/>
+                      </a:solidFill>
+                      <a:prstDash val="solid"/>
+                      <a:round/>
+                      <a:headEnd type="none" w="med" len="med"/>
+                      <a:tailEnd type="none" w="med" len="med"/>
+                    </a:lnR>
+                    <a:lnT w="6350" cap="flat" cmpd="sng" algn="ctr">
+                      <a:solidFill>
+                        <a:srgbClr val="D9DEE8"/>
+                      </a:solidFill>
+                      <a:prstDash val="solid"/>
+                      <a:round/>
+                      <a:headEnd type="none" w="med" len="med"/>
+                      <a:tailEnd type="none" w="med" len="med"/>
+                    </a:lnT>
+                    <a:lnB w="6350" cap="flat" cmpd="sng" algn="ctr">
+                      <a:solidFill>
+                        <a:srgbClr val="D9DEE8"/>
+                      </a:solidFill>
+                      <a:prstDash val="solid"/>
+                      <a:round/>
+                      <a:headEnd type="none" w="med" len="med"/>
+                      <a:tailEnd type="none" w="med" len="med"/>
+                    </a:lnB>
+                    <a:solidFill>
+                      <a:srgbClr val="F1F4F9"/>
+                    </a:solidFill>
+                  </a:tcPr>
+                </a:tc>
+                <a:tc>
+                  <a:txBody>
+                    <a:bodyPr/>
+                    <a:lstStyle/>
+                    <a:p>
+                      <a:pPr algn="ctr" indent="0" marL="0">
+                        <a:buNone/>
+                      </a:pPr>
+                      <a:r>
+                        <a:rPr lang="en-US" sz="1300" b="1" dirty="0">
                           <a:solidFill>
                             <a:srgbClr val="2E7D5B"/>
                           </a:solidFill>
                         </a:rPr>
                         <a:t>Ổn định</a:t>
                       </a:r>
-                      <a:endParaRPr lang="en-US" sz="1400" dirty="0"/>
+                      <a:endParaRPr lang="en-US" sz="1300" dirty="0"/>
                     </a:p>
                   </a:txBody>
                   <a:tcPr marL="91440" marR="91440" marT="45720" marB="45720">
@@ -18488,14 +19647,14 @@
       </p:graphicFrame>
       <p:sp>
         <p:nvSpPr>
-          <p:cNvPr id="5" name="Text 2"/>
-          <p:cNvSpPr txBox="1"/>
-          <p:nvPr/>
-        </p:nvSpPr>
-        <p:spPr>
-          <a:xfrm>
-            <a:off x="640080" y="4846320"/>
-            <a:ext cx="10911535" cy="457200"/>
+          <p:cNvPr id="6" name="Text 3"/>
+          <p:cNvSpPr txBox="1"/>
+          <p:nvPr/>
+        </p:nvSpPr>
+        <p:spPr>
+          <a:xfrm>
+            <a:off x="640080" y="4892040"/>
+            <a:ext cx="10911535" cy="548640"/>
           </a:xfrm>
           <a:prstGeom prst="rect">
             <a:avLst/>
@@ -18511,7 +19670,7 @@
               <a:buNone/>
             </a:pPr>
             <a:r>
-              <a:rPr lang="en-US" sz="1200" i="1" dirty="0">
+              <a:rPr lang="en-US" sz="1150" i="1" dirty="0">
                 <a:solidFill>
                   <a:srgbClr val="5B6478"/>
                 </a:solidFill>
@@ -18519,15 +19678,15 @@
                 <a:ea typeface="Calibri" pitchFamily="34" charset="-122"/>
                 <a:cs typeface="Calibri" pitchFamily="34" charset="-120"/>
               </a:rPr>
-              <a:t>Số liệu lấy nguyên văn từ results/tables/deep_demo_summary.csv — không làm tròn để "đẹp bảng", không có kết quả nào bị bỏ sót.</a:t>
-            </a:r>
-            <a:endParaRPr lang="en-US" sz="1200" dirty="0"/>
-          </a:p>
-        </p:txBody>
-      </p:sp>
-      <p:sp>
-        <p:nvSpPr>
-          <p:cNvPr id="6" name="Text 3"/>
+              <a:t>Số liệu lấy nguyên văn từ results/tables/deep_demo_summary.csv — không làm tròn để "đẹp bảng", không có kết quả nào bị bỏ sót. Xem thêm Activation Variance trong log JSON của từng cấu hình (results/logs/deep_demo_*.json).</a:t>
+            </a:r>
+            <a:endParaRPr lang="en-US" sz="1150" dirty="0"/>
+          </a:p>
+        </p:txBody>
+      </p:sp>
+      <p:sp>
+        <p:nvSpPr>
+          <p:cNvPr id="7" name="Text 4"/>
           <p:cNvSpPr txBox="1"/>
           <p:nvPr/>
         </p:nvSpPr>
@@ -18558,7 +19717,7 @@
                 <a:ea typeface="Calibri" pitchFamily="34" charset="-122"/>
                 <a:cs typeface="Calibri" pitchFamily="34" charset="-120"/>
               </a:rPr>
-              <a:t>25/28</a:t>
+              <a:t>26/29</a:t>
             </a:r>
             <a:endParaRPr lang="en-US" sz="900" dirty="0"/>
           </a:p>
@@ -18566,7 +19725,7 @@
       </p:sp>
       <p:sp>
         <p:nvSpPr>
-          <p:cNvPr id="7" name="Shape 4"/>
+          <p:cNvPr id="8" name="Shape 5"/>
           <p:cNvSpPr/>
           <p:nvPr/>
         </p:nvSpPr>
@@ -18586,7 +19745,7 @@
       </p:sp>
       <p:sp>
         <p:nvSpPr>
-          <p:cNvPr id="8" name="Shape 5"/>
+          <p:cNvPr id="9" name="Shape 6"/>
           <p:cNvSpPr/>
           <p:nvPr/>
         </p:nvSpPr>
@@ -18606,7 +19765,7 @@
       </p:sp>
       <p:sp>
         <p:nvSpPr>
-          <p:cNvPr id="9" name="Shape 6"/>
+          <p:cNvPr id="10" name="Shape 7"/>
           <p:cNvSpPr/>
           <p:nvPr/>
         </p:nvSpPr>
@@ -18626,7 +19785,7 @@
       </p:sp>
       <p:sp>
         <p:nvSpPr>
-          <p:cNvPr id="10" name="Shape 7"/>
+          <p:cNvPr id="11" name="Shape 8"/>
           <p:cNvSpPr/>
           <p:nvPr/>
         </p:nvSpPr>
@@ -18646,7 +19805,7 @@
       </p:sp>
       <p:sp>
         <p:nvSpPr>
-          <p:cNvPr id="11" name="Text 8"/>
+          <p:cNvPr id="12" name="Text 9"/>
           <p:cNvSpPr txBox="1"/>
           <p:nvPr/>
         </p:nvSpPr>
@@ -18691,9 +19850,9 @@
 </p:sld>
 </file>
 
-<file path=ppt/slides/slide26.xml><?xml version="1.0" encoding="utf-8"?>
+<file path=ppt/slides/slide27.xml><?xml version="1.0" encoding="utf-8"?>
 <p:sld xmlns:a="http://schemas.openxmlformats.org/drawingml/2006/main" xmlns:r="http://schemas.openxmlformats.org/officeDocument/2006/relationships" xmlns:p="http://schemas.openxmlformats.org/presentationml/2006/main">
-  <p:cSld name="Slide 26">
+  <p:cSld name="Slide 27">
     <p:bg>
       <p:bgPr>
         <a:solidFill>
@@ -19251,8 +20410,8 @@
         </p:nvSpPr>
         <p:spPr>
           <a:xfrm>
-            <a:off x="640080" y="4846320"/>
-            <a:ext cx="10911535" cy="1188720"/>
+            <a:off x="640080" y="4800600"/>
+            <a:ext cx="10911535" cy="1371600"/>
           </a:xfrm>
           <a:prstGeom prst="rect">
             <a:avLst/>
@@ -19266,12 +20425,12 @@
           <a:p>
             <a:pPr indent="0" marL="0">
               <a:spcAft>
-                <a:spcPts val="600"/>
+                <a:spcPts val="500"/>
               </a:spcAft>
               <a:buNone/>
             </a:pPr>
             <a:r>
-              <a:rPr lang="en-US" sz="1250" dirty="0">
+              <a:rPr lang="en-US" sz="1150" dirty="0">
                 <a:solidFill>
                   <a:srgbClr val="CADCFC"/>
                 </a:solidFill>
@@ -19279,19 +20438,19 @@
                 <a:ea typeface="Calibri" pitchFamily="34" charset="-122"/>
                 <a:cs typeface="Calibri" pitchFamily="34" charset="-120"/>
               </a:rPr>
-              <a:t>1. Backpropagation chỉ là ứng dụng có hệ thống của Chain Rule.</a:t>
-            </a:r>
-            <a:endParaRPr lang="en-US" sz="1250" dirty="0"/>
+              <a:t>1. Backpropagation là cách tính gradient hiệu quả bằng cách áp dụng chain rule ngược qua computational graph.</a:t>
+            </a:r>
+            <a:endParaRPr lang="en-US" sz="1150" dirty="0"/>
           </a:p>
           <a:p>
             <a:pPr indent="0" marL="0">
               <a:spcAft>
-                <a:spcPts val="600"/>
+                <a:spcPts val="500"/>
               </a:spcAft>
               <a:buNone/>
             </a:pPr>
             <a:r>
-              <a:rPr lang="en-US" sz="1250" dirty="0">
+              <a:rPr lang="en-US" sz="1150" dirty="0">
                 <a:solidFill>
                   <a:srgbClr val="CADCFC"/>
                 </a:solidFill>
@@ -19299,19 +20458,19 @@
                 <a:ea typeface="Calibri" pitchFamily="34" charset="-122"/>
                 <a:cs typeface="Calibri" pitchFamily="34" charset="-120"/>
               </a:rPr>
-              <a:t>2. Deep network làm gradient trở thành tích của rất nhiều đạo hàm ⇒ vanishing/exploding.</a:t>
-            </a:r>
-            <a:endParaRPr lang="en-US" sz="1250" dirty="0"/>
+              <a:t>2. Trong mạng sâu, gradient phụ thuộc vào tích của nhiều Jacobian/weight transformation — scale của gradient có thể vanish hoặc explode.</a:t>
+            </a:r>
+            <a:endParaRPr lang="en-US" sz="1150" dirty="0"/>
           </a:p>
           <a:p>
             <a:pPr indent="0" marL="0">
               <a:spcAft>
-                <a:spcPts val="600"/>
+                <a:spcPts val="500"/>
               </a:spcAft>
               <a:buNone/>
             </a:pPr>
             <a:r>
-              <a:rPr lang="en-US" sz="1250" dirty="0">
+              <a:rPr lang="en-US" sz="1150" dirty="0">
                 <a:solidFill>
                   <a:srgbClr val="CADCFC"/>
                 </a:solidFill>
@@ -19319,9 +20478,29 @@
                 <a:ea typeface="Calibri" pitchFamily="34" charset="-122"/>
                 <a:cs typeface="Calibri" pitchFamily="34" charset="-120"/>
               </a:rPr>
-              <a:t>3. Xavier và He được thiết kế để giữ variance của activation/gradient ổn định qua nhiều lớp.</a:t>
-            </a:r>
-            <a:endParaRPr lang="en-US" sz="1250" dirty="0"/>
+              <a:t>3. Xavier và He chọn scale of initial weights dựa trên fan-in/fan-out để giữ activation và gradient trong phạm vi hợp lý, dưới các giả định nhất định.</a:t>
+            </a:r>
+            <a:endParaRPr lang="en-US" sz="1150" dirty="0"/>
+          </a:p>
+          <a:p>
+            <a:pPr indent="0" marL="0">
+              <a:spcAft>
+                <a:spcPts val="500"/>
+              </a:spcAft>
+              <a:buNone/>
+            </a:pPr>
+            <a:r>
+              <a:rPr lang="en-US" sz="1150" dirty="0">
+                <a:solidFill>
+                  <a:srgbClr val="CADCFC"/>
+                </a:solidFill>
+                <a:latin typeface="Calibri" pitchFamily="34" charset="0"/>
+                <a:ea typeface="Calibri" pitchFamily="34" charset="-122"/>
+                <a:cs typeface="Calibri" pitchFamily="34" charset="-120"/>
+              </a:rPr>
+              <a:t>4. Good initialization cải thiện optimization và gradient flow, nhưng không đảm bảo generalization tốt.</a:t>
+            </a:r>
+            <a:endParaRPr lang="en-US" sz="1150" dirty="0"/>
           </a:p>
         </p:txBody>
       </p:sp>
@@ -19452,9 +20631,9 @@
 </p:sld>
 </file>
 
-<file path=ppt/slides/slide27.xml><?xml version="1.0" encoding="utf-8"?>
+<file path=ppt/slides/slide28.xml><?xml version="1.0" encoding="utf-8"?>
 <p:sld xmlns:a="http://schemas.openxmlformats.org/drawingml/2006/main" xmlns:r="http://schemas.openxmlformats.org/officeDocument/2006/relationships" xmlns:p="http://schemas.openxmlformats.org/presentationml/2006/main">
-  <p:cSld name="Slide 27">
+  <p:cSld name="Slide 28">
     <p:spTree>
       <p:nvGrpSpPr>
         <p:cNvPr id="1" name=""/>
@@ -20001,7 +21180,7 @@
                 <a:ea typeface="Calibri" pitchFamily="34" charset="-122"/>
                 <a:cs typeface="Calibri" pitchFamily="34" charset="-120"/>
               </a:rPr>
-              <a:t>27/28</a:t>
+              <a:t>28/29</a:t>
             </a:r>
             <a:endParaRPr lang="en-US" sz="900" dirty="0"/>
           </a:p>
@@ -20134,9 +21313,9 @@
 </p:sld>
 </file>
 
-<file path=ppt/slides/slide28.xml><?xml version="1.0" encoding="utf-8"?>
+<file path=ppt/slides/slide29.xml><?xml version="1.0" encoding="utf-8"?>
 <p:sld xmlns:a="http://schemas.openxmlformats.org/drawingml/2006/main" xmlns:r="http://schemas.openxmlformats.org/officeDocument/2006/relationships" xmlns:p="http://schemas.openxmlformats.org/presentationml/2006/main">
-  <p:cSld name="Slide 28">
+  <p:cSld name="Slide 29">
     <p:bg>
       <p:bgPr>
         <a:solidFill>
@@ -20891,7 +22070,7 @@
                 <a:ea typeface="Calibri" pitchFamily="34" charset="-122"/>
                 <a:cs typeface="Calibri" pitchFamily="34" charset="-120"/>
               </a:rPr>
-              <a:t>3/28</a:t>
+              <a:t>3/29</a:t>
             </a:r>
             <a:endParaRPr lang="en-US" sz="900" dirty="0"/>
           </a:p>
@@ -21142,13 +22321,13 @@
           <a:p>
             <a:pPr marL="228600" indent="-228600">
               <a:spcAft>
-                <a:spcPts val="1400"/>
+                <a:spcPts val="1200"/>
               </a:spcAft>
               <a:buSzPct val="100000"/>
               <a:buChar char="▪"/>
             </a:pPr>
             <a:r>
-              <a:rPr lang="en-US" sz="1600" dirty="0">
+              <a:rPr lang="en-US" sz="1550" dirty="0">
                 <a:solidFill>
                   <a:srgbClr val="1A2238"/>
                 </a:solidFill>
@@ -21158,18 +22337,18 @@
               </a:rPr>
               <a:t>Deep Learning có hàng triệu tham số: L(w₁, w₂, ..., wₙ)</a:t>
             </a:r>
-            <a:endParaRPr lang="en-US" sz="1600" dirty="0"/>
+            <a:endParaRPr lang="en-US" sz="1550" dirty="0"/>
           </a:p>
           <a:p>
             <a:pPr marL="228600" indent="-228600">
               <a:spcAft>
-                <a:spcPts val="1400"/>
+                <a:spcPts val="1200"/>
               </a:spcAft>
               <a:buSzPct val="100000"/>
               <a:buChar char="▪"/>
             </a:pPr>
             <a:r>
-              <a:rPr lang="en-US" sz="1600" dirty="0">
+              <a:rPr lang="en-US" sz="1550" dirty="0">
                 <a:solidFill>
                   <a:srgbClr val="1A2238"/>
                 </a:solidFill>
@@ -21179,18 +22358,18 @@
               </a:rPr>
               <a:t>Gradient = vector gồm TẤT CẢ đạo hàm riêng, một cho mỗi tham số</a:t>
             </a:r>
-            <a:endParaRPr lang="en-US" sz="1600" dirty="0"/>
+            <a:endParaRPr lang="en-US" sz="1550" dirty="0"/>
           </a:p>
           <a:p>
             <a:pPr marL="228600" indent="-228600">
               <a:spcAft>
-                <a:spcPts val="1400"/>
+                <a:spcPts val="1200"/>
               </a:spcAft>
               <a:buSzPct val="100000"/>
               <a:buChar char="▪"/>
             </a:pPr>
             <a:r>
-              <a:rPr lang="en-US" sz="1600" dirty="0">
+              <a:rPr lang="en-US" sz="1550" dirty="0">
                 <a:solidFill>
                   <a:srgbClr val="1A2238"/>
                 </a:solidFill>
@@ -21198,9 +22377,30 @@
                 <a:ea typeface="Calibri" pitchFamily="34" charset="-122"/>
                 <a:cs typeface="Calibri" pitchFamily="34" charset="-120"/>
               </a:rPr>
-              <a:t>Gradient cho biết cần thay đổi TỪNG tham số theo hướng nào để giảm Loss nhanh nhất</a:t>
-            </a:r>
-            <a:endParaRPr lang="en-US" sz="1600" dirty="0"/>
+              <a:t>∇L chỉ HƯỚNG TĂNG nhanh nhất của Loss trong không gian tham số</a:t>
+            </a:r>
+            <a:endParaRPr lang="en-US" sz="1550" dirty="0"/>
+          </a:p>
+          <a:p>
+            <a:pPr marL="228600" indent="-228600">
+              <a:spcAft>
+                <a:spcPts val="1200"/>
+              </a:spcAft>
+              <a:buSzPct val="100000"/>
+              <a:buChar char="▪"/>
+            </a:pPr>
+            <a:r>
+              <a:rPr lang="en-US" sz="1550" dirty="0">
+                <a:solidFill>
+                  <a:srgbClr val="1A2238"/>
+                </a:solidFill>
+                <a:latin typeface="Calibri" pitchFamily="34" charset="0"/>
+                <a:ea typeface="Calibri" pitchFamily="34" charset="-122"/>
+                <a:cs typeface="Calibri" pitchFamily="34" charset="-120"/>
+              </a:rPr>
+              <a:t>Gradient Descent cập nhật theo hướng NGƯỢC gradient (−∇L) — hướng giảm nhanh nhất cục bộ</a:t>
+            </a:r>
+            <a:endParaRPr lang="en-US" sz="1550" dirty="0"/>
           </a:p>
         </p:txBody>
       </p:sp>
@@ -21310,7 +22510,7 @@
                 <a:ea typeface="Calibri" pitchFamily="34" charset="-122"/>
                 <a:cs typeface="Calibri" pitchFamily="34" charset="-120"/>
               </a:rPr>
-              <a:t>4/28</a:t>
+              <a:t>4/29</a:t>
             </a:r>
             <a:endParaRPr lang="en-US" sz="900" dirty="0"/>
           </a:p>
@@ -21597,7 +22797,7 @@
               <a:buNone/>
             </a:pPr>
             <a:r>
-              <a:rPr lang="en-US" sz="2000" dirty="0">
+              <a:rPr lang="en-US" sz="1700" dirty="0">
                 <a:solidFill>
                   <a:srgbClr val="16213E"/>
                 </a:solidFill>
@@ -21605,9 +22805,9 @@
                 <a:ea typeface="Cambria Math" pitchFamily="34" charset="-122"/>
                 <a:cs typeface="Cambria Math" pitchFamily="34" charset="-120"/>
               </a:rPr>
-              <a:t>w_new = w_old − η · ∂L/∂w</a:t>
-            </a:r>
-            <a:endParaRPr lang="en-US" sz="2000" dirty="0"/>
+              <a:t>w_new = w_old − η · ∂L/∂w          (dạng vector: θ_new = θ_old − η∇_θL)</a:t>
+            </a:r>
+            <a:endParaRPr lang="en-US" sz="1700" dirty="0"/>
           </a:p>
         </p:txBody>
       </p:sp>
@@ -21640,7 +22840,7 @@
               <a:buChar char="▪"/>
             </a:pPr>
             <a:r>
-              <a:rPr lang="en-US" sz="1650" dirty="0">
+              <a:rPr lang="en-US" sz="1550" dirty="0">
                 <a:solidFill>
                   <a:srgbClr val="1A2238"/>
                 </a:solidFill>
@@ -21648,9 +22848,9 @@
                 <a:ea typeface="Calibri" pitchFamily="34" charset="-122"/>
                 <a:cs typeface="Calibri" pitchFamily="34" charset="-120"/>
               </a:rPr>
-              <a:t>w — parameter cần cập nhật</a:t>
-            </a:r>
-            <a:endParaRPr lang="en-US" sz="1650" dirty="0"/>
+              <a:t>w — parameter cần cập nhật (θ — toàn bộ vector tham số)</a:t>
+            </a:r>
+            <a:endParaRPr lang="en-US" sz="1550" dirty="0"/>
           </a:p>
           <a:p>
             <a:pPr marL="228600" indent="-228600">
@@ -21661,7 +22861,7 @@
               <a:buChar char="▪"/>
             </a:pPr>
             <a:r>
-              <a:rPr lang="en-US" sz="1650" dirty="0">
+              <a:rPr lang="en-US" sz="1550" dirty="0">
                 <a:solidFill>
                   <a:srgbClr val="1A2238"/>
                 </a:solidFill>
@@ -21671,7 +22871,7 @@
               </a:rPr>
               <a:t>η (learning rate) — bước nhảy mỗi lần cập nhật</a:t>
             </a:r>
-            <a:endParaRPr lang="en-US" sz="1650" dirty="0"/>
+            <a:endParaRPr lang="en-US" sz="1550" dirty="0"/>
           </a:p>
           <a:p>
             <a:pPr marL="228600" indent="-228600">
@@ -21682,7 +22882,7 @@
               <a:buChar char="▪"/>
             </a:pPr>
             <a:r>
-              <a:rPr lang="en-US" sz="1650" dirty="0">
+              <a:rPr lang="en-US" sz="1550" dirty="0">
                 <a:solidFill>
                   <a:srgbClr val="1A2238"/>
                 </a:solidFill>
@@ -21692,7 +22892,7 @@
               </a:rPr>
               <a:t>L — loss function cần tối thiểu hoá</a:t>
             </a:r>
-            <a:endParaRPr lang="en-US" sz="1650" dirty="0"/>
+            <a:endParaRPr lang="en-US" sz="1550" dirty="0"/>
           </a:p>
           <a:p>
             <a:pPr marL="228600" indent="-228600">
@@ -21703,7 +22903,7 @@
               <a:buChar char="▪"/>
             </a:pPr>
             <a:r>
-              <a:rPr lang="en-US" sz="1650" dirty="0">
+              <a:rPr lang="en-US" sz="1550" dirty="0">
                 <a:solidFill>
                   <a:srgbClr val="1A2238"/>
                 </a:solidFill>
@@ -21711,9 +22911,9 @@
                 <a:ea typeface="Calibri" pitchFamily="34" charset="-122"/>
                 <a:cs typeface="Calibri" pitchFamily="34" charset="-120"/>
               </a:rPr>
-              <a:t>Trực giác: một quả bóng lăn xuống 'loss landscape' theo hướng dốc nhất</a:t>
-            </a:r>
-            <a:endParaRPr lang="en-US" sz="1650" dirty="0"/>
+              <a:t>Dấu trừ là bắt buộc: −∇L mới là hướng GIẢM, vì ∇L tự nó chỉ hướng tăng — trực giác: quả bóng lăn xuống 'loss landscape' theo hướng ngược gradient</a:t>
+            </a:r>
+            <a:endParaRPr lang="en-US" sz="1550" dirty="0"/>
           </a:p>
         </p:txBody>
       </p:sp>
@@ -21750,7 +22950,7 @@
                 <a:ea typeface="Calibri" pitchFamily="34" charset="-122"/>
                 <a:cs typeface="Calibri" pitchFamily="34" charset="-120"/>
               </a:rPr>
-              <a:t>5/28</a:t>
+              <a:t>5/29</a:t>
             </a:r>
             <a:endParaRPr lang="en-US" sz="900" dirty="0"/>
           </a:p>
@@ -22506,7 +23706,7 @@
               <a:buChar char="▪"/>
             </a:pPr>
             <a:r>
-              <a:rPr lang="en-US" sz="1550" dirty="0">
+              <a:rPr lang="en-US" sz="1500" dirty="0">
                 <a:solidFill>
                   <a:srgbClr val="1A2238"/>
                 </a:solidFill>
@@ -22514,9 +23714,9 @@
                 <a:ea typeface="Calibri" pitchFamily="34" charset="-122"/>
                 <a:cs typeface="Calibri" pitchFamily="34" charset="-120"/>
               </a:rPr>
-              <a:t>Forward pass tính đầu ra VÀ lưu lại giá trị trung gian (z, a) — cần dùng lại khi backward</a:t>
-            </a:r>
-            <a:endParaRPr lang="en-US" sz="1550" dirty="0"/>
+              <a:t>Forward pass CHƯA tính parameter gradients — nó tính output VÀ lưu lại các intermediate values/computational graph mà backward pass cần để tính gradient</a:t>
+            </a:r>
+            <a:endParaRPr lang="en-US" sz="1500" dirty="0"/>
           </a:p>
           <a:p>
             <a:pPr marL="228600" indent="-228600">
@@ -22527,7 +23727,7 @@
               <a:buChar char="▪"/>
             </a:pPr>
             <a:r>
-              <a:rPr lang="en-US" sz="1550" dirty="0">
+              <a:rPr lang="en-US" sz="1500" dirty="0">
                 <a:solidFill>
                   <a:srgbClr val="1A2238"/>
                 </a:solidFill>
@@ -22537,7 +23737,7 @@
               </a:rPr>
               <a:t>Mục tiêu cuối cùng: tính được ∂L/∂w₁ (và mọi tham số khác) để cập nhật bằng Gradient Descent</a:t>
             </a:r>
-            <a:endParaRPr lang="en-US" sz="1550" dirty="0"/>
+            <a:endParaRPr lang="en-US" sz="1500" dirty="0"/>
           </a:p>
         </p:txBody>
       </p:sp>
@@ -22574,7 +23774,7 @@
                 <a:ea typeface="Calibri" pitchFamily="34" charset="-122"/>
                 <a:cs typeface="Calibri" pitchFamily="34" charset="-120"/>
               </a:rPr>
-              <a:t>6/28</a:t>
+              <a:t>6/29</a:t>
             </a:r>
             <a:endParaRPr lang="en-US" sz="900" dirty="0"/>
           </a:p>
@@ -23259,7 +24459,7 @@
         <p:spPr>
           <a:xfrm>
             <a:off x="3931920" y="3840480"/>
-            <a:ext cx="7619695" cy="1828800"/>
+            <a:ext cx="7619695" cy="1371600"/>
           </a:xfrm>
           <a:prstGeom prst="rect">
             <a:avLst/>
@@ -23322,8 +24522,8 @@
         </p:nvSpPr>
         <p:spPr>
           <a:xfrm>
-            <a:off x="11185855" y="6446520"/>
-            <a:ext cx="731520" cy="274320"/>
+            <a:off x="3931920" y="5532120"/>
+            <a:ext cx="7619695" cy="822960"/>
           </a:xfrm>
           <a:prstGeom prst="rect">
             <a:avLst/>
@@ -23335,11 +24535,11 @@
           <a:bodyPr wrap="square" lIns="0" tIns="0" rIns="0" bIns="0" rtlCol="0" anchor="ctr"/>
           <a:lstStyle/>
           <a:p>
-            <a:pPr algn="r" indent="0" marL="0">
-              <a:buNone/>
-            </a:pPr>
-            <a:r>
-              <a:rPr lang="en-US" sz="900" dirty="0">
+            <a:pPr indent="0" marL="0">
+              <a:buNone/>
+            </a:pPr>
+            <a:r>
+              <a:rPr lang="en-US" sz="1150" i="1" dirty="0">
                 <a:solidFill>
                   <a:srgbClr val="5B6478"/>
                 </a:solidFill>
@@ -23347,7 +24547,46 @@
                 <a:ea typeface="Calibri" pitchFamily="34" charset="-122"/>
                 <a:cs typeface="Calibri" pitchFamily="34" charset="-120"/>
               </a:rPr>
-              <a:t>7/28</a:t>
+              <a:t>Trong mạng thực tế, activation/parameter là vector/ma trận — Backpropagation áp dụng multivariable chain rule qua Jacobian/vector-Jacobian product; PyTorch autograd làm việc này tự động.</a:t>
+            </a:r>
+            <a:endParaRPr lang="en-US" sz="1150" dirty="0"/>
+          </a:p>
+        </p:txBody>
+      </p:sp>
+      <p:sp>
+        <p:nvSpPr>
+          <p:cNvPr id="20" name="Text 18"/>
+          <p:cNvSpPr txBox="1"/>
+          <p:nvPr/>
+        </p:nvSpPr>
+        <p:spPr>
+          <a:xfrm>
+            <a:off x="11185855" y="6446520"/>
+            <a:ext cx="731520" cy="274320"/>
+          </a:xfrm>
+          <a:prstGeom prst="rect">
+            <a:avLst/>
+          </a:prstGeom>
+          <a:noFill/>
+          <a:ln/>
+        </p:spPr>
+        <p:txBody>
+          <a:bodyPr wrap="square" lIns="0" tIns="0" rIns="0" bIns="0" rtlCol="0" anchor="ctr"/>
+          <a:lstStyle/>
+          <a:p>
+            <a:pPr algn="r" indent="0" marL="0">
+              <a:buNone/>
+            </a:pPr>
+            <a:r>
+              <a:rPr lang="en-US" sz="900" dirty="0">
+                <a:solidFill>
+                  <a:srgbClr val="5B6478"/>
+                </a:solidFill>
+                <a:latin typeface="Calibri" pitchFamily="34" charset="0"/>
+                <a:ea typeface="Calibri" pitchFamily="34" charset="-122"/>
+                <a:cs typeface="Calibri" pitchFamily="34" charset="-120"/>
+              </a:rPr>
+              <a:t>7/29</a:t>
             </a:r>
             <a:endParaRPr lang="en-US" sz="900" dirty="0"/>
           </a:p>
@@ -23355,7 +24594,7 @@
       </p:sp>
       <p:sp>
         <p:nvSpPr>
-          <p:cNvPr id="20" name="Shape 18"/>
+          <p:cNvPr id="21" name="Shape 19"/>
           <p:cNvSpPr/>
           <p:nvPr/>
         </p:nvSpPr>
@@ -23375,7 +24614,7 @@
       </p:sp>
       <p:sp>
         <p:nvSpPr>
-          <p:cNvPr id="21" name="Shape 19"/>
+          <p:cNvPr id="22" name="Shape 20"/>
           <p:cNvSpPr/>
           <p:nvPr/>
         </p:nvSpPr>
@@ -23395,7 +24634,7 @@
       </p:sp>
       <p:sp>
         <p:nvSpPr>
-          <p:cNvPr id="22" name="Shape 20"/>
+          <p:cNvPr id="23" name="Shape 21"/>
           <p:cNvSpPr/>
           <p:nvPr/>
         </p:nvSpPr>
@@ -23415,7 +24654,7 @@
       </p:sp>
       <p:sp>
         <p:nvSpPr>
-          <p:cNvPr id="23" name="Shape 21"/>
+          <p:cNvPr id="24" name="Shape 22"/>
           <p:cNvSpPr/>
           <p:nvPr/>
         </p:nvSpPr>
@@ -23435,7 +24674,7 @@
       </p:sp>
       <p:sp>
         <p:nvSpPr>
-          <p:cNvPr id="24" name="Text 22"/>
+          <p:cNvPr id="25" name="Text 23"/>
           <p:cNvSpPr txBox="1"/>
           <p:nvPr/>
         </p:nvSpPr>
@@ -24104,7 +25343,7 @@
                 <a:ea typeface="Calibri" pitchFamily="34" charset="-122"/>
                 <a:cs typeface="Calibri" pitchFamily="34" charset="-120"/>
               </a:rPr>
-              <a:t>8/28</a:t>
+              <a:t>8/29</a:t>
             </a:r>
             <a:endParaRPr lang="en-US" sz="900" dirty="0"/>
           </a:p>
@@ -25461,7 +26700,7 @@
                 <a:ea typeface="Calibri" pitchFamily="34" charset="-122"/>
                 <a:cs typeface="Calibri" pitchFamily="34" charset="-120"/>
               </a:rPr>
-              <a:t>9/28</a:t>
+              <a:t>9/29</a:t>
             </a:r>
             <a:endParaRPr lang="en-US" sz="900" dirty="0"/>
           </a:p>

--- a/report/Slide_Backprop_Initialization.pptx
+++ b/report/Slide_Backprop_Initialization.pptx
@@ -34,9 +34,10 @@
     <p:sldId id="282" r:id="rId28"/>
     <p:sldId id="283" r:id="rId29"/>
     <p:sldId id="284" r:id="rId30"/>
+    <p:sldId id="285" r:id="rId31"/>
   </p:sldIdLst>
   <p:notesMasterIdLst>
-    <p:notesMasterId r:id="rId31"/>
+    <p:notesMasterId r:id="rId32"/>
   </p:notesMasterIdLst>
   <p:sldSz cx="12191695" cy="6858000"/>
   <p:notesSz cx="6858000" cy="12191695"/>
@@ -1058,7 +1059,7 @@
           <a:p>
             <a:r>
               <a:rPr lang="en-US" dirty="0"/>
-              <a:t>Số liệu lấy từ results/logs/run_he_relu.json. Trung thực khoa học: chênh lệch nhỏ giữa He/Xavier cho ReLU (xem slide So sánh) KHÔNG có ý nghĩa thống kê với 1 seed duy nhất.</a:t>
+              <a:t>Số liệu lấy từ results/logs/run_he_relu.json. Trung thực khoa học: chênh lệch nhỏ giữa He/Xavier cho ReLU ở đây chỉ đến từ 1 seed duy nhất — không đủ căn cứ để xếp hạng scheme nào tốt hơn, vì chưa biết chênh lệch này có tách biệt rõ so với biến động giữa các lần chạy hay không (xem slide Multi-seed ở phần Demo để có bằng chứng đầy đủ hơn với 5 seed).</a:t>
             </a:r>
             <a:endParaRPr lang="en-US" dirty="0"/>
           </a:p>
@@ -1762,7 +1763,7 @@
           <a:p>
             <a:r>
               <a:rPr lang="en-US" dirty="0"/>
-              <a:t>Số liệu thật từ results/tables/multiseed_xavier_he_summary.csv (5 seed độc lập {42..46}, cùng kiến trúc 10 hidden layer). Đây là điểm chỉnh sửa quan trọng: 1 seed duy nhất KHÔNG đủ để nói 'Xavier tốt hơn He' hay ngược lại — mean±std qua nhiều seed cho thấy chênh lệch accuracy nằm trong nhiễu ngẫu nhiên, trong khi chênh lệch gradient RMS (bậc ~35 lần) lại nhất quán và có ý nghĩa hơn nhiều.</a:t>
+              <a:t>Số liệu thật từ results/tables/multiseed_xavier_he_summary.csv (5 seed độc lập {42..46}, cùng kiến trúc 10 hidden layer). Đây là điểm chỉnh sửa quan trọng: 1 seed duy nhất KHÔNG đủ để nói 'Xavier tốt hơn He' hay ngược lại. Lưu ý về wording: đây KHÔNG phải một kiểm định thống kê chính thức (không có hypothesis test/confidence interval) — chỉ là quan sát mean±std qua 5 lần chạy. Diễn đạt đúng: 'phân phối test-accuracy của hai scheme chồng lấn đáng kể, nên thực nghiệm này không ủng hộ việc xếp hạng rõ ràng giữa Xavier và He.' Ngược lại, gradient RMS lớp 1 của He nhất quán LỚN HƠN Xavier ở cả 5 seed (không dao động qua lại) — có thể nói 'He cho gradient RMS lớp 1 lớn hơn Xavier một cách nhất quán trong setup này', nhưng KHÔNG suy rộng thành 'He luôn cho gradient tốt hơn'.</a:t>
             </a:r>
             <a:endParaRPr lang="en-US" dirty="0"/>
           </a:p>
@@ -1938,7 +1939,7 @@
           <a:p>
             <a:r>
               <a:rPr lang="en-US" dirty="0"/>
-              <a:t>Đây là một trong những visualization quan trọng nhất của toàn bộ demo vì thể hiện TRỰC TIẾP gradient flow qua từng layer, không qua trung gian (khác với accuracy — bằng chứng gián tiếp, chịu ảnh hưởng của nhiều yếu tố khác). Mỗi ô là một số liệu thật (RMS = grad.pow(2).mean().sqrt()), không phải minh hoạ cách điệu.</a:t>
+              <a:t>Đây là một trong những visualization quan trọng nhất của toàn bộ demo vì thể hiện TRỰC TIẾP gradient flow qua từng layer, không qua trung gian (khác với accuracy — bằng chứng gián tiếp, chịu ảnh hưởng của nhiều yếu tố khác). Mỗi ô là một số liệu thật (RMS = grad.pow(2).mean().sqrt()), không phải minh hoạ cách điệu. Lưu ý: 3 màu (xanh/vàng/đỏ) là mô tả trực quan theo thang màu liên tục, KHÔNG phải một ngưỡng (threshold) toán học được định nghĩa chính thức cho 'vùng ổn định'.</a:t>
             </a:r>
             <a:endParaRPr lang="en-US" dirty="0"/>
           </a:p>
@@ -2026,7 +2027,7 @@
           <a:p>
             <a:r>
               <a:rPr lang="en-US" dirty="0"/>
-              <a:t>Số liệu thật từ results/logs/depth_experiment_v2.json. Tránh phát biểu phổ quát kiểu "He ổn định ở mọi độ sâu" hay "Xavier thất bại" — đây là quan sát TRONG setup thực nghiệm cụ thể (MLP, ReLU, Fashion-MNIST). He duy trì gradient RMS cùng bậc độ lớn xuyên suốt (kể cả L=50: grad_rms≈1.08e-2) nhưng test accuracy vẫn dao động (L=12: 32.6%, L=20: 53.6%, L=50: 19.6%) — insight quan trọng nhất: stable gradient flow là điều kiện quan trọng cho optimization ổn định, nhưng KHÔNG phải điều kiện đủ để model generalize tốt.</a:t>
+              <a:t>Bổ sung quan trọng: Heatmap slide trước chứng minh initialization ảnh hưởng BACKWARD (gradient); slide này chứng minh THÊM rằng cùng cơ chế cũng chi phối FORWARD (activation) — đúng như slide Synthesis đã nêu (Var(a) ổn định ở forward, Var(δ) ổn định ở backward). Không vẽ Zero-init vì mọi activation của nó đúng bằng 0 (không biểu diễn được trên thang log). Số liệu thật từ results/logs/deep_demo_*.json, field initial_activation_stats.</a:t>
             </a:r>
             <a:endParaRPr lang="en-US" dirty="0"/>
           </a:p>
@@ -2114,7 +2115,7 @@
           <a:p>
             <a:r>
               <a:rPr lang="en-US" dirty="0"/>
-              <a:t>Bảng ánh xạ trực tiếp từ CSV thật, kể cả NaN của Random-large — trung thực khoa học, không che giấu kết quả thất bại. Test accuracy KHÔNG phải bằng chứng duy nhất cho initialization — nó là chỉ số gián tiếp nhất trong 4 nhóm metric (Activation variance, Gradient RMS, Training loss, rồi mới đến Accuracy).</a:t>
+              <a:t>Số liệu thật từ results/logs/depth_experiment_v2.json. Tránh phát biểu phổ quát kiểu "He ổn định ở mọi độ sâu" hay "Xavier thất bại" — đây là quan sát TRONG setup thực nghiệm cụ thể (MLP, ReLU, Fashion-MNIST). He duy trì gradient RMS cùng bậc độ lớn xuyên suốt (kể cả L=50: grad_rms≈1.08e-2) nhưng test accuracy vẫn dao động (L=12: 32.6%, L=20: 53.6%, L=50: 19.6%). Về nhãn 'overfitting' tại L=12: chỉ gọi đúng tên khi có bằng chứng train tốt/test kém — ở đây train loss=0.456 (thấp, khớp tốt) trong khi test loss=5.41 (cao, gấp hơn 10 lần) — khoảng cách train/test rõ ràng này là căn cứ cho nhãn overfitting, không phải chỉ suy đoán từ test accuracy thấp. Insight quan trọng nhất: stable gradient flow là điều kiện quan trọng cho optimization ổn định, nhưng KHÔNG phải điều kiện đủ để model generalize tốt.</a:t>
             </a:r>
             <a:endParaRPr lang="en-US" dirty="0"/>
           </a:p>
@@ -2202,7 +2203,7 @@
           <a:p>
             <a:r>
               <a:rPr lang="en-US" dirty="0"/>
-              <a:t>Flow tổng kết toàn bộ mạch trình bày — 3 takeaway đọc thẳng ra từ sơ đồ, chốt bằng câu hỏi nghiên cứu đã đặt ra ở Slide 2.</a:t>
+              <a:t>Bảng ánh xạ trực tiếp từ CSV thật, kể cả NaN của Random-large — trung thực khoa học, không che giấu kết quả thất bại. Test accuracy KHÔNG phải bằng chứng duy nhất cho initialization — nó là chỉ số gián tiếp nhất trong 4 nhóm metric (Activation variance, Gradient RMS, Training loss, rồi mới đến Accuracy).</a:t>
             </a:r>
             <a:endParaRPr lang="en-US" dirty="0"/>
           </a:p>
@@ -2290,7 +2291,7 @@
           <a:p>
             <a:r>
               <a:rPr lang="en-US" dirty="0"/>
-              <a:t>Chỉ giới thiệu ngắn, KHÔNG đi sâu — tránh lệch trọng tâm khỏi Backprop + Initialization là chủ đề chính của báo cáo.</a:t>
+              <a:t>Flow tổng kết toàn bộ mạch trình bày — 3 takeaway đọc thẳng ra từ sơ đồ, chốt bằng câu hỏi nghiên cứu đã đặt ra ở Slide 2.</a:t>
             </a:r>
             <a:endParaRPr lang="en-US" dirty="0"/>
           </a:p>
@@ -2378,7 +2379,7 @@
           <a:p>
             <a:r>
               <a:rPr lang="en-US" dirty="0"/>
-              <a:t>11 nguồn, khớp danh mục tham khảo IEEE trong báo cáo LaTeX — không có nguồn bịa.</a:t>
+              <a:t>Chỉ giới thiệu ngắn, KHÔNG đi sâu — tránh lệch trọng tâm khỏi Backprop + Initialization là chủ đề chính của báo cáo.</a:t>
             </a:r>
             <a:endParaRPr lang="en-US" dirty="0"/>
           </a:p>
@@ -2508,6 +2509,94 @@
 </p:notes>
 </file>
 
+<file path=ppt/notesSlides/notesSlide30.xml><?xml version="1.0" encoding="utf-8"?>
+<p:notes xmlns:a="http://schemas.openxmlformats.org/drawingml/2006/main" xmlns:r="http://schemas.openxmlformats.org/officeDocument/2006/relationships" xmlns:p="http://schemas.openxmlformats.org/presentationml/2006/main">
+  <p:cSld>
+    <p:spTree>
+      <p:nvGrpSpPr>
+        <p:cNvPr id="1" name=""/>
+        <p:cNvGrpSpPr/>
+        <p:nvPr/>
+      </p:nvGrpSpPr>
+      <p:grpSpPr>
+        <a:xfrm>
+          <a:off x="0" y="0"/>
+          <a:ext cx="0" cy="0"/>
+          <a:chOff x="0" y="0"/>
+          <a:chExt cx="0" cy="0"/>
+        </a:xfrm>
+      </p:grpSpPr>
+      <p:sp>
+        <p:nvSpPr>
+          <p:cNvPr id="2" name="Slide Image Placeholder 1"/>
+          <p:cNvSpPr>
+            <a:spLocks noGrp="1" noRot="1" noChangeAspect="1"/>
+          </p:cNvSpPr>
+          <p:nvPr>
+            <p:ph type="sldImg"/>
+          </p:nvPr>
+        </p:nvSpPr>
+        <p:spPr/>
+      </p:sp>
+      <p:sp>
+        <p:nvSpPr>
+          <p:cNvPr id="3" name="Notes Placeholder 2"/>
+          <p:cNvSpPr>
+            <a:spLocks noGrp="1"/>
+          </p:cNvSpPr>
+          <p:nvPr>
+            <p:ph type="body" idx="1"/>
+          </p:nvPr>
+        </p:nvSpPr>
+        <p:spPr/>
+        <p:txBody>
+          <a:bodyPr/>
+          <a:lstStyle/>
+          <a:p>
+            <a:r>
+              <a:rPr lang="en-US" dirty="0"/>
+              <a:t>11 nguồn, khớp danh mục tham khảo IEEE trong báo cáo LaTeX — không có nguồn bịa.</a:t>
+            </a:r>
+            <a:endParaRPr lang="en-US" dirty="0"/>
+          </a:p>
+        </p:txBody>
+      </p:sp>
+      <p:sp>
+        <p:nvSpPr>
+          <p:cNvPr id="4" name="Slide Number Placeholder 3"/>
+          <p:cNvSpPr>
+            <a:spLocks noGrp="1"/>
+          </p:cNvSpPr>
+          <p:nvPr>
+            <p:ph type="sldNum" sz="quarter" idx="10"/>
+          </p:nvPr>
+        </p:nvSpPr>
+        <p:spPr/>
+        <p:txBody>
+          <a:bodyPr/>
+          <a:lstStyle/>
+          <a:p>
+            <a:fld id="{F7021451-1387-4CA6-816F-3879F97B5CBC}" type="slidenum">
+              <a:rPr lang="en-US"/>
+              <a:t>30</a:t>
+            </a:fld>
+            <a:endParaRPr lang="en-US"/>
+          </a:p>
+        </p:txBody>
+      </p:sp>
+    </p:spTree>
+    <p:extLst>
+      <p:ext uri="{BB962C8B-B14F-4D97-AF65-F5344CB8AC3E}">
+        <p14:creationId xmlns:p14="http://schemas.microsoft.com/office/powerpoint/2010/main" val="1024086991"/>
+      </p:ext>
+    </p:extLst>
+  </p:cSld>
+  <p:clrMapOvr>
+    <a:masterClrMapping/>
+  </p:clrMapOvr>
+</p:notes>
+</file>
+
 <file path=ppt/notesSlides/notesSlide4.xml><?xml version="1.0" encoding="utf-8"?>
 <p:notes xmlns:a="http://schemas.openxmlformats.org/drawingml/2006/main" xmlns:r="http://schemas.openxmlformats.org/officeDocument/2006/relationships" xmlns:p="http://schemas.openxmlformats.org/presentationml/2006/main">
   <p:cSld>
@@ -2994,7 +3083,7 @@
           <a:p>
             <a:r>
               <a:rPr lang="en-US" dirty="0"/>
-              <a:t>Cầu nối cực kỳ quan trọng: lớp 1 (xa Loss nhất) có gradient = tích của NHIỀU đạo hàm cục bộ nhất — vì sao vanishing/exploding luôn nặng nhất ở các lớp đầu.</a:t>
+              <a:t>Cầu nối cực kỳ quan trọng: lớp gần input có gradient là tích của NHIỀU Jacobian/weight transformation nhất — vì sao vanishing/exploding luôn nặng nhất ở các lớp đầu. Box Forward/Backward/Optimizer làm rõ ranh giới hay bị nhầm: Backpropagation là thuật toán TÍNH gradient; Gradient Descent (trong Optimizer) mới là quy tắc DÙNG gradient đó để update parameter — hai bước tách biệt, Backprop không tự sửa weight.</a:t>
             </a:r>
             <a:endParaRPr lang="en-US" dirty="0"/>
           </a:p>
@@ -6664,7 +6753,7 @@
                 <a:ea typeface="Calibri" pitchFamily="34" charset="-122"/>
                 <a:cs typeface="Calibri" pitchFamily="34" charset="-120"/>
               </a:rPr>
-              <a:t>10/29</a:t>
+              <a:t>10/30</a:t>
             </a:r>
             <a:endParaRPr lang="en-US" sz="900" dirty="0"/>
           </a:p>
@@ -7388,7 +7477,7 @@
                 <a:ea typeface="Calibri" pitchFamily="34" charset="-122"/>
                 <a:cs typeface="Calibri" pitchFamily="34" charset="-120"/>
               </a:rPr>
-              <a:t>11/29</a:t>
+              <a:t>11/30</a:t>
             </a:r>
             <a:endParaRPr lang="en-US" sz="900" dirty="0"/>
           </a:p>
@@ -7924,7 +8013,7 @@
                 <a:ea typeface="Calibri" pitchFamily="34" charset="-122"/>
                 <a:cs typeface="Calibri" pitchFamily="34" charset="-120"/>
               </a:rPr>
-              <a:t>12/29</a:t>
+              <a:t>12/30</a:t>
             </a:r>
             <a:endParaRPr lang="en-US" sz="900" dirty="0"/>
           </a:p>
@@ -8613,7 +8702,7 @@
                 <a:ea typeface="Calibri" pitchFamily="34" charset="-122"/>
                 <a:cs typeface="Calibri" pitchFamily="34" charset="-120"/>
               </a:rPr>
-              <a:t>13/29</a:t>
+              <a:t>13/30</a:t>
             </a:r>
             <a:endParaRPr lang="en-US" sz="900" dirty="0"/>
           </a:p>
@@ -9110,7 +9199,7 @@
                 <a:ea typeface="Calibri" pitchFamily="34" charset="-122"/>
                 <a:cs typeface="Calibri" pitchFamily="34" charset="-120"/>
               </a:rPr>
-              <a:t>14/29</a:t>
+              <a:t>14/30</a:t>
             </a:r>
             <a:endParaRPr lang="en-US" sz="900" dirty="0"/>
           </a:p>
@@ -9607,7 +9696,7 @@
                 <a:ea typeface="Calibri" pitchFamily="34" charset="-122"/>
                 <a:cs typeface="Calibri" pitchFamily="34" charset="-120"/>
               </a:rPr>
-              <a:t>15/29</a:t>
+              <a:t>15/30</a:t>
             </a:r>
             <a:endParaRPr lang="en-US" sz="900" dirty="0"/>
           </a:p>
@@ -11088,7 +11177,7 @@
                 <a:ea typeface="Calibri" pitchFamily="34" charset="-122"/>
                 <a:cs typeface="Calibri" pitchFamily="34" charset="-120"/>
               </a:rPr>
-              <a:t>16/29</a:t>
+              <a:t>16/30</a:t>
             </a:r>
             <a:endParaRPr lang="en-US" sz="900" dirty="0"/>
           </a:p>
@@ -11735,7 +11824,7 @@
                 <a:ea typeface="Calibri" pitchFamily="34" charset="-122"/>
                 <a:cs typeface="Calibri" pitchFamily="34" charset="-120"/>
               </a:rPr>
-              <a:t>17/29</a:t>
+              <a:t>17/30</a:t>
             </a:r>
             <a:endParaRPr lang="en-US" sz="900" dirty="0"/>
           </a:p>
@@ -12769,7 +12858,7 @@
                 <a:ea typeface="Calibri" pitchFamily="34" charset="-122"/>
                 <a:cs typeface="Calibri" pitchFamily="34" charset="-120"/>
               </a:rPr>
-              <a:t>18/29</a:t>
+              <a:t>18/30</a:t>
             </a:r>
             <a:endParaRPr lang="en-US" sz="900" dirty="0"/>
           </a:p>
@@ -13478,7 +13567,7 @@
                 <a:ea typeface="Calibri" pitchFamily="34" charset="-122"/>
                 <a:cs typeface="Calibri" pitchFamily="34" charset="-120"/>
               </a:rPr>
-              <a:t>19/29</a:t>
+              <a:t>19/30</a:t>
             </a:r>
             <a:endParaRPr lang="en-US" sz="900" dirty="0"/>
           </a:p>
@@ -14467,7 +14556,7 @@
                 <a:ea typeface="Calibri" pitchFamily="34" charset="-122"/>
                 <a:cs typeface="Calibri" pitchFamily="34" charset="-120"/>
               </a:rPr>
-              <a:t>2/29</a:t>
+              <a:t>2/30</a:t>
             </a:r>
             <a:endParaRPr lang="en-US" sz="900" dirty="0"/>
           </a:p>
@@ -15140,7 +15229,7 @@
                 <a:ea typeface="Calibri" pitchFamily="34" charset="-122"/>
                 <a:cs typeface="Calibri" pitchFamily="34" charset="-120"/>
               </a:rPr>
-              <a:t>20/29</a:t>
+              <a:t>20/30</a:t>
             </a:r>
             <a:endParaRPr lang="en-US" sz="900" dirty="0"/>
           </a:p>
@@ -15762,7 +15851,7 @@
                 <a:ea typeface="Calibri" pitchFamily="34" charset="-122"/>
                 <a:cs typeface="Calibri" pitchFamily="34" charset="-120"/>
               </a:rPr>
-              <a:t>21/29</a:t>
+              <a:t>21/30</a:t>
             </a:r>
             <a:endParaRPr lang="en-US" sz="900" dirty="0"/>
           </a:p>
@@ -15984,7 +16073,7 @@
                 <a:ea typeface="Cambria" pitchFamily="34" charset="-122"/>
                 <a:cs typeface="Cambria" pitchFamily="34" charset="-120"/>
               </a:rPr>
-              <a:t>Xavier vs. He — cả hai học được, chênh lệch KHÔNG đủ ý nghĩa</a:t>
+              <a:t>Xavier vs. He — cả hai học được, phân phối accuracy CHỒNG LẤN</a:t>
             </a:r>
             <a:endParaRPr lang="en-US" sz="2400" dirty="0"/>
           </a:p>
@@ -16418,7 +16507,7 @@
                 <a:ea typeface="Calibri" pitchFamily="34" charset="-122"/>
                 <a:cs typeface="Calibri" pitchFamily="34" charset="-120"/>
               </a:rPr>
-              <a:t>22/29</a:t>
+              <a:t>22/30</a:t>
             </a:r>
             <a:endParaRPr lang="en-US" sz="900" dirty="0"/>
           </a:p>
@@ -16788,7 +16877,7 @@
                 <a:ea typeface="Calibri" pitchFamily="34" charset="-122"/>
                 <a:cs typeface="Calibri" pitchFamily="34" charset="-120"/>
               </a:rPr>
-              <a:t>23/29</a:t>
+              <a:t>23/30</a:t>
             </a:r>
             <a:endParaRPr lang="en-US" sz="900" dirty="0"/>
           </a:p>
@@ -17065,7 +17154,7 @@
               <a:buNone/>
             </a:pPr>
             <a:r>
-              <a:rPr lang="en-US" sz="1250" i="1" dirty="0">
+              <a:rPr lang="en-US" sz="1200" i="1" dirty="0">
                 <a:solidFill>
                   <a:srgbClr val="5B6478"/>
                 </a:solidFill>
@@ -17073,9 +17162,9 @@
                 <a:ea typeface="Calibri" pitchFamily="34" charset="-122"/>
                 <a:cs typeface="Calibri" pitchFamily="34" charset="-120"/>
               </a:rPr>
-              <a:t>log₁₀(RMS gradient) đo thật tại bước khởi tạo, 10 hidden layer, activation ReLU — xanh dương = quá nhỏ (vanish), đỏ = quá lớn (explode), cam nhạt/vàng = vùng ổn định.</a:t>
-            </a:r>
-            <a:endParaRPr lang="en-US" sz="1250" dirty="0"/>
+              <a:t>log₁₀(RMS gradient) đo thật tại bước khởi tạo, 10 hidden layer, activation ReLU — xanh dương = rất nhỏ (đặc trưng vanishing), đỏ = rất lớn (đặc trưng exploding), cam nhạt/vàng = vùng gradient ở mức trung bình, quan sát thấy ổn định hơn trong thực nghiệm này.</a:t>
+            </a:r>
+            <a:endParaRPr lang="en-US" sz="1200" dirty="0"/>
           </a:p>
         </p:txBody>
       </p:sp>
@@ -17112,7 +17201,7 @@
                 <a:ea typeface="Calibri" pitchFamily="34" charset="-122"/>
                 <a:cs typeface="Calibri" pitchFamily="34" charset="-120"/>
               </a:rPr>
-              <a:t>24/29</a:t>
+              <a:t>24/30</a:t>
             </a:r>
             <a:endParaRPr lang="en-US" sz="900" dirty="0"/>
           </a:p>
@@ -17295,7 +17384,7 @@
                 <a:ea typeface="Calibri" pitchFamily="34" charset="-122"/>
                 <a:cs typeface="Calibri" pitchFamily="34" charset="-120"/>
               </a:rPr>
-              <a:t>DEMO — DEPTH EXPERIMENT</a:t>
+              <a:t>DEMO — VISUALIZATION BỔ SUNG (FORWARD PASS)</a:t>
             </a:r>
             <a:endParaRPr lang="en-US" sz="1300" dirty="0"/>
           </a:p>
@@ -17326,7 +17415,7 @@
               <a:buNone/>
             </a:pPr>
             <a:r>
-              <a:rPr lang="en-US" sz="2200" b="1" dirty="0">
+              <a:rPr lang="en-US" sz="2500" b="1" dirty="0">
                 <a:solidFill>
                   <a:srgbClr val="1A2238"/>
                 </a:solidFill>
@@ -17334,15 +17423,15 @@
                 <a:ea typeface="Cambria" pitchFamily="34" charset="-122"/>
                 <a:cs typeface="Cambria" pitchFamily="34" charset="-120"/>
               </a:rPr>
-              <a:t>Random vs. Xavier vs. He — theo độ sâu (2→50 lớp)</a:t>
-            </a:r>
-            <a:endParaRPr lang="en-US" sz="2200" dirty="0"/>
+              <a:t>Activation Variance theo layer</a:t>
+            </a:r>
+            <a:endParaRPr lang="en-US" sz="2500" dirty="0"/>
           </a:p>
         </p:txBody>
       </p:sp>
       <p:pic>
         <p:nvPicPr>
-          <p:cNvPr id="4" name="Image 0" descr="..\results\figures\depth_comparison_v2_slide.png">    </p:cNvPr>
+          <p:cNvPr id="4" name="Image 0" descr="..\results\figures\activation_variance_slide.png">    </p:cNvPr>
           <p:cNvPicPr>
             <a:picLocks noChangeAspect="1"/>
           </p:cNvPicPr>
@@ -17356,8 +17445,8 @@
         </p:blipFill>
         <p:spPr>
           <a:xfrm>
-            <a:off x="640080" y="1737360"/>
-            <a:ext cx="6035040" cy="4157472"/>
+            <a:off x="3215488" y="1600200"/>
+            <a:ext cx="5760720" cy="3968496"/>
           </a:xfrm>
           <a:prstGeom prst="rect">
             <a:avLst/>
@@ -17372,8 +17461,8 @@
         </p:nvSpPr>
         <p:spPr>
           <a:xfrm>
-            <a:off x="7040880" y="1828800"/>
-            <a:ext cx="4510735" cy="4206240"/>
+            <a:off x="640080" y="5705856"/>
+            <a:ext cx="10911535" cy="1188720"/>
           </a:xfrm>
           <a:prstGeom prst="rect">
             <a:avLst/>
@@ -17387,13 +17476,13 @@
           <a:p>
             <a:pPr marL="228600" indent="-228600">
               <a:spcAft>
-                <a:spcPts val="900"/>
+                <a:spcPts val="600"/>
               </a:spcAft>
               <a:buSzPct val="100000"/>
               <a:buChar char="▪"/>
             </a:pPr>
             <a:r>
-              <a:rPr lang="en-US" sz="1250" dirty="0">
+              <a:rPr lang="en-US" sz="1300" dirty="0">
                 <a:solidFill>
                   <a:srgbClr val="1A2238"/>
                 </a:solidFill>
@@ -17401,20 +17490,20 @@
                 <a:ea typeface="Calibri" pitchFamily="34" charset="-122"/>
                 <a:cs typeface="Calibri" pitchFamily="34" charset="-120"/>
               </a:rPr>
-              <a:t>Random (naive): trong thiết lập này, gradient RMS về xấp xỉ 0 từ độ sâu 20 trở lên</a:t>
-            </a:r>
-            <a:endParaRPr lang="en-US" sz="1250" dirty="0"/>
+              <a:t>Random nhỏ: Var(a) co lại dần theo layer — cùng câu chuyện vanishing đã thấy ở gradient, nhưng lần này ở FORWARD PASS</a:t>
+            </a:r>
+            <a:endParaRPr lang="en-US" sz="1300" dirty="0"/>
           </a:p>
           <a:p>
             <a:pPr marL="228600" indent="-228600">
               <a:spcAft>
-                <a:spcPts val="900"/>
+                <a:spcPts val="600"/>
               </a:spcAft>
               <a:buSzPct val="100000"/>
               <a:buChar char="▪"/>
             </a:pPr>
             <a:r>
-              <a:rPr lang="en-US" sz="1250" dirty="0">
+              <a:rPr lang="en-US" sz="1300" dirty="0">
                 <a:solidFill>
                   <a:srgbClr val="1A2238"/>
                 </a:solidFill>
@@ -17422,20 +17511,20 @@
                 <a:ea typeface="Calibri" pitchFamily="34" charset="-122"/>
                 <a:cs typeface="Calibri" pitchFamily="34" charset="-120"/>
               </a:rPr>
-              <a:t>Xavier: suy giảm dần đều — cho gradient RMS rất nhỏ tại depth=50 (≈3×10⁻¹⁰)</a:t>
-            </a:r>
-            <a:endParaRPr lang="en-US" sz="1250" dirty="0"/>
+              <a:t>Random lớn: Var(a) tăng theo cấp số mũ — hàng chục bậc độ lớn chỉ sau 10 layer</a:t>
+            </a:r>
+            <a:endParaRPr lang="en-US" sz="1300" dirty="0"/>
           </a:p>
           <a:p>
             <a:pPr marL="228600" indent="-228600">
               <a:spcAft>
-                <a:spcPts val="900"/>
+                <a:spcPts val="600"/>
               </a:spcAft>
               <a:buSzPct val="100000"/>
               <a:buChar char="▪"/>
             </a:pPr>
             <a:r>
-              <a:rPr lang="en-US" sz="1250" dirty="0">
+              <a:rPr lang="en-US" sz="1300" dirty="0">
                 <a:solidFill>
                   <a:srgbClr val="1A2238"/>
                 </a:solidFill>
@@ -17443,67 +17532,46 @@
                 <a:ea typeface="Calibri" pitchFamily="34" charset="-122"/>
                 <a:cs typeface="Calibri" pitchFamily="34" charset="-120"/>
               </a:rPr>
-              <a:t>He: duy trì gradient RMS cùng order of magnitude (~10⁻²) đến depth=50, trong architecture và training setup đang xét</a:t>
-            </a:r>
-            <a:endParaRPr lang="en-US" sz="1250" dirty="0"/>
-          </a:p>
-          <a:p>
-            <a:pPr marL="228600" indent="-228600">
-              <a:spcAft>
-                <a:spcPts val="900"/>
-              </a:spcAft>
-              <a:buSzPct val="100000"/>
-              <a:buChar char="▪"/>
-            </a:pPr>
-            <a:r>
-              <a:rPr lang="en-US" sz="1250" dirty="0">
-                <a:solidFill>
-                  <a:srgbClr val="1A2238"/>
+              <a:t>Xavier/He: Var(a) gần như phẳng, dao động quanh bậc 10⁰ suốt 10 layer</a:t>
+            </a:r>
+            <a:endParaRPr lang="en-US" sz="1300" dirty="0"/>
+          </a:p>
+        </p:txBody>
+      </p:sp>
+      <p:sp>
+        <p:nvSpPr>
+          <p:cNvPr id="6" name="Text 3"/>
+          <p:cNvSpPr txBox="1"/>
+          <p:nvPr/>
+        </p:nvSpPr>
+        <p:spPr>
+          <a:xfrm>
+            <a:off x="11185855" y="6446520"/>
+            <a:ext cx="731520" cy="274320"/>
+          </a:xfrm>
+          <a:prstGeom prst="rect">
+            <a:avLst/>
+          </a:prstGeom>
+          <a:noFill/>
+          <a:ln/>
+        </p:spPr>
+        <p:txBody>
+          <a:bodyPr wrap="square" lIns="0" tIns="0" rIns="0" bIns="0" rtlCol="0" anchor="ctr"/>
+          <a:lstStyle/>
+          <a:p>
+            <a:pPr algn="r" indent="0" marL="0">
+              <a:buNone/>
+            </a:pPr>
+            <a:r>
+              <a:rPr lang="en-US" sz="900" dirty="0">
+                <a:solidFill>
+                  <a:srgbClr val="5B6478"/>
                 </a:solidFill>
                 <a:latin typeface="Calibri" pitchFamily="34" charset="0"/>
                 <a:ea typeface="Calibri" pitchFamily="34" charset="-122"/>
                 <a:cs typeface="Calibri" pitchFamily="34" charset="-120"/>
               </a:rPr>
-              <a:t>Nhưng gradient ổn định KHÔNG đồng nghĩa học tốt: He@L=12 test acc chỉ 32.6% (overfitting quan sát được, không phải vanishing — khớp phát hiện của báo cáo chính)</a:t>
-            </a:r>
-            <a:endParaRPr lang="en-US" sz="1250" dirty="0"/>
-          </a:p>
-        </p:txBody>
-      </p:sp>
-      <p:sp>
-        <p:nvSpPr>
-          <p:cNvPr id="6" name="Text 3"/>
-          <p:cNvSpPr txBox="1"/>
-          <p:nvPr/>
-        </p:nvSpPr>
-        <p:spPr>
-          <a:xfrm>
-            <a:off x="11185855" y="6446520"/>
-            <a:ext cx="731520" cy="274320"/>
-          </a:xfrm>
-          <a:prstGeom prst="rect">
-            <a:avLst/>
-          </a:prstGeom>
-          <a:noFill/>
-          <a:ln/>
-        </p:spPr>
-        <p:txBody>
-          <a:bodyPr wrap="square" lIns="0" tIns="0" rIns="0" bIns="0" rtlCol="0" anchor="ctr"/>
-          <a:lstStyle/>
-          <a:p>
-            <a:pPr algn="r" indent="0" marL="0">
-              <a:buNone/>
-            </a:pPr>
-            <a:r>
-              <a:rPr lang="en-US" sz="900" dirty="0">
-                <a:solidFill>
-                  <a:srgbClr val="5B6478"/>
-                </a:solidFill>
-                <a:latin typeface="Calibri" pitchFamily="34" charset="0"/>
-                <a:ea typeface="Calibri" pitchFamily="34" charset="-122"/>
-                <a:cs typeface="Calibri" pitchFamily="34" charset="-120"/>
-              </a:rPr>
-              <a:t>25/29</a:t>
+              <a:t>25/30</a:t>
             </a:r>
             <a:endParaRPr lang="en-US" sz="900" dirty="0"/>
           </a:p>
@@ -17686,7 +17754,7 @@
                 <a:ea typeface="Calibri" pitchFamily="34" charset="-122"/>
                 <a:cs typeface="Calibri" pitchFamily="34" charset="-120"/>
               </a:rPr>
-              <a:t>KẾT QUẢ</a:t>
+              <a:t>DEMO — DEPTH EXPERIMENT</a:t>
             </a:r>
             <a:endParaRPr lang="en-US" sz="1300" dirty="0"/>
           </a:p>
@@ -17717,7 +17785,7 @@
               <a:buNone/>
             </a:pPr>
             <a:r>
-              <a:rPr lang="en-US" sz="2400" b="1" dirty="0">
+              <a:rPr lang="en-US" sz="2200" b="1" dirty="0">
                 <a:solidFill>
                   <a:srgbClr val="1A2238"/>
                 </a:solidFill>
@@ -17725,45 +17793,436 @@
                 <a:ea typeface="Cambria" pitchFamily="34" charset="-122"/>
                 <a:cs typeface="Cambria" pitchFamily="34" charset="-120"/>
               </a:rPr>
-              <a:t>Bảng tổng hợp — 5 thí nghiệm, số liệu thật</a:t>
-            </a:r>
-            <a:endParaRPr lang="en-US" sz="2400" dirty="0"/>
-          </a:p>
-        </p:txBody>
-      </p:sp>
-      <p:sp>
-        <p:nvSpPr>
-          <p:cNvPr id="4" name="Text 2"/>
-          <p:cNvSpPr txBox="1"/>
-          <p:nvPr/>
-        </p:nvSpPr>
-        <p:spPr>
-          <a:xfrm>
-            <a:off x="640080" y="1572768"/>
-            <a:ext cx="10911535" cy="320040"/>
-          </a:xfrm>
-          <a:prstGeom prst="rect">
-            <a:avLst/>
-          </a:prstGeom>
-          <a:noFill/>
-          <a:ln/>
-        </p:spPr>
-        <p:txBody>
-          <a:bodyPr wrap="square" lIns="0" tIns="0" rIns="0" bIns="0" rtlCol="0" anchor="ctr"/>
-          <a:lstStyle/>
-          <a:p>
-            <a:pPr indent="0" marL="0">
-              <a:buNone/>
-            </a:pPr>
-            <a:r>
-              <a:rPr lang="en-US" sz="1250" i="1" dirty="0">
-                <a:solidFill>
-                  <a:srgbClr val="5B6478"/>
+              <a:t>Random vs. Xavier vs. He — theo độ sâu (2→50 lớp)</a:t>
+            </a:r>
+            <a:endParaRPr lang="en-US" sz="2200" dirty="0"/>
+          </a:p>
+        </p:txBody>
+      </p:sp>
+      <p:pic>
+        <p:nvPicPr>
+          <p:cNvPr id="4" name="Image 0" descr="..\results\figures\depth_comparison_v2_slide.png">    </p:cNvPr>
+          <p:cNvPicPr>
+            <a:picLocks noChangeAspect="1"/>
+          </p:cNvPicPr>
+          <p:nvPr/>
+        </p:nvPicPr>
+        <p:blipFill>
+          <a:blip r:embed="rId1"/>
+          <a:stretch>
+            <a:fillRect/>
+          </a:stretch>
+        </p:blipFill>
+        <p:spPr>
+          <a:xfrm>
+            <a:off x="640080" y="1737360"/>
+            <a:ext cx="6035040" cy="4157472"/>
+          </a:xfrm>
+          <a:prstGeom prst="rect">
+            <a:avLst/>
+          </a:prstGeom>
+        </p:spPr>
+      </p:pic>
+      <p:sp>
+        <p:nvSpPr>
+          <p:cNvPr id="5" name="Text 2"/>
+          <p:cNvSpPr txBox="1"/>
+          <p:nvPr/>
+        </p:nvSpPr>
+        <p:spPr>
+          <a:xfrm>
+            <a:off x="7040880" y="1828800"/>
+            <a:ext cx="4510735" cy="4206240"/>
+          </a:xfrm>
+          <a:prstGeom prst="rect">
+            <a:avLst/>
+          </a:prstGeom>
+          <a:noFill/>
+          <a:ln/>
+        </p:spPr>
+        <p:txBody>
+          <a:bodyPr wrap="square" lIns="0" tIns="0" rIns="0" bIns="0" rtlCol="0" anchor="t"/>
+          <a:lstStyle/>
+          <a:p>
+            <a:pPr marL="228600" indent="-228600">
+              <a:spcAft>
+                <a:spcPts val="900"/>
+              </a:spcAft>
+              <a:buSzPct val="100000"/>
+              <a:buChar char="▪"/>
+            </a:pPr>
+            <a:r>
+              <a:rPr lang="en-US" sz="1200" dirty="0">
+                <a:solidFill>
+                  <a:srgbClr val="1A2238"/>
                 </a:solidFill>
                 <a:latin typeface="Calibri" pitchFamily="34" charset="0"/>
                 <a:ea typeface="Calibri" pitchFamily="34" charset="-122"/>
                 <a:cs typeface="Calibri" pitchFamily="34" charset="-120"/>
               </a:rPr>
+              <a:t>Random (naive): trong thiết lập này, gradient RMS về xấp xỉ 0 từ độ sâu 20 trở lên</a:t>
+            </a:r>
+            <a:endParaRPr lang="en-US" sz="1200" dirty="0"/>
+          </a:p>
+          <a:p>
+            <a:pPr marL="228600" indent="-228600">
+              <a:spcAft>
+                <a:spcPts val="900"/>
+              </a:spcAft>
+              <a:buSzPct val="100000"/>
+              <a:buChar char="▪"/>
+            </a:pPr>
+            <a:r>
+              <a:rPr lang="en-US" sz="1200" dirty="0">
+                <a:solidFill>
+                  <a:srgbClr val="1A2238"/>
+                </a:solidFill>
+                <a:latin typeface="Calibri" pitchFamily="34" charset="0"/>
+                <a:ea typeface="Calibri" pitchFamily="34" charset="-122"/>
+                <a:cs typeface="Calibri" pitchFamily="34" charset="-120"/>
+              </a:rPr>
+              <a:t>Xavier: suy giảm dần đều — cho gradient RMS rất nhỏ tại depth=50 (≈3×10⁻¹⁰)</a:t>
+            </a:r>
+            <a:endParaRPr lang="en-US" sz="1200" dirty="0"/>
+          </a:p>
+          <a:p>
+            <a:pPr marL="228600" indent="-228600">
+              <a:spcAft>
+                <a:spcPts val="900"/>
+              </a:spcAft>
+              <a:buSzPct val="100000"/>
+              <a:buChar char="▪"/>
+            </a:pPr>
+            <a:r>
+              <a:rPr lang="en-US" sz="1200" dirty="0">
+                <a:solidFill>
+                  <a:srgbClr val="1A2238"/>
+                </a:solidFill>
+                <a:latin typeface="Calibri" pitchFamily="34" charset="0"/>
+                <a:ea typeface="Calibri" pitchFamily="34" charset="-122"/>
+                <a:cs typeface="Calibri" pitchFamily="34" charset="-120"/>
+              </a:rPr>
+              <a:t>He: duy trì gradient RMS cùng order of magnitude (~10⁻²) đến depth=50, trong architecture và training setup đang xét</a:t>
+            </a:r>
+            <a:endParaRPr lang="en-US" sz="1200" dirty="0"/>
+          </a:p>
+          <a:p>
+            <a:pPr marL="228600" indent="-228600">
+              <a:spcAft>
+                <a:spcPts val="900"/>
+              </a:spcAft>
+              <a:buSzPct val="100000"/>
+              <a:buChar char="▪"/>
+            </a:pPr>
+            <a:r>
+              <a:rPr lang="en-US" sz="1200" dirty="0">
+                <a:solidFill>
+                  <a:srgbClr val="1A2238"/>
+                </a:solidFill>
+                <a:latin typeface="Calibri" pitchFamily="34" charset="0"/>
+                <a:ea typeface="Calibri" pitchFamily="34" charset="-122"/>
+                <a:cs typeface="Calibri" pitchFamily="34" charset="-120"/>
+              </a:rPr>
+              <a:t>Nhưng gradient ổn định KHÔNG đồng nghĩa học tốt: He@L=12 train loss chỉ 0.456 trong khi test loss vọt lên 5.41 (test acc 32.6%) — khoảng cách train/test lớn này là bằng chứng cụ thể cho overfitting, không phải suy đoán từ accuracy đơn lẻ</a:t>
+            </a:r>
+            <a:endParaRPr lang="en-US" sz="1200" dirty="0"/>
+          </a:p>
+        </p:txBody>
+      </p:sp>
+      <p:sp>
+        <p:nvSpPr>
+          <p:cNvPr id="6" name="Text 3"/>
+          <p:cNvSpPr txBox="1"/>
+          <p:nvPr/>
+        </p:nvSpPr>
+        <p:spPr>
+          <a:xfrm>
+            <a:off x="11185855" y="6446520"/>
+            <a:ext cx="731520" cy="274320"/>
+          </a:xfrm>
+          <a:prstGeom prst="rect">
+            <a:avLst/>
+          </a:prstGeom>
+          <a:noFill/>
+          <a:ln/>
+        </p:spPr>
+        <p:txBody>
+          <a:bodyPr wrap="square" lIns="0" tIns="0" rIns="0" bIns="0" rtlCol="0" anchor="ctr"/>
+          <a:lstStyle/>
+          <a:p>
+            <a:pPr algn="r" indent="0" marL="0">
+              <a:buNone/>
+            </a:pPr>
+            <a:r>
+              <a:rPr lang="en-US" sz="900" dirty="0">
+                <a:solidFill>
+                  <a:srgbClr val="5B6478"/>
+                </a:solidFill>
+                <a:latin typeface="Calibri" pitchFamily="34" charset="0"/>
+                <a:ea typeface="Calibri" pitchFamily="34" charset="-122"/>
+                <a:cs typeface="Calibri" pitchFamily="34" charset="-120"/>
+              </a:rPr>
+              <a:t>26/30</a:t>
+            </a:r>
+            <a:endParaRPr lang="en-US" sz="900" dirty="0"/>
+          </a:p>
+        </p:txBody>
+      </p:sp>
+      <p:sp>
+        <p:nvSpPr>
+          <p:cNvPr id="7" name="Shape 4"/>
+          <p:cNvSpPr/>
+          <p:nvPr/>
+        </p:nvSpPr>
+        <p:spPr>
+          <a:xfrm>
+            <a:off x="610362" y="6473952"/>
+            <a:ext cx="59436" cy="59436"/>
+          </a:xfrm>
+          <a:prstGeom prst="ellipse">
+            <a:avLst/>
+          </a:prstGeom>
+          <a:solidFill>
+            <a:srgbClr val="D9DEE8"/>
+          </a:solidFill>
+          <a:ln/>
+        </p:spPr>
+      </p:sp>
+      <p:sp>
+        <p:nvSpPr>
+          <p:cNvPr id="8" name="Shape 5"/>
+          <p:cNvSpPr/>
+          <p:nvPr/>
+        </p:nvSpPr>
+        <p:spPr>
+          <a:xfrm>
+            <a:off x="829818" y="6473952"/>
+            <a:ext cx="59436" cy="59436"/>
+          </a:xfrm>
+          <a:prstGeom prst="ellipse">
+            <a:avLst/>
+          </a:prstGeom>
+          <a:solidFill>
+            <a:srgbClr val="D9DEE8"/>
+          </a:solidFill>
+          <a:ln/>
+        </p:spPr>
+      </p:sp>
+      <p:sp>
+        <p:nvSpPr>
+          <p:cNvPr id="9" name="Shape 6"/>
+          <p:cNvSpPr/>
+          <p:nvPr/>
+        </p:nvSpPr>
+        <p:spPr>
+          <a:xfrm>
+            <a:off x="1034415" y="6459093"/>
+            <a:ext cx="89154" cy="89154"/>
+          </a:xfrm>
+          <a:prstGeom prst="ellipse">
+            <a:avLst/>
+          </a:prstGeom>
+          <a:solidFill>
+            <a:srgbClr val="285AB4"/>
+          </a:solidFill>
+          <a:ln/>
+        </p:spPr>
+      </p:sp>
+      <p:sp>
+        <p:nvSpPr>
+          <p:cNvPr id="10" name="Shape 7"/>
+          <p:cNvSpPr/>
+          <p:nvPr/>
+        </p:nvSpPr>
+        <p:spPr>
+          <a:xfrm>
+            <a:off x="1268730" y="6473952"/>
+            <a:ext cx="59436" cy="59436"/>
+          </a:xfrm>
+          <a:prstGeom prst="ellipse">
+            <a:avLst/>
+          </a:prstGeom>
+          <a:solidFill>
+            <a:srgbClr val="D9DEE8"/>
+          </a:solidFill>
+          <a:ln/>
+        </p:spPr>
+      </p:sp>
+      <p:sp>
+        <p:nvSpPr>
+          <p:cNvPr id="11" name="Text 8"/>
+          <p:cNvSpPr txBox="1"/>
+          <p:nvPr/>
+        </p:nvSpPr>
+        <p:spPr>
+          <a:xfrm>
+            <a:off x="1563624" y="6391656"/>
+            <a:ext cx="3291840" cy="274320"/>
+          </a:xfrm>
+          <a:prstGeom prst="rect">
+            <a:avLst/>
+          </a:prstGeom>
+          <a:noFill/>
+          <a:ln/>
+        </p:spPr>
+        <p:txBody>
+          <a:bodyPr wrap="square" lIns="0" tIns="0" rIns="0" bIns="0" rtlCol="0" anchor="ctr"/>
+          <a:lstStyle/>
+          <a:p>
+            <a:pPr indent="0" marL="0">
+              <a:buNone/>
+            </a:pPr>
+            <a:r>
+              <a:rPr lang="en-US" sz="850" spc="50" kern="0" dirty="0">
+                <a:solidFill>
+                  <a:srgbClr val="5B6478"/>
+                </a:solidFill>
+                <a:latin typeface="Calibri" pitchFamily="34" charset="0"/>
+                <a:ea typeface="Calibri" pitchFamily="34" charset="-122"/>
+                <a:cs typeface="Calibri" pitchFamily="34" charset="-120"/>
+              </a:rPr>
+              <a:t>EXPERIMENT</a:t>
+            </a:r>
+            <a:endParaRPr lang="en-US" sz="850" dirty="0"/>
+          </a:p>
+        </p:txBody>
+      </p:sp>
+    </p:spTree>
+  </p:cSld>
+  <p:clrMapOvr>
+    <a:masterClrMapping/>
+  </p:clrMapOvr>
+</p:sld>
+</file>
+
+<file path=ppt/slides/slide27.xml><?xml version="1.0" encoding="utf-8"?>
+<p:sld xmlns:a="http://schemas.openxmlformats.org/drawingml/2006/main" xmlns:r="http://schemas.openxmlformats.org/officeDocument/2006/relationships" xmlns:p="http://schemas.openxmlformats.org/presentationml/2006/main">
+  <p:cSld name="Slide 27">
+    <p:spTree>
+      <p:nvGrpSpPr>
+        <p:cNvPr id="1" name=""/>
+        <p:cNvGrpSpPr/>
+        <p:nvPr/>
+      </p:nvGrpSpPr>
+      <p:grpSpPr>
+        <a:xfrm>
+          <a:off x="0" y="0"/>
+          <a:ext cx="0" cy="0"/>
+          <a:chOff x="0" y="0"/>
+          <a:chExt cx="0" cy="0"/>
+        </a:xfrm>
+      </p:grpSpPr>
+      <p:sp>
+        <p:nvSpPr>
+          <p:cNvPr id="2" name="Text 0"/>
+          <p:cNvSpPr txBox="1"/>
+          <p:nvPr/>
+        </p:nvSpPr>
+        <p:spPr>
+          <a:xfrm>
+            <a:off x="640080" y="457200"/>
+            <a:ext cx="9144000" cy="320040"/>
+          </a:xfrm>
+          <a:prstGeom prst="rect">
+            <a:avLst/>
+          </a:prstGeom>
+          <a:noFill/>
+          <a:ln/>
+        </p:spPr>
+        <p:txBody>
+          <a:bodyPr wrap="square" lIns="0" tIns="0" rIns="0" bIns="0" rtlCol="0" anchor="ctr"/>
+          <a:lstStyle/>
+          <a:p>
+            <a:pPr indent="0" marL="0">
+              <a:buNone/>
+            </a:pPr>
+            <a:r>
+              <a:rPr lang="en-US" sz="1300" b="1" spc="100" kern="0" dirty="0">
+                <a:solidFill>
+                  <a:srgbClr val="285AB4"/>
+                </a:solidFill>
+                <a:latin typeface="Calibri" pitchFamily="34" charset="0"/>
+                <a:ea typeface="Calibri" pitchFamily="34" charset="-122"/>
+                <a:cs typeface="Calibri" pitchFamily="34" charset="-120"/>
+              </a:rPr>
+              <a:t>KẾT QUẢ</a:t>
+            </a:r>
+            <a:endParaRPr lang="en-US" sz="1300" dirty="0"/>
+          </a:p>
+        </p:txBody>
+      </p:sp>
+      <p:sp>
+        <p:nvSpPr>
+          <p:cNvPr id="3" name="Text 1"/>
+          <p:cNvSpPr txBox="1"/>
+          <p:nvPr/>
+        </p:nvSpPr>
+        <p:spPr>
+          <a:xfrm>
+            <a:off x="640080" y="749808"/>
+            <a:ext cx="10911535" cy="822960"/>
+          </a:xfrm>
+          <a:prstGeom prst="rect">
+            <a:avLst/>
+          </a:prstGeom>
+          <a:noFill/>
+          <a:ln/>
+        </p:spPr>
+        <p:txBody>
+          <a:bodyPr wrap="square" lIns="0" tIns="0" rIns="0" bIns="0" rtlCol="0" anchor="t"/>
+          <a:lstStyle/>
+          <a:p>
+            <a:pPr indent="0" marL="0">
+              <a:buNone/>
+            </a:pPr>
+            <a:r>
+              <a:rPr lang="en-US" sz="2400" b="1" dirty="0">
+                <a:solidFill>
+                  <a:srgbClr val="1A2238"/>
+                </a:solidFill>
+                <a:latin typeface="Cambria" pitchFamily="34" charset="0"/>
+                <a:ea typeface="Cambria" pitchFamily="34" charset="-122"/>
+                <a:cs typeface="Cambria" pitchFamily="34" charset="-120"/>
+              </a:rPr>
+              <a:t>Bảng tổng hợp — 5 thí nghiệm, số liệu thật</a:t>
+            </a:r>
+            <a:endParaRPr lang="en-US" sz="2400" dirty="0"/>
+          </a:p>
+        </p:txBody>
+      </p:sp>
+      <p:sp>
+        <p:nvSpPr>
+          <p:cNvPr id="4" name="Text 2"/>
+          <p:cNvSpPr txBox="1"/>
+          <p:nvPr/>
+        </p:nvSpPr>
+        <p:spPr>
+          <a:xfrm>
+            <a:off x="640080" y="1572768"/>
+            <a:ext cx="10911535" cy="320040"/>
+          </a:xfrm>
+          <a:prstGeom prst="rect">
+            <a:avLst/>
+          </a:prstGeom>
+          <a:noFill/>
+          <a:ln/>
+        </p:spPr>
+        <p:txBody>
+          <a:bodyPr wrap="square" lIns="0" tIns="0" rIns="0" bIns="0" rtlCol="0" anchor="ctr"/>
+          <a:lstStyle/>
+          <a:p>
+            <a:pPr indent="0" marL="0">
+              <a:buNone/>
+            </a:pPr>
+            <a:r>
+              <a:rPr lang="en-US" sz="1250" i="1" dirty="0">
+                <a:solidFill>
+                  <a:srgbClr val="5B6478"/>
+                </a:solidFill>
+                <a:latin typeface="Calibri" pitchFamily="34" charset="0"/>
+                <a:ea typeface="Calibri" pitchFamily="34" charset="-122"/>
+                <a:cs typeface="Calibri" pitchFamily="34" charset="-120"/>
+              </a:rPr>
               <a:t>Thứ tự đọc kết quả (từ trực tiếp nhất): Gradient RMS → Training Loss → Test Accuracy</a:t>
             </a:r>
             <a:endParaRPr lang="en-US" sz="1250" dirty="0"/>
@@ -17772,7 +18231,7 @@
       </p:sp>
       <p:graphicFrame>
         <p:nvGraphicFramePr>
-          <p:cNvPr id="27" name="Table 0"/>
+          <p:cNvPr id="28" name="Table 0"/>
           <p:cNvGraphicFramePr>
             <a:graphicFrameLocks noGrp="1"/>
           </p:cNvGraphicFramePr>
@@ -19717,7 +20176,7 @@
                 <a:ea typeface="Calibri" pitchFamily="34" charset="-122"/>
                 <a:cs typeface="Calibri" pitchFamily="34" charset="-120"/>
               </a:rPr>
-              <a:t>26/29</a:t>
+              <a:t>27/30</a:t>
             </a:r>
             <a:endParaRPr lang="en-US" sz="900" dirty="0"/>
           </a:p>
@@ -19850,9 +20309,9 @@
 </p:sld>
 </file>
 
-<file path=ppt/slides/slide27.xml><?xml version="1.0" encoding="utf-8"?>
+<file path=ppt/slides/slide28.xml><?xml version="1.0" encoding="utf-8"?>
 <p:sld xmlns:a="http://schemas.openxmlformats.org/drawingml/2006/main" xmlns:r="http://schemas.openxmlformats.org/officeDocument/2006/relationships" xmlns:p="http://schemas.openxmlformats.org/presentationml/2006/main">
-  <p:cSld name="Slide 27">
+  <p:cSld name="Slide 28">
     <p:bg>
       <p:bgPr>
         <a:solidFill>
@@ -20631,9 +21090,9 @@
 </p:sld>
 </file>
 
-<file path=ppt/slides/slide28.xml><?xml version="1.0" encoding="utf-8"?>
+<file path=ppt/slides/slide29.xml><?xml version="1.0" encoding="utf-8"?>
 <p:sld xmlns:a="http://schemas.openxmlformats.org/drawingml/2006/main" xmlns:r="http://schemas.openxmlformats.org/officeDocument/2006/relationships" xmlns:p="http://schemas.openxmlformats.org/presentationml/2006/main">
-  <p:cSld name="Slide 28">
+  <p:cSld name="Slide 29">
     <p:spTree>
       <p:nvGrpSpPr>
         <p:cNvPr id="1" name=""/>
@@ -21180,7 +21639,7 @@
                 <a:ea typeface="Calibri" pitchFamily="34" charset="-122"/>
                 <a:cs typeface="Calibri" pitchFamily="34" charset="-120"/>
               </a:rPr>
-              <a:t>28/29</a:t>
+              <a:t>29/30</a:t>
             </a:r>
             <a:endParaRPr lang="en-US" sz="900" dirty="0"/>
           </a:p>
@@ -21294,477 +21753,6 @@
               <a:rPr lang="en-US" sz="850" spc="50" kern="0" dirty="0">
                 <a:solidFill>
                   <a:srgbClr val="5B6478"/>
-                </a:solidFill>
-                <a:latin typeface="Calibri" pitchFamily="34" charset="0"/>
-                <a:ea typeface="Calibri" pitchFamily="34" charset="-122"/>
-                <a:cs typeface="Calibri" pitchFamily="34" charset="-120"/>
-              </a:rPr>
-              <a:t>CONCLUSION</a:t>
-            </a:r>
-            <a:endParaRPr lang="en-US" sz="850" dirty="0"/>
-          </a:p>
-        </p:txBody>
-      </p:sp>
-    </p:spTree>
-  </p:cSld>
-  <p:clrMapOvr>
-    <a:masterClrMapping/>
-  </p:clrMapOvr>
-</p:sld>
-</file>
-
-<file path=ppt/slides/slide29.xml><?xml version="1.0" encoding="utf-8"?>
-<p:sld xmlns:a="http://schemas.openxmlformats.org/drawingml/2006/main" xmlns:r="http://schemas.openxmlformats.org/officeDocument/2006/relationships" xmlns:p="http://schemas.openxmlformats.org/presentationml/2006/main">
-  <p:cSld name="Slide 29">
-    <p:bg>
-      <p:bgPr>
-        <a:solidFill>
-          <a:srgbClr val="16213E"/>
-        </a:solidFill>
-      </p:bgPr>
-    </p:bg>
-    <p:spTree>
-      <p:nvGrpSpPr>
-        <p:cNvPr id="1" name=""/>
-        <p:cNvGrpSpPr/>
-        <p:nvPr/>
-      </p:nvGrpSpPr>
-      <p:grpSpPr>
-        <a:xfrm>
-          <a:off x="0" y="0"/>
-          <a:ext cx="0" cy="0"/>
-          <a:chOff x="0" y="0"/>
-          <a:chExt cx="0" cy="0"/>
-        </a:xfrm>
-      </p:grpSpPr>
-      <p:sp>
-        <p:nvSpPr>
-          <p:cNvPr id="2" name="Text 0"/>
-          <p:cNvSpPr txBox="1"/>
-          <p:nvPr/>
-        </p:nvSpPr>
-        <p:spPr>
-          <a:xfrm>
-            <a:off x="640080" y="502920"/>
-            <a:ext cx="9144000" cy="320040"/>
-          </a:xfrm>
-          <a:prstGeom prst="rect">
-            <a:avLst/>
-          </a:prstGeom>
-          <a:noFill/>
-          <a:ln/>
-        </p:spPr>
-        <p:txBody>
-          <a:bodyPr wrap="square" lIns="0" tIns="0" rIns="0" bIns="0" rtlCol="0" anchor="ctr"/>
-          <a:lstStyle/>
-          <a:p>
-            <a:pPr indent="0" marL="0">
-              <a:buNone/>
-            </a:pPr>
-            <a:r>
-              <a:rPr lang="en-US" sz="1300" b="1" spc="100" kern="0" dirty="0">
-                <a:solidFill>
-                  <a:srgbClr val="8FA3C9"/>
-                </a:solidFill>
-                <a:latin typeface="Calibri" pitchFamily="34" charset="0"/>
-                <a:ea typeface="Calibri" pitchFamily="34" charset="-122"/>
-                <a:cs typeface="Calibri" pitchFamily="34" charset="-120"/>
-              </a:rPr>
-              <a:t>TÀI LIỆU THAM KHẢO</a:t>
-            </a:r>
-            <a:endParaRPr lang="en-US" sz="1300" dirty="0"/>
-          </a:p>
-        </p:txBody>
-      </p:sp>
-      <p:sp>
-        <p:nvSpPr>
-          <p:cNvPr id="3" name="Text 1"/>
-          <p:cNvSpPr txBox="1"/>
-          <p:nvPr/>
-        </p:nvSpPr>
-        <p:spPr>
-          <a:xfrm>
-            <a:off x="640080" y="914400"/>
-            <a:ext cx="10911535" cy="822960"/>
-          </a:xfrm>
-          <a:prstGeom prst="rect">
-            <a:avLst/>
-          </a:prstGeom>
-          <a:noFill/>
-          <a:ln/>
-        </p:spPr>
-        <p:txBody>
-          <a:bodyPr wrap="square" lIns="0" tIns="0" rIns="0" bIns="0" rtlCol="0" anchor="t"/>
-          <a:lstStyle/>
-          <a:p>
-            <a:pPr indent="0" marL="0">
-              <a:buNone/>
-            </a:pPr>
-            <a:r>
-              <a:rPr lang="en-US" sz="2900" b="1" dirty="0">
-                <a:solidFill>
-                  <a:srgbClr val="FFFFFF"/>
-                </a:solidFill>
-                <a:latin typeface="Cambria" pitchFamily="34" charset="0"/>
-                <a:ea typeface="Cambria" pitchFamily="34" charset="-122"/>
-                <a:cs typeface="Cambria" pitchFamily="34" charset="-120"/>
-              </a:rPr>
-              <a:t>References</a:t>
-            </a:r>
-            <a:endParaRPr lang="en-US" sz="2900" dirty="0"/>
-          </a:p>
-        </p:txBody>
-      </p:sp>
-      <p:sp>
-        <p:nvSpPr>
-          <p:cNvPr id="4" name="Text 2"/>
-          <p:cNvSpPr txBox="1"/>
-          <p:nvPr/>
-        </p:nvSpPr>
-        <p:spPr>
-          <a:xfrm>
-            <a:off x="640080" y="1691640"/>
-            <a:ext cx="10911535" cy="4709160"/>
-          </a:xfrm>
-          <a:prstGeom prst="rect">
-            <a:avLst/>
-          </a:prstGeom>
-          <a:noFill/>
-          <a:ln/>
-        </p:spPr>
-        <p:txBody>
-          <a:bodyPr wrap="square" lIns="0" tIns="0" rIns="0" bIns="0" rtlCol="0" anchor="t"/>
-          <a:lstStyle/>
-          <a:p>
-            <a:pPr indent="0" marL="0">
-              <a:spcAft>
-                <a:spcPts val="650"/>
-              </a:spcAft>
-              <a:buNone/>
-            </a:pPr>
-            <a:r>
-              <a:rPr lang="en-US" sz="1100" dirty="0">
-                <a:solidFill>
-                  <a:srgbClr val="D8E0EF"/>
-                </a:solidFill>
-                <a:latin typeface="Calibri" pitchFamily="34" charset="0"/>
-                <a:ea typeface="Calibri" pitchFamily="34" charset="-122"/>
-                <a:cs typeface="Calibri" pitchFamily="34" charset="-120"/>
-              </a:rPr>
-              <a:t>[1] Rumelhart, Hinton &amp; Williams (1986). Learning representations by back-propagating errors. Nature, 323(6088):533–536.</a:t>
-            </a:r>
-            <a:endParaRPr lang="en-US" sz="1100" dirty="0"/>
-          </a:p>
-          <a:p>
-            <a:pPr indent="0" marL="0">
-              <a:spcAft>
-                <a:spcPts val="650"/>
-              </a:spcAft>
-              <a:buNone/>
-            </a:pPr>
-            <a:r>
-              <a:rPr lang="en-US" sz="1100" dirty="0">
-                <a:solidFill>
-                  <a:srgbClr val="D8E0EF"/>
-                </a:solidFill>
-                <a:latin typeface="Calibri" pitchFamily="34" charset="0"/>
-                <a:ea typeface="Calibri" pitchFamily="34" charset="-122"/>
-                <a:cs typeface="Calibri" pitchFamily="34" charset="-120"/>
-              </a:rPr>
-              <a:t>[2] LeCun, Bottou, Orr &amp; Müller (1998/2012). Efficient BackProp. Neural Networks: Tricks of the Trade.</a:t>
-            </a:r>
-            <a:endParaRPr lang="en-US" sz="1100" dirty="0"/>
-          </a:p>
-          <a:p>
-            <a:pPr indent="0" marL="0">
-              <a:spcAft>
-                <a:spcPts val="650"/>
-              </a:spcAft>
-              <a:buNone/>
-            </a:pPr>
-            <a:r>
-              <a:rPr lang="en-US" sz="1100" dirty="0">
-                <a:solidFill>
-                  <a:srgbClr val="D8E0EF"/>
-                </a:solidFill>
-                <a:latin typeface="Calibri" pitchFamily="34" charset="0"/>
-                <a:ea typeface="Calibri" pitchFamily="34" charset="-122"/>
-                <a:cs typeface="Calibri" pitchFamily="34" charset="-120"/>
-              </a:rPr>
-              <a:t>[3] Glorot &amp; Bengio (2010). Understanding the difficulty of training deep feedforward neural networks. AISTATS.</a:t>
-            </a:r>
-            <a:endParaRPr lang="en-US" sz="1100" dirty="0"/>
-          </a:p>
-          <a:p>
-            <a:pPr indent="0" marL="0">
-              <a:spcAft>
-                <a:spcPts val="650"/>
-              </a:spcAft>
-              <a:buNone/>
-            </a:pPr>
-            <a:r>
-              <a:rPr lang="en-US" sz="1100" dirty="0">
-                <a:solidFill>
-                  <a:srgbClr val="D8E0EF"/>
-                </a:solidFill>
-                <a:latin typeface="Calibri" pitchFamily="34" charset="0"/>
-                <a:ea typeface="Calibri" pitchFamily="34" charset="-122"/>
-                <a:cs typeface="Calibri" pitchFamily="34" charset="-120"/>
-              </a:rPr>
-              <a:t>[4] He, Zhang, Ren &amp; Sun (2015). Delving Deep into Rectifiers. ICCV. arXiv:1502.01852.</a:t>
-            </a:r>
-            <a:endParaRPr lang="en-US" sz="1100" dirty="0"/>
-          </a:p>
-          <a:p>
-            <a:pPr indent="0" marL="0">
-              <a:spcAft>
-                <a:spcPts val="650"/>
-              </a:spcAft>
-              <a:buNone/>
-            </a:pPr>
-            <a:r>
-              <a:rPr lang="en-US" sz="1100" dirty="0">
-                <a:solidFill>
-                  <a:srgbClr val="D8E0EF"/>
-                </a:solidFill>
-                <a:latin typeface="Calibri" pitchFamily="34" charset="0"/>
-                <a:ea typeface="Calibri" pitchFamily="34" charset="-122"/>
-                <a:cs typeface="Calibri" pitchFamily="34" charset="-120"/>
-              </a:rPr>
-              <a:t>[5] Bishop (2006). Pattern Recognition and Machine Learning. Springer.</a:t>
-            </a:r>
-            <a:endParaRPr lang="en-US" sz="1100" dirty="0"/>
-          </a:p>
-          <a:p>
-            <a:pPr indent="0" marL="0">
-              <a:spcAft>
-                <a:spcPts val="650"/>
-              </a:spcAft>
-              <a:buNone/>
-            </a:pPr>
-            <a:r>
-              <a:rPr lang="en-US" sz="1100" dirty="0">
-                <a:solidFill>
-                  <a:srgbClr val="D8E0EF"/>
-                </a:solidFill>
-                <a:latin typeface="Calibri" pitchFamily="34" charset="0"/>
-                <a:ea typeface="Calibri" pitchFamily="34" charset="-122"/>
-                <a:cs typeface="Calibri" pitchFamily="34" charset="-120"/>
-              </a:rPr>
-              <a:t>[6] Goodfellow, Bengio &amp; Courville (2016). Deep Learning. MIT Press.</a:t>
-            </a:r>
-            <a:endParaRPr lang="en-US" sz="1100" dirty="0"/>
-          </a:p>
-          <a:p>
-            <a:pPr indent="0" marL="0">
-              <a:spcAft>
-                <a:spcPts val="650"/>
-              </a:spcAft>
-              <a:buNone/>
-            </a:pPr>
-            <a:r>
-              <a:rPr lang="en-US" sz="1100" dirty="0">
-                <a:solidFill>
-                  <a:srgbClr val="D8E0EF"/>
-                </a:solidFill>
-                <a:latin typeface="Calibri" pitchFamily="34" charset="0"/>
-                <a:ea typeface="Calibri" pitchFamily="34" charset="-122"/>
-                <a:cs typeface="Calibri" pitchFamily="34" charset="-120"/>
-              </a:rPr>
-              <a:t>[7] Kingma &amp; Ba (2015). Adam: A Method for Stochastic Optimization. ICLR. arXiv:1412.6980.</a:t>
-            </a:r>
-            <a:endParaRPr lang="en-US" sz="1100" dirty="0"/>
-          </a:p>
-          <a:p>
-            <a:pPr indent="0" marL="0">
-              <a:spcAft>
-                <a:spcPts val="650"/>
-              </a:spcAft>
-              <a:buNone/>
-            </a:pPr>
-            <a:r>
-              <a:rPr lang="en-US" sz="1100" dirty="0">
-                <a:solidFill>
-                  <a:srgbClr val="D8E0EF"/>
-                </a:solidFill>
-                <a:latin typeface="Calibri" pitchFamily="34" charset="0"/>
-                <a:ea typeface="Calibri" pitchFamily="34" charset="-122"/>
-                <a:cs typeface="Calibri" pitchFamily="34" charset="-120"/>
-              </a:rPr>
-              <a:t>[8] Clevert, Unterthiner &amp; Hochreiter (2016). Fast and Accurate Deep Network Learning by ELUs. ICLR. arXiv:1511.07289.</a:t>
-            </a:r>
-            <a:endParaRPr lang="en-US" sz="1100" dirty="0"/>
-          </a:p>
-          <a:p>
-            <a:pPr indent="0" marL="0">
-              <a:spcAft>
-                <a:spcPts val="650"/>
-              </a:spcAft>
-              <a:buNone/>
-            </a:pPr>
-            <a:r>
-              <a:rPr lang="en-US" sz="1100" dirty="0">
-                <a:solidFill>
-                  <a:srgbClr val="D8E0EF"/>
-                </a:solidFill>
-                <a:latin typeface="Calibri" pitchFamily="34" charset="0"/>
-                <a:ea typeface="Calibri" pitchFamily="34" charset="-122"/>
-                <a:cs typeface="Calibri" pitchFamily="34" charset="-120"/>
-              </a:rPr>
-              <a:t>[9] Klambauer, Unterthiner, Mayr &amp; Hochreiter (2017). Self-Normalizing Neural Networks. NeurIPS. arXiv:1706.02515.</a:t>
-            </a:r>
-            <a:endParaRPr lang="en-US" sz="1100" dirty="0"/>
-          </a:p>
-          <a:p>
-            <a:pPr indent="0" marL="0">
-              <a:spcAft>
-                <a:spcPts val="650"/>
-              </a:spcAft>
-              <a:buNone/>
-            </a:pPr>
-            <a:r>
-              <a:rPr lang="en-US" sz="1100" dirty="0">
-                <a:solidFill>
-                  <a:srgbClr val="D8E0EF"/>
-                </a:solidFill>
-                <a:latin typeface="Calibri" pitchFamily="34" charset="0"/>
-                <a:ea typeface="Calibri" pitchFamily="34" charset="-122"/>
-                <a:cs typeface="Calibri" pitchFamily="34" charset="-120"/>
-              </a:rPr>
-              <a:t>[10] Xiao, Rasul &amp; Vollgraf (2017). Fashion-MNIST. arXiv:1708.07747.</a:t>
-            </a:r>
-            <a:endParaRPr lang="en-US" sz="1100" dirty="0"/>
-          </a:p>
-          <a:p>
-            <a:pPr indent="0" marL="0">
-              <a:spcAft>
-                <a:spcPts val="650"/>
-              </a:spcAft>
-              <a:buNone/>
-            </a:pPr>
-            <a:r>
-              <a:rPr lang="en-US" sz="1100" dirty="0">
-                <a:solidFill>
-                  <a:srgbClr val="D8E0EF"/>
-                </a:solidFill>
-                <a:latin typeface="Calibri" pitchFamily="34" charset="0"/>
-                <a:ea typeface="Calibri" pitchFamily="34" charset="-122"/>
-                <a:cs typeface="Calibri" pitchFamily="34" charset="-120"/>
-              </a:rPr>
-              <a:t>[11] Paszke et al. (2019). PyTorch: An Imperative Style, High-Performance Deep Learning Library. NeurIPS.</a:t>
-            </a:r>
-            <a:endParaRPr lang="en-US" sz="1100" dirty="0"/>
-          </a:p>
-        </p:txBody>
-      </p:sp>
-      <p:sp>
-        <p:nvSpPr>
-          <p:cNvPr id="5" name="Shape 3"/>
-          <p:cNvSpPr/>
-          <p:nvPr/>
-        </p:nvSpPr>
-        <p:spPr>
-          <a:xfrm>
-            <a:off x="610362" y="6473952"/>
-            <a:ext cx="59436" cy="59436"/>
-          </a:xfrm>
-          <a:prstGeom prst="ellipse">
-            <a:avLst/>
-          </a:prstGeom>
-          <a:solidFill>
-            <a:srgbClr val="3A4A70"/>
-          </a:solidFill>
-          <a:ln/>
-        </p:spPr>
-      </p:sp>
-      <p:sp>
-        <p:nvSpPr>
-          <p:cNvPr id="6" name="Shape 4"/>
-          <p:cNvSpPr/>
-          <p:nvPr/>
-        </p:nvSpPr>
-        <p:spPr>
-          <a:xfrm>
-            <a:off x="829818" y="6473952"/>
-            <a:ext cx="59436" cy="59436"/>
-          </a:xfrm>
-          <a:prstGeom prst="ellipse">
-            <a:avLst/>
-          </a:prstGeom>
-          <a:solidFill>
-            <a:srgbClr val="3A4A70"/>
-          </a:solidFill>
-          <a:ln/>
-        </p:spPr>
-      </p:sp>
-      <p:sp>
-        <p:nvSpPr>
-          <p:cNvPr id="7" name="Shape 5"/>
-          <p:cNvSpPr/>
-          <p:nvPr/>
-        </p:nvSpPr>
-        <p:spPr>
-          <a:xfrm>
-            <a:off x="1049274" y="6473952"/>
-            <a:ext cx="59436" cy="59436"/>
-          </a:xfrm>
-          <a:prstGeom prst="ellipse">
-            <a:avLst/>
-          </a:prstGeom>
-          <a:solidFill>
-            <a:srgbClr val="3A4A70"/>
-          </a:solidFill>
-          <a:ln/>
-        </p:spPr>
-      </p:sp>
-      <p:sp>
-        <p:nvSpPr>
-          <p:cNvPr id="8" name="Shape 6"/>
-          <p:cNvSpPr/>
-          <p:nvPr/>
-        </p:nvSpPr>
-        <p:spPr>
-          <a:xfrm>
-            <a:off x="1253871" y="6459093"/>
-            <a:ext cx="89154" cy="89154"/>
-          </a:xfrm>
-          <a:prstGeom prst="ellipse">
-            <a:avLst/>
-          </a:prstGeom>
-          <a:solidFill>
-            <a:srgbClr val="6FA3E0"/>
-          </a:solidFill>
-          <a:ln/>
-        </p:spPr>
-      </p:sp>
-      <p:sp>
-        <p:nvSpPr>
-          <p:cNvPr id="9" name="Text 7"/>
-          <p:cNvSpPr txBox="1"/>
-          <p:nvPr/>
-        </p:nvSpPr>
-        <p:spPr>
-          <a:xfrm>
-            <a:off x="1563624" y="6391656"/>
-            <a:ext cx="3291840" cy="274320"/>
-          </a:xfrm>
-          <a:prstGeom prst="rect">
-            <a:avLst/>
-          </a:prstGeom>
-          <a:noFill/>
-          <a:ln/>
-        </p:spPr>
-        <p:txBody>
-          <a:bodyPr wrap="square" lIns="0" tIns="0" rIns="0" bIns="0" rtlCol="0" anchor="ctr"/>
-          <a:lstStyle/>
-          <a:p>
-            <a:pPr indent="0" marL="0">
-              <a:buNone/>
-            </a:pPr>
-            <a:r>
-              <a:rPr lang="en-US" sz="850" spc="50" kern="0" dirty="0">
-                <a:solidFill>
-                  <a:srgbClr val="6FA3E0"/>
                 </a:solidFill>
                 <a:latin typeface="Calibri" pitchFamily="34" charset="0"/>
                 <a:ea typeface="Calibri" pitchFamily="34" charset="-122"/>
@@ -22070,7 +22058,7 @@
                 <a:ea typeface="Calibri" pitchFamily="34" charset="-122"/>
                 <a:cs typeface="Calibri" pitchFamily="34" charset="-120"/>
               </a:rPr>
-              <a:t>3/29</a:t>
+              <a:t>3/30</a:t>
             </a:r>
             <a:endParaRPr lang="en-US" sz="900" dirty="0"/>
           </a:p>
@@ -22190,6 +22178,477 @@
                 <a:cs typeface="Calibri" pitchFamily="34" charset="-120"/>
               </a:rPr>
               <a:t>MOTIVATION &amp; MATH</a:t>
+            </a:r>
+            <a:endParaRPr lang="en-US" sz="850" dirty="0"/>
+          </a:p>
+        </p:txBody>
+      </p:sp>
+    </p:spTree>
+  </p:cSld>
+  <p:clrMapOvr>
+    <a:masterClrMapping/>
+  </p:clrMapOvr>
+</p:sld>
+</file>
+
+<file path=ppt/slides/slide30.xml><?xml version="1.0" encoding="utf-8"?>
+<p:sld xmlns:a="http://schemas.openxmlformats.org/drawingml/2006/main" xmlns:r="http://schemas.openxmlformats.org/officeDocument/2006/relationships" xmlns:p="http://schemas.openxmlformats.org/presentationml/2006/main">
+  <p:cSld name="Slide 30">
+    <p:bg>
+      <p:bgPr>
+        <a:solidFill>
+          <a:srgbClr val="16213E"/>
+        </a:solidFill>
+      </p:bgPr>
+    </p:bg>
+    <p:spTree>
+      <p:nvGrpSpPr>
+        <p:cNvPr id="1" name=""/>
+        <p:cNvGrpSpPr/>
+        <p:nvPr/>
+      </p:nvGrpSpPr>
+      <p:grpSpPr>
+        <a:xfrm>
+          <a:off x="0" y="0"/>
+          <a:ext cx="0" cy="0"/>
+          <a:chOff x="0" y="0"/>
+          <a:chExt cx="0" cy="0"/>
+        </a:xfrm>
+      </p:grpSpPr>
+      <p:sp>
+        <p:nvSpPr>
+          <p:cNvPr id="2" name="Text 0"/>
+          <p:cNvSpPr txBox="1"/>
+          <p:nvPr/>
+        </p:nvSpPr>
+        <p:spPr>
+          <a:xfrm>
+            <a:off x="640080" y="502920"/>
+            <a:ext cx="9144000" cy="320040"/>
+          </a:xfrm>
+          <a:prstGeom prst="rect">
+            <a:avLst/>
+          </a:prstGeom>
+          <a:noFill/>
+          <a:ln/>
+        </p:spPr>
+        <p:txBody>
+          <a:bodyPr wrap="square" lIns="0" tIns="0" rIns="0" bIns="0" rtlCol="0" anchor="ctr"/>
+          <a:lstStyle/>
+          <a:p>
+            <a:pPr indent="0" marL="0">
+              <a:buNone/>
+            </a:pPr>
+            <a:r>
+              <a:rPr lang="en-US" sz="1300" b="1" spc="100" kern="0" dirty="0">
+                <a:solidFill>
+                  <a:srgbClr val="8FA3C9"/>
+                </a:solidFill>
+                <a:latin typeface="Calibri" pitchFamily="34" charset="0"/>
+                <a:ea typeface="Calibri" pitchFamily="34" charset="-122"/>
+                <a:cs typeface="Calibri" pitchFamily="34" charset="-120"/>
+              </a:rPr>
+              <a:t>TÀI LIỆU THAM KHẢO</a:t>
+            </a:r>
+            <a:endParaRPr lang="en-US" sz="1300" dirty="0"/>
+          </a:p>
+        </p:txBody>
+      </p:sp>
+      <p:sp>
+        <p:nvSpPr>
+          <p:cNvPr id="3" name="Text 1"/>
+          <p:cNvSpPr txBox="1"/>
+          <p:nvPr/>
+        </p:nvSpPr>
+        <p:spPr>
+          <a:xfrm>
+            <a:off x="640080" y="914400"/>
+            <a:ext cx="10911535" cy="822960"/>
+          </a:xfrm>
+          <a:prstGeom prst="rect">
+            <a:avLst/>
+          </a:prstGeom>
+          <a:noFill/>
+          <a:ln/>
+        </p:spPr>
+        <p:txBody>
+          <a:bodyPr wrap="square" lIns="0" tIns="0" rIns="0" bIns="0" rtlCol="0" anchor="t"/>
+          <a:lstStyle/>
+          <a:p>
+            <a:pPr indent="0" marL="0">
+              <a:buNone/>
+            </a:pPr>
+            <a:r>
+              <a:rPr lang="en-US" sz="2900" b="1" dirty="0">
+                <a:solidFill>
+                  <a:srgbClr val="FFFFFF"/>
+                </a:solidFill>
+                <a:latin typeface="Cambria" pitchFamily="34" charset="0"/>
+                <a:ea typeface="Cambria" pitchFamily="34" charset="-122"/>
+                <a:cs typeface="Cambria" pitchFamily="34" charset="-120"/>
+              </a:rPr>
+              <a:t>References</a:t>
+            </a:r>
+            <a:endParaRPr lang="en-US" sz="2900" dirty="0"/>
+          </a:p>
+        </p:txBody>
+      </p:sp>
+      <p:sp>
+        <p:nvSpPr>
+          <p:cNvPr id="4" name="Text 2"/>
+          <p:cNvSpPr txBox="1"/>
+          <p:nvPr/>
+        </p:nvSpPr>
+        <p:spPr>
+          <a:xfrm>
+            <a:off x="640080" y="1691640"/>
+            <a:ext cx="10911535" cy="4709160"/>
+          </a:xfrm>
+          <a:prstGeom prst="rect">
+            <a:avLst/>
+          </a:prstGeom>
+          <a:noFill/>
+          <a:ln/>
+        </p:spPr>
+        <p:txBody>
+          <a:bodyPr wrap="square" lIns="0" tIns="0" rIns="0" bIns="0" rtlCol="0" anchor="t"/>
+          <a:lstStyle/>
+          <a:p>
+            <a:pPr indent="0" marL="0">
+              <a:spcAft>
+                <a:spcPts val="650"/>
+              </a:spcAft>
+              <a:buNone/>
+            </a:pPr>
+            <a:r>
+              <a:rPr lang="en-US" sz="1100" dirty="0">
+                <a:solidFill>
+                  <a:srgbClr val="D8E0EF"/>
+                </a:solidFill>
+                <a:latin typeface="Calibri" pitchFamily="34" charset="0"/>
+                <a:ea typeface="Calibri" pitchFamily="34" charset="-122"/>
+                <a:cs typeface="Calibri" pitchFamily="34" charset="-120"/>
+              </a:rPr>
+              <a:t>[1] Rumelhart, Hinton &amp; Williams (1986). Learning representations by back-propagating errors. Nature, 323(6088):533–536.</a:t>
+            </a:r>
+            <a:endParaRPr lang="en-US" sz="1100" dirty="0"/>
+          </a:p>
+          <a:p>
+            <a:pPr indent="0" marL="0">
+              <a:spcAft>
+                <a:spcPts val="650"/>
+              </a:spcAft>
+              <a:buNone/>
+            </a:pPr>
+            <a:r>
+              <a:rPr lang="en-US" sz="1100" dirty="0">
+                <a:solidFill>
+                  <a:srgbClr val="D8E0EF"/>
+                </a:solidFill>
+                <a:latin typeface="Calibri" pitchFamily="34" charset="0"/>
+                <a:ea typeface="Calibri" pitchFamily="34" charset="-122"/>
+                <a:cs typeface="Calibri" pitchFamily="34" charset="-120"/>
+              </a:rPr>
+              <a:t>[2] LeCun, Bottou, Orr &amp; Müller (1998/2012). Efficient BackProp. Neural Networks: Tricks of the Trade.</a:t>
+            </a:r>
+            <a:endParaRPr lang="en-US" sz="1100" dirty="0"/>
+          </a:p>
+          <a:p>
+            <a:pPr indent="0" marL="0">
+              <a:spcAft>
+                <a:spcPts val="650"/>
+              </a:spcAft>
+              <a:buNone/>
+            </a:pPr>
+            <a:r>
+              <a:rPr lang="en-US" sz="1100" dirty="0">
+                <a:solidFill>
+                  <a:srgbClr val="D8E0EF"/>
+                </a:solidFill>
+                <a:latin typeface="Calibri" pitchFamily="34" charset="0"/>
+                <a:ea typeface="Calibri" pitchFamily="34" charset="-122"/>
+                <a:cs typeface="Calibri" pitchFamily="34" charset="-120"/>
+              </a:rPr>
+              <a:t>[3] Glorot &amp; Bengio (2010). Understanding the difficulty of training deep feedforward neural networks. AISTATS.</a:t>
+            </a:r>
+            <a:endParaRPr lang="en-US" sz="1100" dirty="0"/>
+          </a:p>
+          <a:p>
+            <a:pPr indent="0" marL="0">
+              <a:spcAft>
+                <a:spcPts val="650"/>
+              </a:spcAft>
+              <a:buNone/>
+            </a:pPr>
+            <a:r>
+              <a:rPr lang="en-US" sz="1100" dirty="0">
+                <a:solidFill>
+                  <a:srgbClr val="D8E0EF"/>
+                </a:solidFill>
+                <a:latin typeface="Calibri" pitchFamily="34" charset="0"/>
+                <a:ea typeface="Calibri" pitchFamily="34" charset="-122"/>
+                <a:cs typeface="Calibri" pitchFamily="34" charset="-120"/>
+              </a:rPr>
+              <a:t>[4] He, Zhang, Ren &amp; Sun (2015). Delving Deep into Rectifiers. ICCV. arXiv:1502.01852.</a:t>
+            </a:r>
+            <a:endParaRPr lang="en-US" sz="1100" dirty="0"/>
+          </a:p>
+          <a:p>
+            <a:pPr indent="0" marL="0">
+              <a:spcAft>
+                <a:spcPts val="650"/>
+              </a:spcAft>
+              <a:buNone/>
+            </a:pPr>
+            <a:r>
+              <a:rPr lang="en-US" sz="1100" dirty="0">
+                <a:solidFill>
+                  <a:srgbClr val="D8E0EF"/>
+                </a:solidFill>
+                <a:latin typeface="Calibri" pitchFamily="34" charset="0"/>
+                <a:ea typeface="Calibri" pitchFamily="34" charset="-122"/>
+                <a:cs typeface="Calibri" pitchFamily="34" charset="-120"/>
+              </a:rPr>
+              <a:t>[5] Bishop (2006). Pattern Recognition and Machine Learning. Springer.</a:t>
+            </a:r>
+            <a:endParaRPr lang="en-US" sz="1100" dirty="0"/>
+          </a:p>
+          <a:p>
+            <a:pPr indent="0" marL="0">
+              <a:spcAft>
+                <a:spcPts val="650"/>
+              </a:spcAft>
+              <a:buNone/>
+            </a:pPr>
+            <a:r>
+              <a:rPr lang="en-US" sz="1100" dirty="0">
+                <a:solidFill>
+                  <a:srgbClr val="D8E0EF"/>
+                </a:solidFill>
+                <a:latin typeface="Calibri" pitchFamily="34" charset="0"/>
+                <a:ea typeface="Calibri" pitchFamily="34" charset="-122"/>
+                <a:cs typeface="Calibri" pitchFamily="34" charset="-120"/>
+              </a:rPr>
+              <a:t>[6] Goodfellow, Bengio &amp; Courville (2016). Deep Learning. MIT Press.</a:t>
+            </a:r>
+            <a:endParaRPr lang="en-US" sz="1100" dirty="0"/>
+          </a:p>
+          <a:p>
+            <a:pPr indent="0" marL="0">
+              <a:spcAft>
+                <a:spcPts val="650"/>
+              </a:spcAft>
+              <a:buNone/>
+            </a:pPr>
+            <a:r>
+              <a:rPr lang="en-US" sz="1100" dirty="0">
+                <a:solidFill>
+                  <a:srgbClr val="D8E0EF"/>
+                </a:solidFill>
+                <a:latin typeface="Calibri" pitchFamily="34" charset="0"/>
+                <a:ea typeface="Calibri" pitchFamily="34" charset="-122"/>
+                <a:cs typeface="Calibri" pitchFamily="34" charset="-120"/>
+              </a:rPr>
+              <a:t>[7] Kingma &amp; Ba (2015). Adam: A Method for Stochastic Optimization. ICLR. arXiv:1412.6980.</a:t>
+            </a:r>
+            <a:endParaRPr lang="en-US" sz="1100" dirty="0"/>
+          </a:p>
+          <a:p>
+            <a:pPr indent="0" marL="0">
+              <a:spcAft>
+                <a:spcPts val="650"/>
+              </a:spcAft>
+              <a:buNone/>
+            </a:pPr>
+            <a:r>
+              <a:rPr lang="en-US" sz="1100" dirty="0">
+                <a:solidFill>
+                  <a:srgbClr val="D8E0EF"/>
+                </a:solidFill>
+                <a:latin typeface="Calibri" pitchFamily="34" charset="0"/>
+                <a:ea typeface="Calibri" pitchFamily="34" charset="-122"/>
+                <a:cs typeface="Calibri" pitchFamily="34" charset="-120"/>
+              </a:rPr>
+              <a:t>[8] Clevert, Unterthiner &amp; Hochreiter (2016). Fast and Accurate Deep Network Learning by ELUs. ICLR. arXiv:1511.07289.</a:t>
+            </a:r>
+            <a:endParaRPr lang="en-US" sz="1100" dirty="0"/>
+          </a:p>
+          <a:p>
+            <a:pPr indent="0" marL="0">
+              <a:spcAft>
+                <a:spcPts val="650"/>
+              </a:spcAft>
+              <a:buNone/>
+            </a:pPr>
+            <a:r>
+              <a:rPr lang="en-US" sz="1100" dirty="0">
+                <a:solidFill>
+                  <a:srgbClr val="D8E0EF"/>
+                </a:solidFill>
+                <a:latin typeface="Calibri" pitchFamily="34" charset="0"/>
+                <a:ea typeface="Calibri" pitchFamily="34" charset="-122"/>
+                <a:cs typeface="Calibri" pitchFamily="34" charset="-120"/>
+              </a:rPr>
+              <a:t>[9] Klambauer, Unterthiner, Mayr &amp; Hochreiter (2017). Self-Normalizing Neural Networks. NeurIPS. arXiv:1706.02515.</a:t>
+            </a:r>
+            <a:endParaRPr lang="en-US" sz="1100" dirty="0"/>
+          </a:p>
+          <a:p>
+            <a:pPr indent="0" marL="0">
+              <a:spcAft>
+                <a:spcPts val="650"/>
+              </a:spcAft>
+              <a:buNone/>
+            </a:pPr>
+            <a:r>
+              <a:rPr lang="en-US" sz="1100" dirty="0">
+                <a:solidFill>
+                  <a:srgbClr val="D8E0EF"/>
+                </a:solidFill>
+                <a:latin typeface="Calibri" pitchFamily="34" charset="0"/>
+                <a:ea typeface="Calibri" pitchFamily="34" charset="-122"/>
+                <a:cs typeface="Calibri" pitchFamily="34" charset="-120"/>
+              </a:rPr>
+              <a:t>[10] Xiao, Rasul &amp; Vollgraf (2017). Fashion-MNIST. arXiv:1708.07747.</a:t>
+            </a:r>
+            <a:endParaRPr lang="en-US" sz="1100" dirty="0"/>
+          </a:p>
+          <a:p>
+            <a:pPr indent="0" marL="0">
+              <a:spcAft>
+                <a:spcPts val="650"/>
+              </a:spcAft>
+              <a:buNone/>
+            </a:pPr>
+            <a:r>
+              <a:rPr lang="en-US" sz="1100" dirty="0">
+                <a:solidFill>
+                  <a:srgbClr val="D8E0EF"/>
+                </a:solidFill>
+                <a:latin typeface="Calibri" pitchFamily="34" charset="0"/>
+                <a:ea typeface="Calibri" pitchFamily="34" charset="-122"/>
+                <a:cs typeface="Calibri" pitchFamily="34" charset="-120"/>
+              </a:rPr>
+              <a:t>[11] Paszke et al. (2019). PyTorch: An Imperative Style, High-Performance Deep Learning Library. NeurIPS.</a:t>
+            </a:r>
+            <a:endParaRPr lang="en-US" sz="1100" dirty="0"/>
+          </a:p>
+        </p:txBody>
+      </p:sp>
+      <p:sp>
+        <p:nvSpPr>
+          <p:cNvPr id="5" name="Shape 3"/>
+          <p:cNvSpPr/>
+          <p:nvPr/>
+        </p:nvSpPr>
+        <p:spPr>
+          <a:xfrm>
+            <a:off x="610362" y="6473952"/>
+            <a:ext cx="59436" cy="59436"/>
+          </a:xfrm>
+          <a:prstGeom prst="ellipse">
+            <a:avLst/>
+          </a:prstGeom>
+          <a:solidFill>
+            <a:srgbClr val="3A4A70"/>
+          </a:solidFill>
+          <a:ln/>
+        </p:spPr>
+      </p:sp>
+      <p:sp>
+        <p:nvSpPr>
+          <p:cNvPr id="6" name="Shape 4"/>
+          <p:cNvSpPr/>
+          <p:nvPr/>
+        </p:nvSpPr>
+        <p:spPr>
+          <a:xfrm>
+            <a:off x="829818" y="6473952"/>
+            <a:ext cx="59436" cy="59436"/>
+          </a:xfrm>
+          <a:prstGeom prst="ellipse">
+            <a:avLst/>
+          </a:prstGeom>
+          <a:solidFill>
+            <a:srgbClr val="3A4A70"/>
+          </a:solidFill>
+          <a:ln/>
+        </p:spPr>
+      </p:sp>
+      <p:sp>
+        <p:nvSpPr>
+          <p:cNvPr id="7" name="Shape 5"/>
+          <p:cNvSpPr/>
+          <p:nvPr/>
+        </p:nvSpPr>
+        <p:spPr>
+          <a:xfrm>
+            <a:off x="1049274" y="6473952"/>
+            <a:ext cx="59436" cy="59436"/>
+          </a:xfrm>
+          <a:prstGeom prst="ellipse">
+            <a:avLst/>
+          </a:prstGeom>
+          <a:solidFill>
+            <a:srgbClr val="3A4A70"/>
+          </a:solidFill>
+          <a:ln/>
+        </p:spPr>
+      </p:sp>
+      <p:sp>
+        <p:nvSpPr>
+          <p:cNvPr id="8" name="Shape 6"/>
+          <p:cNvSpPr/>
+          <p:nvPr/>
+        </p:nvSpPr>
+        <p:spPr>
+          <a:xfrm>
+            <a:off x="1253871" y="6459093"/>
+            <a:ext cx="89154" cy="89154"/>
+          </a:xfrm>
+          <a:prstGeom prst="ellipse">
+            <a:avLst/>
+          </a:prstGeom>
+          <a:solidFill>
+            <a:srgbClr val="6FA3E0"/>
+          </a:solidFill>
+          <a:ln/>
+        </p:spPr>
+      </p:sp>
+      <p:sp>
+        <p:nvSpPr>
+          <p:cNvPr id="9" name="Text 7"/>
+          <p:cNvSpPr txBox="1"/>
+          <p:nvPr/>
+        </p:nvSpPr>
+        <p:spPr>
+          <a:xfrm>
+            <a:off x="1563624" y="6391656"/>
+            <a:ext cx="3291840" cy="274320"/>
+          </a:xfrm>
+          <a:prstGeom prst="rect">
+            <a:avLst/>
+          </a:prstGeom>
+          <a:noFill/>
+          <a:ln/>
+        </p:spPr>
+        <p:txBody>
+          <a:bodyPr wrap="square" lIns="0" tIns="0" rIns="0" bIns="0" rtlCol="0" anchor="ctr"/>
+          <a:lstStyle/>
+          <a:p>
+            <a:pPr indent="0" marL="0">
+              <a:buNone/>
+            </a:pPr>
+            <a:r>
+              <a:rPr lang="en-US" sz="850" spc="50" kern="0" dirty="0">
+                <a:solidFill>
+                  <a:srgbClr val="6FA3E0"/>
+                </a:solidFill>
+                <a:latin typeface="Calibri" pitchFamily="34" charset="0"/>
+                <a:ea typeface="Calibri" pitchFamily="34" charset="-122"/>
+                <a:cs typeface="Calibri" pitchFamily="34" charset="-120"/>
+              </a:rPr>
+              <a:t>CONCLUSION</a:t>
             </a:r>
             <a:endParaRPr lang="en-US" sz="850" dirty="0"/>
           </a:p>
@@ -22510,7 +22969,7 @@
                 <a:ea typeface="Calibri" pitchFamily="34" charset="-122"/>
                 <a:cs typeface="Calibri" pitchFamily="34" charset="-120"/>
               </a:rPr>
-              <a:t>4/29</a:t>
+              <a:t>4/30</a:t>
             </a:r>
             <a:endParaRPr lang="en-US" sz="900" dirty="0"/>
           </a:p>
@@ -22950,7 +23409,7 @@
                 <a:ea typeface="Calibri" pitchFamily="34" charset="-122"/>
                 <a:cs typeface="Calibri" pitchFamily="34" charset="-120"/>
               </a:rPr>
-              <a:t>5/29</a:t>
+              <a:t>5/30</a:t>
             </a:r>
             <a:endParaRPr lang="en-US" sz="900" dirty="0"/>
           </a:p>
@@ -23774,7 +24233,7 @@
                 <a:ea typeface="Calibri" pitchFamily="34" charset="-122"/>
                 <a:cs typeface="Calibri" pitchFamily="34" charset="-120"/>
               </a:rPr>
-              <a:t>6/29</a:t>
+              <a:t>6/30</a:t>
             </a:r>
             <a:endParaRPr lang="en-US" sz="900" dirty="0"/>
           </a:p>
@@ -24586,7 +25045,7 @@
                 <a:ea typeface="Calibri" pitchFamily="34" charset="-122"/>
                 <a:cs typeface="Calibri" pitchFamily="34" charset="-120"/>
               </a:rPr>
-              <a:t>7/29</a:t>
+              <a:t>7/30</a:t>
             </a:r>
             <a:endParaRPr lang="en-US" sz="900" dirty="0"/>
           </a:p>
@@ -25343,7 +25802,7 @@
                 <a:ea typeface="Calibri" pitchFamily="34" charset="-122"/>
                 <a:cs typeface="Calibri" pitchFamily="34" charset="-120"/>
               </a:rPr>
-              <a:t>8/29</a:t>
+              <a:t>8/30</a:t>
             </a:r>
             <a:endParaRPr lang="en-US" sz="900" dirty="0"/>
           </a:p>
@@ -26611,8 +27070,8 @@
         </p:nvSpPr>
         <p:spPr>
           <a:xfrm>
-            <a:off x="6035040" y="1965960"/>
-            <a:ext cx="5516575" cy="2377440"/>
+            <a:off x="6035040" y="1828800"/>
+            <a:ext cx="5516575" cy="1920240"/>
           </a:xfrm>
           <a:prstGeom prst="rect">
             <a:avLst/>
@@ -26626,13 +27085,13 @@
           <a:p>
             <a:pPr marL="228600" indent="-228600">
               <a:spcAft>
-                <a:spcPts val="1400"/>
+                <a:spcPts val="1200"/>
               </a:spcAft>
               <a:buSzPct val="100000"/>
               <a:buChar char="▪"/>
             </a:pPr>
             <a:r>
-              <a:rPr lang="en-US" sz="1550" dirty="0">
+              <a:rPr lang="en-US" sz="1450" dirty="0">
                 <a:solidFill>
                   <a:srgbClr val="1A2238"/>
                 </a:solidFill>
@@ -26640,20 +27099,20 @@
                 <a:ea typeface="Calibri" pitchFamily="34" charset="-122"/>
                 <a:cs typeface="Calibri" pitchFamily="34" charset="-120"/>
               </a:rPr>
-              <a:t>Gradient của lớp CÀNG GẦN INPUT phụ thuộc vào TÍCH của CÀNG NHIỀU đạo hàm cục bộ</a:t>
-            </a:r>
-            <a:endParaRPr lang="en-US" sz="1550" dirty="0"/>
+              <a:t>Gradient lan truyền về lớp gần input phụ thuộc vào TÍCH của nhiều local Jacobian VÀ weight transformation — không chỉ là tích các đạo hàm vô hướng đơn giản</a:t>
+            </a:r>
+            <a:endParaRPr lang="en-US" sz="1450" dirty="0"/>
           </a:p>
           <a:p>
             <a:pPr marL="228600" indent="-228600">
               <a:spcAft>
-                <a:spcPts val="1400"/>
+                <a:spcPts val="1200"/>
               </a:spcAft>
               <a:buSzPct val="100000"/>
               <a:buChar char="▪"/>
             </a:pPr>
             <a:r>
-              <a:rPr lang="en-US" sz="1550" dirty="0">
+              <a:rPr lang="en-US" sz="1450" dirty="0">
                 <a:solidFill>
                   <a:srgbClr val="1A2238"/>
                 </a:solidFill>
@@ -26663,20 +27122,47 @@
               </a:rPr>
               <a:t>Đây chính là cầu nối trực tiếp sang vấn đề tiếp theo: điều gì xảy ra khi tích đó có nhiều số hạng?</a:t>
             </a:r>
-            <a:endParaRPr lang="en-US" sz="1550" dirty="0"/>
-          </a:p>
-        </p:txBody>
-      </p:sp>
-      <p:sp>
-        <p:nvSpPr>
-          <p:cNvPr id="39" name="Text 37"/>
-          <p:cNvSpPr txBox="1"/>
-          <p:nvPr/>
-        </p:nvSpPr>
-        <p:spPr>
-          <a:xfrm>
-            <a:off x="11185855" y="6446520"/>
-            <a:ext cx="731520" cy="274320"/>
+            <a:endParaRPr lang="en-US" sz="1450" dirty="0"/>
+          </a:p>
+        </p:txBody>
+      </p:sp>
+      <p:sp>
+        <p:nvSpPr>
+          <p:cNvPr id="39" name="Shape 37"/>
+          <p:cNvSpPr/>
+          <p:nvPr/>
+        </p:nvSpPr>
+        <p:spPr>
+          <a:xfrm>
+            <a:off x="6035040" y="4023360"/>
+            <a:ext cx="1686458" cy="1051560"/>
+          </a:xfrm>
+          <a:prstGeom prst="roundRect">
+            <a:avLst>
+              <a:gd name="adj" fmla="val 5217"/>
+            </a:avLst>
+          </a:prstGeom>
+          <a:solidFill>
+            <a:srgbClr val="EAF0FB"/>
+          </a:solidFill>
+          <a:ln w="12700">
+            <a:solidFill>
+              <a:srgbClr val="285AB4"/>
+            </a:solidFill>
+            <a:prstDash val="solid"/>
+          </a:ln>
+        </p:spPr>
+      </p:sp>
+      <p:sp>
+        <p:nvSpPr>
+          <p:cNvPr id="40" name="Text 38"/>
+          <p:cNvSpPr txBox="1"/>
+          <p:nvPr/>
+        </p:nvSpPr>
+        <p:spPr>
+          <a:xfrm>
+            <a:off x="6144768" y="4114800"/>
+            <a:ext cx="1467002" cy="320040"/>
           </a:xfrm>
           <a:prstGeom prst="rect">
             <a:avLst/>
@@ -26688,11 +27174,50 @@
           <a:bodyPr wrap="square" lIns="0" tIns="0" rIns="0" bIns="0" rtlCol="0" anchor="ctr"/>
           <a:lstStyle/>
           <a:p>
-            <a:pPr algn="r" indent="0" marL="0">
-              <a:buNone/>
-            </a:pPr>
-            <a:r>
-              <a:rPr lang="en-US" sz="900" dirty="0">
+            <a:pPr indent="0" marL="0">
+              <a:buNone/>
+            </a:pPr>
+            <a:r>
+              <a:rPr lang="en-US" sz="1300" b="1" dirty="0">
+                <a:solidFill>
+                  <a:srgbClr val="285AB4"/>
+                </a:solidFill>
+                <a:latin typeface="Cambria" pitchFamily="34" charset="0"/>
+                <a:ea typeface="Cambria" pitchFamily="34" charset="-122"/>
+                <a:cs typeface="Cambria" pitchFamily="34" charset="-120"/>
+              </a:rPr>
+              <a:t>Forward</a:t>
+            </a:r>
+            <a:endParaRPr lang="en-US" sz="1300" dirty="0"/>
+          </a:p>
+        </p:txBody>
+      </p:sp>
+      <p:sp>
+        <p:nvSpPr>
+          <p:cNvPr id="41" name="Text 39"/>
+          <p:cNvSpPr txBox="1"/>
+          <p:nvPr/>
+        </p:nvSpPr>
+        <p:spPr>
+          <a:xfrm>
+            <a:off x="6144768" y="4462272"/>
+            <a:ext cx="1467002" cy="548640"/>
+          </a:xfrm>
+          <a:prstGeom prst="rect">
+            <a:avLst/>
+          </a:prstGeom>
+          <a:noFill/>
+          <a:ln/>
+        </p:spPr>
+        <p:txBody>
+          <a:bodyPr wrap="square" lIns="0" tIns="0" rIns="0" bIns="0" rtlCol="0" anchor="ctr"/>
+          <a:lstStyle/>
+          <a:p>
+            <a:pPr indent="0" marL="0">
+              <a:buNone/>
+            </a:pPr>
+            <a:r>
+              <a:rPr lang="en-US" sz="1000" dirty="0">
                 <a:solidFill>
                   <a:srgbClr val="5B6478"/>
                 </a:solidFill>
@@ -26700,7 +27225,343 @@
                 <a:ea typeface="Calibri" pitchFamily="34" charset="-122"/>
                 <a:cs typeface="Calibri" pitchFamily="34" charset="-120"/>
               </a:rPr>
-              <a:t>9/29</a:t>
+              <a:t>compute prediction + loss</a:t>
+            </a:r>
+            <a:endParaRPr lang="en-US" sz="1000" dirty="0"/>
+          </a:p>
+        </p:txBody>
+      </p:sp>
+      <p:sp>
+        <p:nvSpPr>
+          <p:cNvPr id="42" name="Shape 40"/>
+          <p:cNvSpPr/>
+          <p:nvPr/>
+        </p:nvSpPr>
+        <p:spPr>
+          <a:xfrm>
+            <a:off x="7721498" y="4549140"/>
+            <a:ext cx="228600" cy="0"/>
+          </a:xfrm>
+          <a:prstGeom prst="line">
+            <a:avLst/>
+          </a:prstGeom>
+          <a:noFill/>
+          <a:ln w="19050">
+            <a:solidFill>
+              <a:srgbClr val="5B6478"/>
+            </a:solidFill>
+            <a:prstDash val="solid"/>
+            <a:tailEnd type="triangle"/>
+          </a:ln>
+        </p:spPr>
+      </p:sp>
+      <p:sp>
+        <p:nvSpPr>
+          <p:cNvPr id="43" name="Shape 41"/>
+          <p:cNvSpPr/>
+          <p:nvPr/>
+        </p:nvSpPr>
+        <p:spPr>
+          <a:xfrm>
+            <a:off x="7950098" y="4023360"/>
+            <a:ext cx="1686458" cy="1051560"/>
+          </a:xfrm>
+          <a:prstGeom prst="roundRect">
+            <a:avLst>
+              <a:gd name="adj" fmla="val 5217"/>
+            </a:avLst>
+          </a:prstGeom>
+          <a:solidFill>
+            <a:srgbClr val="FBEEEC"/>
+          </a:solidFill>
+          <a:ln w="12700">
+            <a:solidFill>
+              <a:srgbClr val="BE3C32"/>
+            </a:solidFill>
+            <a:prstDash val="solid"/>
+          </a:ln>
+        </p:spPr>
+      </p:sp>
+      <p:sp>
+        <p:nvSpPr>
+          <p:cNvPr id="44" name="Text 42"/>
+          <p:cNvSpPr txBox="1"/>
+          <p:nvPr/>
+        </p:nvSpPr>
+        <p:spPr>
+          <a:xfrm>
+            <a:off x="8059826" y="4114800"/>
+            <a:ext cx="1467002" cy="320040"/>
+          </a:xfrm>
+          <a:prstGeom prst="rect">
+            <a:avLst/>
+          </a:prstGeom>
+          <a:noFill/>
+          <a:ln/>
+        </p:spPr>
+        <p:txBody>
+          <a:bodyPr wrap="square" lIns="0" tIns="0" rIns="0" bIns="0" rtlCol="0" anchor="ctr"/>
+          <a:lstStyle/>
+          <a:p>
+            <a:pPr indent="0" marL="0">
+              <a:buNone/>
+            </a:pPr>
+            <a:r>
+              <a:rPr lang="en-US" sz="1300" b="1" dirty="0">
+                <a:solidFill>
+                  <a:srgbClr val="BE3C32"/>
+                </a:solidFill>
+                <a:latin typeface="Cambria" pitchFamily="34" charset="0"/>
+                <a:ea typeface="Cambria" pitchFamily="34" charset="-122"/>
+                <a:cs typeface="Cambria" pitchFamily="34" charset="-120"/>
+              </a:rPr>
+              <a:t>Backward</a:t>
+            </a:r>
+            <a:endParaRPr lang="en-US" sz="1300" dirty="0"/>
+          </a:p>
+        </p:txBody>
+      </p:sp>
+      <p:sp>
+        <p:nvSpPr>
+          <p:cNvPr id="45" name="Text 43"/>
+          <p:cNvSpPr txBox="1"/>
+          <p:nvPr/>
+        </p:nvSpPr>
+        <p:spPr>
+          <a:xfrm>
+            <a:off x="8059826" y="4462272"/>
+            <a:ext cx="1467002" cy="548640"/>
+          </a:xfrm>
+          <a:prstGeom prst="rect">
+            <a:avLst/>
+          </a:prstGeom>
+          <a:noFill/>
+          <a:ln/>
+        </p:spPr>
+        <p:txBody>
+          <a:bodyPr wrap="square" lIns="0" tIns="0" rIns="0" bIns="0" rtlCol="0" anchor="ctr"/>
+          <a:lstStyle/>
+          <a:p>
+            <a:pPr indent="0" marL="0">
+              <a:buNone/>
+            </a:pPr>
+            <a:r>
+              <a:rPr lang="en-US" sz="1000" dirty="0">
+                <a:solidFill>
+                  <a:srgbClr val="5B6478"/>
+                </a:solidFill>
+                <a:latin typeface="Calibri" pitchFamily="34" charset="0"/>
+                <a:ea typeface="Calibri" pitchFamily="34" charset="-122"/>
+                <a:cs typeface="Calibri" pitchFamily="34" charset="-120"/>
+              </a:rPr>
+              <a:t>compute gradients (Backprop)</a:t>
+            </a:r>
+            <a:endParaRPr lang="en-US" sz="1000" dirty="0"/>
+          </a:p>
+        </p:txBody>
+      </p:sp>
+      <p:sp>
+        <p:nvSpPr>
+          <p:cNvPr id="46" name="Shape 44"/>
+          <p:cNvSpPr/>
+          <p:nvPr/>
+        </p:nvSpPr>
+        <p:spPr>
+          <a:xfrm>
+            <a:off x="9636557" y="4549140"/>
+            <a:ext cx="228600" cy="0"/>
+          </a:xfrm>
+          <a:prstGeom prst="line">
+            <a:avLst/>
+          </a:prstGeom>
+          <a:noFill/>
+          <a:ln w="19050">
+            <a:solidFill>
+              <a:srgbClr val="5B6478"/>
+            </a:solidFill>
+            <a:prstDash val="solid"/>
+            <a:tailEnd type="triangle"/>
+          </a:ln>
+        </p:spPr>
+      </p:sp>
+      <p:sp>
+        <p:nvSpPr>
+          <p:cNvPr id="47" name="Shape 45"/>
+          <p:cNvSpPr/>
+          <p:nvPr/>
+        </p:nvSpPr>
+        <p:spPr>
+          <a:xfrm>
+            <a:off x="9865157" y="4023360"/>
+            <a:ext cx="1686458" cy="1051560"/>
+          </a:xfrm>
+          <a:prstGeom prst="roundRect">
+            <a:avLst>
+              <a:gd name="adj" fmla="val 5217"/>
+            </a:avLst>
+          </a:prstGeom>
+          <a:solidFill>
+            <a:srgbClr val="FBF3E2"/>
+          </a:solidFill>
+          <a:ln w="12700">
+            <a:solidFill>
+              <a:srgbClr val="C68A2E"/>
+            </a:solidFill>
+            <a:prstDash val="solid"/>
+          </a:ln>
+        </p:spPr>
+      </p:sp>
+      <p:sp>
+        <p:nvSpPr>
+          <p:cNvPr id="48" name="Text 46"/>
+          <p:cNvSpPr txBox="1"/>
+          <p:nvPr/>
+        </p:nvSpPr>
+        <p:spPr>
+          <a:xfrm>
+            <a:off x="9974885" y="4114800"/>
+            <a:ext cx="1467002" cy="320040"/>
+          </a:xfrm>
+          <a:prstGeom prst="rect">
+            <a:avLst/>
+          </a:prstGeom>
+          <a:noFill/>
+          <a:ln/>
+        </p:spPr>
+        <p:txBody>
+          <a:bodyPr wrap="square" lIns="0" tIns="0" rIns="0" bIns="0" rtlCol="0" anchor="ctr"/>
+          <a:lstStyle/>
+          <a:p>
+            <a:pPr indent="0" marL="0">
+              <a:buNone/>
+            </a:pPr>
+            <a:r>
+              <a:rPr lang="en-US" sz="1300" b="1" dirty="0">
+                <a:solidFill>
+                  <a:srgbClr val="C68A2E"/>
+                </a:solidFill>
+                <a:latin typeface="Cambria" pitchFamily="34" charset="0"/>
+                <a:ea typeface="Cambria" pitchFamily="34" charset="-122"/>
+                <a:cs typeface="Cambria" pitchFamily="34" charset="-120"/>
+              </a:rPr>
+              <a:t>Optimizer</a:t>
+            </a:r>
+            <a:endParaRPr lang="en-US" sz="1300" dirty="0"/>
+          </a:p>
+        </p:txBody>
+      </p:sp>
+      <p:sp>
+        <p:nvSpPr>
+          <p:cNvPr id="49" name="Text 47"/>
+          <p:cNvSpPr txBox="1"/>
+          <p:nvPr/>
+        </p:nvSpPr>
+        <p:spPr>
+          <a:xfrm>
+            <a:off x="9974885" y="4462272"/>
+            <a:ext cx="1467002" cy="548640"/>
+          </a:xfrm>
+          <a:prstGeom prst="rect">
+            <a:avLst/>
+          </a:prstGeom>
+          <a:noFill/>
+          <a:ln/>
+        </p:spPr>
+        <p:txBody>
+          <a:bodyPr wrap="square" lIns="0" tIns="0" rIns="0" bIns="0" rtlCol="0" anchor="ctr"/>
+          <a:lstStyle/>
+          <a:p>
+            <a:pPr indent="0" marL="0">
+              <a:buNone/>
+            </a:pPr>
+            <a:r>
+              <a:rPr lang="en-US" sz="1000" dirty="0">
+                <a:solidFill>
+                  <a:srgbClr val="5B6478"/>
+                </a:solidFill>
+                <a:latin typeface="Calibri" pitchFamily="34" charset="0"/>
+                <a:ea typeface="Calibri" pitchFamily="34" charset="-122"/>
+                <a:cs typeface="Calibri" pitchFamily="34" charset="-120"/>
+              </a:rPr>
+              <a:t>update parameters (Gradient Descent)</a:t>
+            </a:r>
+            <a:endParaRPr lang="en-US" sz="1000" dirty="0"/>
+          </a:p>
+        </p:txBody>
+      </p:sp>
+      <p:sp>
+        <p:nvSpPr>
+          <p:cNvPr id="50" name="Text 48"/>
+          <p:cNvSpPr txBox="1"/>
+          <p:nvPr/>
+        </p:nvSpPr>
+        <p:spPr>
+          <a:xfrm>
+            <a:off x="6035040" y="5212080"/>
+            <a:ext cx="5516575" cy="502920"/>
+          </a:xfrm>
+          <a:prstGeom prst="rect">
+            <a:avLst/>
+          </a:prstGeom>
+          <a:noFill/>
+          <a:ln/>
+        </p:spPr>
+        <p:txBody>
+          <a:bodyPr wrap="square" lIns="0" tIns="0" rIns="0" bIns="0" rtlCol="0" anchor="ctr"/>
+          <a:lstStyle/>
+          <a:p>
+            <a:pPr indent="0" marL="0">
+              <a:buNone/>
+            </a:pPr>
+            <a:r>
+              <a:rPr lang="en-US" sz="1100" i="1" dirty="0">
+                <a:solidFill>
+                  <a:srgbClr val="5B6478"/>
+                </a:solidFill>
+                <a:latin typeface="Calibri" pitchFamily="34" charset="0"/>
+                <a:ea typeface="Calibri" pitchFamily="34" charset="-122"/>
+                <a:cs typeface="Calibri" pitchFamily="34" charset="-120"/>
+              </a:rPr>
+              <a:t>Backpropagation KHÔNG tự cập nhật weight — nó chỉ tính gradient. Việc update là của Optimizer (Gradient Descent hoặc biến thể).</a:t>
+            </a:r>
+            <a:endParaRPr lang="en-US" sz="1100" dirty="0"/>
+          </a:p>
+        </p:txBody>
+      </p:sp>
+      <p:sp>
+        <p:nvSpPr>
+          <p:cNvPr id="51" name="Text 49"/>
+          <p:cNvSpPr txBox="1"/>
+          <p:nvPr/>
+        </p:nvSpPr>
+        <p:spPr>
+          <a:xfrm>
+            <a:off x="11185855" y="6446520"/>
+            <a:ext cx="731520" cy="274320"/>
+          </a:xfrm>
+          <a:prstGeom prst="rect">
+            <a:avLst/>
+          </a:prstGeom>
+          <a:noFill/>
+          <a:ln/>
+        </p:spPr>
+        <p:txBody>
+          <a:bodyPr wrap="square" lIns="0" tIns="0" rIns="0" bIns="0" rtlCol="0" anchor="ctr"/>
+          <a:lstStyle/>
+          <a:p>
+            <a:pPr algn="r" indent="0" marL="0">
+              <a:buNone/>
+            </a:pPr>
+            <a:r>
+              <a:rPr lang="en-US" sz="900" dirty="0">
+                <a:solidFill>
+                  <a:srgbClr val="5B6478"/>
+                </a:solidFill>
+                <a:latin typeface="Calibri" pitchFamily="34" charset="0"/>
+                <a:ea typeface="Calibri" pitchFamily="34" charset="-122"/>
+                <a:cs typeface="Calibri" pitchFamily="34" charset="-120"/>
+              </a:rPr>
+              <a:t>9/30</a:t>
             </a:r>
             <a:endParaRPr lang="en-US" sz="900" dirty="0"/>
           </a:p>
@@ -26708,7 +27569,7 @@
       </p:sp>
       <p:sp>
         <p:nvSpPr>
-          <p:cNvPr id="40" name="Shape 38"/>
+          <p:cNvPr id="52" name="Shape 50"/>
           <p:cNvSpPr/>
           <p:nvPr/>
         </p:nvSpPr>
@@ -26728,7 +27589,7 @@
       </p:sp>
       <p:sp>
         <p:nvSpPr>
-          <p:cNvPr id="41" name="Shape 39"/>
+          <p:cNvPr id="53" name="Shape 51"/>
           <p:cNvSpPr/>
           <p:nvPr/>
         </p:nvSpPr>
@@ -26748,7 +27609,7 @@
       </p:sp>
       <p:sp>
         <p:nvSpPr>
-          <p:cNvPr id="42" name="Shape 40"/>
+          <p:cNvPr id="54" name="Shape 52"/>
           <p:cNvSpPr/>
           <p:nvPr/>
         </p:nvSpPr>
@@ -26768,7 +27629,7 @@
       </p:sp>
       <p:sp>
         <p:nvSpPr>
-          <p:cNvPr id="43" name="Shape 41"/>
+          <p:cNvPr id="55" name="Shape 53"/>
           <p:cNvSpPr/>
           <p:nvPr/>
         </p:nvSpPr>
@@ -26788,7 +27649,7 @@
       </p:sp>
       <p:sp>
         <p:nvSpPr>
-          <p:cNvPr id="44" name="Text 42"/>
+          <p:cNvPr id="56" name="Text 54"/>
           <p:cNvSpPr txBox="1"/>
           <p:nvPr/>
         </p:nvSpPr>
